--- a/docs/pitch/Kahani_ZeroToOne_Pitch.pptx
+++ b/docs/pitch/Kahani_ZeroToOne_Pitch.pptx
@@ -3155,7 +3155,7 @@
         <p:spPr>
           <a:xfrm>
             <a:off x="640080" y="640080"/>
-            <a:ext cx="10908792" cy="256032"/>
+            <a:ext cx="10908792" cy="237744"/>
           </a:xfrm>
           <a:prstGeom prst="rect">
             <a:avLst/>
@@ -3168,7 +3168,7 @@
           <a:p>
             <a:pPr algn="l">
               <a:lnSpc>
-                <a:spcPct val="112000"/>
+                <a:spcPct val="110000"/>
               </a:lnSpc>
               <a:spcBef>
                 <a:spcPts val="0"/>
@@ -3199,8 +3199,8 @@
         </p:nvSpPr>
         <p:spPr>
           <a:xfrm>
-            <a:off x="640080" y="1920240"/>
-            <a:ext cx="10908792" cy="731520"/>
+            <a:off x="640080" y="1874519"/>
+            <a:ext cx="10908792" cy="685800"/>
           </a:xfrm>
           <a:prstGeom prst="rect">
             <a:avLst/>
@@ -3213,7 +3213,7 @@
           <a:p>
             <a:pPr algn="l">
               <a:lnSpc>
-                <a:spcPct val="112000"/>
+                <a:spcPct val="110000"/>
               </a:lnSpc>
               <a:spcBef>
                 <a:spcPts val="0"/>
@@ -3244,8 +3244,8 @@
         </p:nvSpPr>
         <p:spPr>
           <a:xfrm>
-            <a:off x="640080" y="2743200"/>
-            <a:ext cx="10241280" cy="457200"/>
+            <a:off x="640080" y="2651760"/>
+            <a:ext cx="10241280" cy="411480"/>
           </a:xfrm>
           <a:prstGeom prst="rect">
             <a:avLst/>
@@ -3258,7 +3258,7 @@
           <a:p>
             <a:pPr algn="l">
               <a:lnSpc>
-                <a:spcPct val="112000"/>
+                <a:spcPct val="110000"/>
               </a:lnSpc>
               <a:spcBef>
                 <a:spcPts val="0"/>
@@ -3276,7 +3276,7 @@
                 <a:ea typeface="Calibri"/>
                 <a:cs typeface="Calibri"/>
               </a:rPr>
-              <a:t>Agentic production studio for serialized audio entertainment.</a:t>
+              <a:t>Multi-agent production studio for serialized audio entertainment.</a:t>
             </a:r>
           </a:p>
         </p:txBody>
@@ -3289,7 +3289,7 @@
         </p:nvSpPr>
         <p:spPr>
           <a:xfrm>
-            <a:off x="640080" y="3246120"/>
+            <a:off x="640080" y="3154680"/>
             <a:ext cx="10058400" cy="365760"/>
           </a:xfrm>
           <a:prstGeom prst="rect">
@@ -3303,7 +3303,7 @@
           <a:p>
             <a:pPr algn="l">
               <a:lnSpc>
-                <a:spcPct val="112000"/>
+                <a:spcPct val="110000"/>
               </a:lnSpc>
               <a:spcBef>
                 <a:spcPts val="0"/>
@@ -3321,7 +3321,7 @@
                 <a:ea typeface="Calibri"/>
                 <a:cs typeface="Calibri"/>
               </a:rPr>
-              <a:t>Discovery → multi-part serial package → audience simulation → human publish.</a:t>
+              <a:t>What we built · how the agents work · Databricks-backed context &amp; cast retrieval.</a:t>
             </a:r>
           </a:p>
         </p:txBody>
@@ -3334,7 +3334,7 @@
         </p:nvSpPr>
         <p:spPr>
           <a:xfrm>
-            <a:off x="640080" y="4663440"/>
+            <a:off x="640080" y="4617720"/>
             <a:ext cx="3474720" cy="1097280"/>
           </a:xfrm>
           <a:prstGeom prst="roundRect">
@@ -3366,12 +3366,12 @@
           </a:fontRef>
         </p:style>
         <p:txBody>
-          <a:bodyPr rtlCol="0" anchor="t" wrap="square" lIns="146304" rIns="128016" tIns="109728" bIns="91440"/>
-          <a:lstStyle/>
-          <a:p>
-            <a:pPr algn="l">
-              <a:lnSpc>
-                <a:spcPct val="112000"/>
+          <a:bodyPr rtlCol="0" anchor="t" wrap="square" lIns="128016" rIns="109728" tIns="91440" bIns="73152"/>
+          <a:lstStyle/>
+          <a:p>
+            <a:pPr algn="l">
+              <a:lnSpc>
+                <a:spcPct val="110000"/>
               </a:lnSpc>
               <a:spcBef>
                 <a:spcPts val="0"/>
@@ -3395,7 +3395,7 @@
           <a:p>
             <a:pPr algn="l">
               <a:lnSpc>
-                <a:spcPct val="112000"/>
+                <a:spcPct val="110000"/>
               </a:lnSpc>
               <a:spcBef>
                 <a:spcPts val="0"/>
@@ -3413,7 +3413,7 @@
                 <a:ea typeface="Calibri"/>
                 <a:cs typeface="Calibri"/>
               </a:rPr>
-              <a:t>T-04 Creator Tools  ·  also T-01 / T-02</a:t>
+              <a:t>T-04 Creator Tools  ·  T-01 / T-02</a:t>
             </a:r>
           </a:p>
         </p:txBody>
@@ -3426,7 +3426,7 @@
         </p:nvSpPr>
         <p:spPr>
           <a:xfrm>
-            <a:off x="4315968" y="4663440"/>
+            <a:off x="4297680" y="4617720"/>
             <a:ext cx="3474720" cy="1097280"/>
           </a:xfrm>
           <a:prstGeom prst="roundRect">
@@ -3458,12 +3458,12 @@
           </a:fontRef>
         </p:style>
         <p:txBody>
-          <a:bodyPr rtlCol="0" anchor="t" wrap="square" lIns="146304" rIns="128016" tIns="109728" bIns="91440"/>
-          <a:lstStyle/>
-          <a:p>
-            <a:pPr algn="l">
-              <a:lnSpc>
-                <a:spcPct val="112000"/>
+          <a:bodyPr rtlCol="0" anchor="t" wrap="square" lIns="128016" rIns="109728" tIns="91440" bIns="73152"/>
+          <a:lstStyle/>
+          <a:p>
+            <a:pPr algn="l">
+              <a:lnSpc>
+                <a:spcPct val="110000"/>
               </a:lnSpc>
               <a:spcBef>
                 <a:spcPts val="0"/>
@@ -3481,13 +3481,13 @@
                 <a:ea typeface="Calibri"/>
                 <a:cs typeface="Calibri"/>
               </a:rPr>
-              <a:t>BET</a:t>
-            </a:r>
-          </a:p>
-          <a:p>
-            <a:pPr algn="l">
-              <a:lnSpc>
-                <a:spcPct val="112000"/>
+              <a:t>CORE</a:t>
+            </a:r>
+          </a:p>
+          <a:p>
+            <a:pPr algn="l">
+              <a:lnSpc>
+                <a:spcPct val="110000"/>
               </a:lnSpc>
               <a:spcBef>
                 <a:spcPts val="0"/>
@@ -3505,7 +3505,7 @@
                 <a:ea typeface="Calibri"/>
                 <a:cs typeface="Calibri"/>
               </a:rPr>
-              <a:t>Wow audio first — agents are the how</a:t>
+              <a:t>7 specialized agents in one pipeline</a:t>
             </a:r>
           </a:p>
         </p:txBody>
@@ -3518,7 +3518,7 @@
         </p:nvSpPr>
         <p:spPr>
           <a:xfrm>
-            <a:off x="7991856" y="4663440"/>
+            <a:off x="7955280" y="4617720"/>
             <a:ext cx="3474720" cy="1097280"/>
           </a:xfrm>
           <a:prstGeom prst="roundRect">
@@ -3550,12 +3550,12 @@
           </a:fontRef>
         </p:style>
         <p:txBody>
-          <a:bodyPr rtlCol="0" anchor="t" wrap="square" lIns="146304" rIns="128016" tIns="109728" bIns="91440"/>
-          <a:lstStyle/>
-          <a:p>
-            <a:pPr algn="l">
-              <a:lnSpc>
-                <a:spcPct val="112000"/>
+          <a:bodyPr rtlCol="0" anchor="t" wrap="square" lIns="128016" rIns="109728" tIns="91440" bIns="73152"/>
+          <a:lstStyle/>
+          <a:p>
+            <a:pPr algn="l">
+              <a:lnSpc>
+                <a:spcPct val="110000"/>
               </a:lnSpc>
               <a:spcBef>
                 <a:spcPts val="0"/>
@@ -3573,13 +3573,13 @@
                 <a:ea typeface="Calibri"/>
                 <a:cs typeface="Calibri"/>
               </a:rPr>
-              <a:t>GATE</a:t>
-            </a:r>
-          </a:p>
-          <a:p>
-            <a:pPr algn="l">
-              <a:lnSpc>
-                <a:spcPct val="112000"/>
+              <a:t>DEMO</a:t>
+            </a:r>
+          </a:p>
+          <a:p>
+            <a:pPr algn="l">
+              <a:lnSpc>
+                <a:spcPct val="110000"/>
               </a:lnSpc>
               <a:spcBef>
                 <a:spcPts val="0"/>
@@ -3597,7 +3597,7 @@
                 <a:ea typeface="Calibri"/>
                 <a:cs typeface="Calibri"/>
               </a:rPr>
-              <a:t>Auto-run pipeline · never auto-publish</a:t>
+              <a:t>Listen → simulate → human publish</a:t>
             </a:r>
           </a:p>
         </p:txBody>
@@ -3636,8 +3636,8 @@
         </p:nvSpPr>
         <p:spPr>
           <a:xfrm>
-            <a:off x="640080" y="347472"/>
-            <a:ext cx="347472" cy="54864"/>
+            <a:off x="640080" y="329184"/>
+            <a:ext cx="329184" cy="54864"/>
           </a:xfrm>
           <a:prstGeom prst="rect">
             <a:avLst/>
@@ -3679,8 +3679,8 @@
         </p:nvSpPr>
         <p:spPr>
           <a:xfrm>
-            <a:off x="640080" y="475488"/>
-            <a:ext cx="10908792" cy="219456"/>
+            <a:off x="640080" y="457200"/>
+            <a:ext cx="10908792" cy="201168"/>
           </a:xfrm>
           <a:prstGeom prst="rect">
             <a:avLst/>
@@ -3693,7 +3693,7 @@
           <a:p>
             <a:pPr algn="l">
               <a:lnSpc>
-                <a:spcPct val="112000"/>
+                <a:spcPct val="110000"/>
               </a:lnSpc>
               <a:spcBef>
                 <a:spcPts val="0"/>
@@ -3711,7 +3711,7 @@
                 <a:ea typeface="Calibri"/>
                 <a:cs typeface="Calibri"/>
               </a:rPr>
-              <a:t>01  PROBLEM &amp; INSIGHT</a:t>
+              <a:t>01  WHAT WE BUILT</a:t>
             </a:r>
           </a:p>
         </p:txBody>
@@ -3724,8 +3724,8 @@
         </p:nvSpPr>
         <p:spPr>
           <a:xfrm>
-            <a:off x="640080" y="731520"/>
-            <a:ext cx="10908792" cy="365760"/>
+            <a:off x="640080" y="694944"/>
+            <a:ext cx="10908792" cy="347472"/>
           </a:xfrm>
           <a:prstGeom prst="rect">
             <a:avLst/>
@@ -3738,7 +3738,7 @@
           <a:p>
             <a:pPr algn="l">
               <a:lnSpc>
-                <a:spcPct val="112000"/>
+                <a:spcPct val="110000"/>
               </a:lnSpc>
               <a:spcBef>
                 <a:spcPts val="0"/>
@@ -3756,7 +3756,7 @@
                 <a:ea typeface="Calibri"/>
                 <a:cs typeface="Calibri"/>
               </a:rPr>
-              <a:t>Retention is part-to-part. Production still runs in fragments.</a:t>
+              <a:t>An end-to-end studio — from story hook to publishable episode package</a:t>
             </a:r>
           </a:p>
         </p:txBody>
@@ -3769,7 +3769,7 @@
         </p:nvSpPr>
         <p:spPr>
           <a:xfrm>
-            <a:off x="640080" y="1152144"/>
+            <a:off x="640080" y="1097280"/>
             <a:ext cx="10908792" cy="365760"/>
           </a:xfrm>
           <a:prstGeom prst="rect">
@@ -3783,17 +3783,17 @@
           <a:p>
             <a:pPr algn="l">
               <a:lnSpc>
-                <a:spcPct val="112000"/>
-              </a:lnSpc>
-              <a:spcBef>
-                <a:spcPts val="0"/>
-              </a:spcBef>
-              <a:spcAft>
-                <a:spcPts val="0"/>
-              </a:spcAft>
-            </a:pPr>
-            <a:r>
-              <a:rPr sz="1300" b="0">
+                <a:spcPct val="110000"/>
+              </a:lnSpc>
+              <a:spcBef>
+                <a:spcPts val="0"/>
+              </a:spcBef>
+              <a:spcAft>
+                <a:spcPts val="0"/>
+              </a:spcAft>
+            </a:pPr>
+            <a:r>
+              <a:rPr sz="1200" b="0">
                 <a:solidFill>
                   <a:srgbClr val="A1A1AA"/>
                 </a:solidFill>
@@ -3801,7 +3801,7 @@
                 <a:ea typeface="Calibri"/>
                 <a:cs typeface="Calibri"/>
               </a:rPr>
-              <a:t>Orchestrate a studio with agents — keep humans at the quality cliffs.</a:t>
+              <a:t>Not a chat wrapper: human-gated production stages with agent orchestration.</a:t>
             </a:r>
           </a:p>
         </p:txBody>
@@ -3814,8 +3814,8 @@
         </p:nvSpPr>
         <p:spPr>
           <a:xfrm>
-            <a:off x="640080" y="1691640"/>
-            <a:ext cx="73152" cy="1554480"/>
+            <a:off x="640080" y="1664208"/>
+            <a:ext cx="73152" cy="4160520"/>
           </a:xfrm>
           <a:prstGeom prst="rect">
             <a:avLst/>
@@ -3857,8 +3857,8 @@
         </p:nvSpPr>
         <p:spPr>
           <a:xfrm>
-            <a:off x="713232" y="1691640"/>
-            <a:ext cx="2487168" cy="1554480"/>
+            <a:off x="713232" y="1664208"/>
+            <a:ext cx="5779008" cy="4160520"/>
           </a:xfrm>
           <a:prstGeom prst="roundRect">
             <a:avLst>
@@ -3889,22 +3889,22 @@
           </a:fontRef>
         </p:style>
         <p:txBody>
-          <a:bodyPr rtlCol="0" anchor="t" wrap="square" lIns="128016" rIns="128016" tIns="109728" bIns="91440"/>
-          <a:lstStyle/>
-          <a:p>
-            <a:pPr algn="l">
-              <a:lnSpc>
-                <a:spcPct val="112000"/>
-              </a:lnSpc>
-              <a:spcBef>
-                <a:spcPts val="0"/>
-              </a:spcBef>
-              <a:spcAft>
-                <a:spcPts val="600"/>
-              </a:spcAft>
-            </a:pPr>
-            <a:r>
-              <a:rPr sz="1300" b="1">
+          <a:bodyPr rtlCol="0" anchor="t" wrap="square" lIns="109728" rIns="109728" tIns="91440" bIns="73152"/>
+          <a:lstStyle/>
+          <a:p>
+            <a:pPr algn="l">
+              <a:lnSpc>
+                <a:spcPct val="110000"/>
+              </a:lnSpc>
+              <a:spcBef>
+                <a:spcPts val="0"/>
+              </a:spcBef>
+              <a:spcAft>
+                <a:spcPts val="700"/>
+              </a:spcAft>
+            </a:pPr>
+            <a:r>
+              <a:rPr sz="1400" b="1">
                 <a:solidFill>
                   <a:srgbClr val="FFFFFF"/>
                 </a:solidFill>
@@ -3912,23 +3912,23 @@
                 <a:ea typeface="Calibri"/>
                 <a:cs typeface="Calibri"/>
               </a:rPr>
-              <a:t>Slow idea → script</a:t>
-            </a:r>
-          </a:p>
-          <a:p>
-            <a:pPr algn="l">
-              <a:lnSpc>
-                <a:spcPct val="112000"/>
-              </a:lnSpc>
-              <a:spcBef>
-                <a:spcPts val="0"/>
-              </a:spcBef>
-              <a:spcAft>
-                <a:spcPts val="0"/>
-              </a:spcAft>
-            </a:pPr>
-            <a:r>
-              <a:rPr sz="1100" b="0">
+              <a:t>Shipped surfaces</a:t>
+            </a:r>
+          </a:p>
+          <a:p>
+            <a:pPr algn="l">
+              <a:lnSpc>
+                <a:spcPct val="110000"/>
+              </a:lnSpc>
+              <a:spcBef>
+                <a:spcPts val="0"/>
+              </a:spcBef>
+              <a:spcAft>
+                <a:spcPts val="400"/>
+              </a:spcAft>
+            </a:pPr>
+            <a:r>
+              <a:rPr sz="1200" b="0">
                 <a:solidFill>
                   <a:srgbClr val="A1A1AA"/>
                 </a:solidFill>
@@ -3936,64 +3936,189 @@
                 <a:ea typeface="Calibri"/>
                 <a:cs typeface="Calibri"/>
               </a:rPr>
-              <a:t>Generic LLM drafts lack regional authenticity.</a:t>
-            </a:r>
-          </a:p>
-        </p:txBody>
-      </p:sp>
-      <p:sp>
-        <p:nvSpPr>
-          <p:cNvPr id="8" name="Rectangle 7"/>
+              <a:t>•  Project workspace with context attachments</a:t>
+            </a:r>
+          </a:p>
+          <a:p>
+            <a:pPr algn="l">
+              <a:lnSpc>
+                <a:spcPct val="110000"/>
+              </a:lnSpc>
+              <a:spcBef>
+                <a:spcPts val="0"/>
+              </a:spcBef>
+              <a:spcAft>
+                <a:spcPts val="400"/>
+              </a:spcAft>
+            </a:pPr>
+            <a:r>
+              <a:rPr sz="1200" b="0">
+                <a:solidFill>
+                  <a:srgbClr val="A1A1AA"/>
+                </a:solidFill>
+                <a:latin typeface="Calibri"/>
+                <a:ea typeface="Calibri"/>
+                <a:cs typeface="Calibri"/>
+              </a:rPr>
+              <a:t>•  Agent chat: discover, pitch, generate, approve</a:t>
+            </a:r>
+          </a:p>
+          <a:p>
+            <a:pPr algn="l">
+              <a:lnSpc>
+                <a:spcPct val="110000"/>
+              </a:lnSpc>
+              <a:spcBef>
+                <a:spcPts val="0"/>
+              </a:spcBef>
+              <a:spcAft>
+                <a:spcPts val="400"/>
+              </a:spcAft>
+            </a:pPr>
+            <a:r>
+              <a:rPr sz="1200" b="0">
+                <a:solidFill>
+                  <a:srgbClr val="A1A1AA"/>
+                </a:solidFill>
+                <a:latin typeface="Calibri"/>
+                <a:ea typeface="Calibri"/>
+                <a:cs typeface="Calibri"/>
+              </a:rPr>
+              <a:t>•  LangGraph run → structured script package</a:t>
+            </a:r>
+          </a:p>
+          <a:p>
+            <a:pPr algn="l">
+              <a:lnSpc>
+                <a:spcPct val="110000"/>
+              </a:lnSpc>
+              <a:spcBef>
+                <a:spcPts val="0"/>
+              </a:spcBef>
+              <a:spcAft>
+                <a:spcPts val="400"/>
+              </a:spcAft>
+            </a:pPr>
+            <a:r>
+              <a:rPr sz="1200" b="0">
+                <a:solidFill>
+                  <a:srgbClr val="A1A1AA"/>
+                </a:solidFill>
+                <a:latin typeface="Calibri"/>
+                <a:ea typeface="Calibri"/>
+                <a:cs typeface="Calibri"/>
+              </a:rPr>
+              <a:t>•  Voice + SFX mix (ElevenLabs / Sarvam)</a:t>
+            </a:r>
+          </a:p>
+          <a:p>
+            <a:pPr algn="l">
+              <a:lnSpc>
+                <a:spcPct val="110000"/>
+              </a:lnSpc>
+              <a:spcBef>
+                <a:spcPts val="0"/>
+              </a:spcBef>
+              <a:spcAft>
+                <a:spcPts val="400"/>
+              </a:spcAft>
+            </a:pPr>
+            <a:r>
+              <a:rPr sz="1200" b="0">
+                <a:solidFill>
+                  <a:srgbClr val="A1A1AA"/>
+                </a:solidFill>
+                <a:latin typeface="Calibri"/>
+                <a:ea typeface="Calibri"/>
+                <a:cs typeface="Calibri"/>
+              </a:rPr>
+              <a:t>•  Companion visuals + cover art</a:t>
+            </a:r>
+          </a:p>
+          <a:p>
+            <a:pPr algn="l">
+              <a:lnSpc>
+                <a:spcPct val="110000"/>
+              </a:lnSpc>
+              <a:spcBef>
+                <a:spcPts val="0"/>
+              </a:spcBef>
+              <a:spcAft>
+                <a:spcPts val="400"/>
+              </a:spcAft>
+            </a:pPr>
+            <a:r>
+              <a:rPr sz="1200" b="0">
+                <a:solidFill>
+                  <a:srgbClr val="A1A1AA"/>
+                </a:solidFill>
+                <a:latin typeface="Calibri"/>
+                <a:ea typeface="Calibri"/>
+                <a:cs typeface="Calibri"/>
+              </a:rPr>
+              <a:t>•  Web timeline editor (stems, markers, listen)</a:t>
+            </a:r>
+          </a:p>
+          <a:p>
+            <a:pPr algn="l">
+              <a:lnSpc>
+                <a:spcPct val="110000"/>
+              </a:lnSpc>
+              <a:spcBef>
+                <a:spcPts val="0"/>
+              </a:spcBef>
+              <a:spcAft>
+                <a:spcPts val="400"/>
+              </a:spcAft>
+            </a:pPr>
+            <a:r>
+              <a:rPr sz="1200" b="0">
+                <a:solidFill>
+                  <a:srgbClr val="A1A1AA"/>
+                </a:solidFill>
+                <a:latin typeface="Calibri"/>
+                <a:ea typeface="Calibri"/>
+                <a:cs typeface="Calibri"/>
+              </a:rPr>
+              <a:t>•  Audience simulation (audit + personas + patches)</a:t>
+            </a:r>
+          </a:p>
+          <a:p>
+            <a:pPr algn="l">
+              <a:lnSpc>
+                <a:spcPct val="110000"/>
+              </a:lnSpc>
+              <a:spcBef>
+                <a:spcPts val="0"/>
+              </a:spcBef>
+              <a:spcAft>
+                <a:spcPts val="0"/>
+              </a:spcAft>
+            </a:pPr>
+            <a:r>
+              <a:rPr sz="1200" b="0">
+                <a:solidFill>
+                  <a:srgbClr val="A1A1AA"/>
+                </a:solidFill>
+                <a:latin typeface="Calibri"/>
+                <a:ea typeface="Calibri"/>
+                <a:cs typeface="Calibri"/>
+              </a:rPr>
+              <a:t>•  Episode assembly → S3 artifact package</a:t>
+            </a:r>
+          </a:p>
+        </p:txBody>
+      </p:sp>
+      <p:sp>
+        <p:nvSpPr>
+          <p:cNvPr id="8" name="Rounded Rectangle 7"/>
           <p:cNvSpPr/>
           <p:nvPr/>
         </p:nvSpPr>
         <p:spPr>
           <a:xfrm>
-            <a:off x="3401568" y="1691640"/>
-            <a:ext cx="73152" cy="1554480"/>
-          </a:xfrm>
-          <a:prstGeom prst="rect">
-            <a:avLst/>
-          </a:prstGeom>
-          <a:solidFill>
-            <a:srgbClr val="E6194D"/>
-          </a:solidFill>
-          <a:ln>
-            <a:noFill/>
-          </a:ln>
-        </p:spPr>
-        <p:style>
-          <a:lnRef idx="1">
-            <a:schemeClr val="accent1"/>
-          </a:lnRef>
-          <a:fillRef idx="3">
-            <a:schemeClr val="accent1"/>
-          </a:fillRef>
-          <a:effectRef idx="2">
-            <a:schemeClr val="accent1"/>
-          </a:effectRef>
-          <a:fontRef idx="minor">
-            <a:schemeClr val="lt1"/>
-          </a:fontRef>
-        </p:style>
-        <p:txBody>
-          <a:bodyPr rtlCol="0" anchor="ctr"/>
-          <a:lstStyle/>
-          <a:p>
-            <a:pPr algn="ctr"/>
-          </a:p>
-        </p:txBody>
-      </p:sp>
-      <p:sp>
-        <p:nvSpPr>
-          <p:cNvPr id="9" name="Rounded Rectangle 8"/>
-          <p:cNvSpPr/>
-          <p:nvPr/>
-        </p:nvSpPr>
-        <p:spPr>
-          <a:xfrm>
-            <a:off x="3474720" y="1691640"/>
-            <a:ext cx="2487168" cy="1554480"/>
+            <a:off x="6675120" y="1664208"/>
+            <a:ext cx="4846320" cy="914400"/>
           </a:xfrm>
           <a:prstGeom prst="roundRect">
             <a:avLst>
@@ -4024,18 +4149,42 @@
           </a:fontRef>
         </p:style>
         <p:txBody>
-          <a:bodyPr rtlCol="0" anchor="t" wrap="square" lIns="128016" rIns="128016" tIns="109728" bIns="91440"/>
-          <a:lstStyle/>
-          <a:p>
-            <a:pPr algn="l">
-              <a:lnSpc>
-                <a:spcPct val="112000"/>
-              </a:lnSpc>
-              <a:spcBef>
-                <a:spcPts val="0"/>
-              </a:spcBef>
-              <a:spcAft>
-                <a:spcPts val="600"/>
+          <a:bodyPr rtlCol="0" anchor="t" wrap="square" lIns="128016" rIns="109728" tIns="91440" bIns="73152"/>
+          <a:lstStyle/>
+          <a:p>
+            <a:pPr algn="l">
+              <a:lnSpc>
+                <a:spcPct val="110000"/>
+              </a:lnSpc>
+              <a:spcBef>
+                <a:spcPts val="0"/>
+              </a:spcBef>
+              <a:spcAft>
+                <a:spcPts val="300"/>
+              </a:spcAft>
+            </a:pPr>
+            <a:r>
+              <a:rPr sz="1000" b="1">
+                <a:solidFill>
+                  <a:srgbClr val="E6194D"/>
+                </a:solidFill>
+                <a:latin typeface="Calibri"/>
+                <a:ea typeface="Calibri"/>
+                <a:cs typeface="Calibri"/>
+              </a:rPr>
+              <a:t>ENTRY</a:t>
+            </a:r>
+          </a:p>
+          <a:p>
+            <a:pPr algn="l">
+              <a:lnSpc>
+                <a:spcPct val="110000"/>
+              </a:lnSpc>
+              <a:spcBef>
+                <a:spcPts val="0"/>
+              </a:spcBef>
+              <a:spcAft>
+                <a:spcPts val="0"/>
               </a:spcAft>
             </a:pPr>
             <a:r>
@@ -4047,88 +4196,21 @@
                 <a:ea typeface="Calibri"/>
                 <a:cs typeface="Calibri"/>
               </a:rPr>
-              <a:t>Weak chaining</a:t>
-            </a:r>
-          </a:p>
-          <a:p>
-            <a:pPr algn="l">
-              <a:lnSpc>
-                <a:spcPct val="112000"/>
-              </a:lnSpc>
-              <a:spcBef>
-                <a:spcPts val="0"/>
-              </a:spcBef>
-              <a:spcAft>
-                <a:spcPts val="0"/>
-              </a:spcAft>
-            </a:pPr>
-            <a:r>
-              <a:rPr sz="1100" b="0">
-                <a:solidFill>
-                  <a:srgbClr val="A1A1AA"/>
-                </a:solidFill>
-                <a:latin typeface="Calibri"/>
-                <a:ea typeface="Calibri"/>
-                <a:cs typeface="Calibri"/>
-              </a:rPr>
-              <a:t>Cliffhangers fail → drop-off after part one.</a:t>
-            </a:r>
-          </a:p>
-        </p:txBody>
-      </p:sp>
-      <p:sp>
-        <p:nvSpPr>
-          <p:cNvPr id="10" name="Rectangle 9"/>
+              <a:t>Project + prompt + attachments</a:t>
+            </a:r>
+          </a:p>
+        </p:txBody>
+      </p:sp>
+      <p:sp>
+        <p:nvSpPr>
+          <p:cNvPr id="9" name="Rounded Rectangle 8"/>
           <p:cNvSpPr/>
           <p:nvPr/>
         </p:nvSpPr>
         <p:spPr>
           <a:xfrm>
-            <a:off x="6163056" y="1691640"/>
-            <a:ext cx="73152" cy="1554480"/>
-          </a:xfrm>
-          <a:prstGeom prst="rect">
-            <a:avLst/>
-          </a:prstGeom>
-          <a:solidFill>
-            <a:srgbClr val="E6194D"/>
-          </a:solidFill>
-          <a:ln>
-            <a:noFill/>
-          </a:ln>
-        </p:spPr>
-        <p:style>
-          <a:lnRef idx="1">
-            <a:schemeClr val="accent1"/>
-          </a:lnRef>
-          <a:fillRef idx="3">
-            <a:schemeClr val="accent1"/>
-          </a:fillRef>
-          <a:effectRef idx="2">
-            <a:schemeClr val="accent1"/>
-          </a:effectRef>
-          <a:fontRef idx="minor">
-            <a:schemeClr val="lt1"/>
-          </a:fontRef>
-        </p:style>
-        <p:txBody>
-          <a:bodyPr rtlCol="0" anchor="ctr"/>
-          <a:lstStyle/>
-          <a:p>
-            <a:pPr algn="ctr"/>
-          </a:p>
-        </p:txBody>
-      </p:sp>
-      <p:sp>
-        <p:nvSpPr>
-          <p:cNvPr id="11" name="Rounded Rectangle 10"/>
-          <p:cNvSpPr/>
-          <p:nvPr/>
-        </p:nvSpPr>
-        <p:spPr>
-          <a:xfrm>
-            <a:off x="6236208" y="1691640"/>
-            <a:ext cx="2487168" cy="1554480"/>
+            <a:off x="6675120" y="2688336"/>
+            <a:ext cx="4846320" cy="914400"/>
           </a:xfrm>
           <a:prstGeom prst="roundRect">
             <a:avLst>
@@ -4159,18 +4241,42 @@
           </a:fontRef>
         </p:style>
         <p:txBody>
-          <a:bodyPr rtlCol="0" anchor="t" wrap="square" lIns="128016" rIns="128016" tIns="109728" bIns="91440"/>
-          <a:lstStyle/>
-          <a:p>
-            <a:pPr algn="l">
-              <a:lnSpc>
-                <a:spcPct val="112000"/>
-              </a:lnSpc>
-              <a:spcBef>
-                <a:spcPts val="0"/>
-              </a:spcBef>
-              <a:spcAft>
-                <a:spcPts val="600"/>
+          <a:bodyPr rtlCol="0" anchor="t" wrap="square" lIns="128016" rIns="109728" tIns="91440" bIns="73152"/>
+          <a:lstStyle/>
+          <a:p>
+            <a:pPr algn="l">
+              <a:lnSpc>
+                <a:spcPct val="110000"/>
+              </a:lnSpc>
+              <a:spcBef>
+                <a:spcPts val="0"/>
+              </a:spcBef>
+              <a:spcAft>
+                <a:spcPts val="300"/>
+              </a:spcAft>
+            </a:pPr>
+            <a:r>
+              <a:rPr sz="1000" b="1">
+                <a:solidFill>
+                  <a:srgbClr val="E6194D"/>
+                </a:solidFill>
+                <a:latin typeface="Calibri"/>
+                <a:ea typeface="Calibri"/>
+                <a:cs typeface="Calibri"/>
+              </a:rPr>
+              <a:t>GATES</a:t>
+            </a:r>
+          </a:p>
+          <a:p>
+            <a:pPr algn="l">
+              <a:lnSpc>
+                <a:spcPct val="110000"/>
+              </a:lnSpc>
+              <a:spcBef>
+                <a:spcPts val="0"/>
+              </a:spcBef>
+              <a:spcAft>
+                <a:spcPts val="0"/>
               </a:spcAft>
             </a:pPr>
             <a:r>
@@ -4182,88 +4288,21 @@
                 <a:ea typeface="Calibri"/>
                 <a:cs typeface="Calibri"/>
               </a:rPr>
-              <a:t>Manual assembly</a:t>
-            </a:r>
-          </a:p>
-          <a:p>
-            <a:pPr algn="l">
-              <a:lnSpc>
-                <a:spcPct val="112000"/>
-              </a:lnSpc>
-              <a:spcBef>
-                <a:spcPts val="0"/>
-              </a:spcBef>
-              <a:spcAft>
-                <a:spcPts val="0"/>
-              </a:spcAft>
-            </a:pPr>
-            <a:r>
-              <a:rPr sz="1100" b="0">
-                <a:solidFill>
-                  <a:srgbClr val="A1A1AA"/>
-                </a:solidFill>
-                <a:latin typeface="Calibri"/>
-                <a:ea typeface="Calibri"/>
-                <a:cs typeface="Calibri"/>
-              </a:rPr>
-              <a:t>Voice, SFX, visuals aligned by hand across tools.</a:t>
-            </a:r>
-          </a:p>
-        </p:txBody>
-      </p:sp>
-      <p:sp>
-        <p:nvSpPr>
-          <p:cNvPr id="12" name="Rectangle 11"/>
+              <a:t>Script → Audio → Visuals → Cover → Assembly</a:t>
+            </a:r>
+          </a:p>
+        </p:txBody>
+      </p:sp>
+      <p:sp>
+        <p:nvSpPr>
+          <p:cNvPr id="10" name="Rounded Rectangle 9"/>
           <p:cNvSpPr/>
           <p:nvPr/>
         </p:nvSpPr>
         <p:spPr>
           <a:xfrm>
-            <a:off x="8924544" y="1691640"/>
-            <a:ext cx="73152" cy="1554480"/>
-          </a:xfrm>
-          <a:prstGeom prst="rect">
-            <a:avLst/>
-          </a:prstGeom>
-          <a:solidFill>
-            <a:srgbClr val="E6194D"/>
-          </a:solidFill>
-          <a:ln>
-            <a:noFill/>
-          </a:ln>
-        </p:spPr>
-        <p:style>
-          <a:lnRef idx="1">
-            <a:schemeClr val="accent1"/>
-          </a:lnRef>
-          <a:fillRef idx="3">
-            <a:schemeClr val="accent1"/>
-          </a:fillRef>
-          <a:effectRef idx="2">
-            <a:schemeClr val="accent1"/>
-          </a:effectRef>
-          <a:fontRef idx="minor">
-            <a:schemeClr val="lt1"/>
-          </a:fontRef>
-        </p:style>
-        <p:txBody>
-          <a:bodyPr rtlCol="0" anchor="ctr"/>
-          <a:lstStyle/>
-          <a:p>
-            <a:pPr algn="ctr"/>
-          </a:p>
-        </p:txBody>
-      </p:sp>
-      <p:sp>
-        <p:nvSpPr>
-          <p:cNvPr id="13" name="Rounded Rectangle 12"/>
-          <p:cNvSpPr/>
-          <p:nvPr/>
-        </p:nvSpPr>
-        <p:spPr>
-          <a:xfrm>
-            <a:off x="8997696" y="1691640"/>
-            <a:ext cx="2487168" cy="1554480"/>
+            <a:off x="6675120" y="3712464"/>
+            <a:ext cx="4846320" cy="914400"/>
           </a:xfrm>
           <a:prstGeom prst="roundRect">
             <a:avLst>
@@ -4294,18 +4333,42 @@
           </a:fontRef>
         </p:style>
         <p:txBody>
-          <a:bodyPr rtlCol="0" anchor="t" wrap="square" lIns="128016" rIns="128016" tIns="109728" bIns="91440"/>
-          <a:lstStyle/>
-          <a:p>
-            <a:pPr algn="l">
-              <a:lnSpc>
-                <a:spcPct val="112000"/>
-              </a:lnSpc>
-              <a:spcBef>
-                <a:spcPts val="0"/>
-              </a:spcBef>
-              <a:spcAft>
-                <a:spcPts val="600"/>
+          <a:bodyPr rtlCol="0" anchor="t" wrap="square" lIns="128016" rIns="109728" tIns="91440" bIns="73152"/>
+          <a:lstStyle/>
+          <a:p>
+            <a:pPr algn="l">
+              <a:lnSpc>
+                <a:spcPct val="110000"/>
+              </a:lnSpc>
+              <a:spcBef>
+                <a:spcPts val="0"/>
+              </a:spcBef>
+              <a:spcAft>
+                <a:spcPts val="300"/>
+              </a:spcAft>
+            </a:pPr>
+            <a:r>
+              <a:rPr sz="1000" b="1">
+                <a:solidFill>
+                  <a:srgbClr val="E6194D"/>
+                </a:solidFill>
+                <a:latin typeface="Calibri"/>
+                <a:ea typeface="Calibri"/>
+                <a:cs typeface="Calibri"/>
+              </a:rPr>
+              <a:t>LANGUAGES</a:t>
+            </a:r>
+          </a:p>
+          <a:p>
+            <a:pPr algn="l">
+              <a:lnSpc>
+                <a:spcPct val="110000"/>
+              </a:lnSpc>
+              <a:spcBef>
+                <a:spcPts val="0"/>
+              </a:spcBef>
+              <a:spcAft>
+                <a:spcPts val="0"/>
               </a:spcAft>
             </a:pPr>
             <a:r>
@@ -4317,45 +4380,21 @@
                 <a:ea typeface="Calibri"/>
                 <a:cs typeface="Calibri"/>
               </a:rPr>
-              <a:t>No pre-publish signal</a:t>
-            </a:r>
-          </a:p>
-          <a:p>
-            <a:pPr algn="l">
-              <a:lnSpc>
-                <a:spcPct val="112000"/>
-              </a:lnSpc>
-              <a:spcBef>
-                <a:spcPts val="0"/>
-              </a:spcBef>
-              <a:spcAft>
-                <a:spcPts val="0"/>
-              </a:spcAft>
-            </a:pPr>
-            <a:r>
-              <a:rPr sz="1100" b="0">
-                <a:solidFill>
-                  <a:srgbClr val="A1A1AA"/>
-                </a:solidFill>
-                <a:latin typeface="Calibri"/>
-                <a:ea typeface="Calibri"/>
-                <a:cs typeface="Calibri"/>
-              </a:rPr>
-              <a:t>Teams guess which cohorts will continue.</a:t>
-            </a:r>
-          </a:p>
-        </p:txBody>
-      </p:sp>
-      <p:sp>
-        <p:nvSpPr>
-          <p:cNvPr id="14" name="Rounded Rectangle 13"/>
+              <a:t>Hindi + English (library voices)</a:t>
+            </a:r>
+          </a:p>
+        </p:txBody>
+      </p:sp>
+      <p:sp>
+        <p:nvSpPr>
+          <p:cNvPr id="11" name="Rounded Rectangle 10"/>
           <p:cNvSpPr/>
           <p:nvPr/>
         </p:nvSpPr>
         <p:spPr>
           <a:xfrm>
-            <a:off x="640080" y="3447288"/>
-            <a:ext cx="3474720" cy="2331720"/>
+            <a:off x="6675120" y="4736592"/>
+            <a:ext cx="4846320" cy="914400"/>
           </a:xfrm>
           <a:prstGeom prst="roundRect">
             <a:avLst>
@@ -4363,7 +4402,7 @@
             </a:avLst>
           </a:prstGeom>
           <a:solidFill>
-            <a:srgbClr val="22222C"/>
+            <a:srgbClr val="18181F"/>
           </a:solidFill>
           <a:ln w="12700">
             <a:solidFill>
@@ -4386,18 +4425,42 @@
           </a:fontRef>
         </p:style>
         <p:txBody>
-          <a:bodyPr rtlCol="0" anchor="t" wrap="square" lIns="146304" rIns="128016" tIns="109728" bIns="91440"/>
-          <a:lstStyle/>
-          <a:p>
-            <a:pPr algn="l">
-              <a:lnSpc>
-                <a:spcPct val="112000"/>
-              </a:lnSpc>
-              <a:spcBef>
-                <a:spcPts val="0"/>
-              </a:spcBef>
-              <a:spcAft>
-                <a:spcPts val="800"/>
+          <a:bodyPr rtlCol="0" anchor="t" wrap="square" lIns="128016" rIns="109728" tIns="91440" bIns="73152"/>
+          <a:lstStyle/>
+          <a:p>
+            <a:pPr algn="l">
+              <a:lnSpc>
+                <a:spcPct val="110000"/>
+              </a:lnSpc>
+              <a:spcBef>
+                <a:spcPts val="0"/>
+              </a:spcBef>
+              <a:spcAft>
+                <a:spcPts val="300"/>
+              </a:spcAft>
+            </a:pPr>
+            <a:r>
+              <a:rPr sz="1000" b="1">
+                <a:solidFill>
+                  <a:srgbClr val="E6194D"/>
+                </a:solidFill>
+                <a:latin typeface="Calibri"/>
+                <a:ea typeface="Calibri"/>
+                <a:cs typeface="Calibri"/>
+              </a:rPr>
+              <a:t>RUNTIME</a:t>
+            </a:r>
+          </a:p>
+          <a:p>
+            <a:pPr algn="l">
+              <a:lnSpc>
+                <a:spcPct val="110000"/>
+              </a:lnSpc>
+              <a:spcBef>
+                <a:spcPts val="0"/>
+              </a:spcBef>
+              <a:spcAft>
+                <a:spcPts val="0"/>
               </a:spcAft>
             </a:pPr>
             <a:r>
@@ -4409,373 +4472,21 @@
                 <a:ea typeface="Calibri"/>
                 <a:cs typeface="Calibri"/>
               </a:rPr>
-              <a:t>Audio is the product</a:t>
-            </a:r>
-          </a:p>
-          <a:p>
-            <a:pPr algn="l">
-              <a:lnSpc>
-                <a:spcPct val="112000"/>
-              </a:lnSpc>
-              <a:spcBef>
-                <a:spcPts val="0"/>
-              </a:spcBef>
-              <a:spcAft>
-                <a:spcPts val="500"/>
-              </a:spcAft>
-            </a:pPr>
-            <a:r>
-              <a:rPr sz="1100" b="0">
-                <a:solidFill>
-                  <a:srgbClr val="A1A1AA"/>
-                </a:solidFill>
-                <a:latin typeface="Calibri"/>
-                <a:ea typeface="Calibri"/>
-                <a:cs typeface="Calibri"/>
-              </a:rPr>
-              <a:t>•  Visuals are companion, not spine</a:t>
-            </a:r>
-          </a:p>
-          <a:p>
-            <a:pPr algn="l">
-              <a:lnSpc>
-                <a:spcPct val="112000"/>
-              </a:lnSpc>
-              <a:spcBef>
-                <a:spcPts val="0"/>
-              </a:spcBef>
-              <a:spcAft>
-                <a:spcPts val="500"/>
-              </a:spcAft>
-            </a:pPr>
-            <a:r>
-              <a:rPr sz="1100" b="0">
-                <a:solidFill>
-                  <a:srgbClr val="A1A1AA"/>
-                </a:solidFill>
-                <a:latin typeface="Calibri"/>
-                <a:ea typeface="Calibri"/>
-                <a:cs typeface="Calibri"/>
-              </a:rPr>
-              <a:t>•  Narration-led by default</a:t>
-            </a:r>
-          </a:p>
-          <a:p>
-            <a:pPr algn="l">
-              <a:lnSpc>
-                <a:spcPct val="112000"/>
-              </a:lnSpc>
-              <a:spcBef>
-                <a:spcPts val="0"/>
-              </a:spcBef>
-              <a:spcAft>
-                <a:spcPts val="0"/>
-              </a:spcAft>
-            </a:pPr>
-            <a:r>
-              <a:rPr sz="1100" b="0">
-                <a:solidFill>
-                  <a:srgbClr val="A1A1AA"/>
-                </a:solidFill>
-                <a:latin typeface="Calibri"/>
-                <a:ea typeface="Calibri"/>
-                <a:cs typeface="Calibri"/>
-              </a:rPr>
-              <a:t>•  Demo: one undeniable listen</a:t>
-            </a:r>
-          </a:p>
-        </p:txBody>
-      </p:sp>
-      <p:sp>
-        <p:nvSpPr>
-          <p:cNvPr id="15" name="Rounded Rectangle 14"/>
-          <p:cNvSpPr/>
-          <p:nvPr/>
-        </p:nvSpPr>
-        <p:spPr>
-          <a:xfrm>
-            <a:off x="4315968" y="3447288"/>
-            <a:ext cx="3474720" cy="2331720"/>
-          </a:xfrm>
-          <a:prstGeom prst="roundRect">
-            <a:avLst>
-              <a:gd name="adj" fmla="val 5000"/>
-            </a:avLst>
-          </a:prstGeom>
-          <a:solidFill>
-            <a:srgbClr val="22222C"/>
-          </a:solidFill>
-          <a:ln w="12700">
-            <a:solidFill>
-              <a:srgbClr val="2E2E38"/>
-            </a:solidFill>
-          </a:ln>
-        </p:spPr>
-        <p:style>
-          <a:lnRef idx="1">
-            <a:schemeClr val="accent1"/>
-          </a:lnRef>
-          <a:fillRef idx="3">
-            <a:schemeClr val="accent1"/>
-          </a:fillRef>
-          <a:effectRef idx="2">
-            <a:schemeClr val="accent1"/>
-          </a:effectRef>
-          <a:fontRef idx="minor">
-            <a:schemeClr val="lt1"/>
-          </a:fontRef>
-        </p:style>
-        <p:txBody>
-          <a:bodyPr rtlCol="0" anchor="t" wrap="square" lIns="146304" rIns="128016" tIns="109728" bIns="91440"/>
-          <a:lstStyle/>
-          <a:p>
-            <a:pPr algn="l">
-              <a:lnSpc>
-                <a:spcPct val="112000"/>
-              </a:lnSpc>
-              <a:spcBef>
-                <a:spcPts val="0"/>
-              </a:spcBef>
-              <a:spcAft>
-                <a:spcPts val="800"/>
-              </a:spcAft>
-            </a:pPr>
-            <a:r>
-              <a:rPr sz="1300" b="1">
-                <a:solidFill>
-                  <a:srgbClr val="FFFFFF"/>
-                </a:solidFill>
-                <a:latin typeface="Calibri"/>
-                <a:ea typeface="Calibri"/>
-                <a:cs typeface="Calibri"/>
-              </a:rPr>
-              <a:t>Serials over one-shots</a:t>
-            </a:r>
-          </a:p>
-          <a:p>
-            <a:pPr algn="l">
-              <a:lnSpc>
-                <a:spcPct val="112000"/>
-              </a:lnSpc>
-              <a:spcBef>
-                <a:spcPts val="0"/>
-              </a:spcBef>
-              <a:spcAft>
-                <a:spcPts val="500"/>
-              </a:spcAft>
-            </a:pPr>
-            <a:r>
-              <a:rPr sz="1100" b="0">
-                <a:solidFill>
-                  <a:srgbClr val="A1A1AA"/>
-                </a:solidFill>
-                <a:latin typeface="Calibri"/>
-                <a:ea typeface="Calibri"/>
-                <a:cs typeface="Calibri"/>
-              </a:rPr>
-              <a:t>•  Multi-part arcs (90–180s)</a:t>
-            </a:r>
-          </a:p>
-          <a:p>
-            <a:pPr algn="l">
-              <a:lnSpc>
-                <a:spcPct val="112000"/>
-              </a:lnSpc>
-              <a:spcBef>
-                <a:spcPts val="0"/>
-              </a:spcBef>
-              <a:spcAft>
-                <a:spcPts val="500"/>
-              </a:spcAft>
-            </a:pPr>
-            <a:r>
-              <a:rPr sz="1100" b="0">
-                <a:solidFill>
-                  <a:srgbClr val="A1A1AA"/>
-                </a:solidFill>
-                <a:latin typeface="Calibri"/>
-                <a:ea typeface="Calibri"/>
-                <a:cs typeface="Calibri"/>
-              </a:rPr>
-              <a:t>•  Cliffhangers as a first-class stage</a:t>
-            </a:r>
-          </a:p>
-          <a:p>
-            <a:pPr algn="l">
-              <a:lnSpc>
-                <a:spcPct val="112000"/>
-              </a:lnSpc>
-              <a:spcBef>
-                <a:spcPts val="0"/>
-              </a:spcBef>
-              <a:spcAft>
-                <a:spcPts val="0"/>
-              </a:spcAft>
-            </a:pPr>
-            <a:r>
-              <a:rPr sz="1100" b="0">
-                <a:solidFill>
-                  <a:srgbClr val="A1A1AA"/>
-                </a:solidFill>
-                <a:latin typeface="Calibri"/>
-                <a:ea typeface="Calibri"/>
-                <a:cs typeface="Calibri"/>
-              </a:rPr>
-              <a:t>•  One shared timeline clock</a:t>
-            </a:r>
-          </a:p>
-        </p:txBody>
-      </p:sp>
-      <p:sp>
-        <p:nvSpPr>
-          <p:cNvPr id="16" name="Rounded Rectangle 15"/>
-          <p:cNvSpPr/>
-          <p:nvPr/>
-        </p:nvSpPr>
-        <p:spPr>
-          <a:xfrm>
-            <a:off x="7991856" y="3447288"/>
-            <a:ext cx="3474720" cy="2331720"/>
-          </a:xfrm>
-          <a:prstGeom prst="roundRect">
-            <a:avLst>
-              <a:gd name="adj" fmla="val 5000"/>
-            </a:avLst>
-          </a:prstGeom>
-          <a:solidFill>
-            <a:srgbClr val="22222C"/>
-          </a:solidFill>
-          <a:ln w="12700">
-            <a:solidFill>
-              <a:srgbClr val="2E2E38"/>
-            </a:solidFill>
-          </a:ln>
-        </p:spPr>
-        <p:style>
-          <a:lnRef idx="1">
-            <a:schemeClr val="accent1"/>
-          </a:lnRef>
-          <a:fillRef idx="3">
-            <a:schemeClr val="accent1"/>
-          </a:fillRef>
-          <a:effectRef idx="2">
-            <a:schemeClr val="accent1"/>
-          </a:effectRef>
-          <a:fontRef idx="minor">
-            <a:schemeClr val="lt1"/>
-          </a:fontRef>
-        </p:style>
-        <p:txBody>
-          <a:bodyPr rtlCol="0" anchor="t" wrap="square" lIns="146304" rIns="128016" tIns="109728" bIns="91440"/>
-          <a:lstStyle/>
-          <a:p>
-            <a:pPr algn="l">
-              <a:lnSpc>
-                <a:spcPct val="112000"/>
-              </a:lnSpc>
-              <a:spcBef>
-                <a:spcPts val="0"/>
-              </a:spcBef>
-              <a:spcAft>
-                <a:spcPts val="800"/>
-              </a:spcAft>
-            </a:pPr>
-            <a:r>
-              <a:rPr sz="1300" b="1">
-                <a:solidFill>
-                  <a:srgbClr val="FFFFFF"/>
-                </a:solidFill>
-                <a:latin typeface="Calibri"/>
-                <a:ea typeface="Calibri"/>
-                <a:cs typeface="Calibri"/>
-              </a:rPr>
-              <a:t>Simulate before publish</a:t>
-            </a:r>
-          </a:p>
-          <a:p>
-            <a:pPr algn="l">
-              <a:lnSpc>
-                <a:spcPct val="112000"/>
-              </a:lnSpc>
-              <a:spcBef>
-                <a:spcPts val="0"/>
-              </a:spcBef>
-              <a:spcAft>
-                <a:spcPts val="500"/>
-              </a:spcAft>
-            </a:pPr>
-            <a:r>
-              <a:rPr sz="1100" b="0">
-                <a:solidFill>
-                  <a:srgbClr val="A1A1AA"/>
-                </a:solidFill>
-                <a:latin typeface="Calibri"/>
-                <a:ea typeface="Calibri"/>
-                <a:cs typeface="Calibri"/>
-              </a:rPr>
-              <a:t>•  Structural audit + personas</a:t>
-            </a:r>
-          </a:p>
-          <a:p>
-            <a:pPr algn="l">
-              <a:lnSpc>
-                <a:spcPct val="112000"/>
-              </a:lnSpc>
-              <a:spcBef>
-                <a:spcPts val="0"/>
-              </a:spcBef>
-              <a:spcAft>
-                <a:spcPts val="500"/>
-              </a:spcAft>
-            </a:pPr>
-            <a:r>
-              <a:rPr sz="1100" b="0">
-                <a:solidFill>
-                  <a:srgbClr val="A1A1AA"/>
-                </a:solidFill>
-                <a:latin typeface="Calibri"/>
-                <a:ea typeface="Calibri"/>
-                <a:cs typeface="Calibri"/>
-              </a:rPr>
-              <a:t>•  Concrete rewrite patches</a:t>
-            </a:r>
-          </a:p>
-          <a:p>
-            <a:pPr algn="l">
-              <a:lnSpc>
-                <a:spcPct val="112000"/>
-              </a:lnSpc>
-              <a:spcBef>
-                <a:spcPts val="0"/>
-              </a:spcBef>
-              <a:spcAft>
-                <a:spcPts val="0"/>
-              </a:spcAft>
-            </a:pPr>
-            <a:r>
-              <a:rPr sz="1100" b="0">
-                <a:solidFill>
-                  <a:srgbClr val="A1A1AA"/>
-                </a:solidFill>
-                <a:latin typeface="Calibri"/>
-                <a:ea typeface="Calibri"/>
-                <a:cs typeface="Calibri"/>
-              </a:rPr>
-              <a:t>•  Human approve — always</a:t>
-            </a:r>
-          </a:p>
-        </p:txBody>
-      </p:sp>
-      <p:sp>
-        <p:nvSpPr>
-          <p:cNvPr id="17" name="TextBox 16"/>
+              <a:t>Docker Compose · API · Worker · Redis</a:t>
+            </a:r>
+          </a:p>
+        </p:txBody>
+      </p:sp>
+      <p:sp>
+        <p:nvSpPr>
+          <p:cNvPr id="12" name="TextBox 11"/>
           <p:cNvSpPr txBox="1"/>
           <p:nvPr/>
         </p:nvSpPr>
         <p:spPr>
           <a:xfrm>
             <a:off x="640080" y="6473952"/>
-            <a:ext cx="8412480" cy="219456"/>
+            <a:ext cx="8412480" cy="201168"/>
           </a:xfrm>
           <a:prstGeom prst="rect">
             <a:avLst/>
@@ -4788,7 +4499,7 @@
           <a:p>
             <a:pPr algn="l">
               <a:lnSpc>
-                <a:spcPct val="112000"/>
+                <a:spcPct val="110000"/>
               </a:lnSpc>
               <a:spcBef>
                 <a:spcPts val="0"/>
@@ -4813,14 +4524,14 @@
       </p:sp>
       <p:sp>
         <p:nvSpPr>
-          <p:cNvPr id="18" name="TextBox 17"/>
+          <p:cNvPr id="13" name="TextBox 12"/>
           <p:cNvSpPr txBox="1"/>
           <p:nvPr/>
         </p:nvSpPr>
         <p:spPr>
           <a:xfrm>
             <a:off x="10195560" y="6473952"/>
-            <a:ext cx="1371600" cy="219456"/>
+            <a:ext cx="1371600" cy="201168"/>
           </a:xfrm>
           <a:prstGeom prst="rect">
             <a:avLst/>
@@ -4833,7 +4544,7 @@
           <a:p>
             <a:pPr algn="r">
               <a:lnSpc>
-                <a:spcPct val="112000"/>
+                <a:spcPct val="110000"/>
               </a:lnSpc>
               <a:spcBef>
                 <a:spcPts val="0"/>
@@ -4890,8 +4601,8 @@
         </p:nvSpPr>
         <p:spPr>
           <a:xfrm>
-            <a:off x="640080" y="347472"/>
-            <a:ext cx="347472" cy="54864"/>
+            <a:off x="640080" y="329184"/>
+            <a:ext cx="329184" cy="54864"/>
           </a:xfrm>
           <a:prstGeom prst="rect">
             <a:avLst/>
@@ -4933,8 +4644,8 @@
         </p:nvSpPr>
         <p:spPr>
           <a:xfrm>
-            <a:off x="640080" y="475488"/>
-            <a:ext cx="10908792" cy="219456"/>
+            <a:off x="640080" y="457200"/>
+            <a:ext cx="10908792" cy="201168"/>
           </a:xfrm>
           <a:prstGeom prst="rect">
             <a:avLst/>
@@ -4947,7 +4658,7 @@
           <a:p>
             <a:pPr algn="l">
               <a:lnSpc>
-                <a:spcPct val="112000"/>
+                <a:spcPct val="110000"/>
               </a:lnSpc>
               <a:spcBef>
                 <a:spcPts val="0"/>
@@ -4965,7 +4676,7 @@
                 <a:ea typeface="Calibri"/>
                 <a:cs typeface="Calibri"/>
               </a:rPr>
-              <a:t>02  SOLUTION</a:t>
+              <a:t>02  TECH STACK</a:t>
             </a:r>
           </a:p>
         </p:txBody>
@@ -4978,8 +4689,8 @@
         </p:nvSpPr>
         <p:spPr>
           <a:xfrm>
-            <a:off x="640080" y="731520"/>
-            <a:ext cx="10908792" cy="365760"/>
+            <a:off x="640080" y="694944"/>
+            <a:ext cx="10908792" cy="347472"/>
           </a:xfrm>
           <a:prstGeom prst="rect">
             <a:avLst/>
@@ -4992,7 +4703,7 @@
           <a:p>
             <a:pPr algn="l">
               <a:lnSpc>
-                <a:spcPct val="112000"/>
+                <a:spcPct val="110000"/>
               </a:lnSpc>
               <a:spcBef>
                 <a:spcPts val="0"/>
@@ -5010,7 +4721,7 @@
                 <a:ea typeface="Calibri"/>
                 <a:cs typeface="Calibri"/>
               </a:rPr>
-              <a:t>Kahani — discovery signal to human-approved serial package</a:t>
+              <a:t>Production stack — including Databricks for vector retrieval</a:t>
             </a:r>
           </a:p>
         </p:txBody>
@@ -5023,7 +4734,7 @@
         </p:nvSpPr>
         <p:spPr>
           <a:xfrm>
-            <a:off x="640080" y="1152144"/>
+            <a:off x="640080" y="1097280"/>
             <a:ext cx="10908792" cy="365760"/>
           </a:xfrm>
           <a:prstGeom prst="rect">
@@ -5037,17 +4748,17 @@
           <a:p>
             <a:pPr algn="l">
               <a:lnSpc>
-                <a:spcPct val="112000"/>
-              </a:lnSpc>
-              <a:spcBef>
-                <a:spcPts val="0"/>
-              </a:spcBef>
-              <a:spcAft>
-                <a:spcPts val="0"/>
-              </a:spcAft>
-            </a:pPr>
-            <a:r>
-              <a:rPr sz="1300" b="0">
+                <a:spcPct val="110000"/>
+              </a:lnSpc>
+              <a:spcBef>
+                <a:spcPts val="0"/>
+              </a:spcBef>
+              <a:spcAft>
+                <a:spcPts val="0"/>
+              </a:spcAft>
+            </a:pPr>
+            <a:r>
+              <a:rPr sz="1200" b="0">
                 <a:solidFill>
                   <a:srgbClr val="A1A1AA"/>
                 </a:solidFill>
@@ -5055,20 +4766,641 @@
                 <a:ea typeface="Calibri"/>
                 <a:cs typeface="Calibri"/>
               </a:rPr>
-              <a:t>One project. One multi-agent pipeline. One editor-ready output.</a:t>
-            </a:r>
-          </a:p>
-        </p:txBody>
-      </p:sp>
-      <p:sp>
-        <p:nvSpPr>
-          <p:cNvPr id="6" name="Rounded Rectangle 5"/>
+              <a:t>Same stack we run in Compose locally and wire for cloud deploy.</a:t>
+            </a:r>
+          </a:p>
+        </p:txBody>
+      </p:sp>
+      <p:sp>
+        <p:nvSpPr>
+          <p:cNvPr id="6" name="Rectangle 5"/>
           <p:cNvSpPr/>
           <p:nvPr/>
         </p:nvSpPr>
         <p:spPr>
           <a:xfrm>
-            <a:off x="640080" y="1691640"/>
+            <a:off x="640080" y="1664208"/>
+            <a:ext cx="73152" cy="3246120"/>
+          </a:xfrm>
+          <a:prstGeom prst="rect">
+            <a:avLst/>
+          </a:prstGeom>
+          <a:solidFill>
+            <a:srgbClr val="E6194D"/>
+          </a:solidFill>
+          <a:ln>
+            <a:noFill/>
+          </a:ln>
+        </p:spPr>
+        <p:style>
+          <a:lnRef idx="1">
+            <a:schemeClr val="accent1"/>
+          </a:lnRef>
+          <a:fillRef idx="3">
+            <a:schemeClr val="accent1"/>
+          </a:fillRef>
+          <a:effectRef idx="2">
+            <a:schemeClr val="accent1"/>
+          </a:effectRef>
+          <a:fontRef idx="minor">
+            <a:schemeClr val="lt1"/>
+          </a:fontRef>
+        </p:style>
+        <p:txBody>
+          <a:bodyPr rtlCol="0" anchor="ctr"/>
+          <a:lstStyle/>
+          <a:p>
+            <a:pPr algn="ctr"/>
+          </a:p>
+        </p:txBody>
+      </p:sp>
+      <p:sp>
+        <p:nvSpPr>
+          <p:cNvPr id="7" name="Rounded Rectangle 6"/>
+          <p:cNvSpPr/>
+          <p:nvPr/>
+        </p:nvSpPr>
+        <p:spPr>
+          <a:xfrm>
+            <a:off x="713232" y="1664208"/>
+            <a:ext cx="3401568" cy="3246120"/>
+          </a:xfrm>
+          <a:prstGeom prst="roundRect">
+            <a:avLst>
+              <a:gd name="adj" fmla="val 5000"/>
+            </a:avLst>
+          </a:prstGeom>
+          <a:solidFill>
+            <a:srgbClr val="18181F"/>
+          </a:solidFill>
+          <a:ln w="12700">
+            <a:solidFill>
+              <a:srgbClr val="2E2E38"/>
+            </a:solidFill>
+          </a:ln>
+        </p:spPr>
+        <p:style>
+          <a:lnRef idx="1">
+            <a:schemeClr val="accent1"/>
+          </a:lnRef>
+          <a:fillRef idx="3">
+            <a:schemeClr val="accent1"/>
+          </a:fillRef>
+          <a:effectRef idx="2">
+            <a:schemeClr val="accent1"/>
+          </a:effectRef>
+          <a:fontRef idx="minor">
+            <a:schemeClr val="lt1"/>
+          </a:fontRef>
+        </p:style>
+        <p:txBody>
+          <a:bodyPr rtlCol="0" anchor="t" wrap="square" lIns="109728" rIns="109728" tIns="91440" bIns="73152"/>
+          <a:lstStyle/>
+          <a:p>
+            <a:pPr algn="l">
+              <a:lnSpc>
+                <a:spcPct val="110000"/>
+              </a:lnSpc>
+              <a:spcBef>
+                <a:spcPts val="0"/>
+              </a:spcBef>
+              <a:spcAft>
+                <a:spcPts val="700"/>
+              </a:spcAft>
+            </a:pPr>
+            <a:r>
+              <a:rPr sz="1300" b="1">
+                <a:solidFill>
+                  <a:srgbClr val="FFFFFF"/>
+                </a:solidFill>
+                <a:latin typeface="Calibri"/>
+                <a:ea typeface="Calibri"/>
+                <a:cs typeface="Calibri"/>
+              </a:rPr>
+              <a:t>Application</a:t>
+            </a:r>
+          </a:p>
+          <a:p>
+            <a:pPr algn="l">
+              <a:lnSpc>
+                <a:spcPct val="110000"/>
+              </a:lnSpc>
+              <a:spcBef>
+                <a:spcPts val="0"/>
+              </a:spcBef>
+              <a:spcAft>
+                <a:spcPts val="400"/>
+              </a:spcAft>
+            </a:pPr>
+            <a:r>
+              <a:rPr sz="1100" b="0">
+                <a:solidFill>
+                  <a:srgbClr val="A1A1AA"/>
+                </a:solidFill>
+                <a:latin typeface="Calibri"/>
+                <a:ea typeface="Calibri"/>
+                <a:cs typeface="Calibri"/>
+              </a:rPr>
+              <a:t>•  React 19 · TypeScript · Vite · Tailwind</a:t>
+            </a:r>
+          </a:p>
+          <a:p>
+            <a:pPr algn="l">
+              <a:lnSpc>
+                <a:spcPct val="110000"/>
+              </a:lnSpc>
+              <a:spcBef>
+                <a:spcPts val="0"/>
+              </a:spcBef>
+              <a:spcAft>
+                <a:spcPts val="400"/>
+              </a:spcAft>
+            </a:pPr>
+            <a:r>
+              <a:rPr sz="1100" b="0">
+                <a:solidFill>
+                  <a:srgbClr val="A1A1AA"/>
+                </a:solidFill>
+                <a:latin typeface="Calibri"/>
+                <a:ea typeface="Calibri"/>
+                <a:cs typeface="Calibri"/>
+              </a:rPr>
+              <a:t>•  FastAPI · SQLAlchemy async · Alembic</a:t>
+            </a:r>
+          </a:p>
+          <a:p>
+            <a:pPr algn="l">
+              <a:lnSpc>
+                <a:spcPct val="110000"/>
+              </a:lnSpc>
+              <a:spcBef>
+                <a:spcPts val="0"/>
+              </a:spcBef>
+              <a:spcAft>
+                <a:spcPts val="400"/>
+              </a:spcAft>
+            </a:pPr>
+            <a:r>
+              <a:rPr sz="1100" b="0">
+                <a:solidFill>
+                  <a:srgbClr val="A1A1AA"/>
+                </a:solidFill>
+                <a:latin typeface="Calibri"/>
+                <a:ea typeface="Calibri"/>
+                <a:cs typeface="Calibri"/>
+              </a:rPr>
+              <a:t>•  ARQ workers on Redis</a:t>
+            </a:r>
+          </a:p>
+          <a:p>
+            <a:pPr algn="l">
+              <a:lnSpc>
+                <a:spcPct val="110000"/>
+              </a:lnSpc>
+              <a:spcBef>
+                <a:spcPts val="0"/>
+              </a:spcBef>
+              <a:spcAft>
+                <a:spcPts val="0"/>
+              </a:spcAft>
+            </a:pPr>
+            <a:r>
+              <a:rPr sz="1100" b="0">
+                <a:solidFill>
+                  <a:srgbClr val="A1A1AA"/>
+                </a:solidFill>
+                <a:latin typeface="Calibri"/>
+                <a:ea typeface="Calibri"/>
+                <a:cs typeface="Calibri"/>
+              </a:rPr>
+              <a:t>•  LangGraph + Postgres checkpointer</a:t>
+            </a:r>
+          </a:p>
+        </p:txBody>
+      </p:sp>
+      <p:sp>
+        <p:nvSpPr>
+          <p:cNvPr id="8" name="Rectangle 7"/>
+          <p:cNvSpPr/>
+          <p:nvPr/>
+        </p:nvSpPr>
+        <p:spPr>
+          <a:xfrm>
+            <a:off x="4297680" y="1664208"/>
+            <a:ext cx="73152" cy="3246120"/>
+          </a:xfrm>
+          <a:prstGeom prst="rect">
+            <a:avLst/>
+          </a:prstGeom>
+          <a:solidFill>
+            <a:srgbClr val="E6194D"/>
+          </a:solidFill>
+          <a:ln>
+            <a:noFill/>
+          </a:ln>
+        </p:spPr>
+        <p:style>
+          <a:lnRef idx="1">
+            <a:schemeClr val="accent1"/>
+          </a:lnRef>
+          <a:fillRef idx="3">
+            <a:schemeClr val="accent1"/>
+          </a:fillRef>
+          <a:effectRef idx="2">
+            <a:schemeClr val="accent1"/>
+          </a:effectRef>
+          <a:fontRef idx="minor">
+            <a:schemeClr val="lt1"/>
+          </a:fontRef>
+        </p:style>
+        <p:txBody>
+          <a:bodyPr rtlCol="0" anchor="ctr"/>
+          <a:lstStyle/>
+          <a:p>
+            <a:pPr algn="ctr"/>
+          </a:p>
+        </p:txBody>
+      </p:sp>
+      <p:sp>
+        <p:nvSpPr>
+          <p:cNvPr id="9" name="Rounded Rectangle 8"/>
+          <p:cNvSpPr/>
+          <p:nvPr/>
+        </p:nvSpPr>
+        <p:spPr>
+          <a:xfrm>
+            <a:off x="4370832" y="1664208"/>
+            <a:ext cx="3401568" cy="3246120"/>
+          </a:xfrm>
+          <a:prstGeom prst="roundRect">
+            <a:avLst>
+              <a:gd name="adj" fmla="val 5000"/>
+            </a:avLst>
+          </a:prstGeom>
+          <a:solidFill>
+            <a:srgbClr val="18181F"/>
+          </a:solidFill>
+          <a:ln w="12700">
+            <a:solidFill>
+              <a:srgbClr val="2E2E38"/>
+            </a:solidFill>
+          </a:ln>
+        </p:spPr>
+        <p:style>
+          <a:lnRef idx="1">
+            <a:schemeClr val="accent1"/>
+          </a:lnRef>
+          <a:fillRef idx="3">
+            <a:schemeClr val="accent1"/>
+          </a:fillRef>
+          <a:effectRef idx="2">
+            <a:schemeClr val="accent1"/>
+          </a:effectRef>
+          <a:fontRef idx="minor">
+            <a:schemeClr val="lt1"/>
+          </a:fontRef>
+        </p:style>
+        <p:txBody>
+          <a:bodyPr rtlCol="0" anchor="t" wrap="square" lIns="109728" rIns="109728" tIns="91440" bIns="73152"/>
+          <a:lstStyle/>
+          <a:p>
+            <a:pPr algn="l">
+              <a:lnSpc>
+                <a:spcPct val="110000"/>
+              </a:lnSpc>
+              <a:spcBef>
+                <a:spcPts val="0"/>
+              </a:spcBef>
+              <a:spcAft>
+                <a:spcPts val="700"/>
+              </a:spcAft>
+            </a:pPr>
+            <a:r>
+              <a:rPr sz="1300" b="1">
+                <a:solidFill>
+                  <a:srgbClr val="FFFFFF"/>
+                </a:solidFill>
+                <a:latin typeface="Calibri"/>
+                <a:ea typeface="Calibri"/>
+                <a:cs typeface="Calibri"/>
+              </a:rPr>
+              <a:t>AI &amp; media</a:t>
+            </a:r>
+          </a:p>
+          <a:p>
+            <a:pPr algn="l">
+              <a:lnSpc>
+                <a:spcPct val="110000"/>
+              </a:lnSpc>
+              <a:spcBef>
+                <a:spcPts val="0"/>
+              </a:spcBef>
+              <a:spcAft>
+                <a:spcPts val="400"/>
+              </a:spcAft>
+            </a:pPr>
+            <a:r>
+              <a:rPr sz="1100" b="0">
+                <a:solidFill>
+                  <a:srgbClr val="A1A1AA"/>
+                </a:solidFill>
+                <a:latin typeface="Calibri"/>
+                <a:ea typeface="Calibri"/>
+                <a:cs typeface="Calibri"/>
+              </a:rPr>
+              <a:t>•  LLM: OpenAI / Anthropic (Script Writer)</a:t>
+            </a:r>
+          </a:p>
+          <a:p>
+            <a:pPr algn="l">
+              <a:lnSpc>
+                <a:spcPct val="110000"/>
+              </a:lnSpc>
+              <a:spcBef>
+                <a:spcPts val="0"/>
+              </a:spcBef>
+              <a:spcAft>
+                <a:spcPts val="400"/>
+              </a:spcAft>
+            </a:pPr>
+            <a:r>
+              <a:rPr sz="1100" b="0">
+                <a:solidFill>
+                  <a:srgbClr val="A1A1AA"/>
+                </a:solidFill>
+                <a:latin typeface="Calibri"/>
+                <a:ea typeface="Calibri"/>
+                <a:cs typeface="Calibri"/>
+              </a:rPr>
+              <a:t>•  TTS: ElevenLabs + Sarvam (Hindi)</a:t>
+            </a:r>
+          </a:p>
+          <a:p>
+            <a:pPr algn="l">
+              <a:lnSpc>
+                <a:spcPct val="110000"/>
+              </a:lnSpc>
+              <a:spcBef>
+                <a:spcPts val="0"/>
+              </a:spcBef>
+              <a:spcAft>
+                <a:spcPts val="400"/>
+              </a:spcAft>
+            </a:pPr>
+            <a:r>
+              <a:rPr sz="1100" b="0">
+                <a:solidFill>
+                  <a:srgbClr val="A1A1AA"/>
+                </a:solidFill>
+                <a:latin typeface="Calibri"/>
+                <a:ea typeface="Calibri"/>
+                <a:cs typeface="Calibri"/>
+              </a:rPr>
+              <a:t>•  Images: OpenAI · Gemini (fallback)</a:t>
+            </a:r>
+          </a:p>
+          <a:p>
+            <a:pPr algn="l">
+              <a:lnSpc>
+                <a:spcPct val="110000"/>
+              </a:lnSpc>
+              <a:spcBef>
+                <a:spcPts val="0"/>
+              </a:spcBef>
+              <a:spcAft>
+                <a:spcPts val="0"/>
+              </a:spcAft>
+            </a:pPr>
+            <a:r>
+              <a:rPr sz="1100" b="0">
+                <a:solidFill>
+                  <a:srgbClr val="A1A1AA"/>
+                </a:solidFill>
+                <a:latin typeface="Calibri"/>
+                <a:ea typeface="Calibri"/>
+                <a:cs typeface="Calibri"/>
+              </a:rPr>
+              <a:t>•  Research: Tavily web crawl</a:t>
+            </a:r>
+          </a:p>
+        </p:txBody>
+      </p:sp>
+      <p:sp>
+        <p:nvSpPr>
+          <p:cNvPr id="10" name="Rectangle 9"/>
+          <p:cNvSpPr/>
+          <p:nvPr/>
+        </p:nvSpPr>
+        <p:spPr>
+          <a:xfrm>
+            <a:off x="7955280" y="1664208"/>
+            <a:ext cx="73152" cy="3246120"/>
+          </a:xfrm>
+          <a:prstGeom prst="rect">
+            <a:avLst/>
+          </a:prstGeom>
+          <a:solidFill>
+            <a:srgbClr val="E6194D"/>
+          </a:solidFill>
+          <a:ln>
+            <a:noFill/>
+          </a:ln>
+        </p:spPr>
+        <p:style>
+          <a:lnRef idx="1">
+            <a:schemeClr val="accent1"/>
+          </a:lnRef>
+          <a:fillRef idx="3">
+            <a:schemeClr val="accent1"/>
+          </a:fillRef>
+          <a:effectRef idx="2">
+            <a:schemeClr val="accent1"/>
+          </a:effectRef>
+          <a:fontRef idx="minor">
+            <a:schemeClr val="lt1"/>
+          </a:fontRef>
+        </p:style>
+        <p:txBody>
+          <a:bodyPr rtlCol="0" anchor="ctr"/>
+          <a:lstStyle/>
+          <a:p>
+            <a:pPr algn="ctr"/>
+          </a:p>
+        </p:txBody>
+      </p:sp>
+      <p:sp>
+        <p:nvSpPr>
+          <p:cNvPr id="11" name="Rounded Rectangle 10"/>
+          <p:cNvSpPr/>
+          <p:nvPr/>
+        </p:nvSpPr>
+        <p:spPr>
+          <a:xfrm>
+            <a:off x="8028432" y="1664208"/>
+            <a:ext cx="3401568" cy="3246120"/>
+          </a:xfrm>
+          <a:prstGeom prst="roundRect">
+            <a:avLst>
+              <a:gd name="adj" fmla="val 5000"/>
+            </a:avLst>
+          </a:prstGeom>
+          <a:solidFill>
+            <a:srgbClr val="18181F"/>
+          </a:solidFill>
+          <a:ln w="12700">
+            <a:solidFill>
+              <a:srgbClr val="2E2E38"/>
+            </a:solidFill>
+          </a:ln>
+        </p:spPr>
+        <p:style>
+          <a:lnRef idx="1">
+            <a:schemeClr val="accent1"/>
+          </a:lnRef>
+          <a:fillRef idx="3">
+            <a:schemeClr val="accent1"/>
+          </a:fillRef>
+          <a:effectRef idx="2">
+            <a:schemeClr val="accent1"/>
+          </a:effectRef>
+          <a:fontRef idx="minor">
+            <a:schemeClr val="lt1"/>
+          </a:fontRef>
+        </p:style>
+        <p:txBody>
+          <a:bodyPr rtlCol="0" anchor="t" wrap="square" lIns="109728" rIns="109728" tIns="91440" bIns="73152"/>
+          <a:lstStyle/>
+          <a:p>
+            <a:pPr algn="l">
+              <a:lnSpc>
+                <a:spcPct val="110000"/>
+              </a:lnSpc>
+              <a:spcBef>
+                <a:spcPts val="0"/>
+              </a:spcBef>
+              <a:spcAft>
+                <a:spcPts val="700"/>
+              </a:spcAft>
+            </a:pPr>
+            <a:r>
+              <a:rPr sz="1300" b="1">
+                <a:solidFill>
+                  <a:srgbClr val="FFFFFF"/>
+                </a:solidFill>
+                <a:latin typeface="Calibri"/>
+                <a:ea typeface="Calibri"/>
+                <a:cs typeface="Calibri"/>
+              </a:rPr>
+              <a:t>Data &amp; infra</a:t>
+            </a:r>
+          </a:p>
+          <a:p>
+            <a:pPr algn="l">
+              <a:lnSpc>
+                <a:spcPct val="110000"/>
+              </a:lnSpc>
+              <a:spcBef>
+                <a:spcPts val="0"/>
+              </a:spcBef>
+              <a:spcAft>
+                <a:spcPts val="400"/>
+              </a:spcAft>
+            </a:pPr>
+            <a:r>
+              <a:rPr sz="1100" b="0">
+                <a:solidFill>
+                  <a:srgbClr val="A1A1AA"/>
+                </a:solidFill>
+                <a:latin typeface="Calibri"/>
+                <a:ea typeface="Calibri"/>
+                <a:cs typeface="Calibri"/>
+              </a:rPr>
+              <a:t>•  Postgres 16 · Redis 7</a:t>
+            </a:r>
+          </a:p>
+          <a:p>
+            <a:pPr algn="l">
+              <a:lnSpc>
+                <a:spcPct val="110000"/>
+              </a:lnSpc>
+              <a:spcBef>
+                <a:spcPts val="0"/>
+              </a:spcBef>
+              <a:spcAft>
+                <a:spcPts val="400"/>
+              </a:spcAft>
+            </a:pPr>
+            <a:r>
+              <a:rPr sz="1100" b="0">
+                <a:solidFill>
+                  <a:srgbClr val="A1A1AA"/>
+                </a:solidFill>
+                <a:latin typeface="Calibri"/>
+                <a:ea typeface="Calibri"/>
+                <a:cs typeface="Calibri"/>
+              </a:rPr>
+              <a:t>•  Databricks AI Search (project RAG)</a:t>
+            </a:r>
+          </a:p>
+          <a:p>
+            <a:pPr algn="l">
+              <a:lnSpc>
+                <a:spcPct val="110000"/>
+              </a:lnSpc>
+              <a:spcBef>
+                <a:spcPts val="0"/>
+              </a:spcBef>
+              <a:spcAft>
+                <a:spcPts val="400"/>
+              </a:spcAft>
+            </a:pPr>
+            <a:r>
+              <a:rPr sz="1100" b="0">
+                <a:solidFill>
+                  <a:srgbClr val="A1A1AA"/>
+                </a:solidFill>
+                <a:latin typeface="Calibri"/>
+                <a:ea typeface="Calibri"/>
+                <a:cs typeface="Calibri"/>
+              </a:rPr>
+              <a:t>•  Databricks Vector Search (cast catalog)</a:t>
+            </a:r>
+          </a:p>
+          <a:p>
+            <a:pPr algn="l">
+              <a:lnSpc>
+                <a:spcPct val="110000"/>
+              </a:lnSpc>
+              <a:spcBef>
+                <a:spcPts val="0"/>
+              </a:spcBef>
+              <a:spcAft>
+                <a:spcPts val="0"/>
+              </a:spcAft>
+            </a:pPr>
+            <a:r>
+              <a:rPr sz="1100" b="0">
+                <a:solidFill>
+                  <a:srgbClr val="A1A1AA"/>
+                </a:solidFill>
+                <a:latin typeface="Calibri"/>
+                <a:ea typeface="Calibri"/>
+                <a:cs typeface="Calibri"/>
+              </a:rPr>
+              <a:t>•  S3 artifacts · Docker · AWS / Terraform</a:t>
+            </a:r>
+          </a:p>
+        </p:txBody>
+      </p:sp>
+      <p:sp>
+        <p:nvSpPr>
+          <p:cNvPr id="12" name="Rounded Rectangle 11"/>
+          <p:cNvSpPr/>
+          <p:nvPr/>
+        </p:nvSpPr>
+        <p:spPr>
+          <a:xfrm>
+            <a:off x="640080" y="5093208"/>
             <a:ext cx="10908792" cy="868680"/>
           </a:xfrm>
           <a:prstGeom prst="roundRect">
@@ -5100,86 +5432,18 @@
           </a:fontRef>
         </p:style>
         <p:txBody>
-          <a:bodyPr rtlCol="0" anchor="t" wrap="square" lIns="146304" rIns="128016" tIns="109728" bIns="91440"/>
-          <a:lstStyle/>
-          <a:p>
-            <a:pPr algn="l">
-              <a:lnSpc>
-                <a:spcPct val="112000"/>
-              </a:lnSpc>
-              <a:spcBef>
-                <a:spcPts val="0"/>
-              </a:spcBef>
-              <a:spcAft>
-                <a:spcPts val="0"/>
-              </a:spcAft>
-            </a:pPr>
-            <a:r>
-              <a:rPr sz="1300" b="0">
-                <a:solidFill>
-                  <a:srgbClr val="FFFFFF"/>
-                </a:solidFill>
-                <a:latin typeface="Calibri"/>
-                <a:ea typeface="Calibri"/>
-                <a:cs typeface="Calibri"/>
-              </a:rPr>
-              <a:t>Hook → multi-part serial (script, cliffhangers, narration/dialogue audio, SFX, companion visuals) → simulated listeners → patches → human publish.</a:t>
-            </a:r>
-          </a:p>
-        </p:txBody>
-      </p:sp>
-      <p:sp>
-        <p:nvSpPr>
-          <p:cNvPr id="7" name="Rounded Rectangle 6"/>
-          <p:cNvSpPr/>
-          <p:nvPr/>
-        </p:nvSpPr>
-        <p:spPr>
-          <a:xfrm>
-            <a:off x="640080" y="2743200"/>
-            <a:ext cx="1078992" cy="1051560"/>
-          </a:xfrm>
-          <a:prstGeom prst="roundRect">
-            <a:avLst>
-              <a:gd name="adj" fmla="val 5000"/>
-            </a:avLst>
-          </a:prstGeom>
-          <a:solidFill>
-            <a:srgbClr val="18181F"/>
-          </a:solidFill>
-          <a:ln w="12700">
-            <a:solidFill>
-              <a:srgbClr val="2E2E38"/>
-            </a:solidFill>
-          </a:ln>
-        </p:spPr>
-        <p:style>
-          <a:lnRef idx="1">
-            <a:schemeClr val="accent1"/>
-          </a:lnRef>
-          <a:fillRef idx="3">
-            <a:schemeClr val="accent1"/>
-          </a:fillRef>
-          <a:effectRef idx="2">
-            <a:schemeClr val="accent1"/>
-          </a:effectRef>
-          <a:fontRef idx="minor">
-            <a:schemeClr val="lt1"/>
-          </a:fontRef>
-        </p:style>
-        <p:txBody>
-          <a:bodyPr rtlCol="0" anchor="ctr" wrap="square" lIns="146304" rIns="128016" tIns="109728" bIns="91440"/>
-          <a:lstStyle/>
-          <a:p>
-            <a:pPr algn="ctr">
-              <a:lnSpc>
-                <a:spcPct val="112000"/>
-              </a:lnSpc>
-              <a:spcBef>
-                <a:spcPts val="0"/>
-              </a:spcBef>
-              <a:spcAft>
-                <a:spcPts val="200"/>
+          <a:bodyPr rtlCol="0" anchor="t" wrap="square" lIns="128016" rIns="109728" tIns="91440" bIns="73152"/>
+          <a:lstStyle/>
+          <a:p>
+            <a:pPr algn="l">
+              <a:lnSpc>
+                <a:spcPct val="110000"/>
+              </a:lnSpc>
+              <a:spcBef>
+                <a:spcPts val="0"/>
+              </a:spcBef>
+              <a:spcAft>
+                <a:spcPts val="400"/>
               </a:spcAft>
             </a:pPr>
             <a:r>
@@ -5191,851 +5455,23 @@
                 <a:ea typeface="Calibri"/>
                 <a:cs typeface="Calibri"/>
               </a:rPr>
-              <a:t>1</a:t>
-            </a:r>
-          </a:p>
-          <a:p>
-            <a:pPr algn="ctr">
-              <a:lnSpc>
-                <a:spcPct val="112000"/>
-              </a:lnSpc>
-              <a:spcBef>
-                <a:spcPts val="0"/>
-              </a:spcBef>
-              <a:spcAft>
-                <a:spcPts val="0"/>
-              </a:spcAft>
-            </a:pPr>
-            <a:r>
-              <a:rPr sz="1000" b="1">
-                <a:solidFill>
-                  <a:srgbClr val="FFFFFF"/>
-                </a:solidFill>
-                <a:latin typeface="Calibri"/>
-                <a:ea typeface="Calibri"/>
-                <a:cs typeface="Calibri"/>
-              </a:rPr>
-              <a:t>Discovery</a:t>
-            </a:r>
-          </a:p>
-        </p:txBody>
-      </p:sp>
-      <p:sp>
-        <p:nvSpPr>
-          <p:cNvPr id="8" name="Rounded Rectangle 7"/>
-          <p:cNvSpPr/>
-          <p:nvPr/>
-        </p:nvSpPr>
-        <p:spPr>
-          <a:xfrm>
-            <a:off x="1828800" y="2743200"/>
-            <a:ext cx="1078992" cy="1051560"/>
-          </a:xfrm>
-          <a:prstGeom prst="roundRect">
-            <a:avLst>
-              <a:gd name="adj" fmla="val 5000"/>
-            </a:avLst>
-          </a:prstGeom>
-          <a:solidFill>
-            <a:srgbClr val="18181F"/>
-          </a:solidFill>
-          <a:ln w="12700">
-            <a:solidFill>
-              <a:srgbClr val="2E2E38"/>
-            </a:solidFill>
-          </a:ln>
-        </p:spPr>
-        <p:style>
-          <a:lnRef idx="1">
-            <a:schemeClr val="accent1"/>
-          </a:lnRef>
-          <a:fillRef idx="3">
-            <a:schemeClr val="accent1"/>
-          </a:fillRef>
-          <a:effectRef idx="2">
-            <a:schemeClr val="accent1"/>
-          </a:effectRef>
-          <a:fontRef idx="minor">
-            <a:schemeClr val="lt1"/>
-          </a:fontRef>
-        </p:style>
-        <p:txBody>
-          <a:bodyPr rtlCol="0" anchor="ctr" wrap="square" lIns="146304" rIns="128016" tIns="109728" bIns="91440"/>
-          <a:lstStyle/>
-          <a:p>
-            <a:pPr algn="ctr">
-              <a:lnSpc>
-                <a:spcPct val="112000"/>
-              </a:lnSpc>
-              <a:spcBef>
-                <a:spcPts val="0"/>
-              </a:spcBef>
-              <a:spcAft>
-                <a:spcPts val="200"/>
-              </a:spcAft>
-            </a:pPr>
-            <a:r>
-              <a:rPr sz="1200" b="1">
-                <a:solidFill>
-                  <a:srgbClr val="E6194D"/>
-                </a:solidFill>
-                <a:latin typeface="Calibri"/>
-                <a:ea typeface="Calibri"/>
-                <a:cs typeface="Calibri"/>
-              </a:rPr>
-              <a:t>2</a:t>
-            </a:r>
-          </a:p>
-          <a:p>
-            <a:pPr algn="ctr">
-              <a:lnSpc>
-                <a:spcPct val="112000"/>
-              </a:lnSpc>
-              <a:spcBef>
-                <a:spcPts val="0"/>
-              </a:spcBef>
-              <a:spcAft>
-                <a:spcPts val="0"/>
-              </a:spcAft>
-            </a:pPr>
-            <a:r>
-              <a:rPr sz="1000" b="1">
-                <a:solidFill>
-                  <a:srgbClr val="FFFFFF"/>
-                </a:solidFill>
-                <a:latin typeface="Calibri"/>
-                <a:ea typeface="Calibri"/>
-                <a:cs typeface="Calibri"/>
-              </a:rPr>
-              <a:t>Script</a:t>
-            </a:r>
-          </a:p>
-        </p:txBody>
-      </p:sp>
-      <p:sp>
-        <p:nvSpPr>
-          <p:cNvPr id="9" name="Rounded Rectangle 8"/>
-          <p:cNvSpPr/>
-          <p:nvPr/>
-        </p:nvSpPr>
-        <p:spPr>
-          <a:xfrm>
-            <a:off x="3017520" y="2743200"/>
-            <a:ext cx="1078992" cy="1051560"/>
-          </a:xfrm>
-          <a:prstGeom prst="roundRect">
-            <a:avLst>
-              <a:gd name="adj" fmla="val 5000"/>
-            </a:avLst>
-          </a:prstGeom>
-          <a:solidFill>
-            <a:srgbClr val="18181F"/>
-          </a:solidFill>
-          <a:ln w="12700">
-            <a:solidFill>
-              <a:srgbClr val="2E2E38"/>
-            </a:solidFill>
-          </a:ln>
-        </p:spPr>
-        <p:style>
-          <a:lnRef idx="1">
-            <a:schemeClr val="accent1"/>
-          </a:lnRef>
-          <a:fillRef idx="3">
-            <a:schemeClr val="accent1"/>
-          </a:fillRef>
-          <a:effectRef idx="2">
-            <a:schemeClr val="accent1"/>
-          </a:effectRef>
-          <a:fontRef idx="minor">
-            <a:schemeClr val="lt1"/>
-          </a:fontRef>
-        </p:style>
-        <p:txBody>
-          <a:bodyPr rtlCol="0" anchor="ctr" wrap="square" lIns="146304" rIns="128016" tIns="109728" bIns="91440"/>
-          <a:lstStyle/>
-          <a:p>
-            <a:pPr algn="ctr">
-              <a:lnSpc>
-                <a:spcPct val="112000"/>
-              </a:lnSpc>
-              <a:spcBef>
-                <a:spcPts val="0"/>
-              </a:spcBef>
-              <a:spcAft>
-                <a:spcPts val="200"/>
-              </a:spcAft>
-            </a:pPr>
-            <a:r>
-              <a:rPr sz="1200" b="1">
-                <a:solidFill>
-                  <a:srgbClr val="E6194D"/>
-                </a:solidFill>
-                <a:latin typeface="Calibri"/>
-                <a:ea typeface="Calibri"/>
-                <a:cs typeface="Calibri"/>
-              </a:rPr>
-              <a:t>3</a:t>
-            </a:r>
-          </a:p>
-          <a:p>
-            <a:pPr algn="ctr">
-              <a:lnSpc>
-                <a:spcPct val="112000"/>
-              </a:lnSpc>
-              <a:spcBef>
-                <a:spcPts val="0"/>
-              </a:spcBef>
-              <a:spcAft>
-                <a:spcPts val="0"/>
-              </a:spcAft>
-            </a:pPr>
-            <a:r>
-              <a:rPr sz="1000" b="1">
-                <a:solidFill>
-                  <a:srgbClr val="FFFFFF"/>
-                </a:solidFill>
-                <a:latin typeface="Calibri"/>
-                <a:ea typeface="Calibri"/>
-                <a:cs typeface="Calibri"/>
-              </a:rPr>
-              <a:t>Cliff</a:t>
-            </a:r>
-          </a:p>
-        </p:txBody>
-      </p:sp>
-      <p:sp>
-        <p:nvSpPr>
-          <p:cNvPr id="10" name="Rounded Rectangle 9"/>
-          <p:cNvSpPr/>
-          <p:nvPr/>
-        </p:nvSpPr>
-        <p:spPr>
-          <a:xfrm>
-            <a:off x="4206240" y="2743200"/>
-            <a:ext cx="1078992" cy="1051560"/>
-          </a:xfrm>
-          <a:prstGeom prst="roundRect">
-            <a:avLst>
-              <a:gd name="adj" fmla="val 5000"/>
-            </a:avLst>
-          </a:prstGeom>
-          <a:solidFill>
-            <a:srgbClr val="18181F"/>
-          </a:solidFill>
-          <a:ln w="12700">
-            <a:solidFill>
-              <a:srgbClr val="2E2E38"/>
-            </a:solidFill>
-          </a:ln>
-        </p:spPr>
-        <p:style>
-          <a:lnRef idx="1">
-            <a:schemeClr val="accent1"/>
-          </a:lnRef>
-          <a:fillRef idx="3">
-            <a:schemeClr val="accent1"/>
-          </a:fillRef>
-          <a:effectRef idx="2">
-            <a:schemeClr val="accent1"/>
-          </a:effectRef>
-          <a:fontRef idx="minor">
-            <a:schemeClr val="lt1"/>
-          </a:fontRef>
-        </p:style>
-        <p:txBody>
-          <a:bodyPr rtlCol="0" anchor="ctr" wrap="square" lIns="146304" rIns="128016" tIns="109728" bIns="91440"/>
-          <a:lstStyle/>
-          <a:p>
-            <a:pPr algn="ctr">
-              <a:lnSpc>
-                <a:spcPct val="112000"/>
-              </a:lnSpc>
-              <a:spcBef>
-                <a:spcPts val="0"/>
-              </a:spcBef>
-              <a:spcAft>
-                <a:spcPts val="200"/>
-              </a:spcAft>
-            </a:pPr>
-            <a:r>
-              <a:rPr sz="1200" b="1">
-                <a:solidFill>
-                  <a:srgbClr val="E6194D"/>
-                </a:solidFill>
-                <a:latin typeface="Calibri"/>
-                <a:ea typeface="Calibri"/>
-                <a:cs typeface="Calibri"/>
-              </a:rPr>
-              <a:t>4</a:t>
-            </a:r>
-          </a:p>
-          <a:p>
-            <a:pPr algn="ctr">
-              <a:lnSpc>
-                <a:spcPct val="112000"/>
-              </a:lnSpc>
-              <a:spcBef>
-                <a:spcPts val="0"/>
-              </a:spcBef>
-              <a:spcAft>
-                <a:spcPts val="0"/>
-              </a:spcAft>
-            </a:pPr>
-            <a:r>
-              <a:rPr sz="1000" b="1">
-                <a:solidFill>
-                  <a:srgbClr val="FFFFFF"/>
-                </a:solidFill>
-                <a:latin typeface="Calibri"/>
-                <a:ea typeface="Calibri"/>
-                <a:cs typeface="Calibri"/>
-              </a:rPr>
-              <a:t>Narration</a:t>
-            </a:r>
-          </a:p>
-        </p:txBody>
-      </p:sp>
-      <p:sp>
-        <p:nvSpPr>
-          <p:cNvPr id="11" name="Rounded Rectangle 10"/>
-          <p:cNvSpPr/>
-          <p:nvPr/>
-        </p:nvSpPr>
-        <p:spPr>
-          <a:xfrm>
-            <a:off x="5394960" y="2743200"/>
-            <a:ext cx="1078992" cy="1051560"/>
-          </a:xfrm>
-          <a:prstGeom prst="roundRect">
-            <a:avLst>
-              <a:gd name="adj" fmla="val 5000"/>
-            </a:avLst>
-          </a:prstGeom>
-          <a:solidFill>
-            <a:srgbClr val="18181F"/>
-          </a:solidFill>
-          <a:ln w="12700">
-            <a:solidFill>
-              <a:srgbClr val="2E2E38"/>
-            </a:solidFill>
-          </a:ln>
-        </p:spPr>
-        <p:style>
-          <a:lnRef idx="1">
-            <a:schemeClr val="accent1"/>
-          </a:lnRef>
-          <a:fillRef idx="3">
-            <a:schemeClr val="accent1"/>
-          </a:fillRef>
-          <a:effectRef idx="2">
-            <a:schemeClr val="accent1"/>
-          </a:effectRef>
-          <a:fontRef idx="minor">
-            <a:schemeClr val="lt1"/>
-          </a:fontRef>
-        </p:style>
-        <p:txBody>
-          <a:bodyPr rtlCol="0" anchor="ctr" wrap="square" lIns="146304" rIns="128016" tIns="109728" bIns="91440"/>
-          <a:lstStyle/>
-          <a:p>
-            <a:pPr algn="ctr">
-              <a:lnSpc>
-                <a:spcPct val="112000"/>
-              </a:lnSpc>
-              <a:spcBef>
-                <a:spcPts val="0"/>
-              </a:spcBef>
-              <a:spcAft>
-                <a:spcPts val="200"/>
-              </a:spcAft>
-            </a:pPr>
-            <a:r>
-              <a:rPr sz="1200" b="1">
-                <a:solidFill>
-                  <a:srgbClr val="E6194D"/>
-                </a:solidFill>
-                <a:latin typeface="Calibri"/>
-                <a:ea typeface="Calibri"/>
-                <a:cs typeface="Calibri"/>
-              </a:rPr>
-              <a:t>5</a:t>
-            </a:r>
-          </a:p>
-          <a:p>
-            <a:pPr algn="ctr">
-              <a:lnSpc>
-                <a:spcPct val="112000"/>
-              </a:lnSpc>
-              <a:spcBef>
-                <a:spcPts val="0"/>
-              </a:spcBef>
-              <a:spcAft>
-                <a:spcPts val="0"/>
-              </a:spcAft>
-            </a:pPr>
-            <a:r>
-              <a:rPr sz="1000" b="1">
-                <a:solidFill>
-                  <a:srgbClr val="FFFFFF"/>
-                </a:solidFill>
-                <a:latin typeface="Calibri"/>
-                <a:ea typeface="Calibri"/>
-                <a:cs typeface="Calibri"/>
-              </a:rPr>
-              <a:t>Voice</a:t>
-            </a:r>
-          </a:p>
-        </p:txBody>
-      </p:sp>
-      <p:sp>
-        <p:nvSpPr>
-          <p:cNvPr id="12" name="Rounded Rectangle 11"/>
-          <p:cNvSpPr/>
-          <p:nvPr/>
-        </p:nvSpPr>
-        <p:spPr>
-          <a:xfrm>
-            <a:off x="6583680" y="2743200"/>
-            <a:ext cx="1078992" cy="1051560"/>
-          </a:xfrm>
-          <a:prstGeom prst="roundRect">
-            <a:avLst>
-              <a:gd name="adj" fmla="val 5000"/>
-            </a:avLst>
-          </a:prstGeom>
-          <a:solidFill>
-            <a:srgbClr val="18181F"/>
-          </a:solidFill>
-          <a:ln w="12700">
-            <a:solidFill>
-              <a:srgbClr val="2E2E38"/>
-            </a:solidFill>
-          </a:ln>
-        </p:spPr>
-        <p:style>
-          <a:lnRef idx="1">
-            <a:schemeClr val="accent1"/>
-          </a:lnRef>
-          <a:fillRef idx="3">
-            <a:schemeClr val="accent1"/>
-          </a:fillRef>
-          <a:effectRef idx="2">
-            <a:schemeClr val="accent1"/>
-          </a:effectRef>
-          <a:fontRef idx="minor">
-            <a:schemeClr val="lt1"/>
-          </a:fontRef>
-        </p:style>
-        <p:txBody>
-          <a:bodyPr rtlCol="0" anchor="ctr" wrap="square" lIns="146304" rIns="128016" tIns="109728" bIns="91440"/>
-          <a:lstStyle/>
-          <a:p>
-            <a:pPr algn="ctr">
-              <a:lnSpc>
-                <a:spcPct val="112000"/>
-              </a:lnSpc>
-              <a:spcBef>
-                <a:spcPts val="0"/>
-              </a:spcBef>
-              <a:spcAft>
-                <a:spcPts val="200"/>
-              </a:spcAft>
-            </a:pPr>
-            <a:r>
-              <a:rPr sz="1200" b="1">
-                <a:solidFill>
-                  <a:srgbClr val="E6194D"/>
-                </a:solidFill>
-                <a:latin typeface="Calibri"/>
-                <a:ea typeface="Calibri"/>
-                <a:cs typeface="Calibri"/>
-              </a:rPr>
-              <a:t>6</a:t>
-            </a:r>
-          </a:p>
-          <a:p>
-            <a:pPr algn="ctr">
-              <a:lnSpc>
-                <a:spcPct val="112000"/>
-              </a:lnSpc>
-              <a:spcBef>
-                <a:spcPts val="0"/>
-              </a:spcBef>
-              <a:spcAft>
-                <a:spcPts val="0"/>
-              </a:spcAft>
-            </a:pPr>
-            <a:r>
-              <a:rPr sz="1000" b="1">
-                <a:solidFill>
-                  <a:srgbClr val="FFFFFF"/>
-                </a:solidFill>
-                <a:latin typeface="Calibri"/>
-                <a:ea typeface="Calibri"/>
-                <a:cs typeface="Calibri"/>
-              </a:rPr>
-              <a:t>SFX</a:t>
-            </a:r>
-          </a:p>
-        </p:txBody>
-      </p:sp>
-      <p:sp>
-        <p:nvSpPr>
-          <p:cNvPr id="13" name="Rounded Rectangle 12"/>
-          <p:cNvSpPr/>
-          <p:nvPr/>
-        </p:nvSpPr>
-        <p:spPr>
-          <a:xfrm>
-            <a:off x="7772400" y="2743200"/>
-            <a:ext cx="1078992" cy="1051560"/>
-          </a:xfrm>
-          <a:prstGeom prst="roundRect">
-            <a:avLst>
-              <a:gd name="adj" fmla="val 5000"/>
-            </a:avLst>
-          </a:prstGeom>
-          <a:solidFill>
-            <a:srgbClr val="18181F"/>
-          </a:solidFill>
-          <a:ln w="12700">
-            <a:solidFill>
-              <a:srgbClr val="2E2E38"/>
-            </a:solidFill>
-          </a:ln>
-        </p:spPr>
-        <p:style>
-          <a:lnRef idx="1">
-            <a:schemeClr val="accent1"/>
-          </a:lnRef>
-          <a:fillRef idx="3">
-            <a:schemeClr val="accent1"/>
-          </a:fillRef>
-          <a:effectRef idx="2">
-            <a:schemeClr val="accent1"/>
-          </a:effectRef>
-          <a:fontRef idx="minor">
-            <a:schemeClr val="lt1"/>
-          </a:fontRef>
-        </p:style>
-        <p:txBody>
-          <a:bodyPr rtlCol="0" anchor="ctr" wrap="square" lIns="146304" rIns="128016" tIns="109728" bIns="91440"/>
-          <a:lstStyle/>
-          <a:p>
-            <a:pPr algn="ctr">
-              <a:lnSpc>
-                <a:spcPct val="112000"/>
-              </a:lnSpc>
-              <a:spcBef>
-                <a:spcPts val="0"/>
-              </a:spcBef>
-              <a:spcAft>
-                <a:spcPts val="200"/>
-              </a:spcAft>
-            </a:pPr>
-            <a:r>
-              <a:rPr sz="1200" b="1">
-                <a:solidFill>
-                  <a:srgbClr val="E6194D"/>
-                </a:solidFill>
-                <a:latin typeface="Calibri"/>
-                <a:ea typeface="Calibri"/>
-                <a:cs typeface="Calibri"/>
-              </a:rPr>
-              <a:t>7</a:t>
-            </a:r>
-          </a:p>
-          <a:p>
-            <a:pPr algn="ctr">
-              <a:lnSpc>
-                <a:spcPct val="112000"/>
-              </a:lnSpc>
-              <a:spcBef>
-                <a:spcPts val="0"/>
-              </a:spcBef>
-              <a:spcAft>
-                <a:spcPts val="0"/>
-              </a:spcAft>
-            </a:pPr>
-            <a:r>
-              <a:rPr sz="1000" b="1">
-                <a:solidFill>
-                  <a:srgbClr val="FFFFFF"/>
-                </a:solidFill>
-                <a:latin typeface="Calibri"/>
-                <a:ea typeface="Calibri"/>
-                <a:cs typeface="Calibri"/>
-              </a:rPr>
-              <a:t>Visuals</a:t>
-            </a:r>
-          </a:p>
-        </p:txBody>
-      </p:sp>
-      <p:sp>
-        <p:nvSpPr>
-          <p:cNvPr id="14" name="Rounded Rectangle 13"/>
-          <p:cNvSpPr/>
-          <p:nvPr/>
-        </p:nvSpPr>
-        <p:spPr>
-          <a:xfrm>
-            <a:off x="8961120" y="2743200"/>
-            <a:ext cx="1078992" cy="1051560"/>
-          </a:xfrm>
-          <a:prstGeom prst="roundRect">
-            <a:avLst>
-              <a:gd name="adj" fmla="val 5000"/>
-            </a:avLst>
-          </a:prstGeom>
-          <a:solidFill>
-            <a:srgbClr val="18181F"/>
-          </a:solidFill>
-          <a:ln w="12700">
-            <a:solidFill>
-              <a:srgbClr val="2E2E38"/>
-            </a:solidFill>
-          </a:ln>
-        </p:spPr>
-        <p:style>
-          <a:lnRef idx="1">
-            <a:schemeClr val="accent1"/>
-          </a:lnRef>
-          <a:fillRef idx="3">
-            <a:schemeClr val="accent1"/>
-          </a:fillRef>
-          <a:effectRef idx="2">
-            <a:schemeClr val="accent1"/>
-          </a:effectRef>
-          <a:fontRef idx="minor">
-            <a:schemeClr val="lt1"/>
-          </a:fontRef>
-        </p:style>
-        <p:txBody>
-          <a:bodyPr rtlCol="0" anchor="ctr" wrap="square" lIns="146304" rIns="128016" tIns="109728" bIns="91440"/>
-          <a:lstStyle/>
-          <a:p>
-            <a:pPr algn="ctr">
-              <a:lnSpc>
-                <a:spcPct val="112000"/>
-              </a:lnSpc>
-              <a:spcBef>
-                <a:spcPts val="0"/>
-              </a:spcBef>
-              <a:spcAft>
-                <a:spcPts val="200"/>
-              </a:spcAft>
-            </a:pPr>
-            <a:r>
-              <a:rPr sz="1200" b="1">
-                <a:solidFill>
-                  <a:srgbClr val="E6194D"/>
-                </a:solidFill>
-                <a:latin typeface="Calibri"/>
-                <a:ea typeface="Calibri"/>
-                <a:cs typeface="Calibri"/>
-              </a:rPr>
-              <a:t>8</a:t>
-            </a:r>
-          </a:p>
-          <a:p>
-            <a:pPr algn="ctr">
-              <a:lnSpc>
-                <a:spcPct val="112000"/>
-              </a:lnSpc>
-              <a:spcBef>
-                <a:spcPts val="0"/>
-              </a:spcBef>
-              <a:spcAft>
-                <a:spcPts val="0"/>
-              </a:spcAft>
-            </a:pPr>
-            <a:r>
-              <a:rPr sz="1000" b="1">
-                <a:solidFill>
-                  <a:srgbClr val="FFFFFF"/>
-                </a:solidFill>
-                <a:latin typeface="Calibri"/>
-                <a:ea typeface="Calibri"/>
-                <a:cs typeface="Calibri"/>
-              </a:rPr>
-              <a:t>Editor</a:t>
-            </a:r>
-          </a:p>
-        </p:txBody>
-      </p:sp>
-      <p:sp>
-        <p:nvSpPr>
-          <p:cNvPr id="15" name="Rounded Rectangle 14"/>
-          <p:cNvSpPr/>
-          <p:nvPr/>
-        </p:nvSpPr>
-        <p:spPr>
-          <a:xfrm>
-            <a:off x="10149840" y="2743200"/>
-            <a:ext cx="1078992" cy="1051560"/>
-          </a:xfrm>
-          <a:prstGeom prst="roundRect">
-            <a:avLst>
-              <a:gd name="adj" fmla="val 5000"/>
-            </a:avLst>
-          </a:prstGeom>
-          <a:solidFill>
-            <a:srgbClr val="18181F"/>
-          </a:solidFill>
-          <a:ln w="12700">
-            <a:solidFill>
-              <a:srgbClr val="2E2E38"/>
-            </a:solidFill>
-          </a:ln>
-        </p:spPr>
-        <p:style>
-          <a:lnRef idx="1">
-            <a:schemeClr val="accent1"/>
-          </a:lnRef>
-          <a:fillRef idx="3">
-            <a:schemeClr val="accent1"/>
-          </a:fillRef>
-          <a:effectRef idx="2">
-            <a:schemeClr val="accent1"/>
-          </a:effectRef>
-          <a:fontRef idx="minor">
-            <a:schemeClr val="lt1"/>
-          </a:fontRef>
-        </p:style>
-        <p:txBody>
-          <a:bodyPr rtlCol="0" anchor="ctr" wrap="square" lIns="146304" rIns="128016" tIns="109728" bIns="91440"/>
-          <a:lstStyle/>
-          <a:p>
-            <a:pPr algn="ctr">
-              <a:lnSpc>
-                <a:spcPct val="112000"/>
-              </a:lnSpc>
-              <a:spcBef>
-                <a:spcPts val="0"/>
-              </a:spcBef>
-              <a:spcAft>
-                <a:spcPts val="200"/>
-              </a:spcAft>
-            </a:pPr>
-            <a:r>
-              <a:rPr sz="1200" b="1">
-                <a:solidFill>
-                  <a:srgbClr val="E6194D"/>
-                </a:solidFill>
-                <a:latin typeface="Calibri"/>
-                <a:ea typeface="Calibri"/>
-                <a:cs typeface="Calibri"/>
-              </a:rPr>
-              <a:t>9</a:t>
-            </a:r>
-          </a:p>
-          <a:p>
-            <a:pPr algn="ctr">
-              <a:lnSpc>
-                <a:spcPct val="112000"/>
-              </a:lnSpc>
-              <a:spcBef>
-                <a:spcPts val="0"/>
-              </a:spcBef>
-              <a:spcAft>
-                <a:spcPts val="0"/>
-              </a:spcAft>
-            </a:pPr>
-            <a:r>
-              <a:rPr sz="1000" b="1">
-                <a:solidFill>
-                  <a:srgbClr val="FFFFFF"/>
-                </a:solidFill>
-                <a:latin typeface="Calibri"/>
-                <a:ea typeface="Calibri"/>
-                <a:cs typeface="Calibri"/>
-              </a:rPr>
-              <a:t>Sim</a:t>
-            </a:r>
-          </a:p>
-        </p:txBody>
-      </p:sp>
-      <p:sp>
-        <p:nvSpPr>
-          <p:cNvPr id="16" name="Rounded Rectangle 15"/>
-          <p:cNvSpPr/>
-          <p:nvPr/>
-        </p:nvSpPr>
-        <p:spPr>
-          <a:xfrm>
-            <a:off x="640080" y="3977640"/>
-            <a:ext cx="2560320" cy="1600200"/>
-          </a:xfrm>
-          <a:prstGeom prst="roundRect">
-            <a:avLst>
-              <a:gd name="adj" fmla="val 5000"/>
-            </a:avLst>
-          </a:prstGeom>
-          <a:solidFill>
-            <a:srgbClr val="18181F"/>
-          </a:solidFill>
-          <a:ln w="12700">
-            <a:solidFill>
-              <a:srgbClr val="2E2E38"/>
-            </a:solidFill>
-          </a:ln>
-        </p:spPr>
-        <p:style>
-          <a:lnRef idx="1">
-            <a:schemeClr val="accent1"/>
-          </a:lnRef>
-          <a:fillRef idx="3">
-            <a:schemeClr val="accent1"/>
-          </a:fillRef>
-          <a:effectRef idx="2">
-            <a:schemeClr val="accent1"/>
-          </a:effectRef>
-          <a:fontRef idx="minor">
-            <a:schemeClr val="lt1"/>
-          </a:fontRef>
-        </p:style>
-        <p:txBody>
-          <a:bodyPr rtlCol="0" anchor="t" wrap="square" lIns="146304" rIns="128016" tIns="109728" bIns="91440"/>
-          <a:lstStyle/>
-          <a:p>
-            <a:pPr algn="l">
-              <a:lnSpc>
-                <a:spcPct val="112000"/>
-              </a:lnSpc>
-              <a:spcBef>
-                <a:spcPts val="0"/>
-              </a:spcBef>
-              <a:spcAft>
-                <a:spcPts val="600"/>
-              </a:spcAft>
-            </a:pPr>
-            <a:r>
-              <a:rPr sz="1600" b="1">
-                <a:solidFill>
-                  <a:srgbClr val="E6194D"/>
-                </a:solidFill>
-                <a:latin typeface="Calibri"/>
-                <a:ea typeface="Calibri"/>
-                <a:cs typeface="Calibri"/>
-              </a:rPr>
-              <a:t>&lt; 4 hrs</a:t>
-            </a:r>
-          </a:p>
-          <a:p>
-            <a:pPr algn="l">
-              <a:lnSpc>
-                <a:spcPct val="112000"/>
-              </a:lnSpc>
-              <a:spcBef>
-                <a:spcPts val="0"/>
-              </a:spcBef>
-              <a:spcAft>
-                <a:spcPts val="0"/>
-              </a:spcAft>
-            </a:pPr>
-            <a:r>
-              <a:rPr sz="1100" b="0">
+              <a:t>Databricks in the loop</a:t>
+            </a:r>
+          </a:p>
+          <a:p>
+            <a:pPr algn="l">
+              <a:lnSpc>
+                <a:spcPct val="110000"/>
+              </a:lnSpc>
+              <a:spcBef>
+                <a:spcPts val="0"/>
+              </a:spcBef>
+              <a:spcAft>
+                <a:spcPts val="0"/>
+              </a:spcAft>
+            </a:pPr>
+            <a:r>
+              <a:rPr sz="1200" b="0">
                 <a:solidFill>
                   <a:srgbClr val="A1A1AA"/>
                 </a:solidFill>
@@ -6043,297 +5479,21 @@
                 <a:ea typeface="Calibri"/>
                 <a:cs typeface="Calibri"/>
               </a:rPr>
-              <a:t>Target for a 5-part package with ≤ 2 human gates</a:t>
-            </a:r>
-          </a:p>
-        </p:txBody>
-      </p:sp>
-      <p:sp>
-        <p:nvSpPr>
-          <p:cNvPr id="17" name="Rounded Rectangle 16"/>
-          <p:cNvSpPr/>
-          <p:nvPr/>
-        </p:nvSpPr>
-        <p:spPr>
-          <a:xfrm>
-            <a:off x="3401568" y="3977640"/>
-            <a:ext cx="2560320" cy="1600200"/>
-          </a:xfrm>
-          <a:prstGeom prst="roundRect">
-            <a:avLst>
-              <a:gd name="adj" fmla="val 5000"/>
-            </a:avLst>
-          </a:prstGeom>
-          <a:solidFill>
-            <a:srgbClr val="18181F"/>
-          </a:solidFill>
-          <a:ln w="12700">
-            <a:solidFill>
-              <a:srgbClr val="2E2E38"/>
-            </a:solidFill>
-          </a:ln>
-        </p:spPr>
-        <p:style>
-          <a:lnRef idx="1">
-            <a:schemeClr val="accent1"/>
-          </a:lnRef>
-          <a:fillRef idx="3">
-            <a:schemeClr val="accent1"/>
-          </a:fillRef>
-          <a:effectRef idx="2">
-            <a:schemeClr val="accent1"/>
-          </a:effectRef>
-          <a:fontRef idx="minor">
-            <a:schemeClr val="lt1"/>
-          </a:fontRef>
-        </p:style>
-        <p:txBody>
-          <a:bodyPr rtlCol="0" anchor="t" wrap="square" lIns="146304" rIns="128016" tIns="109728" bIns="91440"/>
-          <a:lstStyle/>
-          <a:p>
-            <a:pPr algn="l">
-              <a:lnSpc>
-                <a:spcPct val="112000"/>
-              </a:lnSpc>
-              <a:spcBef>
-                <a:spcPts val="0"/>
-              </a:spcBef>
-              <a:spcAft>
-                <a:spcPts val="600"/>
-              </a:spcAft>
-            </a:pPr>
-            <a:r>
-              <a:rPr sz="1600" b="1">
-                <a:solidFill>
-                  <a:srgbClr val="E6194D"/>
-                </a:solidFill>
-                <a:latin typeface="Calibri"/>
-                <a:ea typeface="Calibri"/>
-                <a:cs typeface="Calibri"/>
-              </a:rPr>
-              <a:t>24+ personas</a:t>
-            </a:r>
-          </a:p>
-          <a:p>
-            <a:pPr algn="l">
-              <a:lnSpc>
-                <a:spcPct val="112000"/>
-              </a:lnSpc>
-              <a:spcBef>
-                <a:spcPts val="0"/>
-              </a:spcBef>
-              <a:spcAft>
-                <a:spcPts val="0"/>
-              </a:spcAft>
-            </a:pPr>
-            <a:r>
-              <a:rPr sz="1100" b="0">
-                <a:solidFill>
-                  <a:srgbClr val="A1A1AA"/>
-                </a:solidFill>
-                <a:latin typeface="Calibri"/>
-                <a:ea typeface="Calibri"/>
-                <a:cs typeface="Calibri"/>
-              </a:rPr>
-              <a:t>Age × gender × city-tier × intent cohorts</a:t>
-            </a:r>
-          </a:p>
-        </p:txBody>
-      </p:sp>
-      <p:sp>
-        <p:nvSpPr>
-          <p:cNvPr id="18" name="Rounded Rectangle 17"/>
-          <p:cNvSpPr/>
-          <p:nvPr/>
-        </p:nvSpPr>
-        <p:spPr>
-          <a:xfrm>
-            <a:off x="6163056" y="3977640"/>
-            <a:ext cx="2560320" cy="1600200"/>
-          </a:xfrm>
-          <a:prstGeom prst="roundRect">
-            <a:avLst>
-              <a:gd name="adj" fmla="val 5000"/>
-            </a:avLst>
-          </a:prstGeom>
-          <a:solidFill>
-            <a:srgbClr val="18181F"/>
-          </a:solidFill>
-          <a:ln w="12700">
-            <a:solidFill>
-              <a:srgbClr val="2E2E38"/>
-            </a:solidFill>
-          </a:ln>
-        </p:spPr>
-        <p:style>
-          <a:lnRef idx="1">
-            <a:schemeClr val="accent1"/>
-          </a:lnRef>
-          <a:fillRef idx="3">
-            <a:schemeClr val="accent1"/>
-          </a:fillRef>
-          <a:effectRef idx="2">
-            <a:schemeClr val="accent1"/>
-          </a:effectRef>
-          <a:fontRef idx="minor">
-            <a:schemeClr val="lt1"/>
-          </a:fontRef>
-        </p:style>
-        <p:txBody>
-          <a:bodyPr rtlCol="0" anchor="t" wrap="square" lIns="146304" rIns="128016" tIns="109728" bIns="91440"/>
-          <a:lstStyle/>
-          <a:p>
-            <a:pPr algn="l">
-              <a:lnSpc>
-                <a:spcPct val="112000"/>
-              </a:lnSpc>
-              <a:spcBef>
-                <a:spcPts val="0"/>
-              </a:spcBef>
-              <a:spcAft>
-                <a:spcPts val="600"/>
-              </a:spcAft>
-            </a:pPr>
-            <a:r>
-              <a:rPr sz="1600" b="1">
-                <a:solidFill>
-                  <a:srgbClr val="E6194D"/>
-                </a:solidFill>
-                <a:latin typeface="Calibri"/>
-                <a:ea typeface="Calibri"/>
-                <a:cs typeface="Calibri"/>
-              </a:rPr>
-              <a:t>1 timeline</a:t>
-            </a:r>
-          </a:p>
-          <a:p>
-            <a:pPr algn="l">
-              <a:lnSpc>
-                <a:spcPct val="112000"/>
-              </a:lnSpc>
-              <a:spcBef>
-                <a:spcPts val="0"/>
-              </a:spcBef>
-              <a:spcAft>
-                <a:spcPts val="0"/>
-              </a:spcAft>
-            </a:pPr>
-            <a:r>
-              <a:rPr sz="1100" b="0">
-                <a:solidFill>
-                  <a:srgbClr val="A1A1AA"/>
-                </a:solidFill>
-                <a:latin typeface="Calibri"/>
-                <a:ea typeface="Calibri"/>
-                <a:cs typeface="Calibri"/>
-              </a:rPr>
-              <a:t>Script, VO, SFX, shots share one clock</a:t>
-            </a:r>
-          </a:p>
-        </p:txBody>
-      </p:sp>
-      <p:sp>
-        <p:nvSpPr>
-          <p:cNvPr id="19" name="Rounded Rectangle 18"/>
-          <p:cNvSpPr/>
-          <p:nvPr/>
-        </p:nvSpPr>
-        <p:spPr>
-          <a:xfrm>
-            <a:off x="8924544" y="3977640"/>
-            <a:ext cx="2560320" cy="1600200"/>
-          </a:xfrm>
-          <a:prstGeom prst="roundRect">
-            <a:avLst>
-              <a:gd name="adj" fmla="val 5000"/>
-            </a:avLst>
-          </a:prstGeom>
-          <a:solidFill>
-            <a:srgbClr val="18181F"/>
-          </a:solidFill>
-          <a:ln w="12700">
-            <a:solidFill>
-              <a:srgbClr val="2E2E38"/>
-            </a:solidFill>
-          </a:ln>
-        </p:spPr>
-        <p:style>
-          <a:lnRef idx="1">
-            <a:schemeClr val="accent1"/>
-          </a:lnRef>
-          <a:fillRef idx="3">
-            <a:schemeClr val="accent1"/>
-          </a:fillRef>
-          <a:effectRef idx="2">
-            <a:schemeClr val="accent1"/>
-          </a:effectRef>
-          <a:fontRef idx="minor">
-            <a:schemeClr val="lt1"/>
-          </a:fontRef>
-        </p:style>
-        <p:txBody>
-          <a:bodyPr rtlCol="0" anchor="t" wrap="square" lIns="146304" rIns="128016" tIns="109728" bIns="91440"/>
-          <a:lstStyle/>
-          <a:p>
-            <a:pPr algn="l">
-              <a:lnSpc>
-                <a:spcPct val="112000"/>
-              </a:lnSpc>
-              <a:spcBef>
-                <a:spcPts val="0"/>
-              </a:spcBef>
-              <a:spcAft>
-                <a:spcPts val="600"/>
-              </a:spcAft>
-            </a:pPr>
-            <a:r>
-              <a:rPr sz="1600" b="1">
-                <a:solidFill>
-                  <a:srgbClr val="E6194D"/>
-                </a:solidFill>
-                <a:latin typeface="Calibri"/>
-                <a:ea typeface="Calibri"/>
-                <a:cs typeface="Calibri"/>
-              </a:rPr>
-              <a:t>Closed loop</a:t>
-            </a:r>
-          </a:p>
-          <a:p>
-            <a:pPr algn="l">
-              <a:lnSpc>
-                <a:spcPct val="112000"/>
-              </a:lnSpc>
-              <a:spcBef>
-                <a:spcPts val="0"/>
-              </a:spcBef>
-              <a:spcAft>
-                <a:spcPts val="0"/>
-              </a:spcAft>
-            </a:pPr>
-            <a:r>
-              <a:rPr sz="1100" b="0">
-                <a:solidFill>
-                  <a:srgbClr val="A1A1AA"/>
-                </a:solidFill>
-                <a:latin typeface="Calibri"/>
-                <a:ea typeface="Calibri"/>
-                <a:cs typeface="Calibri"/>
-              </a:rPr>
-              <a:t>Sim patches re-enter Script / Cliff / Narration</a:t>
-            </a:r>
-          </a:p>
-        </p:txBody>
-      </p:sp>
-      <p:sp>
-        <p:nvSpPr>
-          <p:cNvPr id="20" name="TextBox 19"/>
+              <a:t>AI Search indexes story attachments for grounded scripting. Vector Search retrieves cast / voice assets and shot templates — so agents don’t invent casting or visuals from thin air.</a:t>
+            </a:r>
+          </a:p>
+        </p:txBody>
+      </p:sp>
+      <p:sp>
+        <p:nvSpPr>
+          <p:cNvPr id="13" name="TextBox 12"/>
           <p:cNvSpPr txBox="1"/>
           <p:nvPr/>
         </p:nvSpPr>
         <p:spPr>
           <a:xfrm>
             <a:off x="640080" y="6473952"/>
-            <a:ext cx="8412480" cy="219456"/>
+            <a:ext cx="8412480" cy="201168"/>
           </a:xfrm>
           <a:prstGeom prst="rect">
             <a:avLst/>
@@ -6346,7 +5506,7 @@
           <a:p>
             <a:pPr algn="l">
               <a:lnSpc>
-                <a:spcPct val="112000"/>
+                <a:spcPct val="110000"/>
               </a:lnSpc>
               <a:spcBef>
                 <a:spcPts val="0"/>
@@ -6371,14 +5531,14 @@
       </p:sp>
       <p:sp>
         <p:nvSpPr>
-          <p:cNvPr id="21" name="TextBox 20"/>
+          <p:cNvPr id="14" name="TextBox 13"/>
           <p:cNvSpPr txBox="1"/>
           <p:nvPr/>
         </p:nvSpPr>
         <p:spPr>
           <a:xfrm>
             <a:off x="10195560" y="6473952"/>
-            <a:ext cx="1371600" cy="219456"/>
+            <a:ext cx="1371600" cy="201168"/>
           </a:xfrm>
           <a:prstGeom prst="rect">
             <a:avLst/>
@@ -6391,7 +5551,7 @@
           <a:p>
             <a:pPr algn="r">
               <a:lnSpc>
-                <a:spcPct val="112000"/>
+                <a:spcPct val="110000"/>
               </a:lnSpc>
               <a:spcBef>
                 <a:spcPts val="0"/>
@@ -6448,8 +5608,8 @@
         </p:nvSpPr>
         <p:spPr>
           <a:xfrm>
-            <a:off x="640080" y="347472"/>
-            <a:ext cx="347472" cy="54864"/>
+            <a:off x="640080" y="329184"/>
+            <a:ext cx="329184" cy="54864"/>
           </a:xfrm>
           <a:prstGeom prst="rect">
             <a:avLst/>
@@ -6491,8 +5651,8 @@
         </p:nvSpPr>
         <p:spPr>
           <a:xfrm>
-            <a:off x="640080" y="475488"/>
-            <a:ext cx="10908792" cy="219456"/>
+            <a:off x="640080" y="457200"/>
+            <a:ext cx="10908792" cy="201168"/>
           </a:xfrm>
           <a:prstGeom prst="rect">
             <a:avLst/>
@@ -6505,7 +5665,7 @@
           <a:p>
             <a:pPr algn="l">
               <a:lnSpc>
-                <a:spcPct val="112000"/>
+                <a:spcPct val="110000"/>
               </a:lnSpc>
               <a:spcBef>
                 <a:spcPts val="0"/>
@@ -6523,7 +5683,7 @@
                 <a:ea typeface="Calibri"/>
                 <a:cs typeface="Calibri"/>
               </a:rPr>
-              <a:t>03  PRODUCT</a:t>
+              <a:t>03  PROBLEM</a:t>
             </a:r>
           </a:p>
         </p:txBody>
@@ -6536,8 +5696,8 @@
         </p:nvSpPr>
         <p:spPr>
           <a:xfrm>
-            <a:off x="640080" y="731520"/>
-            <a:ext cx="10908792" cy="365760"/>
+            <a:off x="640080" y="694944"/>
+            <a:ext cx="10908792" cy="347472"/>
           </a:xfrm>
           <a:prstGeom prst="rect">
             <a:avLst/>
@@ -6550,7 +5710,7 @@
           <a:p>
             <a:pPr algn="l">
               <a:lnSpc>
-                <a:spcPct val="112000"/>
+                <a:spcPct val="110000"/>
               </a:lnSpc>
               <a:spcBef>
                 <a:spcPts val="0"/>
@@ -6568,7 +5728,7 @@
                 <a:ea typeface="Calibri"/>
                 <a:cs typeface="Calibri"/>
               </a:rPr>
-              <a:t>What judges can click, listen to, and stress-test</a:t>
+              <a:t>Serial audio wins on part-to-part retention. Production is still fragmented.</a:t>
             </a:r>
           </a:p>
         </p:txBody>
@@ -6581,7 +5741,7 @@
         </p:nvSpPr>
         <p:spPr>
           <a:xfrm>
-            <a:off x="640080" y="1152144"/>
+            <a:off x="640080" y="1097280"/>
             <a:ext cx="10908792" cy="365760"/>
           </a:xfrm>
           <a:prstGeom prst="rect">
@@ -6595,17 +5755,17 @@
           <a:p>
             <a:pPr algn="l">
               <a:lnSpc>
-                <a:spcPct val="112000"/>
-              </a:lnSpc>
-              <a:spcBef>
-                <a:spcPts val="0"/>
-              </a:spcBef>
-              <a:spcAft>
-                <a:spcPts val="0"/>
-              </a:spcAft>
-            </a:pPr>
-            <a:r>
-              <a:rPr sz="1300" b="0">
+                <a:spcPct val="110000"/>
+              </a:lnSpc>
+              <a:spcBef>
+                <a:spcPts val="0"/>
+              </a:spcBef>
+              <a:spcAft>
+                <a:spcPts val="0"/>
+              </a:spcAft>
+            </a:pPr>
+            <a:r>
+              <a:rPr sz="1200" b="0">
                 <a:solidFill>
                   <a:srgbClr val="A1A1AA"/>
                 </a:solidFill>
@@ -6613,7 +5773,7 @@
                 <a:ea typeface="Calibri"/>
                 <a:cs typeface="Calibri"/>
               </a:rPr>
-              <a:t>Built for T-04 Creator Tools — with storytelling and voice AI in the loop.</a:t>
+              <a:t>Pocket FM–class storytelling needs speed, cultural specificity, and pre-publish signal.</a:t>
             </a:r>
           </a:p>
         </p:txBody>
@@ -6626,8 +5786,8 @@
         </p:nvSpPr>
         <p:spPr>
           <a:xfrm>
-            <a:off x="640080" y="1691640"/>
-            <a:ext cx="73152" cy="4160520"/>
+            <a:off x="640080" y="1664208"/>
+            <a:ext cx="73152" cy="1691640"/>
           </a:xfrm>
           <a:prstGeom prst="rect">
             <a:avLst/>
@@ -6669,8 +5829,8 @@
         </p:nvSpPr>
         <p:spPr>
           <a:xfrm>
-            <a:off x="713232" y="1691640"/>
-            <a:ext cx="4864608" cy="4160520"/>
+            <a:off x="713232" y="1664208"/>
+            <a:ext cx="3401568" cy="1691640"/>
           </a:xfrm>
           <a:prstGeom prst="roundRect">
             <a:avLst>
@@ -6701,22 +5861,22 @@
           </a:fontRef>
         </p:style>
         <p:txBody>
-          <a:bodyPr rtlCol="0" anchor="t" wrap="square" lIns="128016" rIns="128016" tIns="109728" bIns="91440"/>
-          <a:lstStyle/>
-          <a:p>
-            <a:pPr algn="l">
-              <a:lnSpc>
-                <a:spcPct val="112000"/>
-              </a:lnSpc>
-              <a:spcBef>
-                <a:spcPts val="0"/>
-              </a:spcBef>
-              <a:spcAft>
-                <a:spcPts val="800"/>
-              </a:spcAft>
-            </a:pPr>
-            <a:r>
-              <a:rPr sz="1400" b="1">
+          <a:bodyPr rtlCol="0" anchor="t" wrap="square" lIns="109728" rIns="109728" tIns="91440" bIns="73152"/>
+          <a:lstStyle/>
+          <a:p>
+            <a:pPr algn="l">
+              <a:lnSpc>
+                <a:spcPct val="110000"/>
+              </a:lnSpc>
+              <a:spcBef>
+                <a:spcPts val="0"/>
+              </a:spcBef>
+              <a:spcAft>
+                <a:spcPts val="600"/>
+              </a:spcAft>
+            </a:pPr>
+            <a:r>
+              <a:rPr sz="1300" b="1">
                 <a:solidFill>
                   <a:srgbClr val="FFFFFF"/>
                 </a:solidFill>
@@ -6724,23 +5884,23 @@
                 <a:ea typeface="Calibri"/>
                 <a:cs typeface="Calibri"/>
               </a:rPr>
-              <a:t>Shipped for demo</a:t>
-            </a:r>
-          </a:p>
-          <a:p>
-            <a:pPr algn="l">
-              <a:lnSpc>
-                <a:spcPct val="112000"/>
-              </a:lnSpc>
-              <a:spcBef>
-                <a:spcPts val="0"/>
-              </a:spcBef>
-              <a:spcAft>
-                <a:spcPts val="500"/>
-              </a:spcAft>
-            </a:pPr>
-            <a:r>
-              <a:rPr sz="1200" b="0">
+              <a:t>Idea → script is slow</a:t>
+            </a:r>
+          </a:p>
+          <a:p>
+            <a:pPr algn="l">
+              <a:lnSpc>
+                <a:spcPct val="110000"/>
+              </a:lnSpc>
+              <a:spcBef>
+                <a:spcPts val="0"/>
+              </a:spcBef>
+              <a:spcAft>
+                <a:spcPts val="0"/>
+              </a:spcAft>
+            </a:pPr>
+            <a:r>
+              <a:rPr sz="1100" b="0">
                 <a:solidFill>
                   <a:srgbClr val="A1A1AA"/>
                 </a:solidFill>
@@ -6748,165 +5908,64 @@
                 <a:ea typeface="Calibri"/>
                 <a:cs typeface="Calibri"/>
               </a:rPr>
-              <a:t>•  Agent chat with live pipeline + approvals</a:t>
-            </a:r>
-          </a:p>
-          <a:p>
-            <a:pPr algn="l">
-              <a:lnSpc>
-                <a:spcPct val="112000"/>
-              </a:lnSpc>
-              <a:spcBef>
-                <a:spcPts val="0"/>
-              </a:spcBef>
-              <a:spcAft>
-                <a:spcPts val="500"/>
-              </a:spcAft>
-            </a:pPr>
-            <a:r>
-              <a:rPr sz="1200" b="0">
-                <a:solidFill>
-                  <a:srgbClr val="A1A1AA"/>
-                </a:solidFill>
-                <a:latin typeface="Calibri"/>
-                <a:ea typeface="Calibri"/>
-                <a:cs typeface="Calibri"/>
-              </a:rPr>
-              <a:t>•  Script package review (structured, not a wall of text)</a:t>
-            </a:r>
-          </a:p>
-          <a:p>
-            <a:pPr algn="l">
-              <a:lnSpc>
-                <a:spcPct val="112000"/>
-              </a:lnSpc>
-              <a:spcBef>
-                <a:spcPts val="0"/>
-              </a:spcBef>
-              <a:spcAft>
-                <a:spcPts val="500"/>
-              </a:spcAft>
-            </a:pPr>
-            <a:r>
-              <a:rPr sz="1200" b="0">
-                <a:solidFill>
-                  <a:srgbClr val="A1A1AA"/>
-                </a:solidFill>
-                <a:latin typeface="Calibri"/>
-                <a:ea typeface="Calibri"/>
-                <a:cs typeface="Calibri"/>
-              </a:rPr>
-              <a:t>•  Narration Director → performance map before TTS</a:t>
-            </a:r>
-          </a:p>
-          <a:p>
-            <a:pPr algn="l">
-              <a:lnSpc>
-                <a:spcPct val="112000"/>
-              </a:lnSpc>
-              <a:spcBef>
-                <a:spcPts val="0"/>
-              </a:spcBef>
-              <a:spcAft>
-                <a:spcPts val="500"/>
-              </a:spcAft>
-            </a:pPr>
-            <a:r>
-              <a:rPr sz="1200" b="0">
-                <a:solidFill>
-                  <a:srgbClr val="A1A1AA"/>
-                </a:solidFill>
-                <a:latin typeface="Calibri"/>
-                <a:ea typeface="Calibri"/>
-                <a:cs typeface="Calibri"/>
-              </a:rPr>
-              <a:t>•  Web timeline editor (stems, markers, listen)</a:t>
-            </a:r>
-          </a:p>
-          <a:p>
-            <a:pPr algn="l">
-              <a:lnSpc>
-                <a:spcPct val="112000"/>
-              </a:lnSpc>
-              <a:spcBef>
-                <a:spcPts val="0"/>
-              </a:spcBef>
-              <a:spcAft>
-                <a:spcPts val="500"/>
-              </a:spcAft>
-            </a:pPr>
-            <a:r>
-              <a:rPr sz="1200" b="0">
-                <a:solidFill>
-                  <a:srgbClr val="A1A1AA"/>
-                </a:solidFill>
-                <a:latin typeface="Calibri"/>
-                <a:ea typeface="Calibri"/>
-                <a:cs typeface="Calibri"/>
-              </a:rPr>
-              <a:t>•  Companion visuals aligned to story beats</a:t>
-            </a:r>
-          </a:p>
-          <a:p>
-            <a:pPr algn="l">
-              <a:lnSpc>
-                <a:spcPct val="112000"/>
-              </a:lnSpc>
-              <a:spcBef>
-                <a:spcPts val="0"/>
-              </a:spcBef>
-              <a:spcAft>
-                <a:spcPts val="500"/>
-              </a:spcAft>
-            </a:pPr>
-            <a:r>
-              <a:rPr sz="1200" b="0">
-                <a:solidFill>
-                  <a:srgbClr val="A1A1AA"/>
-                </a:solidFill>
-                <a:latin typeface="Calibri"/>
-                <a:ea typeface="Calibri"/>
-                <a:cs typeface="Calibri"/>
-              </a:rPr>
-              <a:t>•  Audience Sim: audit, personas, diff-style patches</a:t>
-            </a:r>
-          </a:p>
-          <a:p>
-            <a:pPr algn="l">
-              <a:lnSpc>
-                <a:spcPct val="112000"/>
-              </a:lnSpc>
-              <a:spcBef>
-                <a:spcPts val="0"/>
-              </a:spcBef>
-              <a:spcAft>
-                <a:spcPts val="0"/>
-              </a:spcAft>
-            </a:pPr>
-            <a:r>
-              <a:rPr sz="1200" b="0">
-                <a:solidFill>
-                  <a:srgbClr val="A1A1AA"/>
-                </a:solidFill>
-                <a:latin typeface="Calibri"/>
-                <a:ea typeface="Calibri"/>
-                <a:cs typeface="Calibri"/>
-              </a:rPr>
-              <a:t>•  Hindi + English · Docker Compose runtime</a:t>
-            </a:r>
-          </a:p>
-        </p:txBody>
-      </p:sp>
-      <p:sp>
-        <p:nvSpPr>
-          <p:cNvPr id="8" name="Rounded Rectangle 7"/>
+              <a:t>Regional authenticity is the moat. Generic LLM drafts sound thin.</a:t>
+            </a:r>
+          </a:p>
+        </p:txBody>
+      </p:sp>
+      <p:sp>
+        <p:nvSpPr>
+          <p:cNvPr id="8" name="Rectangle 7"/>
           <p:cNvSpPr/>
           <p:nvPr/>
         </p:nvSpPr>
         <p:spPr>
           <a:xfrm>
-            <a:off x="5779008" y="1691640"/>
-            <a:ext cx="5760720" cy="4160520"/>
+            <a:off x="4297680" y="1664208"/>
+            <a:ext cx="73152" cy="1691640"/>
+          </a:xfrm>
+          <a:prstGeom prst="rect">
+            <a:avLst/>
+          </a:prstGeom>
+          <a:solidFill>
+            <a:srgbClr val="E6194D"/>
+          </a:solidFill>
+          <a:ln>
+            <a:noFill/>
+          </a:ln>
+        </p:spPr>
+        <p:style>
+          <a:lnRef idx="1">
+            <a:schemeClr val="accent1"/>
+          </a:lnRef>
+          <a:fillRef idx="3">
+            <a:schemeClr val="accent1"/>
+          </a:fillRef>
+          <a:effectRef idx="2">
+            <a:schemeClr val="accent1"/>
+          </a:effectRef>
+          <a:fontRef idx="minor">
+            <a:schemeClr val="lt1"/>
+          </a:fontRef>
+        </p:style>
+        <p:txBody>
+          <a:bodyPr rtlCol="0" anchor="ctr"/>
+          <a:lstStyle/>
+          <a:p>
+            <a:pPr algn="ctr"/>
+          </a:p>
+        </p:txBody>
+      </p:sp>
+      <p:sp>
+        <p:nvSpPr>
+          <p:cNvPr id="9" name="Rounded Rectangle 8"/>
+          <p:cNvSpPr/>
+          <p:nvPr/>
+        </p:nvSpPr>
+        <p:spPr>
+          <a:xfrm>
+            <a:off x="4370832" y="1664208"/>
+            <a:ext cx="3401568" cy="1691640"/>
           </a:xfrm>
           <a:prstGeom prst="roundRect">
             <a:avLst>
@@ -6914,7 +5973,7 @@
             </a:avLst>
           </a:prstGeom>
           <a:solidFill>
-            <a:srgbClr val="22222C"/>
+            <a:srgbClr val="18181F"/>
           </a:solidFill>
           <a:ln w="12700">
             <a:solidFill>
@@ -6937,105 +5996,666 @@
           </a:fontRef>
         </p:style>
         <p:txBody>
-          <a:bodyPr rtlCol="0" anchor="ctr"/>
-          <a:lstStyle/>
-          <a:p>
-            <a:pPr algn="ctr"/>
-          </a:p>
-        </p:txBody>
-      </p:sp>
-      <p:pic>
-        <p:nvPicPr>
-          <p:cNvPr id="9" name="Picture 8" descr="01-chat-or-missing.png"/>
-          <p:cNvPicPr>
-            <a:picLocks noChangeAspect="1"/>
-          </p:cNvPicPr>
-          <p:nvPr/>
-        </p:nvPicPr>
-        <p:blipFill>
-          <a:blip r:embed="rId2"/>
-          <a:stretch>
-            <a:fillRect/>
-          </a:stretch>
-        </p:blipFill>
-        <p:spPr>
-          <a:xfrm>
-            <a:off x="5852160" y="2192845"/>
-            <a:ext cx="5614416" cy="3158109"/>
+          <a:bodyPr rtlCol="0" anchor="t" wrap="square" lIns="109728" rIns="109728" tIns="91440" bIns="73152"/>
+          <a:lstStyle/>
+          <a:p>
+            <a:pPr algn="l">
+              <a:lnSpc>
+                <a:spcPct val="110000"/>
+              </a:lnSpc>
+              <a:spcBef>
+                <a:spcPts val="0"/>
+              </a:spcBef>
+              <a:spcAft>
+                <a:spcPts val="600"/>
+              </a:spcAft>
+            </a:pPr>
+            <a:r>
+              <a:rPr sz="1300" b="1">
+                <a:solidFill>
+                  <a:srgbClr val="FFFFFF"/>
+                </a:solidFill>
+                <a:latin typeface="Calibri"/>
+                <a:ea typeface="Calibri"/>
+                <a:cs typeface="Calibri"/>
+              </a:rPr>
+              <a:t>Episodes don’t chain</a:t>
+            </a:r>
+          </a:p>
+          <a:p>
+            <a:pPr algn="l">
+              <a:lnSpc>
+                <a:spcPct val="110000"/>
+              </a:lnSpc>
+              <a:spcBef>
+                <a:spcPts val="0"/>
+              </a:spcBef>
+              <a:spcAft>
+                <a:spcPts val="0"/>
+              </a:spcAft>
+            </a:pPr>
+            <a:r>
+              <a:rPr sz="1100" b="0">
+                <a:solidFill>
+                  <a:srgbClr val="A1A1AA"/>
+                </a:solidFill>
+                <a:latin typeface="Calibri"/>
+                <a:ea typeface="Calibri"/>
+                <a:cs typeface="Calibri"/>
+              </a:rPr>
+              <a:t>Weak cliffhangers → drop-off after part one.</a:t>
+            </a:r>
+          </a:p>
+        </p:txBody>
+      </p:sp>
+      <p:sp>
+        <p:nvSpPr>
+          <p:cNvPr id="10" name="Rectangle 9"/>
+          <p:cNvSpPr/>
+          <p:nvPr/>
+        </p:nvSpPr>
+        <p:spPr>
+          <a:xfrm>
+            <a:off x="7955280" y="1664208"/>
+            <a:ext cx="73152" cy="1691640"/>
           </a:xfrm>
           <a:prstGeom prst="rect">
             <a:avLst/>
           </a:prstGeom>
-        </p:spPr>
-      </p:pic>
-      <p:sp>
-        <p:nvSpPr>
-          <p:cNvPr id="10" name="TextBox 9"/>
-          <p:cNvSpPr txBox="1"/>
-          <p:nvPr/>
-        </p:nvSpPr>
-        <p:spPr>
-          <a:xfrm>
-            <a:off x="640080" y="6473952"/>
-            <a:ext cx="8412480" cy="219456"/>
+          <a:solidFill>
+            <a:srgbClr val="E6194D"/>
+          </a:solidFill>
+          <a:ln>
+            <a:noFill/>
+          </a:ln>
+        </p:spPr>
+        <p:style>
+          <a:lnRef idx="1">
+            <a:schemeClr val="accent1"/>
+          </a:lnRef>
+          <a:fillRef idx="3">
+            <a:schemeClr val="accent1"/>
+          </a:fillRef>
+          <a:effectRef idx="2">
+            <a:schemeClr val="accent1"/>
+          </a:effectRef>
+          <a:fontRef idx="minor">
+            <a:schemeClr val="lt1"/>
+          </a:fontRef>
+        </p:style>
+        <p:txBody>
+          <a:bodyPr rtlCol="0" anchor="ctr"/>
+          <a:lstStyle/>
+          <a:p>
+            <a:pPr algn="ctr"/>
+          </a:p>
+        </p:txBody>
+      </p:sp>
+      <p:sp>
+        <p:nvSpPr>
+          <p:cNvPr id="11" name="Rounded Rectangle 10"/>
+          <p:cNvSpPr/>
+          <p:nvPr/>
+        </p:nvSpPr>
+        <p:spPr>
+          <a:xfrm>
+            <a:off x="8028432" y="1664208"/>
+            <a:ext cx="3401568" cy="1691640"/>
+          </a:xfrm>
+          <a:prstGeom prst="roundRect">
+            <a:avLst>
+              <a:gd name="adj" fmla="val 5000"/>
+            </a:avLst>
+          </a:prstGeom>
+          <a:solidFill>
+            <a:srgbClr val="18181F"/>
+          </a:solidFill>
+          <a:ln w="12700">
+            <a:solidFill>
+              <a:srgbClr val="2E2E38"/>
+            </a:solidFill>
+          </a:ln>
+        </p:spPr>
+        <p:style>
+          <a:lnRef idx="1">
+            <a:schemeClr val="accent1"/>
+          </a:lnRef>
+          <a:fillRef idx="3">
+            <a:schemeClr val="accent1"/>
+          </a:fillRef>
+          <a:effectRef idx="2">
+            <a:schemeClr val="accent1"/>
+          </a:effectRef>
+          <a:fontRef idx="minor">
+            <a:schemeClr val="lt1"/>
+          </a:fontRef>
+        </p:style>
+        <p:txBody>
+          <a:bodyPr rtlCol="0" anchor="t" wrap="square" lIns="109728" rIns="109728" tIns="91440" bIns="73152"/>
+          <a:lstStyle/>
+          <a:p>
+            <a:pPr algn="l">
+              <a:lnSpc>
+                <a:spcPct val="110000"/>
+              </a:lnSpc>
+              <a:spcBef>
+                <a:spcPts val="0"/>
+              </a:spcBef>
+              <a:spcAft>
+                <a:spcPts val="600"/>
+              </a:spcAft>
+            </a:pPr>
+            <a:r>
+              <a:rPr sz="1300" b="1">
+                <a:solidFill>
+                  <a:srgbClr val="FFFFFF"/>
+                </a:solidFill>
+                <a:latin typeface="Calibri"/>
+                <a:ea typeface="Calibri"/>
+                <a:cs typeface="Calibri"/>
+              </a:rPr>
+              <a:t>Audio assembly is manual</a:t>
+            </a:r>
+          </a:p>
+          <a:p>
+            <a:pPr algn="l">
+              <a:lnSpc>
+                <a:spcPct val="110000"/>
+              </a:lnSpc>
+              <a:spcBef>
+                <a:spcPts val="0"/>
+              </a:spcBef>
+              <a:spcAft>
+                <a:spcPts val="0"/>
+              </a:spcAft>
+            </a:pPr>
+            <a:r>
+              <a:rPr sz="1100" b="0">
+                <a:solidFill>
+                  <a:srgbClr val="A1A1AA"/>
+                </a:solidFill>
+                <a:latin typeface="Calibri"/>
+                <a:ea typeface="Calibri"/>
+                <a:cs typeface="Calibri"/>
+              </a:rPr>
+              <a:t>Voice, SFX, and visuals are synced by hand across tools.</a:t>
+            </a:r>
+          </a:p>
+        </p:txBody>
+      </p:sp>
+      <p:sp>
+        <p:nvSpPr>
+          <p:cNvPr id="12" name="Rectangle 11"/>
+          <p:cNvSpPr/>
+          <p:nvPr/>
+        </p:nvSpPr>
+        <p:spPr>
+          <a:xfrm>
+            <a:off x="640080" y="3538728"/>
+            <a:ext cx="73152" cy="1691640"/>
           </a:xfrm>
           <a:prstGeom prst="rect">
             <a:avLst/>
           </a:prstGeom>
-          <a:noFill/>
-        </p:spPr>
-        <p:txBody>
-          <a:bodyPr wrap="square" anchor="t" lIns="0" rIns="0" tIns="0" bIns="0"/>
-          <a:lstStyle/>
-          <a:p>
-            <a:pPr algn="l">
-              <a:lnSpc>
-                <a:spcPct val="112000"/>
-              </a:lnSpc>
-              <a:spcBef>
-                <a:spcPts val="0"/>
-              </a:spcBef>
-              <a:spcAft>
-                <a:spcPts val="0"/>
-              </a:spcAft>
-            </a:pPr>
-            <a:r>
-              <a:rPr sz="1000" b="0">
-                <a:solidFill>
-                  <a:srgbClr val="71717A"/>
-                </a:solidFill>
-                <a:latin typeface="Calibri"/>
-                <a:ea typeface="Calibri"/>
-                <a:cs typeface="Calibri"/>
-              </a:rPr>
-              <a:t>Kahani  ·  Zero to One × Pocket FM  ·  IIM Bangalore</a:t>
-            </a:r>
-          </a:p>
-        </p:txBody>
-      </p:sp>
-      <p:sp>
-        <p:nvSpPr>
-          <p:cNvPr id="11" name="TextBox 10"/>
-          <p:cNvSpPr txBox="1"/>
-          <p:nvPr/>
-        </p:nvSpPr>
-        <p:spPr>
-          <a:xfrm>
-            <a:off x="10195560" y="6473952"/>
-            <a:ext cx="1371600" cy="219456"/>
+          <a:solidFill>
+            <a:srgbClr val="E6194D"/>
+          </a:solidFill>
+          <a:ln>
+            <a:noFill/>
+          </a:ln>
+        </p:spPr>
+        <p:style>
+          <a:lnRef idx="1">
+            <a:schemeClr val="accent1"/>
+          </a:lnRef>
+          <a:fillRef idx="3">
+            <a:schemeClr val="accent1"/>
+          </a:fillRef>
+          <a:effectRef idx="2">
+            <a:schemeClr val="accent1"/>
+          </a:effectRef>
+          <a:fontRef idx="minor">
+            <a:schemeClr val="lt1"/>
+          </a:fontRef>
+        </p:style>
+        <p:txBody>
+          <a:bodyPr rtlCol="0" anchor="ctr"/>
+          <a:lstStyle/>
+          <a:p>
+            <a:pPr algn="ctr"/>
+          </a:p>
+        </p:txBody>
+      </p:sp>
+      <p:sp>
+        <p:nvSpPr>
+          <p:cNvPr id="13" name="Rounded Rectangle 12"/>
+          <p:cNvSpPr/>
+          <p:nvPr/>
+        </p:nvSpPr>
+        <p:spPr>
+          <a:xfrm>
+            <a:off x="713232" y="3538728"/>
+            <a:ext cx="3401568" cy="1691640"/>
+          </a:xfrm>
+          <a:prstGeom prst="roundRect">
+            <a:avLst>
+              <a:gd name="adj" fmla="val 5000"/>
+            </a:avLst>
+          </a:prstGeom>
+          <a:solidFill>
+            <a:srgbClr val="18181F"/>
+          </a:solidFill>
+          <a:ln w="12700">
+            <a:solidFill>
+              <a:srgbClr val="2E2E38"/>
+            </a:solidFill>
+          </a:ln>
+        </p:spPr>
+        <p:style>
+          <a:lnRef idx="1">
+            <a:schemeClr val="accent1"/>
+          </a:lnRef>
+          <a:fillRef idx="3">
+            <a:schemeClr val="accent1"/>
+          </a:fillRef>
+          <a:effectRef idx="2">
+            <a:schemeClr val="accent1"/>
+          </a:effectRef>
+          <a:fontRef idx="minor">
+            <a:schemeClr val="lt1"/>
+          </a:fontRef>
+        </p:style>
+        <p:txBody>
+          <a:bodyPr rtlCol="0" anchor="t" wrap="square" lIns="109728" rIns="109728" tIns="91440" bIns="73152"/>
+          <a:lstStyle/>
+          <a:p>
+            <a:pPr algn="l">
+              <a:lnSpc>
+                <a:spcPct val="110000"/>
+              </a:lnSpc>
+              <a:spcBef>
+                <a:spcPts val="0"/>
+              </a:spcBef>
+              <a:spcAft>
+                <a:spcPts val="600"/>
+              </a:spcAft>
+            </a:pPr>
+            <a:r>
+              <a:rPr sz="1300" b="1">
+                <a:solidFill>
+                  <a:srgbClr val="FFFFFF"/>
+                </a:solidFill>
+                <a:latin typeface="Calibri"/>
+                <a:ea typeface="Calibri"/>
+                <a:cs typeface="Calibri"/>
+              </a:rPr>
+              <a:t>No pre-publish signal</a:t>
+            </a:r>
+          </a:p>
+          <a:p>
+            <a:pPr algn="l">
+              <a:lnSpc>
+                <a:spcPct val="110000"/>
+              </a:lnSpc>
+              <a:spcBef>
+                <a:spcPts val="0"/>
+              </a:spcBef>
+              <a:spcAft>
+                <a:spcPts val="0"/>
+              </a:spcAft>
+            </a:pPr>
+            <a:r>
+              <a:rPr sz="1100" b="0">
+                <a:solidFill>
+                  <a:srgbClr val="A1A1AA"/>
+                </a:solidFill>
+                <a:latin typeface="Calibri"/>
+                <a:ea typeface="Calibri"/>
+                <a:cs typeface="Calibri"/>
+              </a:rPr>
+              <a:t>Teams guess which cohorts will continue listening.</a:t>
+            </a:r>
+          </a:p>
+        </p:txBody>
+      </p:sp>
+      <p:sp>
+        <p:nvSpPr>
+          <p:cNvPr id="14" name="Rectangle 13"/>
+          <p:cNvSpPr/>
+          <p:nvPr/>
+        </p:nvSpPr>
+        <p:spPr>
+          <a:xfrm>
+            <a:off x="4297680" y="3538728"/>
+            <a:ext cx="73152" cy="1691640"/>
           </a:xfrm>
           <a:prstGeom prst="rect">
             <a:avLst/>
           </a:prstGeom>
+          <a:solidFill>
+            <a:srgbClr val="E6194D"/>
+          </a:solidFill>
+          <a:ln>
+            <a:noFill/>
+          </a:ln>
+        </p:spPr>
+        <p:style>
+          <a:lnRef idx="1">
+            <a:schemeClr val="accent1"/>
+          </a:lnRef>
+          <a:fillRef idx="3">
+            <a:schemeClr val="accent1"/>
+          </a:fillRef>
+          <a:effectRef idx="2">
+            <a:schemeClr val="accent1"/>
+          </a:effectRef>
+          <a:fontRef idx="minor">
+            <a:schemeClr val="lt1"/>
+          </a:fontRef>
+        </p:style>
+        <p:txBody>
+          <a:bodyPr rtlCol="0" anchor="ctr"/>
+          <a:lstStyle/>
+          <a:p>
+            <a:pPr algn="ctr"/>
+          </a:p>
+        </p:txBody>
+      </p:sp>
+      <p:sp>
+        <p:nvSpPr>
+          <p:cNvPr id="15" name="Rounded Rectangle 14"/>
+          <p:cNvSpPr/>
+          <p:nvPr/>
+        </p:nvSpPr>
+        <p:spPr>
+          <a:xfrm>
+            <a:off x="4370832" y="3538728"/>
+            <a:ext cx="3401568" cy="1691640"/>
+          </a:xfrm>
+          <a:prstGeom prst="roundRect">
+            <a:avLst>
+              <a:gd name="adj" fmla="val 5000"/>
+            </a:avLst>
+          </a:prstGeom>
+          <a:solidFill>
+            <a:srgbClr val="18181F"/>
+          </a:solidFill>
+          <a:ln w="12700">
+            <a:solidFill>
+              <a:srgbClr val="2E2E38"/>
+            </a:solidFill>
+          </a:ln>
+        </p:spPr>
+        <p:style>
+          <a:lnRef idx="1">
+            <a:schemeClr val="accent1"/>
+          </a:lnRef>
+          <a:fillRef idx="3">
+            <a:schemeClr val="accent1"/>
+          </a:fillRef>
+          <a:effectRef idx="2">
+            <a:schemeClr val="accent1"/>
+          </a:effectRef>
+          <a:fontRef idx="minor">
+            <a:schemeClr val="lt1"/>
+          </a:fontRef>
+        </p:style>
+        <p:txBody>
+          <a:bodyPr rtlCol="0" anchor="t" wrap="square" lIns="109728" rIns="109728" tIns="91440" bIns="73152"/>
+          <a:lstStyle/>
+          <a:p>
+            <a:pPr algn="l">
+              <a:lnSpc>
+                <a:spcPct val="110000"/>
+              </a:lnSpc>
+              <a:spcBef>
+                <a:spcPts val="0"/>
+              </a:spcBef>
+              <a:spcAft>
+                <a:spcPts val="600"/>
+              </a:spcAft>
+            </a:pPr>
+            <a:r>
+              <a:rPr sz="1300" b="1">
+                <a:solidFill>
+                  <a:srgbClr val="FFFFFF"/>
+                </a:solidFill>
+                <a:latin typeface="Calibri"/>
+                <a:ea typeface="Calibri"/>
+                <a:cs typeface="Calibri"/>
+              </a:rPr>
+              <a:t>No closed loop</a:t>
+            </a:r>
+          </a:p>
+          <a:p>
+            <a:pPr algn="l">
+              <a:lnSpc>
+                <a:spcPct val="110000"/>
+              </a:lnSpc>
+              <a:spcBef>
+                <a:spcPts val="0"/>
+              </a:spcBef>
+              <a:spcAft>
+                <a:spcPts val="0"/>
+              </a:spcAft>
+            </a:pPr>
+            <a:r>
+              <a:rPr sz="1100" b="0">
+                <a:solidFill>
+                  <a:srgbClr val="A1A1AA"/>
+                </a:solidFill>
+                <a:latin typeface="Calibri"/>
+                <a:ea typeface="Calibri"/>
+                <a:cs typeface="Calibri"/>
+              </a:rPr>
+              <a:t>Wins on one story don’t systematically improve the next.</a:t>
+            </a:r>
+          </a:p>
+        </p:txBody>
+      </p:sp>
+      <p:sp>
+        <p:nvSpPr>
+          <p:cNvPr id="16" name="Rectangle 15"/>
+          <p:cNvSpPr/>
+          <p:nvPr/>
+        </p:nvSpPr>
+        <p:spPr>
+          <a:xfrm>
+            <a:off x="7955280" y="3538728"/>
+            <a:ext cx="73152" cy="1691640"/>
+          </a:xfrm>
+          <a:prstGeom prst="rect">
+            <a:avLst/>
+          </a:prstGeom>
+          <a:solidFill>
+            <a:srgbClr val="E6194D"/>
+          </a:solidFill>
+          <a:ln>
+            <a:noFill/>
+          </a:ln>
+        </p:spPr>
+        <p:style>
+          <a:lnRef idx="1">
+            <a:schemeClr val="accent1"/>
+          </a:lnRef>
+          <a:fillRef idx="3">
+            <a:schemeClr val="accent1"/>
+          </a:fillRef>
+          <a:effectRef idx="2">
+            <a:schemeClr val="accent1"/>
+          </a:effectRef>
+          <a:fontRef idx="minor">
+            <a:schemeClr val="lt1"/>
+          </a:fontRef>
+        </p:style>
+        <p:txBody>
+          <a:bodyPr rtlCol="0" anchor="ctr"/>
+          <a:lstStyle/>
+          <a:p>
+            <a:pPr algn="ctr"/>
+          </a:p>
+        </p:txBody>
+      </p:sp>
+      <p:sp>
+        <p:nvSpPr>
+          <p:cNvPr id="17" name="Rounded Rectangle 16"/>
+          <p:cNvSpPr/>
+          <p:nvPr/>
+        </p:nvSpPr>
+        <p:spPr>
+          <a:xfrm>
+            <a:off x="8028432" y="3538728"/>
+            <a:ext cx="3401568" cy="1691640"/>
+          </a:xfrm>
+          <a:prstGeom prst="roundRect">
+            <a:avLst>
+              <a:gd name="adj" fmla="val 5000"/>
+            </a:avLst>
+          </a:prstGeom>
+          <a:solidFill>
+            <a:srgbClr val="18181F"/>
+          </a:solidFill>
+          <a:ln w="12700">
+            <a:solidFill>
+              <a:srgbClr val="2E2E38"/>
+            </a:solidFill>
+          </a:ln>
+        </p:spPr>
+        <p:style>
+          <a:lnRef idx="1">
+            <a:schemeClr val="accent1"/>
+          </a:lnRef>
+          <a:fillRef idx="3">
+            <a:schemeClr val="accent1"/>
+          </a:fillRef>
+          <a:effectRef idx="2">
+            <a:schemeClr val="accent1"/>
+          </a:effectRef>
+          <a:fontRef idx="minor">
+            <a:schemeClr val="lt1"/>
+          </a:fontRef>
+        </p:style>
+        <p:txBody>
+          <a:bodyPr rtlCol="0" anchor="t" wrap="square" lIns="109728" rIns="109728" tIns="91440" bIns="73152"/>
+          <a:lstStyle/>
+          <a:p>
+            <a:pPr algn="l">
+              <a:lnSpc>
+                <a:spcPct val="110000"/>
+              </a:lnSpc>
+              <a:spcBef>
+                <a:spcPts val="0"/>
+              </a:spcBef>
+              <a:spcAft>
+                <a:spcPts val="600"/>
+              </a:spcAft>
+            </a:pPr>
+            <a:r>
+              <a:rPr sz="1300" b="1">
+                <a:solidFill>
+                  <a:srgbClr val="FFFFFF"/>
+                </a:solidFill>
+                <a:latin typeface="Calibri"/>
+                <a:ea typeface="Calibri"/>
+                <a:cs typeface="Calibri"/>
+              </a:rPr>
+              <a:t>Tool sprawl</a:t>
+            </a:r>
+          </a:p>
+          <a:p>
+            <a:pPr algn="l">
+              <a:lnSpc>
+                <a:spcPct val="110000"/>
+              </a:lnSpc>
+              <a:spcBef>
+                <a:spcPts val="0"/>
+              </a:spcBef>
+              <a:spcAft>
+                <a:spcPts val="0"/>
+              </a:spcAft>
+            </a:pPr>
+            <a:r>
+              <a:rPr sz="1100" b="0">
+                <a:solidFill>
+                  <a:srgbClr val="A1A1AA"/>
+                </a:solidFill>
+                <a:latin typeface="Calibri"/>
+                <a:ea typeface="Calibri"/>
+                <a:cs typeface="Calibri"/>
+              </a:rPr>
+              <a:t>Briefing, writing, casting, mix, and QA live in five apps.</a:t>
+            </a:r>
+          </a:p>
+        </p:txBody>
+      </p:sp>
+      <p:sp>
+        <p:nvSpPr>
+          <p:cNvPr id="18" name="TextBox 17"/>
+          <p:cNvSpPr txBox="1"/>
+          <p:nvPr/>
+        </p:nvSpPr>
+        <p:spPr>
+          <a:xfrm>
+            <a:off x="640080" y="6473952"/>
+            <a:ext cx="8412480" cy="201168"/>
+          </a:xfrm>
+          <a:prstGeom prst="rect">
+            <a:avLst/>
+          </a:prstGeom>
           <a:noFill/>
         </p:spPr>
         <p:txBody>
           <a:bodyPr wrap="square" anchor="t" lIns="0" rIns="0" tIns="0" bIns="0"/>
           <a:lstStyle/>
           <a:p>
+            <a:pPr algn="l">
+              <a:lnSpc>
+                <a:spcPct val="110000"/>
+              </a:lnSpc>
+              <a:spcBef>
+                <a:spcPts val="0"/>
+              </a:spcBef>
+              <a:spcAft>
+                <a:spcPts val="0"/>
+              </a:spcAft>
+            </a:pPr>
+            <a:r>
+              <a:rPr sz="1000" b="0">
+                <a:solidFill>
+                  <a:srgbClr val="71717A"/>
+                </a:solidFill>
+                <a:latin typeface="Calibri"/>
+                <a:ea typeface="Calibri"/>
+                <a:cs typeface="Calibri"/>
+              </a:rPr>
+              <a:t>Kahani  ·  Zero to One × Pocket FM  ·  IIM Bangalore</a:t>
+            </a:r>
+          </a:p>
+        </p:txBody>
+      </p:sp>
+      <p:sp>
+        <p:nvSpPr>
+          <p:cNvPr id="19" name="TextBox 18"/>
+          <p:cNvSpPr txBox="1"/>
+          <p:nvPr/>
+        </p:nvSpPr>
+        <p:spPr>
+          <a:xfrm>
+            <a:off x="10195560" y="6473952"/>
+            <a:ext cx="1371600" cy="201168"/>
+          </a:xfrm>
+          <a:prstGeom prst="rect">
+            <a:avLst/>
+          </a:prstGeom>
+          <a:noFill/>
+        </p:spPr>
+        <p:txBody>
+          <a:bodyPr wrap="square" anchor="t" lIns="0" rIns="0" tIns="0" bIns="0"/>
+          <a:lstStyle/>
+          <a:p>
             <a:pPr algn="r">
               <a:lnSpc>
-                <a:spcPct val="112000"/>
+                <a:spcPct val="110000"/>
               </a:lnSpc>
               <a:spcBef>
                 <a:spcPts val="0"/>
@@ -7092,8 +6712,8 @@
         </p:nvSpPr>
         <p:spPr>
           <a:xfrm>
-            <a:off x="640080" y="347472"/>
-            <a:ext cx="347472" cy="54864"/>
+            <a:off x="640080" y="329184"/>
+            <a:ext cx="329184" cy="54864"/>
           </a:xfrm>
           <a:prstGeom prst="rect">
             <a:avLst/>
@@ -7135,8 +6755,8 @@
         </p:nvSpPr>
         <p:spPr>
           <a:xfrm>
-            <a:off x="640080" y="475488"/>
-            <a:ext cx="10908792" cy="219456"/>
+            <a:off x="640080" y="457200"/>
+            <a:ext cx="10908792" cy="201168"/>
           </a:xfrm>
           <a:prstGeom prst="rect">
             <a:avLst/>
@@ -7149,7 +6769,7 @@
           <a:p>
             <a:pPr algn="l">
               <a:lnSpc>
-                <a:spcPct val="112000"/>
+                <a:spcPct val="110000"/>
               </a:lnSpc>
               <a:spcBef>
                 <a:spcPts val="0"/>
@@ -7167,7 +6787,7 @@
                 <a:ea typeface="Calibri"/>
                 <a:cs typeface="Calibri"/>
               </a:rPr>
-              <a:t>04  PRODUCT SURFACES</a:t>
+              <a:t>04  HOW IT WORKS</a:t>
             </a:r>
           </a:p>
         </p:txBody>
@@ -7180,8 +6800,8 @@
         </p:nvSpPr>
         <p:spPr>
           <a:xfrm>
-            <a:off x="640080" y="731520"/>
-            <a:ext cx="10908792" cy="365760"/>
+            <a:off x="640080" y="694944"/>
+            <a:ext cx="10908792" cy="347472"/>
           </a:xfrm>
           <a:prstGeom prst="rect">
             <a:avLst/>
@@ -7194,7 +6814,7 @@
           <a:p>
             <a:pPr algn="l">
               <a:lnSpc>
-                <a:spcPct val="112000"/>
+                <a:spcPct val="110000"/>
               </a:lnSpc>
               <a:spcBef>
                 <a:spcPts val="0"/>
@@ -7212,7 +6832,7 @@
                 <a:ea typeface="Calibri"/>
                 <a:cs typeface="Calibri"/>
               </a:rPr>
-              <a:t>End-to-end loop in four screens</a:t>
+              <a:t>One orchestrated pipeline — agents specialize, humans gate quality cliffs</a:t>
             </a:r>
           </a:p>
         </p:txBody>
@@ -7225,7 +6845,7 @@
         </p:nvSpPr>
         <p:spPr>
           <a:xfrm>
-            <a:off x="640080" y="1152144"/>
+            <a:off x="640080" y="1097280"/>
             <a:ext cx="10908792" cy="365760"/>
           </a:xfrm>
           <a:prstGeom prst="rect">
@@ -7239,17 +6859,17 @@
           <a:p>
             <a:pPr algn="l">
               <a:lnSpc>
-                <a:spcPct val="112000"/>
-              </a:lnSpc>
-              <a:spcBef>
-                <a:spcPts val="0"/>
-              </a:spcBef>
-              <a:spcAft>
-                <a:spcPts val="0"/>
-              </a:spcAft>
-            </a:pPr>
-            <a:r>
-              <a:rPr sz="1300" b="0">
+                <a:spcPct val="110000"/>
+              </a:lnSpc>
+              <a:spcBef>
+                <a:spcPts val="0"/>
+              </a:spcBef>
+              <a:spcAft>
+                <a:spcPts val="0"/>
+              </a:spcAft>
+            </a:pPr>
+            <a:r>
+              <a:rPr sz="1200" b="0">
                 <a:solidFill>
                   <a:srgbClr val="A1A1AA"/>
                 </a:solidFill>
@@ -7257,7 +6877,7 @@
                 <a:ea typeface="Calibri"/>
                 <a:cs typeface="Calibri"/>
               </a:rPr>
-              <a:t>Replace placeholders in docs/pitch/assets/ before final presentation.</a:t>
+              <a:t>Auto-run generation. Never auto-publish.</a:t>
             </a:r>
           </a:p>
         </p:txBody>
@@ -7270,8 +6890,8 @@
         </p:nvSpPr>
         <p:spPr>
           <a:xfrm>
-            <a:off x="640080" y="1691640"/>
-            <a:ext cx="5349240" cy="310896"/>
+            <a:off x="640080" y="1664208"/>
+            <a:ext cx="1234440" cy="1051560"/>
           </a:xfrm>
           <a:prstGeom prst="roundRect">
             <a:avLst>
@@ -7302,12 +6922,36 @@
           </a:fontRef>
         </p:style>
         <p:txBody>
-          <a:bodyPr rtlCol="0" anchor="ctr" wrap="square" lIns="109728" rIns="128016" tIns="18288" bIns="18288"/>
-          <a:lstStyle/>
-          <a:p>
-            <a:pPr algn="l">
-              <a:lnSpc>
-                <a:spcPct val="112000"/>
+          <a:bodyPr rtlCol="0" anchor="ctr" wrap="square" lIns="128016" rIns="109728" tIns="91440" bIns="73152"/>
+          <a:lstStyle/>
+          <a:p>
+            <a:pPr algn="ctr">
+              <a:lnSpc>
+                <a:spcPct val="110000"/>
+              </a:lnSpc>
+              <a:spcBef>
+                <a:spcPts val="0"/>
+              </a:spcBef>
+              <a:spcAft>
+                <a:spcPts val="200"/>
+              </a:spcAft>
+            </a:pPr>
+            <a:r>
+              <a:rPr sz="1200" b="1">
+                <a:solidFill>
+                  <a:srgbClr val="E6194D"/>
+                </a:solidFill>
+                <a:latin typeface="Calibri"/>
+                <a:ea typeface="Calibri"/>
+                <a:cs typeface="Calibri"/>
+              </a:rPr>
+              <a:t>1</a:t>
+            </a:r>
+          </a:p>
+          <a:p>
+            <a:pPr algn="ctr">
+              <a:lnSpc>
+                <a:spcPct val="110000"/>
               </a:lnSpc>
               <a:spcBef>
                 <a:spcPts val="0"/>
@@ -7325,7 +6969,7 @@
                 <a:ea typeface="Calibri"/>
                 <a:cs typeface="Calibri"/>
               </a:rPr>
-              <a:t>Projects</a:t>
+              <a:t>Discover</a:t>
             </a:r>
           </a:p>
         </p:txBody>
@@ -7338,79 +6982,8 @@
         </p:nvSpPr>
         <p:spPr>
           <a:xfrm>
-            <a:off x="640080" y="2057400"/>
-            <a:ext cx="5349240" cy="1600200"/>
-          </a:xfrm>
-          <a:prstGeom prst="roundRect">
-            <a:avLst>
-              <a:gd name="adj" fmla="val 5000"/>
-            </a:avLst>
-          </a:prstGeom>
-          <a:solidFill>
-            <a:srgbClr val="22222C"/>
-          </a:solidFill>
-          <a:ln w="12700">
-            <a:solidFill>
-              <a:srgbClr val="2E2E38"/>
-            </a:solidFill>
-          </a:ln>
-        </p:spPr>
-        <p:style>
-          <a:lnRef idx="1">
-            <a:schemeClr val="accent1"/>
-          </a:lnRef>
-          <a:fillRef idx="3">
-            <a:schemeClr val="accent1"/>
-          </a:fillRef>
-          <a:effectRef idx="2">
-            <a:schemeClr val="accent1"/>
-          </a:effectRef>
-          <a:fontRef idx="minor">
-            <a:schemeClr val="lt1"/>
-          </a:fontRef>
-        </p:style>
-        <p:txBody>
-          <a:bodyPr rtlCol="0" anchor="ctr"/>
-          <a:lstStyle/>
-          <a:p>
-            <a:pPr algn="ctr"/>
-          </a:p>
-        </p:txBody>
-      </p:sp>
-      <p:pic>
-        <p:nvPicPr>
-          <p:cNvPr id="8" name="Picture 7" descr="03-projects-home.png"/>
-          <p:cNvPicPr>
-            <a:picLocks noChangeAspect="1"/>
-          </p:cNvPicPr>
-          <p:nvPr/>
-        </p:nvPicPr>
-        <p:blipFill>
-          <a:blip r:embed="rId2"/>
-          <a:stretch>
-            <a:fillRect/>
-          </a:stretch>
-        </p:blipFill>
-        <p:spPr>
-          <a:xfrm>
-            <a:off x="2022348" y="2130552"/>
-            <a:ext cx="2584704" cy="1453896"/>
-          </a:xfrm>
-          <a:prstGeom prst="rect">
-            <a:avLst/>
-          </a:prstGeom>
-        </p:spPr>
-      </p:pic>
-      <p:sp>
-        <p:nvSpPr>
-          <p:cNvPr id="9" name="Rounded Rectangle 8"/>
-          <p:cNvSpPr/>
-          <p:nvPr/>
-        </p:nvSpPr>
-        <p:spPr>
-          <a:xfrm>
-            <a:off x="6190488" y="1691640"/>
-            <a:ext cx="5349240" cy="310896"/>
+            <a:off x="1984248" y="1664208"/>
+            <a:ext cx="1234440" cy="1051560"/>
           </a:xfrm>
           <a:prstGeom prst="roundRect">
             <a:avLst>
@@ -7441,12 +7014,36 @@
           </a:fontRef>
         </p:style>
         <p:txBody>
-          <a:bodyPr rtlCol="0" anchor="ctr" wrap="square" lIns="109728" rIns="128016" tIns="18288" bIns="18288"/>
-          <a:lstStyle/>
-          <a:p>
-            <a:pPr algn="l">
-              <a:lnSpc>
-                <a:spcPct val="112000"/>
+          <a:bodyPr rtlCol="0" anchor="ctr" wrap="square" lIns="128016" rIns="109728" tIns="91440" bIns="73152"/>
+          <a:lstStyle/>
+          <a:p>
+            <a:pPr algn="ctr">
+              <a:lnSpc>
+                <a:spcPct val="110000"/>
+              </a:lnSpc>
+              <a:spcBef>
+                <a:spcPts val="0"/>
+              </a:spcBef>
+              <a:spcAft>
+                <a:spcPts val="200"/>
+              </a:spcAft>
+            </a:pPr>
+            <a:r>
+              <a:rPr sz="1200" b="1">
+                <a:solidFill>
+                  <a:srgbClr val="E6194D"/>
+                </a:solidFill>
+                <a:latin typeface="Calibri"/>
+                <a:ea typeface="Calibri"/>
+                <a:cs typeface="Calibri"/>
+              </a:rPr>
+              <a:t>2</a:t>
+            </a:r>
+          </a:p>
+          <a:p>
+            <a:pPr algn="ctr">
+              <a:lnSpc>
+                <a:spcPct val="110000"/>
               </a:lnSpc>
               <a:spcBef>
                 <a:spcPts val="0"/>
@@ -7464,92 +7061,21 @@
                 <a:ea typeface="Calibri"/>
                 <a:cs typeface="Calibri"/>
               </a:rPr>
-              <a:t>Timeline editor</a:t>
-            </a:r>
-          </a:p>
-        </p:txBody>
-      </p:sp>
-      <p:sp>
-        <p:nvSpPr>
-          <p:cNvPr id="10" name="Rounded Rectangle 9"/>
+              <a:t>Research</a:t>
+            </a:r>
+          </a:p>
+        </p:txBody>
+      </p:sp>
+      <p:sp>
+        <p:nvSpPr>
+          <p:cNvPr id="8" name="Rounded Rectangle 7"/>
           <p:cNvSpPr/>
           <p:nvPr/>
         </p:nvSpPr>
         <p:spPr>
           <a:xfrm>
-            <a:off x="6190488" y="2057400"/>
-            <a:ext cx="5349240" cy="1600200"/>
-          </a:xfrm>
-          <a:prstGeom prst="roundRect">
-            <a:avLst>
-              <a:gd name="adj" fmla="val 5000"/>
-            </a:avLst>
-          </a:prstGeom>
-          <a:solidFill>
-            <a:srgbClr val="22222C"/>
-          </a:solidFill>
-          <a:ln w="12700">
-            <a:solidFill>
-              <a:srgbClr val="2E2E38"/>
-            </a:solidFill>
-          </a:ln>
-        </p:spPr>
-        <p:style>
-          <a:lnRef idx="1">
-            <a:schemeClr val="accent1"/>
-          </a:lnRef>
-          <a:fillRef idx="3">
-            <a:schemeClr val="accent1"/>
-          </a:fillRef>
-          <a:effectRef idx="2">
-            <a:schemeClr val="accent1"/>
-          </a:effectRef>
-          <a:fontRef idx="minor">
-            <a:schemeClr val="lt1"/>
-          </a:fontRef>
-        </p:style>
-        <p:txBody>
-          <a:bodyPr rtlCol="0" anchor="ctr"/>
-          <a:lstStyle/>
-          <a:p>
-            <a:pPr algn="ctr"/>
-          </a:p>
-        </p:txBody>
-      </p:sp>
-      <p:pic>
-        <p:nvPicPr>
-          <p:cNvPr id="11" name="Picture 10" descr="04-timeline-editor.png"/>
-          <p:cNvPicPr>
-            <a:picLocks noChangeAspect="1"/>
-          </p:cNvPicPr>
-          <p:nvPr/>
-        </p:nvPicPr>
-        <p:blipFill>
-          <a:blip r:embed="rId3"/>
-          <a:stretch>
-            <a:fillRect/>
-          </a:stretch>
-        </p:blipFill>
-        <p:spPr>
-          <a:xfrm>
-            <a:off x="7572756" y="2130552"/>
-            <a:ext cx="2584704" cy="1453896"/>
-          </a:xfrm>
-          <a:prstGeom prst="rect">
-            <a:avLst/>
-          </a:prstGeom>
-        </p:spPr>
-      </p:pic>
-      <p:sp>
-        <p:nvSpPr>
-          <p:cNvPr id="12" name="Rounded Rectangle 11"/>
-          <p:cNvSpPr/>
-          <p:nvPr/>
-        </p:nvSpPr>
-        <p:spPr>
-          <a:xfrm>
-            <a:off x="640080" y="3858768"/>
-            <a:ext cx="5349240" cy="310896"/>
+            <a:off x="3328416" y="1664208"/>
+            <a:ext cx="1234440" cy="1051560"/>
           </a:xfrm>
           <a:prstGeom prst="roundRect">
             <a:avLst>
@@ -7580,12 +7106,36 @@
           </a:fontRef>
         </p:style>
         <p:txBody>
-          <a:bodyPr rtlCol="0" anchor="ctr" wrap="square" lIns="109728" rIns="128016" tIns="18288" bIns="18288"/>
-          <a:lstStyle/>
-          <a:p>
-            <a:pPr algn="l">
-              <a:lnSpc>
-                <a:spcPct val="112000"/>
+          <a:bodyPr rtlCol="0" anchor="ctr" wrap="square" lIns="128016" rIns="109728" tIns="91440" bIns="73152"/>
+          <a:lstStyle/>
+          <a:p>
+            <a:pPr algn="ctr">
+              <a:lnSpc>
+                <a:spcPct val="110000"/>
+              </a:lnSpc>
+              <a:spcBef>
+                <a:spcPts val="0"/>
+              </a:spcBef>
+              <a:spcAft>
+                <a:spcPts val="200"/>
+              </a:spcAft>
+            </a:pPr>
+            <a:r>
+              <a:rPr sz="1200" b="1">
+                <a:solidFill>
+                  <a:srgbClr val="E6194D"/>
+                </a:solidFill>
+                <a:latin typeface="Calibri"/>
+                <a:ea typeface="Calibri"/>
+                <a:cs typeface="Calibri"/>
+              </a:rPr>
+              <a:t>3</a:t>
+            </a:r>
+          </a:p>
+          <a:p>
+            <a:pPr algn="ctr">
+              <a:lnSpc>
+                <a:spcPct val="110000"/>
               </a:lnSpc>
               <a:spcBef>
                 <a:spcPts val="0"/>
@@ -7603,92 +7153,21 @@
                 <a:ea typeface="Calibri"/>
                 <a:cs typeface="Calibri"/>
               </a:rPr>
-              <a:t>Audience Sim</a:t>
-            </a:r>
-          </a:p>
-        </p:txBody>
-      </p:sp>
-      <p:sp>
-        <p:nvSpPr>
-          <p:cNvPr id="13" name="Rounded Rectangle 12"/>
+              <a:t>Script</a:t>
+            </a:r>
+          </a:p>
+        </p:txBody>
+      </p:sp>
+      <p:sp>
+        <p:nvSpPr>
+          <p:cNvPr id="9" name="Rounded Rectangle 8"/>
           <p:cNvSpPr/>
           <p:nvPr/>
         </p:nvSpPr>
         <p:spPr>
           <a:xfrm>
-            <a:off x="640080" y="4224528"/>
-            <a:ext cx="5349240" cy="1600200"/>
-          </a:xfrm>
-          <a:prstGeom prst="roundRect">
-            <a:avLst>
-              <a:gd name="adj" fmla="val 5000"/>
-            </a:avLst>
-          </a:prstGeom>
-          <a:solidFill>
-            <a:srgbClr val="22222C"/>
-          </a:solidFill>
-          <a:ln w="12700">
-            <a:solidFill>
-              <a:srgbClr val="2E2E38"/>
-            </a:solidFill>
-          </a:ln>
-        </p:spPr>
-        <p:style>
-          <a:lnRef idx="1">
-            <a:schemeClr val="accent1"/>
-          </a:lnRef>
-          <a:fillRef idx="3">
-            <a:schemeClr val="accent1"/>
-          </a:fillRef>
-          <a:effectRef idx="2">
-            <a:schemeClr val="accent1"/>
-          </a:effectRef>
-          <a:fontRef idx="minor">
-            <a:schemeClr val="lt1"/>
-          </a:fontRef>
-        </p:style>
-        <p:txBody>
-          <a:bodyPr rtlCol="0" anchor="ctr"/>
-          <a:lstStyle/>
-          <a:p>
-            <a:pPr algn="ctr"/>
-          </a:p>
-        </p:txBody>
-      </p:sp>
-      <p:pic>
-        <p:nvPicPr>
-          <p:cNvPr id="14" name="Picture 13" descr="05-audience-sim.png"/>
-          <p:cNvPicPr>
-            <a:picLocks noChangeAspect="1"/>
-          </p:cNvPicPr>
-          <p:nvPr/>
-        </p:nvPicPr>
-        <p:blipFill>
-          <a:blip r:embed="rId4"/>
-          <a:stretch>
-            <a:fillRect/>
-          </a:stretch>
-        </p:blipFill>
-        <p:spPr>
-          <a:xfrm>
-            <a:off x="2022348" y="4297680"/>
-            <a:ext cx="2584704" cy="1453896"/>
-          </a:xfrm>
-          <a:prstGeom prst="rect">
-            <a:avLst/>
-          </a:prstGeom>
-        </p:spPr>
-      </p:pic>
-      <p:sp>
-        <p:nvSpPr>
-          <p:cNvPr id="15" name="Rounded Rectangle 14"/>
-          <p:cNvSpPr/>
-          <p:nvPr/>
-        </p:nvSpPr>
-        <p:spPr>
-          <a:xfrm>
-            <a:off x="6190488" y="3858768"/>
-            <a:ext cx="5349240" cy="310896"/>
+            <a:off x="4672584" y="1664208"/>
+            <a:ext cx="1234440" cy="1051560"/>
           </a:xfrm>
           <a:prstGeom prst="roundRect">
             <a:avLst>
@@ -7719,12 +7198,36 @@
           </a:fontRef>
         </p:style>
         <p:txBody>
-          <a:bodyPr rtlCol="0" anchor="ctr" wrap="square" lIns="109728" rIns="128016" tIns="18288" bIns="18288"/>
-          <a:lstStyle/>
-          <a:p>
-            <a:pPr algn="l">
-              <a:lnSpc>
-                <a:spcPct val="112000"/>
+          <a:bodyPr rtlCol="0" anchor="ctr" wrap="square" lIns="128016" rIns="109728" tIns="91440" bIns="73152"/>
+          <a:lstStyle/>
+          <a:p>
+            <a:pPr algn="ctr">
+              <a:lnSpc>
+                <a:spcPct val="110000"/>
+              </a:lnSpc>
+              <a:spcBef>
+                <a:spcPts val="0"/>
+              </a:spcBef>
+              <a:spcAft>
+                <a:spcPts val="200"/>
+              </a:spcAft>
+            </a:pPr>
+            <a:r>
+              <a:rPr sz="1200" b="1">
+                <a:solidFill>
+                  <a:srgbClr val="E6194D"/>
+                </a:solidFill>
+                <a:latin typeface="Calibri"/>
+                <a:ea typeface="Calibri"/>
+                <a:cs typeface="Calibri"/>
+              </a:rPr>
+              <a:t>4</a:t>
+            </a:r>
+          </a:p>
+          <a:p>
+            <a:pPr algn="ctr">
+              <a:lnSpc>
+                <a:spcPct val="110000"/>
               </a:lnSpc>
               <a:spcBef>
                 <a:spcPts val="0"/>
@@ -7742,21 +7245,21 @@
                 <a:ea typeface="Calibri"/>
                 <a:cs typeface="Calibri"/>
               </a:rPr>
-              <a:t>Visuals</a:t>
-            </a:r>
-          </a:p>
-        </p:txBody>
-      </p:sp>
-      <p:sp>
-        <p:nvSpPr>
-          <p:cNvPr id="16" name="Rounded Rectangle 15"/>
+              <a:t>Narrate</a:t>
+            </a:r>
+          </a:p>
+        </p:txBody>
+      </p:sp>
+      <p:sp>
+        <p:nvSpPr>
+          <p:cNvPr id="10" name="Rounded Rectangle 9"/>
           <p:cNvSpPr/>
           <p:nvPr/>
         </p:nvSpPr>
         <p:spPr>
           <a:xfrm>
-            <a:off x="6190488" y="4224528"/>
-            <a:ext cx="5349240" cy="1600200"/>
+            <a:off x="6016752" y="1664208"/>
+            <a:ext cx="1234440" cy="1051560"/>
           </a:xfrm>
           <a:prstGeom prst="roundRect">
             <a:avLst>
@@ -7764,7 +7267,7 @@
             </a:avLst>
           </a:prstGeom>
           <a:solidFill>
-            <a:srgbClr val="22222C"/>
+            <a:srgbClr val="18181F"/>
           </a:solidFill>
           <a:ln w="12700">
             <a:solidFill>
@@ -7787,47 +7290,757 @@
           </a:fontRef>
         </p:style>
         <p:txBody>
-          <a:bodyPr rtlCol="0" anchor="ctr"/>
-          <a:lstStyle/>
-          <a:p>
-            <a:pPr algn="ctr"/>
-          </a:p>
-        </p:txBody>
-      </p:sp>
-      <p:pic>
-        <p:nvPicPr>
-          <p:cNvPr id="17" name="Picture 16" descr="06-visuals.png"/>
-          <p:cNvPicPr>
-            <a:picLocks noChangeAspect="1"/>
-          </p:cNvPicPr>
-          <p:nvPr/>
-        </p:nvPicPr>
-        <p:blipFill>
-          <a:blip r:embed="rId5"/>
-          <a:stretch>
-            <a:fillRect/>
-          </a:stretch>
-        </p:blipFill>
-        <p:spPr>
-          <a:xfrm>
-            <a:off x="7572756" y="4297680"/>
-            <a:ext cx="2584704" cy="1453896"/>
+          <a:bodyPr rtlCol="0" anchor="ctr" wrap="square" lIns="128016" rIns="109728" tIns="91440" bIns="73152"/>
+          <a:lstStyle/>
+          <a:p>
+            <a:pPr algn="ctr">
+              <a:lnSpc>
+                <a:spcPct val="110000"/>
+              </a:lnSpc>
+              <a:spcBef>
+                <a:spcPts val="0"/>
+              </a:spcBef>
+              <a:spcAft>
+                <a:spcPts val="200"/>
+              </a:spcAft>
+            </a:pPr>
+            <a:r>
+              <a:rPr sz="1200" b="1">
+                <a:solidFill>
+                  <a:srgbClr val="E6194D"/>
+                </a:solidFill>
+                <a:latin typeface="Calibri"/>
+                <a:ea typeface="Calibri"/>
+                <a:cs typeface="Calibri"/>
+              </a:rPr>
+              <a:t>5</a:t>
+            </a:r>
+          </a:p>
+          <a:p>
+            <a:pPr algn="ctr">
+              <a:lnSpc>
+                <a:spcPct val="110000"/>
+              </a:lnSpc>
+              <a:spcBef>
+                <a:spcPts val="0"/>
+              </a:spcBef>
+              <a:spcAft>
+                <a:spcPts val="0"/>
+              </a:spcAft>
+            </a:pPr>
+            <a:r>
+              <a:rPr sz="1100" b="1">
+                <a:solidFill>
+                  <a:srgbClr val="FFFFFF"/>
+                </a:solidFill>
+                <a:latin typeface="Calibri"/>
+                <a:ea typeface="Calibri"/>
+                <a:cs typeface="Calibri"/>
+              </a:rPr>
+              <a:t>Voice</a:t>
+            </a:r>
+          </a:p>
+        </p:txBody>
+      </p:sp>
+      <p:sp>
+        <p:nvSpPr>
+          <p:cNvPr id="11" name="Rounded Rectangle 10"/>
+          <p:cNvSpPr/>
+          <p:nvPr/>
+        </p:nvSpPr>
+        <p:spPr>
+          <a:xfrm>
+            <a:off x="7360920" y="1664208"/>
+            <a:ext cx="1234440" cy="1051560"/>
+          </a:xfrm>
+          <a:prstGeom prst="roundRect">
+            <a:avLst>
+              <a:gd name="adj" fmla="val 5000"/>
+            </a:avLst>
+          </a:prstGeom>
+          <a:solidFill>
+            <a:srgbClr val="18181F"/>
+          </a:solidFill>
+          <a:ln w="12700">
+            <a:solidFill>
+              <a:srgbClr val="2E2E38"/>
+            </a:solidFill>
+          </a:ln>
+        </p:spPr>
+        <p:style>
+          <a:lnRef idx="1">
+            <a:schemeClr val="accent1"/>
+          </a:lnRef>
+          <a:fillRef idx="3">
+            <a:schemeClr val="accent1"/>
+          </a:fillRef>
+          <a:effectRef idx="2">
+            <a:schemeClr val="accent1"/>
+          </a:effectRef>
+          <a:fontRef idx="minor">
+            <a:schemeClr val="lt1"/>
+          </a:fontRef>
+        </p:style>
+        <p:txBody>
+          <a:bodyPr rtlCol="0" anchor="ctr" wrap="square" lIns="128016" rIns="109728" tIns="91440" bIns="73152"/>
+          <a:lstStyle/>
+          <a:p>
+            <a:pPr algn="ctr">
+              <a:lnSpc>
+                <a:spcPct val="110000"/>
+              </a:lnSpc>
+              <a:spcBef>
+                <a:spcPts val="0"/>
+              </a:spcBef>
+              <a:spcAft>
+                <a:spcPts val="200"/>
+              </a:spcAft>
+            </a:pPr>
+            <a:r>
+              <a:rPr sz="1200" b="1">
+                <a:solidFill>
+                  <a:srgbClr val="E6194D"/>
+                </a:solidFill>
+                <a:latin typeface="Calibri"/>
+                <a:ea typeface="Calibri"/>
+                <a:cs typeface="Calibri"/>
+              </a:rPr>
+              <a:t>6</a:t>
+            </a:r>
+          </a:p>
+          <a:p>
+            <a:pPr algn="ctr">
+              <a:lnSpc>
+                <a:spcPct val="110000"/>
+              </a:lnSpc>
+              <a:spcBef>
+                <a:spcPts val="0"/>
+              </a:spcBef>
+              <a:spcAft>
+                <a:spcPts val="0"/>
+              </a:spcAft>
+            </a:pPr>
+            <a:r>
+              <a:rPr sz="1100" b="1">
+                <a:solidFill>
+                  <a:srgbClr val="FFFFFF"/>
+                </a:solidFill>
+                <a:latin typeface="Calibri"/>
+                <a:ea typeface="Calibri"/>
+                <a:cs typeface="Calibri"/>
+              </a:rPr>
+              <a:t>Visuals</a:t>
+            </a:r>
+          </a:p>
+        </p:txBody>
+      </p:sp>
+      <p:sp>
+        <p:nvSpPr>
+          <p:cNvPr id="12" name="Rounded Rectangle 11"/>
+          <p:cNvSpPr/>
+          <p:nvPr/>
+        </p:nvSpPr>
+        <p:spPr>
+          <a:xfrm>
+            <a:off x="8705088" y="1664208"/>
+            <a:ext cx="1234440" cy="1051560"/>
+          </a:xfrm>
+          <a:prstGeom prst="roundRect">
+            <a:avLst>
+              <a:gd name="adj" fmla="val 5000"/>
+            </a:avLst>
+          </a:prstGeom>
+          <a:solidFill>
+            <a:srgbClr val="18181F"/>
+          </a:solidFill>
+          <a:ln w="12700">
+            <a:solidFill>
+              <a:srgbClr val="2E2E38"/>
+            </a:solidFill>
+          </a:ln>
+        </p:spPr>
+        <p:style>
+          <a:lnRef idx="1">
+            <a:schemeClr val="accent1"/>
+          </a:lnRef>
+          <a:fillRef idx="3">
+            <a:schemeClr val="accent1"/>
+          </a:fillRef>
+          <a:effectRef idx="2">
+            <a:schemeClr val="accent1"/>
+          </a:effectRef>
+          <a:fontRef idx="minor">
+            <a:schemeClr val="lt1"/>
+          </a:fontRef>
+        </p:style>
+        <p:txBody>
+          <a:bodyPr rtlCol="0" anchor="ctr" wrap="square" lIns="128016" rIns="109728" tIns="91440" bIns="73152"/>
+          <a:lstStyle/>
+          <a:p>
+            <a:pPr algn="ctr">
+              <a:lnSpc>
+                <a:spcPct val="110000"/>
+              </a:lnSpc>
+              <a:spcBef>
+                <a:spcPts val="0"/>
+              </a:spcBef>
+              <a:spcAft>
+                <a:spcPts val="200"/>
+              </a:spcAft>
+            </a:pPr>
+            <a:r>
+              <a:rPr sz="1200" b="1">
+                <a:solidFill>
+                  <a:srgbClr val="E6194D"/>
+                </a:solidFill>
+                <a:latin typeface="Calibri"/>
+                <a:ea typeface="Calibri"/>
+                <a:cs typeface="Calibri"/>
+              </a:rPr>
+              <a:t>7</a:t>
+            </a:r>
+          </a:p>
+          <a:p>
+            <a:pPr algn="ctr">
+              <a:lnSpc>
+                <a:spcPct val="110000"/>
+              </a:lnSpc>
+              <a:spcBef>
+                <a:spcPts val="0"/>
+              </a:spcBef>
+              <a:spcAft>
+                <a:spcPts val="0"/>
+              </a:spcAft>
+            </a:pPr>
+            <a:r>
+              <a:rPr sz="1100" b="1">
+                <a:solidFill>
+                  <a:srgbClr val="FFFFFF"/>
+                </a:solidFill>
+                <a:latin typeface="Calibri"/>
+                <a:ea typeface="Calibri"/>
+                <a:cs typeface="Calibri"/>
+              </a:rPr>
+              <a:t>Edit</a:t>
+            </a:r>
+          </a:p>
+        </p:txBody>
+      </p:sp>
+      <p:sp>
+        <p:nvSpPr>
+          <p:cNvPr id="13" name="Rounded Rectangle 12"/>
+          <p:cNvSpPr/>
+          <p:nvPr/>
+        </p:nvSpPr>
+        <p:spPr>
+          <a:xfrm>
+            <a:off x="10049256" y="1664208"/>
+            <a:ext cx="1234440" cy="1051560"/>
+          </a:xfrm>
+          <a:prstGeom prst="roundRect">
+            <a:avLst>
+              <a:gd name="adj" fmla="val 5000"/>
+            </a:avLst>
+          </a:prstGeom>
+          <a:solidFill>
+            <a:srgbClr val="18181F"/>
+          </a:solidFill>
+          <a:ln w="12700">
+            <a:solidFill>
+              <a:srgbClr val="2E2E38"/>
+            </a:solidFill>
+          </a:ln>
+        </p:spPr>
+        <p:style>
+          <a:lnRef idx="1">
+            <a:schemeClr val="accent1"/>
+          </a:lnRef>
+          <a:fillRef idx="3">
+            <a:schemeClr val="accent1"/>
+          </a:fillRef>
+          <a:effectRef idx="2">
+            <a:schemeClr val="accent1"/>
+          </a:effectRef>
+          <a:fontRef idx="minor">
+            <a:schemeClr val="lt1"/>
+          </a:fontRef>
+        </p:style>
+        <p:txBody>
+          <a:bodyPr rtlCol="0" anchor="ctr" wrap="square" lIns="128016" rIns="109728" tIns="91440" bIns="73152"/>
+          <a:lstStyle/>
+          <a:p>
+            <a:pPr algn="ctr">
+              <a:lnSpc>
+                <a:spcPct val="110000"/>
+              </a:lnSpc>
+              <a:spcBef>
+                <a:spcPts val="0"/>
+              </a:spcBef>
+              <a:spcAft>
+                <a:spcPts val="200"/>
+              </a:spcAft>
+            </a:pPr>
+            <a:r>
+              <a:rPr sz="1200" b="1">
+                <a:solidFill>
+                  <a:srgbClr val="E6194D"/>
+                </a:solidFill>
+                <a:latin typeface="Calibri"/>
+                <a:ea typeface="Calibri"/>
+                <a:cs typeface="Calibri"/>
+              </a:rPr>
+              <a:t>8</a:t>
+            </a:r>
+          </a:p>
+          <a:p>
+            <a:pPr algn="ctr">
+              <a:lnSpc>
+                <a:spcPct val="110000"/>
+              </a:lnSpc>
+              <a:spcBef>
+                <a:spcPts val="0"/>
+              </a:spcBef>
+              <a:spcAft>
+                <a:spcPts val="0"/>
+              </a:spcAft>
+            </a:pPr>
+            <a:r>
+              <a:rPr sz="1100" b="1">
+                <a:solidFill>
+                  <a:srgbClr val="FFFFFF"/>
+                </a:solidFill>
+                <a:latin typeface="Calibri"/>
+                <a:ea typeface="Calibri"/>
+                <a:cs typeface="Calibri"/>
+              </a:rPr>
+              <a:t>Simulate</a:t>
+            </a:r>
+          </a:p>
+        </p:txBody>
+      </p:sp>
+      <p:sp>
+        <p:nvSpPr>
+          <p:cNvPr id="14" name="Rounded Rectangle 13"/>
+          <p:cNvSpPr/>
+          <p:nvPr/>
+        </p:nvSpPr>
+        <p:spPr>
+          <a:xfrm>
+            <a:off x="640080" y="2944368"/>
+            <a:ext cx="2560320" cy="2697480"/>
+          </a:xfrm>
+          <a:prstGeom prst="roundRect">
+            <a:avLst>
+              <a:gd name="adj" fmla="val 5000"/>
+            </a:avLst>
+          </a:prstGeom>
+          <a:solidFill>
+            <a:srgbClr val="18181F"/>
+          </a:solidFill>
+          <a:ln w="12700">
+            <a:solidFill>
+              <a:srgbClr val="2E2E38"/>
+            </a:solidFill>
+          </a:ln>
+        </p:spPr>
+        <p:style>
+          <a:lnRef idx="1">
+            <a:schemeClr val="accent1"/>
+          </a:lnRef>
+          <a:fillRef idx="3">
+            <a:schemeClr val="accent1"/>
+          </a:fillRef>
+          <a:effectRef idx="2">
+            <a:schemeClr val="accent1"/>
+          </a:effectRef>
+          <a:fontRef idx="minor">
+            <a:schemeClr val="lt1"/>
+          </a:fontRef>
+        </p:style>
+        <p:txBody>
+          <a:bodyPr rtlCol="0" anchor="t" wrap="square" lIns="128016" rIns="109728" tIns="91440" bIns="73152"/>
+          <a:lstStyle/>
+          <a:p>
+            <a:pPr algn="l">
+              <a:lnSpc>
+                <a:spcPct val="110000"/>
+              </a:lnSpc>
+              <a:spcBef>
+                <a:spcPts val="0"/>
+              </a:spcBef>
+              <a:spcAft>
+                <a:spcPts val="800"/>
+              </a:spcAft>
+            </a:pPr>
+            <a:r>
+              <a:rPr sz="1100" b="1">
+                <a:solidFill>
+                  <a:srgbClr val="E6194D"/>
+                </a:solidFill>
+                <a:latin typeface="Calibri"/>
+                <a:ea typeface="Calibri"/>
+                <a:cs typeface="Calibri"/>
+              </a:rPr>
+              <a:t>GROUND</a:t>
+            </a:r>
+          </a:p>
+          <a:p>
+            <a:pPr algn="l">
+              <a:lnSpc>
+                <a:spcPct val="110000"/>
+              </a:lnSpc>
+              <a:spcBef>
+                <a:spcPts val="0"/>
+              </a:spcBef>
+              <a:spcAft>
+                <a:spcPts val="0"/>
+              </a:spcAft>
+            </a:pPr>
+            <a:r>
+              <a:rPr sz="1200" b="0">
+                <a:solidFill>
+                  <a:srgbClr val="FFFFFF"/>
+                </a:solidFill>
+                <a:latin typeface="Calibri"/>
+                <a:ea typeface="Calibri"/>
+                <a:cs typeface="Calibri"/>
+              </a:rPr>
+              <a:t>Attachments → Databricks AI Search. Cast &amp; templates → Vector Search. Optional Tavily crawl for fresh hooks.</a:t>
+            </a:r>
+          </a:p>
+        </p:txBody>
+      </p:sp>
+      <p:sp>
+        <p:nvSpPr>
+          <p:cNvPr id="15" name="Rounded Rectangle 14"/>
+          <p:cNvSpPr/>
+          <p:nvPr/>
+        </p:nvSpPr>
+        <p:spPr>
+          <a:xfrm>
+            <a:off x="3383280" y="2944368"/>
+            <a:ext cx="2560320" cy="2697480"/>
+          </a:xfrm>
+          <a:prstGeom prst="roundRect">
+            <a:avLst>
+              <a:gd name="adj" fmla="val 5000"/>
+            </a:avLst>
+          </a:prstGeom>
+          <a:solidFill>
+            <a:srgbClr val="18181F"/>
+          </a:solidFill>
+          <a:ln w="12700">
+            <a:solidFill>
+              <a:srgbClr val="2E2E38"/>
+            </a:solidFill>
+          </a:ln>
+        </p:spPr>
+        <p:style>
+          <a:lnRef idx="1">
+            <a:schemeClr val="accent1"/>
+          </a:lnRef>
+          <a:fillRef idx="3">
+            <a:schemeClr val="accent1"/>
+          </a:fillRef>
+          <a:effectRef idx="2">
+            <a:schemeClr val="accent1"/>
+          </a:effectRef>
+          <a:fontRef idx="minor">
+            <a:schemeClr val="lt1"/>
+          </a:fontRef>
+        </p:style>
+        <p:txBody>
+          <a:bodyPr rtlCol="0" anchor="t" wrap="square" lIns="128016" rIns="109728" tIns="91440" bIns="73152"/>
+          <a:lstStyle/>
+          <a:p>
+            <a:pPr algn="l">
+              <a:lnSpc>
+                <a:spcPct val="110000"/>
+              </a:lnSpc>
+              <a:spcBef>
+                <a:spcPts val="0"/>
+              </a:spcBef>
+              <a:spcAft>
+                <a:spcPts val="800"/>
+              </a:spcAft>
+            </a:pPr>
+            <a:r>
+              <a:rPr sz="1100" b="1">
+                <a:solidFill>
+                  <a:srgbClr val="E6194D"/>
+                </a:solidFill>
+                <a:latin typeface="Calibri"/>
+                <a:ea typeface="Calibri"/>
+                <a:cs typeface="Calibri"/>
+              </a:rPr>
+              <a:t>WRITE</a:t>
+            </a:r>
+          </a:p>
+          <a:p>
+            <a:pPr algn="l">
+              <a:lnSpc>
+                <a:spcPct val="110000"/>
+              </a:lnSpc>
+              <a:spcBef>
+                <a:spcPts val="0"/>
+              </a:spcBef>
+              <a:spcAft>
+                <a:spcPts val="0"/>
+              </a:spcAft>
+            </a:pPr>
+            <a:r>
+              <a:rPr sz="1200" b="0">
+                <a:solidFill>
+                  <a:srgbClr val="FFFFFF"/>
+                </a:solidFill>
+                <a:latin typeface="Calibri"/>
+                <a:ea typeface="Calibri"/>
+                <a:cs typeface="Calibri"/>
+              </a:rPr>
+              <a:t>Storytelling + Script Writer produce a structured multi-part package with cliffhangers and narration plan.</a:t>
+            </a:r>
+          </a:p>
+        </p:txBody>
+      </p:sp>
+      <p:sp>
+        <p:nvSpPr>
+          <p:cNvPr id="16" name="Rounded Rectangle 15"/>
+          <p:cNvSpPr/>
+          <p:nvPr/>
+        </p:nvSpPr>
+        <p:spPr>
+          <a:xfrm>
+            <a:off x="6126480" y="2944368"/>
+            <a:ext cx="2560320" cy="2697480"/>
+          </a:xfrm>
+          <a:prstGeom prst="roundRect">
+            <a:avLst>
+              <a:gd name="adj" fmla="val 5000"/>
+            </a:avLst>
+          </a:prstGeom>
+          <a:solidFill>
+            <a:srgbClr val="18181F"/>
+          </a:solidFill>
+          <a:ln w="12700">
+            <a:solidFill>
+              <a:srgbClr val="2E2E38"/>
+            </a:solidFill>
+          </a:ln>
+        </p:spPr>
+        <p:style>
+          <a:lnRef idx="1">
+            <a:schemeClr val="accent1"/>
+          </a:lnRef>
+          <a:fillRef idx="3">
+            <a:schemeClr val="accent1"/>
+          </a:fillRef>
+          <a:effectRef idx="2">
+            <a:schemeClr val="accent1"/>
+          </a:effectRef>
+          <a:fontRef idx="minor">
+            <a:schemeClr val="lt1"/>
+          </a:fontRef>
+        </p:style>
+        <p:txBody>
+          <a:bodyPr rtlCol="0" anchor="t" wrap="square" lIns="128016" rIns="109728" tIns="91440" bIns="73152"/>
+          <a:lstStyle/>
+          <a:p>
+            <a:pPr algn="l">
+              <a:lnSpc>
+                <a:spcPct val="110000"/>
+              </a:lnSpc>
+              <a:spcBef>
+                <a:spcPts val="0"/>
+              </a:spcBef>
+              <a:spcAft>
+                <a:spcPts val="800"/>
+              </a:spcAft>
+            </a:pPr>
+            <a:r>
+              <a:rPr sz="1100" b="1">
+                <a:solidFill>
+                  <a:srgbClr val="E6194D"/>
+                </a:solidFill>
+                <a:latin typeface="Calibri"/>
+                <a:ea typeface="Calibri"/>
+                <a:cs typeface="Calibri"/>
+              </a:rPr>
+              <a:t>PRODUCE</a:t>
+            </a:r>
+          </a:p>
+          <a:p>
+            <a:pPr algn="l">
+              <a:lnSpc>
+                <a:spcPct val="110000"/>
+              </a:lnSpc>
+              <a:spcBef>
+                <a:spcPts val="0"/>
+              </a:spcBef>
+              <a:spcAft>
+                <a:spcPts val="0"/>
+              </a:spcAft>
+            </a:pPr>
+            <a:r>
+              <a:rPr sz="1200" b="0">
+                <a:solidFill>
+                  <a:srgbClr val="FFFFFF"/>
+                </a:solidFill>
+                <a:latin typeface="Calibri"/>
+                <a:ea typeface="Calibri"/>
+                <a:cs typeface="Calibri"/>
+              </a:rPr>
+              <a:t>Voice agent renders TTS + SFX. Director + Image agents build companion visuals and cover art.</a:t>
+            </a:r>
+          </a:p>
+        </p:txBody>
+      </p:sp>
+      <p:sp>
+        <p:nvSpPr>
+          <p:cNvPr id="17" name="Rounded Rectangle 16"/>
+          <p:cNvSpPr/>
+          <p:nvPr/>
+        </p:nvSpPr>
+        <p:spPr>
+          <a:xfrm>
+            <a:off x="8869680" y="2944368"/>
+            <a:ext cx="2560320" cy="2697480"/>
+          </a:xfrm>
+          <a:prstGeom prst="roundRect">
+            <a:avLst>
+              <a:gd name="adj" fmla="val 5000"/>
+            </a:avLst>
+          </a:prstGeom>
+          <a:solidFill>
+            <a:srgbClr val="18181F"/>
+          </a:solidFill>
+          <a:ln w="12700">
+            <a:solidFill>
+              <a:srgbClr val="2E2E38"/>
+            </a:solidFill>
+          </a:ln>
+        </p:spPr>
+        <p:style>
+          <a:lnRef idx="1">
+            <a:schemeClr val="accent1"/>
+          </a:lnRef>
+          <a:fillRef idx="3">
+            <a:schemeClr val="accent1"/>
+          </a:fillRef>
+          <a:effectRef idx="2">
+            <a:schemeClr val="accent1"/>
+          </a:effectRef>
+          <a:fontRef idx="minor">
+            <a:schemeClr val="lt1"/>
+          </a:fontRef>
+        </p:style>
+        <p:txBody>
+          <a:bodyPr rtlCol="0" anchor="t" wrap="square" lIns="128016" rIns="109728" tIns="91440" bIns="73152"/>
+          <a:lstStyle/>
+          <a:p>
+            <a:pPr algn="l">
+              <a:lnSpc>
+                <a:spcPct val="110000"/>
+              </a:lnSpc>
+              <a:spcBef>
+                <a:spcPts val="0"/>
+              </a:spcBef>
+              <a:spcAft>
+                <a:spcPts val="800"/>
+              </a:spcAft>
+            </a:pPr>
+            <a:r>
+              <a:rPr sz="1100" b="1">
+                <a:solidFill>
+                  <a:srgbClr val="E6194D"/>
+                </a:solidFill>
+                <a:latin typeface="Calibri"/>
+                <a:ea typeface="Calibri"/>
+                <a:cs typeface="Calibri"/>
+              </a:rPr>
+              <a:t>ASSURE</a:t>
+            </a:r>
+          </a:p>
+          <a:p>
+            <a:pPr algn="l">
+              <a:lnSpc>
+                <a:spcPct val="110000"/>
+              </a:lnSpc>
+              <a:spcBef>
+                <a:spcPts val="0"/>
+              </a:spcBef>
+              <a:spcAft>
+                <a:spcPts val="0"/>
+              </a:spcAft>
+            </a:pPr>
+            <a:r>
+              <a:rPr sz="1200" b="0">
+                <a:solidFill>
+                  <a:srgbClr val="FFFFFF"/>
+                </a:solidFill>
+                <a:latin typeface="Calibri"/>
+                <a:ea typeface="Calibri"/>
+                <a:cs typeface="Calibri"/>
+              </a:rPr>
+              <a:t>Timeline editor for listen/edit. Audience Sim proposes patches. Human approves each gate.</a:t>
+            </a:r>
+          </a:p>
+        </p:txBody>
+      </p:sp>
+      <p:sp>
+        <p:nvSpPr>
+          <p:cNvPr id="18" name="TextBox 17"/>
+          <p:cNvSpPr txBox="1"/>
+          <p:nvPr/>
+        </p:nvSpPr>
+        <p:spPr>
+          <a:xfrm>
+            <a:off x="640080" y="6473952"/>
+            <a:ext cx="8412480" cy="201168"/>
           </a:xfrm>
           <a:prstGeom prst="rect">
             <a:avLst/>
           </a:prstGeom>
-        </p:spPr>
-      </p:pic>
-      <p:sp>
-        <p:nvSpPr>
-          <p:cNvPr id="18" name="TextBox 17"/>
+          <a:noFill/>
+        </p:spPr>
+        <p:txBody>
+          <a:bodyPr wrap="square" anchor="t" lIns="0" rIns="0" tIns="0" bIns="0"/>
+          <a:lstStyle/>
+          <a:p>
+            <a:pPr algn="l">
+              <a:lnSpc>
+                <a:spcPct val="110000"/>
+              </a:lnSpc>
+              <a:spcBef>
+                <a:spcPts val="0"/>
+              </a:spcBef>
+              <a:spcAft>
+                <a:spcPts val="0"/>
+              </a:spcAft>
+            </a:pPr>
+            <a:r>
+              <a:rPr sz="1000" b="0">
+                <a:solidFill>
+                  <a:srgbClr val="71717A"/>
+                </a:solidFill>
+                <a:latin typeface="Calibri"/>
+                <a:ea typeface="Calibri"/>
+                <a:cs typeface="Calibri"/>
+              </a:rPr>
+              <a:t>Kahani  ·  Zero to One × Pocket FM  ·  IIM Bangalore</a:t>
+            </a:r>
+          </a:p>
+        </p:txBody>
+      </p:sp>
+      <p:sp>
+        <p:nvSpPr>
+          <p:cNvPr id="19" name="TextBox 18"/>
           <p:cNvSpPr txBox="1"/>
           <p:nvPr/>
         </p:nvSpPr>
         <p:spPr>
           <a:xfrm>
-            <a:off x="640080" y="6473952"/>
-            <a:ext cx="8412480" cy="219456"/>
+            <a:off x="10195560" y="6473952"/>
+            <a:ext cx="1371600" cy="201168"/>
           </a:xfrm>
           <a:prstGeom prst="rect">
             <a:avLst/>
@@ -7838,54 +8051,9 @@
           <a:bodyPr wrap="square" anchor="t" lIns="0" rIns="0" tIns="0" bIns="0"/>
           <a:lstStyle/>
           <a:p>
-            <a:pPr algn="l">
-              <a:lnSpc>
-                <a:spcPct val="112000"/>
-              </a:lnSpc>
-              <a:spcBef>
-                <a:spcPts val="0"/>
-              </a:spcBef>
-              <a:spcAft>
-                <a:spcPts val="0"/>
-              </a:spcAft>
-            </a:pPr>
-            <a:r>
-              <a:rPr sz="1000" b="0">
-                <a:solidFill>
-                  <a:srgbClr val="71717A"/>
-                </a:solidFill>
-                <a:latin typeface="Calibri"/>
-                <a:ea typeface="Calibri"/>
-                <a:cs typeface="Calibri"/>
-              </a:rPr>
-              <a:t>Kahani  ·  Zero to One × Pocket FM  ·  IIM Bangalore</a:t>
-            </a:r>
-          </a:p>
-        </p:txBody>
-      </p:sp>
-      <p:sp>
-        <p:nvSpPr>
-          <p:cNvPr id="19" name="TextBox 18"/>
-          <p:cNvSpPr txBox="1"/>
-          <p:nvPr/>
-        </p:nvSpPr>
-        <p:spPr>
-          <a:xfrm>
-            <a:off x="10195560" y="6473952"/>
-            <a:ext cx="1371600" cy="219456"/>
-          </a:xfrm>
-          <a:prstGeom prst="rect">
-            <a:avLst/>
-          </a:prstGeom>
-          <a:noFill/>
-        </p:spPr>
-        <p:txBody>
-          <a:bodyPr wrap="square" anchor="t" lIns="0" rIns="0" tIns="0" bIns="0"/>
-          <a:lstStyle/>
-          <a:p>
             <a:pPr algn="r">
               <a:lnSpc>
-                <a:spcPct val="112000"/>
+                <a:spcPct val="110000"/>
               </a:lnSpc>
               <a:spcBef>
                 <a:spcPts val="0"/>
@@ -7942,8 +8110,8 @@
         </p:nvSpPr>
         <p:spPr>
           <a:xfrm>
-            <a:off x="640080" y="347472"/>
-            <a:ext cx="347472" cy="54864"/>
+            <a:off x="640080" y="329184"/>
+            <a:ext cx="329184" cy="54864"/>
           </a:xfrm>
           <a:prstGeom prst="rect">
             <a:avLst/>
@@ -7985,8 +8153,8 @@
         </p:nvSpPr>
         <p:spPr>
           <a:xfrm>
-            <a:off x="640080" y="475488"/>
-            <a:ext cx="10908792" cy="219456"/>
+            <a:off x="640080" y="457200"/>
+            <a:ext cx="10908792" cy="201168"/>
           </a:xfrm>
           <a:prstGeom prst="rect">
             <a:avLst/>
@@ -7999,7 +8167,7 @@
           <a:p>
             <a:pPr algn="l">
               <a:lnSpc>
-                <a:spcPct val="112000"/>
+                <a:spcPct val="110000"/>
               </a:lnSpc>
               <a:spcBef>
                 <a:spcPts val="0"/>
@@ -8017,7 +8185,7 @@
                 <a:ea typeface="Calibri"/>
                 <a:cs typeface="Calibri"/>
               </a:rPr>
-              <a:t>05  DIFFERENTIATOR &amp; DEMO</a:t>
+              <a:t>05  AGENTS</a:t>
             </a:r>
           </a:p>
         </p:txBody>
@@ -8030,8 +8198,8 @@
         </p:nvSpPr>
         <p:spPr>
           <a:xfrm>
-            <a:off x="640080" y="731520"/>
-            <a:ext cx="10908792" cy="365760"/>
+            <a:off x="640080" y="694944"/>
+            <a:ext cx="10908792" cy="347472"/>
           </a:xfrm>
           <a:prstGeom prst="rect">
             <a:avLst/>
@@ -8044,7 +8212,7 @@
           <a:p>
             <a:pPr algn="l">
               <a:lnSpc>
-                <a:spcPct val="112000"/>
+                <a:spcPct val="110000"/>
               </a:lnSpc>
               <a:spcBef>
                 <a:spcPts val="0"/>
@@ -8062,7 +8230,7 @@
                 <a:ea typeface="Calibri"/>
                 <a:cs typeface="Calibri"/>
               </a:rPr>
-              <a:t>Audience simulation before publish — then prove it with a listen</a:t>
+              <a:t>Seven specialized agents — one production studio</a:t>
             </a:r>
           </a:p>
         </p:txBody>
@@ -8075,7 +8243,7 @@
         </p:nvSpPr>
         <p:spPr>
           <a:xfrm>
-            <a:off x="640080" y="1152144"/>
+            <a:off x="640080" y="1097280"/>
             <a:ext cx="10908792" cy="365760"/>
           </a:xfrm>
           <a:prstGeom prst="rect">
@@ -8089,17 +8257,17 @@
           <a:p>
             <a:pPr algn="l">
               <a:lnSpc>
-                <a:spcPct val="112000"/>
-              </a:lnSpc>
-              <a:spcBef>
-                <a:spcPts val="0"/>
-              </a:spcBef>
-              <a:spcAft>
-                <a:spcPts val="0"/>
-              </a:spcAft>
-            </a:pPr>
-            <a:r>
-              <a:rPr sz="1300" b="0">
+                <a:spcPct val="110000"/>
+              </a:lnSpc>
+              <a:spcBef>
+                <a:spcPts val="0"/>
+              </a:spcBef>
+              <a:spcAft>
+                <a:spcPts val="0"/>
+              </a:spcAft>
+            </a:pPr>
+            <a:r>
+              <a:rPr sz="1200" b="0">
                 <a:solidFill>
                   <a:srgbClr val="A1A1AA"/>
                 </a:solidFill>
@@ -8107,7 +8275,7 @@
                 <a:ea typeface="Calibri"/>
                 <a:cs typeface="Calibri"/>
               </a:rPr>
-              <a:t>Simulation informs; it does not dictate. Scores labeled uncalibrated until listen logs exist.</a:t>
+              <a:t>Each owns a stage; the orchestrator sequences them with human approvals.</a:t>
             </a:r>
           </a:p>
         </p:txBody>
@@ -8120,8 +8288,8 @@
         </p:nvSpPr>
         <p:spPr>
           <a:xfrm>
-            <a:off x="640080" y="1691640"/>
-            <a:ext cx="73152" cy="4160520"/>
+            <a:off x="640080" y="1664208"/>
+            <a:ext cx="73152" cy="1783080"/>
           </a:xfrm>
           <a:prstGeom prst="rect">
             <a:avLst/>
@@ -8163,8 +8331,8 @@
         </p:nvSpPr>
         <p:spPr>
           <a:xfrm>
-            <a:off x="713232" y="1691640"/>
-            <a:ext cx="5276088" cy="4160520"/>
+            <a:off x="713232" y="1664208"/>
+            <a:ext cx="2487168" cy="1783080"/>
           </a:xfrm>
           <a:prstGeom prst="roundRect">
             <a:avLst>
@@ -8195,22 +8363,22 @@
           </a:fontRef>
         </p:style>
         <p:txBody>
-          <a:bodyPr rtlCol="0" anchor="t" wrap="square" lIns="128016" rIns="128016" tIns="109728" bIns="91440"/>
-          <a:lstStyle/>
-          <a:p>
-            <a:pPr algn="l">
-              <a:lnSpc>
-                <a:spcPct val="112000"/>
-              </a:lnSpc>
-              <a:spcBef>
-                <a:spcPts val="0"/>
-              </a:spcBef>
-              <a:spcAft>
-                <a:spcPts val="800"/>
-              </a:spcAft>
-            </a:pPr>
-            <a:r>
-              <a:rPr sz="1400" b="1">
+          <a:bodyPr rtlCol="0" anchor="t" wrap="square" lIns="109728" rIns="109728" tIns="91440" bIns="73152"/>
+          <a:lstStyle/>
+          <a:p>
+            <a:pPr algn="l">
+              <a:lnSpc>
+                <a:spcPct val="110000"/>
+              </a:lnSpc>
+              <a:spcBef>
+                <a:spcPts val="0"/>
+              </a:spcBef>
+              <a:spcAft>
+                <a:spcPts val="600"/>
+              </a:spcAft>
+            </a:pPr>
+            <a:r>
+              <a:rPr sz="1200" b="1">
                 <a:solidFill>
                   <a:srgbClr val="FFFFFF"/>
                 </a:solidFill>
@@ -8218,23 +8386,23 @@
                 <a:ea typeface="Calibri"/>
                 <a:cs typeface="Calibri"/>
               </a:rPr>
-              <a:t>Why this is different</a:t>
-            </a:r>
-          </a:p>
-          <a:p>
-            <a:pPr algn="l">
-              <a:lnSpc>
-                <a:spcPct val="112000"/>
-              </a:lnSpc>
-              <a:spcBef>
-                <a:spcPts val="0"/>
-              </a:spcBef>
-              <a:spcAft>
-                <a:spcPts val="500"/>
-              </a:spcAft>
-            </a:pPr>
-            <a:r>
-              <a:rPr sz="1200" b="0">
+              <a:t>Storytelling Agent</a:t>
+            </a:r>
+          </a:p>
+          <a:p>
+            <a:pPr algn="l">
+              <a:lnSpc>
+                <a:spcPct val="110000"/>
+              </a:lnSpc>
+              <a:spcBef>
+                <a:spcPts val="0"/>
+              </a:spcBef>
+              <a:spcAft>
+                <a:spcPts val="0"/>
+              </a:spcAft>
+            </a:pPr>
+            <a:r>
+              <a:rPr sz="1100" b="0">
                 <a:solidFill>
                   <a:srgbClr val="A1A1AA"/>
                 </a:solidFill>
@@ -8242,141 +8410,64 @@
                 <a:ea typeface="Calibri"/>
                 <a:cs typeface="Calibri"/>
               </a:rPr>
-              <a:t>•  Structural audit + persona drop-off risk</a:t>
-            </a:r>
-          </a:p>
-          <a:p>
-            <a:pPr algn="l">
-              <a:lnSpc>
-                <a:spcPct val="112000"/>
-              </a:lnSpc>
-              <a:spcBef>
-                <a:spcPts val="0"/>
-              </a:spcBef>
-              <a:spcAft>
-                <a:spcPts val="500"/>
-              </a:spcAft>
-            </a:pPr>
-            <a:r>
-              <a:rPr sz="1200" b="0">
-                <a:solidFill>
-                  <a:srgbClr val="A1A1AA"/>
-                </a:solidFill>
-                <a:latin typeface="Calibri"/>
-                <a:ea typeface="Calibri"/>
-                <a:cs typeface="Calibri"/>
-              </a:rPr>
-              <a:t>•  Concrete patches, not vague feedback</a:t>
-            </a:r>
-          </a:p>
-          <a:p>
-            <a:pPr algn="l">
-              <a:lnSpc>
-                <a:spcPct val="112000"/>
-              </a:lnSpc>
-              <a:spcBef>
-                <a:spcPts val="0"/>
-              </a:spcBef>
-              <a:spcAft>
-                <a:spcPts val="500"/>
-              </a:spcAft>
-            </a:pPr>
-            <a:r>
-              <a:rPr sz="1200" b="0">
-                <a:solidFill>
-                  <a:srgbClr val="A1A1AA"/>
-                </a:solidFill>
-                <a:latin typeface="Calibri"/>
-                <a:ea typeface="Calibri"/>
-                <a:cs typeface="Calibri"/>
-              </a:rPr>
-              <a:t>•  Signal before VO / mix spend</a:t>
-            </a:r>
-          </a:p>
-          <a:p>
-            <a:pPr algn="l">
-              <a:lnSpc>
-                <a:spcPct val="112000"/>
-              </a:lnSpc>
-              <a:spcBef>
-                <a:spcPts val="0"/>
-              </a:spcBef>
-              <a:spcAft>
-                <a:spcPts val="500"/>
-              </a:spcAft>
-            </a:pPr>
-            <a:r>
-              <a:rPr sz="1200" b="0">
-                <a:solidFill>
-                  <a:srgbClr val="A1A1AA"/>
-                </a:solidFill>
-                <a:latin typeface="Calibri"/>
-                <a:ea typeface="Calibri"/>
-                <a:cs typeface="Calibri"/>
-              </a:rPr>
-              <a:t>•  Complements ranking — does not claim to replace it</a:t>
-            </a:r>
-          </a:p>
-          <a:p>
-            <a:pPr algn="l">
-              <a:lnSpc>
-                <a:spcPct val="112000"/>
-              </a:lnSpc>
-              <a:spcBef>
-                <a:spcPts val="0"/>
-              </a:spcBef>
-              <a:spcAft>
-                <a:spcPts val="500"/>
-              </a:spcAft>
-            </a:pPr>
-            <a:r>
-              <a:rPr sz="1200" b="0">
-                <a:solidFill>
-                  <a:srgbClr val="A1A1AA"/>
-                </a:solidFill>
-                <a:latin typeface="Calibri"/>
-                <a:ea typeface="Calibri"/>
-                <a:cs typeface="Calibri"/>
-              </a:rPr>
-              <a:t>•  Creator stays final decision-maker</a:t>
-            </a:r>
-          </a:p>
-          <a:p>
-            <a:pPr algn="l">
-              <a:lnSpc>
-                <a:spcPct val="112000"/>
-              </a:lnSpc>
-              <a:spcBef>
-                <a:spcPts val="0"/>
-              </a:spcBef>
-              <a:spcAft>
-                <a:spcPts val="0"/>
-              </a:spcAft>
-            </a:pPr>
-            <a:r>
-              <a:rPr sz="1200" b="0">
-                <a:solidFill>
-                  <a:srgbClr val="A1A1AA"/>
-                </a:solidFill>
-                <a:latin typeface="Calibri"/>
-                <a:ea typeface="Calibri"/>
-                <a:cs typeface="Calibri"/>
-              </a:rPr>
-              <a:t>•  Data flywheel: preview listens → calibrate</a:t>
-            </a:r>
-          </a:p>
-        </p:txBody>
-      </p:sp>
-      <p:sp>
-        <p:nvSpPr>
-          <p:cNvPr id="8" name="Rounded Rectangle 7"/>
+              <a:t>Shapes the series brief, plot pitches, and creative direction inside chat.</a:t>
+            </a:r>
+          </a:p>
+        </p:txBody>
+      </p:sp>
+      <p:sp>
+        <p:nvSpPr>
+          <p:cNvPr id="8" name="Rectangle 7"/>
           <p:cNvSpPr/>
           <p:nvPr/>
         </p:nvSpPr>
         <p:spPr>
           <a:xfrm>
-            <a:off x="6190488" y="1691640"/>
-            <a:ext cx="5349240" cy="621792"/>
+            <a:off x="3383280" y="1664208"/>
+            <a:ext cx="73152" cy="1783080"/>
+          </a:xfrm>
+          <a:prstGeom prst="rect">
+            <a:avLst/>
+          </a:prstGeom>
+          <a:solidFill>
+            <a:srgbClr val="E6194D"/>
+          </a:solidFill>
+          <a:ln>
+            <a:noFill/>
+          </a:ln>
+        </p:spPr>
+        <p:style>
+          <a:lnRef idx="1">
+            <a:schemeClr val="accent1"/>
+          </a:lnRef>
+          <a:fillRef idx="3">
+            <a:schemeClr val="accent1"/>
+          </a:fillRef>
+          <a:effectRef idx="2">
+            <a:schemeClr val="accent1"/>
+          </a:effectRef>
+          <a:fontRef idx="minor">
+            <a:schemeClr val="lt1"/>
+          </a:fontRef>
+        </p:style>
+        <p:txBody>
+          <a:bodyPr rtlCol="0" anchor="ctr"/>
+          <a:lstStyle/>
+          <a:p>
+            <a:pPr algn="ctr"/>
+          </a:p>
+        </p:txBody>
+      </p:sp>
+      <p:sp>
+        <p:nvSpPr>
+          <p:cNvPr id="9" name="Rounded Rectangle 8"/>
+          <p:cNvSpPr/>
+          <p:nvPr/>
+        </p:nvSpPr>
+        <p:spPr>
+          <a:xfrm>
+            <a:off x="3456432" y="1664208"/>
+            <a:ext cx="2487168" cy="1783080"/>
           </a:xfrm>
           <a:prstGeom prst="roundRect">
             <a:avLst>
@@ -8407,18 +8498,18 @@
           </a:fontRef>
         </p:style>
         <p:txBody>
-          <a:bodyPr rtlCol="0" anchor="t" wrap="square" lIns="146304" rIns="128016" tIns="109728" bIns="91440"/>
-          <a:lstStyle/>
-          <a:p>
-            <a:pPr algn="l">
-              <a:lnSpc>
-                <a:spcPct val="112000"/>
-              </a:lnSpc>
-              <a:spcBef>
-                <a:spcPts val="0"/>
-              </a:spcBef>
-              <a:spcAft>
-                <a:spcPts val="200"/>
+          <a:bodyPr rtlCol="0" anchor="t" wrap="square" lIns="109728" rIns="109728" tIns="91440" bIns="73152"/>
+          <a:lstStyle/>
+          <a:p>
+            <a:pPr algn="l">
+              <a:lnSpc>
+                <a:spcPct val="110000"/>
+              </a:lnSpc>
+              <a:spcBef>
+                <a:spcPts val="0"/>
+              </a:spcBef>
+              <a:spcAft>
+                <a:spcPts val="600"/>
               </a:spcAft>
             </a:pPr>
             <a:r>
@@ -8430,13 +8521,13 @@
                 <a:ea typeface="Calibri"/>
                 <a:cs typeface="Calibri"/>
               </a:rPr>
-              <a:t>1 Brief</a:t>
-            </a:r>
-          </a:p>
-          <a:p>
-            <a:pPr algn="l">
-              <a:lnSpc>
-                <a:spcPct val="112000"/>
+              <a:t>Scripting &amp; Search Agent</a:t>
+            </a:r>
+          </a:p>
+          <a:p>
+            <a:pPr algn="l">
+              <a:lnSpc>
+                <a:spcPct val="110000"/>
               </a:lnSpc>
               <a:spcBef>
                 <a:spcPts val="0"/>
@@ -8454,21 +8545,64 @@
                 <a:ea typeface="Calibri"/>
                 <a:cs typeface="Calibri"/>
               </a:rPr>
-              <a:t>Regional hook + context</a:t>
-            </a:r>
-          </a:p>
-        </p:txBody>
-      </p:sp>
-      <p:sp>
-        <p:nvSpPr>
-          <p:cNvPr id="9" name="Rounded Rectangle 8"/>
+              <a:t>Retrieves project context (Databricks) and researches hooks (Tavily + extraction).</a:t>
+            </a:r>
+          </a:p>
+        </p:txBody>
+      </p:sp>
+      <p:sp>
+        <p:nvSpPr>
+          <p:cNvPr id="10" name="Rectangle 9"/>
           <p:cNvSpPr/>
           <p:nvPr/>
         </p:nvSpPr>
         <p:spPr>
           <a:xfrm>
-            <a:off x="6190488" y="2386584"/>
-            <a:ext cx="5349240" cy="621792"/>
+            <a:off x="6126480" y="1664208"/>
+            <a:ext cx="73152" cy="1783080"/>
+          </a:xfrm>
+          <a:prstGeom prst="rect">
+            <a:avLst/>
+          </a:prstGeom>
+          <a:solidFill>
+            <a:srgbClr val="E6194D"/>
+          </a:solidFill>
+          <a:ln>
+            <a:noFill/>
+          </a:ln>
+        </p:spPr>
+        <p:style>
+          <a:lnRef idx="1">
+            <a:schemeClr val="accent1"/>
+          </a:lnRef>
+          <a:fillRef idx="3">
+            <a:schemeClr val="accent1"/>
+          </a:fillRef>
+          <a:effectRef idx="2">
+            <a:schemeClr val="accent1"/>
+          </a:effectRef>
+          <a:fontRef idx="minor">
+            <a:schemeClr val="lt1"/>
+          </a:fontRef>
+        </p:style>
+        <p:txBody>
+          <a:bodyPr rtlCol="0" anchor="ctr"/>
+          <a:lstStyle/>
+          <a:p>
+            <a:pPr algn="ctr"/>
+          </a:p>
+        </p:txBody>
+      </p:sp>
+      <p:sp>
+        <p:nvSpPr>
+          <p:cNvPr id="11" name="Rounded Rectangle 10"/>
+          <p:cNvSpPr/>
+          <p:nvPr/>
+        </p:nvSpPr>
+        <p:spPr>
+          <a:xfrm>
+            <a:off x="6199632" y="1664208"/>
+            <a:ext cx="2487168" cy="1783080"/>
           </a:xfrm>
           <a:prstGeom prst="roundRect">
             <a:avLst>
@@ -8499,18 +8633,18 @@
           </a:fontRef>
         </p:style>
         <p:txBody>
-          <a:bodyPr rtlCol="0" anchor="t" wrap="square" lIns="146304" rIns="128016" tIns="109728" bIns="91440"/>
-          <a:lstStyle/>
-          <a:p>
-            <a:pPr algn="l">
-              <a:lnSpc>
-                <a:spcPct val="112000"/>
-              </a:lnSpc>
-              <a:spcBef>
-                <a:spcPts val="0"/>
-              </a:spcBef>
-              <a:spcAft>
-                <a:spcPts val="200"/>
+          <a:bodyPr rtlCol="0" anchor="t" wrap="square" lIns="109728" rIns="109728" tIns="91440" bIns="73152"/>
+          <a:lstStyle/>
+          <a:p>
+            <a:pPr algn="l">
+              <a:lnSpc>
+                <a:spcPct val="110000"/>
+              </a:lnSpc>
+              <a:spcBef>
+                <a:spcPts val="0"/>
+              </a:spcBef>
+              <a:spcAft>
+                <a:spcPts val="600"/>
               </a:spcAft>
             </a:pPr>
             <a:r>
@@ -8522,13 +8656,13 @@
                 <a:ea typeface="Calibri"/>
                 <a:cs typeface="Calibri"/>
               </a:rPr>
-              <a:t>2 Generate</a:t>
-            </a:r>
-          </a:p>
-          <a:p>
-            <a:pPr algn="l">
-              <a:lnSpc>
-                <a:spcPct val="112000"/>
+              <a:t>Narrative Agent</a:t>
+            </a:r>
+          </a:p>
+          <a:p>
+            <a:pPr algn="l">
+              <a:lnSpc>
+                <a:spcPct val="110000"/>
               </a:lnSpc>
               <a:spcBef>
                 <a:spcPts val="0"/>
@@ -8546,21 +8680,64 @@
                 <a:ea typeface="Calibri"/>
                 <a:cs typeface="Calibri"/>
               </a:rPr>
-              <a:t>Discovery → script → cliff → narration</a:t>
-            </a:r>
-          </a:p>
-        </p:txBody>
-      </p:sp>
-      <p:sp>
-        <p:nvSpPr>
-          <p:cNvPr id="10" name="Rounded Rectangle 9"/>
+              <a:t>Locks narration mode — narration-led, dialogue inserts, multi-narrator, framed.</a:t>
+            </a:r>
+          </a:p>
+        </p:txBody>
+      </p:sp>
+      <p:sp>
+        <p:nvSpPr>
+          <p:cNvPr id="12" name="Rectangle 11"/>
           <p:cNvSpPr/>
           <p:nvPr/>
         </p:nvSpPr>
         <p:spPr>
           <a:xfrm>
-            <a:off x="6190488" y="3081528"/>
-            <a:ext cx="5349240" cy="621792"/>
+            <a:off x="8869680" y="1664208"/>
+            <a:ext cx="73152" cy="1783080"/>
+          </a:xfrm>
+          <a:prstGeom prst="rect">
+            <a:avLst/>
+          </a:prstGeom>
+          <a:solidFill>
+            <a:srgbClr val="E6194D"/>
+          </a:solidFill>
+          <a:ln>
+            <a:noFill/>
+          </a:ln>
+        </p:spPr>
+        <p:style>
+          <a:lnRef idx="1">
+            <a:schemeClr val="accent1"/>
+          </a:lnRef>
+          <a:fillRef idx="3">
+            <a:schemeClr val="accent1"/>
+          </a:fillRef>
+          <a:effectRef idx="2">
+            <a:schemeClr val="accent1"/>
+          </a:effectRef>
+          <a:fontRef idx="minor">
+            <a:schemeClr val="lt1"/>
+          </a:fontRef>
+        </p:style>
+        <p:txBody>
+          <a:bodyPr rtlCol="0" anchor="ctr"/>
+          <a:lstStyle/>
+          <a:p>
+            <a:pPr algn="ctr"/>
+          </a:p>
+        </p:txBody>
+      </p:sp>
+      <p:sp>
+        <p:nvSpPr>
+          <p:cNvPr id="13" name="Rounded Rectangle 12"/>
+          <p:cNvSpPr/>
+          <p:nvPr/>
+        </p:nvSpPr>
+        <p:spPr>
+          <a:xfrm>
+            <a:off x="8942832" y="1664208"/>
+            <a:ext cx="2487168" cy="1783080"/>
           </a:xfrm>
           <a:prstGeom prst="roundRect">
             <a:avLst>
@@ -8591,18 +8768,18 @@
           </a:fontRef>
         </p:style>
         <p:txBody>
-          <a:bodyPr rtlCol="0" anchor="t" wrap="square" lIns="146304" rIns="128016" tIns="109728" bIns="91440"/>
-          <a:lstStyle/>
-          <a:p>
-            <a:pPr algn="l">
-              <a:lnSpc>
-                <a:spcPct val="112000"/>
-              </a:lnSpc>
-              <a:spcBef>
-                <a:spcPts val="0"/>
-              </a:spcBef>
-              <a:spcAft>
-                <a:spcPts val="200"/>
+          <a:bodyPr rtlCol="0" anchor="t" wrap="square" lIns="109728" rIns="109728" tIns="91440" bIns="73152"/>
+          <a:lstStyle/>
+          <a:p>
+            <a:pPr algn="l">
+              <a:lnSpc>
+                <a:spcPct val="110000"/>
+              </a:lnSpc>
+              <a:spcBef>
+                <a:spcPts val="0"/>
+              </a:spcBef>
+              <a:spcAft>
+                <a:spcPts val="600"/>
               </a:spcAft>
             </a:pPr>
             <a:r>
@@ -8614,13 +8791,13 @@
                 <a:ea typeface="Calibri"/>
                 <a:cs typeface="Calibri"/>
               </a:rPr>
-              <a:t>3 Approve</a:t>
-            </a:r>
-          </a:p>
-          <a:p>
-            <a:pPr algn="l">
-              <a:lnSpc>
-                <a:spcPct val="112000"/>
+              <a:t>Script Writer Agent</a:t>
+            </a:r>
+          </a:p>
+          <a:p>
+            <a:pPr algn="l">
+              <a:lnSpc>
+                <a:spcPct val="110000"/>
               </a:lnSpc>
               <a:spcBef>
                 <a:spcPts val="0"/>
@@ -8638,21 +8815,64 @@
                 <a:ea typeface="Calibri"/>
                 <a:cs typeface="Calibri"/>
               </a:rPr>
-              <a:t>Human gate before costly audio</a:t>
-            </a:r>
-          </a:p>
-        </p:txBody>
-      </p:sp>
-      <p:sp>
-        <p:nvSpPr>
-          <p:cNvPr id="11" name="Rounded Rectangle 10"/>
+              <a:t>Writes the structured multi-part script package and screenplay.</a:t>
+            </a:r>
+          </a:p>
+        </p:txBody>
+      </p:sp>
+      <p:sp>
+        <p:nvSpPr>
+          <p:cNvPr id="14" name="Rectangle 13"/>
           <p:cNvSpPr/>
           <p:nvPr/>
         </p:nvSpPr>
         <p:spPr>
           <a:xfrm>
-            <a:off x="6190488" y="3776472"/>
-            <a:ext cx="5349240" cy="621792"/>
+            <a:off x="777240" y="3630168"/>
+            <a:ext cx="73152" cy="1783080"/>
+          </a:xfrm>
+          <a:prstGeom prst="rect">
+            <a:avLst/>
+          </a:prstGeom>
+          <a:solidFill>
+            <a:srgbClr val="E6194D"/>
+          </a:solidFill>
+          <a:ln>
+            <a:noFill/>
+          </a:ln>
+        </p:spPr>
+        <p:style>
+          <a:lnRef idx="1">
+            <a:schemeClr val="accent1"/>
+          </a:lnRef>
+          <a:fillRef idx="3">
+            <a:schemeClr val="accent1"/>
+          </a:fillRef>
+          <a:effectRef idx="2">
+            <a:schemeClr val="accent1"/>
+          </a:effectRef>
+          <a:fontRef idx="minor">
+            <a:schemeClr val="lt1"/>
+          </a:fontRef>
+        </p:style>
+        <p:txBody>
+          <a:bodyPr rtlCol="0" anchor="ctr"/>
+          <a:lstStyle/>
+          <a:p>
+            <a:pPr algn="ctr"/>
+          </a:p>
+        </p:txBody>
+      </p:sp>
+      <p:sp>
+        <p:nvSpPr>
+          <p:cNvPr id="15" name="Rounded Rectangle 14"/>
+          <p:cNvSpPr/>
+          <p:nvPr/>
+        </p:nvSpPr>
+        <p:spPr>
+          <a:xfrm>
+            <a:off x="850392" y="3630168"/>
+            <a:ext cx="3401568" cy="1783080"/>
           </a:xfrm>
           <a:prstGeom prst="roundRect">
             <a:avLst>
@@ -8683,18 +8903,18 @@
           </a:fontRef>
         </p:style>
         <p:txBody>
-          <a:bodyPr rtlCol="0" anchor="t" wrap="square" lIns="146304" rIns="128016" tIns="109728" bIns="91440"/>
-          <a:lstStyle/>
-          <a:p>
-            <a:pPr algn="l">
-              <a:lnSpc>
-                <a:spcPct val="112000"/>
-              </a:lnSpc>
-              <a:spcBef>
-                <a:spcPts val="0"/>
-              </a:spcBef>
-              <a:spcAft>
-                <a:spcPts val="200"/>
+          <a:bodyPr rtlCol="0" anchor="t" wrap="square" lIns="109728" rIns="109728" tIns="91440" bIns="73152"/>
+          <a:lstStyle/>
+          <a:p>
+            <a:pPr algn="l">
+              <a:lnSpc>
+                <a:spcPct val="110000"/>
+              </a:lnSpc>
+              <a:spcBef>
+                <a:spcPts val="0"/>
+              </a:spcBef>
+              <a:spcAft>
+                <a:spcPts val="600"/>
               </a:spcAft>
             </a:pPr>
             <a:r>
@@ -8706,13 +8926,13 @@
                 <a:ea typeface="Calibri"/>
                 <a:cs typeface="Calibri"/>
               </a:rPr>
-              <a:t>4 Listen</a:t>
-            </a:r>
-          </a:p>
-          <a:p>
-            <a:pPr algn="l">
-              <a:lnSpc>
-                <a:spcPct val="112000"/>
+              <a:t>Director Agent</a:t>
+            </a:r>
+          </a:p>
+          <a:p>
+            <a:pPr algn="l">
+              <a:lnSpc>
+                <a:spcPct val="110000"/>
               </a:lnSpc>
               <a:spcBef>
                 <a:spcPts val="0"/>
@@ -8730,21 +8950,64 @@
                 <a:ea typeface="Calibri"/>
                 <a:cs typeface="Calibri"/>
               </a:rPr>
-              <a:t>Wow-audio moment in the editor</a:t>
-            </a:r>
-          </a:p>
-        </p:txBody>
-      </p:sp>
-      <p:sp>
-        <p:nvSpPr>
-          <p:cNvPr id="12" name="Rounded Rectangle 11"/>
+              <a:t>Plans visual shots / lookbook — performance-aware scene direction.</a:t>
+            </a:r>
+          </a:p>
+        </p:txBody>
+      </p:sp>
+      <p:sp>
+        <p:nvSpPr>
+          <p:cNvPr id="16" name="Rectangle 15"/>
           <p:cNvSpPr/>
           <p:nvPr/>
         </p:nvSpPr>
         <p:spPr>
           <a:xfrm>
-            <a:off x="6190488" y="4471416"/>
-            <a:ext cx="5349240" cy="621792"/>
+            <a:off x="4434840" y="3630168"/>
+            <a:ext cx="73152" cy="1783080"/>
+          </a:xfrm>
+          <a:prstGeom prst="rect">
+            <a:avLst/>
+          </a:prstGeom>
+          <a:solidFill>
+            <a:srgbClr val="E6194D"/>
+          </a:solidFill>
+          <a:ln>
+            <a:noFill/>
+          </a:ln>
+        </p:spPr>
+        <p:style>
+          <a:lnRef idx="1">
+            <a:schemeClr val="accent1"/>
+          </a:lnRef>
+          <a:fillRef idx="3">
+            <a:schemeClr val="accent1"/>
+          </a:fillRef>
+          <a:effectRef idx="2">
+            <a:schemeClr val="accent1"/>
+          </a:effectRef>
+          <a:fontRef idx="minor">
+            <a:schemeClr val="lt1"/>
+          </a:fontRef>
+        </p:style>
+        <p:txBody>
+          <a:bodyPr rtlCol="0" anchor="ctr"/>
+          <a:lstStyle/>
+          <a:p>
+            <a:pPr algn="ctr"/>
+          </a:p>
+        </p:txBody>
+      </p:sp>
+      <p:sp>
+        <p:nvSpPr>
+          <p:cNvPr id="17" name="Rounded Rectangle 16"/>
+          <p:cNvSpPr/>
+          <p:nvPr/>
+        </p:nvSpPr>
+        <p:spPr>
+          <a:xfrm>
+            <a:off x="4507992" y="3630168"/>
+            <a:ext cx="3401568" cy="1783080"/>
           </a:xfrm>
           <a:prstGeom prst="roundRect">
             <a:avLst>
@@ -8775,18 +9038,18 @@
           </a:fontRef>
         </p:style>
         <p:txBody>
-          <a:bodyPr rtlCol="0" anchor="t" wrap="square" lIns="146304" rIns="128016" tIns="109728" bIns="91440"/>
-          <a:lstStyle/>
-          <a:p>
-            <a:pPr algn="l">
-              <a:lnSpc>
-                <a:spcPct val="112000"/>
-              </a:lnSpc>
-              <a:spcBef>
-                <a:spcPts val="0"/>
-              </a:spcBef>
-              <a:spcAft>
-                <a:spcPts val="200"/>
+          <a:bodyPr rtlCol="0" anchor="t" wrap="square" lIns="109728" rIns="109728" tIns="91440" bIns="73152"/>
+          <a:lstStyle/>
+          <a:p>
+            <a:pPr algn="l">
+              <a:lnSpc>
+                <a:spcPct val="110000"/>
+              </a:lnSpc>
+              <a:spcBef>
+                <a:spcPts val="0"/>
+              </a:spcBef>
+              <a:spcAft>
+                <a:spcPts val="600"/>
               </a:spcAft>
             </a:pPr>
             <a:r>
@@ -8798,13 +9061,13 @@
                 <a:ea typeface="Calibri"/>
                 <a:cs typeface="Calibri"/>
               </a:rPr>
-              <a:t>5 Simulate</a:t>
-            </a:r>
-          </a:p>
-          <a:p>
-            <a:pPr algn="l">
-              <a:lnSpc>
-                <a:spcPct val="112000"/>
+              <a:t>Voice Agent</a:t>
+            </a:r>
+          </a:p>
+          <a:p>
+            <a:pPr algn="l">
+              <a:lnSpc>
+                <a:spcPct val="110000"/>
               </a:lnSpc>
               <a:spcBef>
                 <a:spcPts val="0"/>
@@ -8822,21 +9085,64 @@
                 <a:ea typeface="Calibri"/>
                 <a:cs typeface="Calibri"/>
               </a:rPr>
-              <a:t>Persona risk + accept a patch</a:t>
-            </a:r>
-          </a:p>
-        </p:txBody>
-      </p:sp>
-      <p:sp>
-        <p:nvSpPr>
-          <p:cNvPr id="13" name="Rounded Rectangle 12"/>
+              <a:t>Casts library voices and renders TTS + SFX beds (ElevenLabs / Sarvam).</a:t>
+            </a:r>
+          </a:p>
+        </p:txBody>
+      </p:sp>
+      <p:sp>
+        <p:nvSpPr>
+          <p:cNvPr id="18" name="Rectangle 17"/>
           <p:cNvSpPr/>
           <p:nvPr/>
         </p:nvSpPr>
         <p:spPr>
           <a:xfrm>
-            <a:off x="6190488" y="5166360"/>
-            <a:ext cx="5349240" cy="621792"/>
+            <a:off x="8092440" y="3630168"/>
+            <a:ext cx="73152" cy="1783080"/>
+          </a:xfrm>
+          <a:prstGeom prst="rect">
+            <a:avLst/>
+          </a:prstGeom>
+          <a:solidFill>
+            <a:srgbClr val="E6194D"/>
+          </a:solidFill>
+          <a:ln>
+            <a:noFill/>
+          </a:ln>
+        </p:spPr>
+        <p:style>
+          <a:lnRef idx="1">
+            <a:schemeClr val="accent1"/>
+          </a:lnRef>
+          <a:fillRef idx="3">
+            <a:schemeClr val="accent1"/>
+          </a:fillRef>
+          <a:effectRef idx="2">
+            <a:schemeClr val="accent1"/>
+          </a:effectRef>
+          <a:fontRef idx="minor">
+            <a:schemeClr val="lt1"/>
+          </a:fontRef>
+        </p:style>
+        <p:txBody>
+          <a:bodyPr rtlCol="0" anchor="ctr"/>
+          <a:lstStyle/>
+          <a:p>
+            <a:pPr algn="ctr"/>
+          </a:p>
+        </p:txBody>
+      </p:sp>
+      <p:sp>
+        <p:nvSpPr>
+          <p:cNvPr id="19" name="Rounded Rectangle 18"/>
+          <p:cNvSpPr/>
+          <p:nvPr/>
+        </p:nvSpPr>
+        <p:spPr>
+          <a:xfrm>
+            <a:off x="8165592" y="3630168"/>
+            <a:ext cx="3401568" cy="1783080"/>
           </a:xfrm>
           <a:prstGeom prst="roundRect">
             <a:avLst>
@@ -8867,18 +9173,18 @@
           </a:fontRef>
         </p:style>
         <p:txBody>
-          <a:bodyPr rtlCol="0" anchor="t" wrap="square" lIns="146304" rIns="128016" tIns="109728" bIns="91440"/>
-          <a:lstStyle/>
-          <a:p>
-            <a:pPr algn="l">
-              <a:lnSpc>
-                <a:spcPct val="112000"/>
-              </a:lnSpc>
-              <a:spcBef>
-                <a:spcPts val="0"/>
-              </a:spcBef>
-              <a:spcAft>
-                <a:spcPts val="200"/>
+          <a:bodyPr rtlCol="0" anchor="t" wrap="square" lIns="109728" rIns="109728" tIns="91440" bIns="73152"/>
+          <a:lstStyle/>
+          <a:p>
+            <a:pPr algn="l">
+              <a:lnSpc>
+                <a:spcPct val="110000"/>
+              </a:lnSpc>
+              <a:spcBef>
+                <a:spcPts val="0"/>
+              </a:spcBef>
+              <a:spcAft>
+                <a:spcPts val="600"/>
               </a:spcAft>
             </a:pPr>
             <a:r>
@@ -8890,13 +9196,13 @@
                 <a:ea typeface="Calibri"/>
                 <a:cs typeface="Calibri"/>
               </a:rPr>
-              <a:t>6 Decide</a:t>
-            </a:r>
-          </a:p>
-          <a:p>
-            <a:pPr algn="l">
-              <a:lnSpc>
-                <a:spcPct val="112000"/>
+              <a:t>Image Agent</a:t>
+            </a:r>
+          </a:p>
+          <a:p>
+            <a:pPr algn="l">
+              <a:lnSpc>
+                <a:spcPct val="110000"/>
               </a:lnSpc>
               <a:spcBef>
                 <a:spcPts val="0"/>
@@ -8914,21 +9220,21 @@
                 <a:ea typeface="Calibri"/>
                 <a:cs typeface="Calibri"/>
               </a:rPr>
-              <a:t>Human publish intent</a:t>
-            </a:r>
-          </a:p>
-        </p:txBody>
-      </p:sp>
-      <p:sp>
-        <p:nvSpPr>
-          <p:cNvPr id="14" name="TextBox 13"/>
+              <a:t>Generates companion stills, cover art, and visual track assets.</a:t>
+            </a:r>
+          </a:p>
+        </p:txBody>
+      </p:sp>
+      <p:sp>
+        <p:nvSpPr>
+          <p:cNvPr id="20" name="TextBox 19"/>
           <p:cNvSpPr txBox="1"/>
           <p:nvPr/>
         </p:nvSpPr>
         <p:spPr>
           <a:xfrm>
             <a:off x="640080" y="6473952"/>
-            <a:ext cx="8412480" cy="219456"/>
+            <a:ext cx="8412480" cy="201168"/>
           </a:xfrm>
           <a:prstGeom prst="rect">
             <a:avLst/>
@@ -8941,7 +9247,7 @@
           <a:p>
             <a:pPr algn="l">
               <a:lnSpc>
-                <a:spcPct val="112000"/>
+                <a:spcPct val="110000"/>
               </a:lnSpc>
               <a:spcBef>
                 <a:spcPts val="0"/>
@@ -8966,14 +9272,14 @@
       </p:sp>
       <p:sp>
         <p:nvSpPr>
-          <p:cNvPr id="15" name="TextBox 14"/>
+          <p:cNvPr id="21" name="TextBox 20"/>
           <p:cNvSpPr txBox="1"/>
           <p:nvPr/>
         </p:nvSpPr>
         <p:spPr>
           <a:xfrm>
             <a:off x="10195560" y="6473952"/>
-            <a:ext cx="1371600" cy="219456"/>
+            <a:ext cx="1371600" cy="201168"/>
           </a:xfrm>
           <a:prstGeom prst="rect">
             <a:avLst/>
@@ -8986,7 +9292,7 @@
           <a:p>
             <a:pPr algn="r">
               <a:lnSpc>
-                <a:spcPct val="112000"/>
+                <a:spcPct val="110000"/>
               </a:lnSpc>
               <a:spcBef>
                 <a:spcPts val="0"/>
@@ -9043,8 +9349,8 @@
         </p:nvSpPr>
         <p:spPr>
           <a:xfrm>
-            <a:off x="640080" y="347472"/>
-            <a:ext cx="347472" cy="54864"/>
+            <a:off x="640080" y="329184"/>
+            <a:ext cx="329184" cy="54864"/>
           </a:xfrm>
           <a:prstGeom prst="rect">
             <a:avLst/>
@@ -9086,8 +9392,8 @@
         </p:nvSpPr>
         <p:spPr>
           <a:xfrm>
-            <a:off x="640080" y="475488"/>
-            <a:ext cx="10908792" cy="219456"/>
+            <a:off x="640080" y="457200"/>
+            <a:ext cx="10908792" cy="201168"/>
           </a:xfrm>
           <a:prstGeom prst="rect">
             <a:avLst/>
@@ -9100,7 +9406,7 @@
           <a:p>
             <a:pPr algn="l">
               <a:lnSpc>
-                <a:spcPct val="112000"/>
+                <a:spcPct val="110000"/>
               </a:lnSpc>
               <a:spcBef>
                 <a:spcPts val="0"/>
@@ -9118,7 +9424,7 @@
                 <a:ea typeface="Calibri"/>
                 <a:cs typeface="Calibri"/>
               </a:rPr>
-              <a:t>06  EXECUTION &amp; ROADMAP</a:t>
+              <a:t>06  AGENT HANDOFF</a:t>
             </a:r>
           </a:p>
         </p:txBody>
@@ -9131,8 +9437,8 @@
         </p:nvSpPr>
         <p:spPr>
           <a:xfrm>
-            <a:off x="640080" y="731520"/>
-            <a:ext cx="10908792" cy="365760"/>
+            <a:off x="640080" y="694944"/>
+            <a:ext cx="10908792" cy="347472"/>
           </a:xfrm>
           <a:prstGeom prst="rect">
             <a:avLst/>
@@ -9145,7 +9451,7 @@
           <a:p>
             <a:pPr algn="l">
               <a:lnSpc>
-                <a:spcPct val="112000"/>
+                <a:spcPct val="110000"/>
               </a:lnSpc>
               <a:spcBef>
                 <a:spcPts val="0"/>
@@ -9163,7 +9469,7 @@
                 <a:ea typeface="Calibri"/>
                 <a:cs typeface="Calibri"/>
               </a:rPr>
-              <a:t>Production-shaped stack — clear path beyond the hackathon</a:t>
+              <a:t>Who does what in sequence</a:t>
             </a:r>
           </a:p>
         </p:txBody>
@@ -9176,7 +9482,7 @@
         </p:nvSpPr>
         <p:spPr>
           <a:xfrm>
-            <a:off x="640080" y="1152144"/>
+            <a:off x="640080" y="1097280"/>
             <a:ext cx="10908792" cy="365760"/>
           </a:xfrm>
           <a:prstGeom prst="rect">
@@ -9190,17 +9496,17 @@
           <a:p>
             <a:pPr algn="l">
               <a:lnSpc>
-                <a:spcPct val="112000"/>
-              </a:lnSpc>
-              <a:spcBef>
-                <a:spcPts val="0"/>
-              </a:spcBef>
-              <a:spcAft>
-                <a:spcPts val="0"/>
-              </a:spcAft>
-            </a:pPr>
-            <a:r>
-              <a:rPr sz="1300" b="0">
+                <a:spcPct val="110000"/>
+              </a:lnSpc>
+              <a:spcBef>
+                <a:spcPts val="0"/>
+              </a:spcBef>
+              <a:spcAft>
+                <a:spcPts val="0"/>
+              </a:spcAft>
+            </a:pPr>
+            <a:r>
+              <a:rPr sz="1200" b="0">
                 <a:solidFill>
                   <a:srgbClr val="A1A1AA"/>
                 </a:solidFill>
@@ -9208,30 +9514,34 @@
                 <a:ea typeface="Calibri"/>
                 <a:cs typeface="Calibri"/>
               </a:rPr>
-              <a:t>Judged on innovation, technical execution, use of AI, real-world impact, and a working demo.</a:t>
-            </a:r>
-          </a:p>
-        </p:txBody>
-      </p:sp>
-      <p:sp>
-        <p:nvSpPr>
-          <p:cNvPr id="6" name="Rectangle 5"/>
+              <a:t>Search grounds truth → writers lock story → voice &amp; image produce → humans decide.</a:t>
+            </a:r>
+          </a:p>
+        </p:txBody>
+      </p:sp>
+      <p:sp>
+        <p:nvSpPr>
+          <p:cNvPr id="6" name="Rounded Rectangle 5"/>
           <p:cNvSpPr/>
           <p:nvPr/>
         </p:nvSpPr>
         <p:spPr>
           <a:xfrm>
-            <a:off x="640080" y="1691640"/>
-            <a:ext cx="73152" cy="4160520"/>
-          </a:xfrm>
-          <a:prstGeom prst="rect">
-            <a:avLst/>
+            <a:off x="640080" y="1664208"/>
+            <a:ext cx="2834640" cy="621792"/>
+          </a:xfrm>
+          <a:prstGeom prst="roundRect">
+            <a:avLst>
+              <a:gd name="adj" fmla="val 5000"/>
+            </a:avLst>
           </a:prstGeom>
           <a:solidFill>
-            <a:srgbClr val="E6194D"/>
+            <a:srgbClr val="22222C"/>
           </a:solidFill>
-          <a:ln>
-            <a:noFill/>
+          <a:ln w="12700">
+            <a:solidFill>
+              <a:srgbClr val="2E2E38"/>
+            </a:solidFill>
           </a:ln>
         </p:spPr>
         <p:style>
@@ -9249,10 +9559,31 @@
           </a:fontRef>
         </p:style>
         <p:txBody>
-          <a:bodyPr rtlCol="0" anchor="ctr"/>
-          <a:lstStyle/>
-          <a:p>
-            <a:pPr algn="ctr"/>
+          <a:bodyPr rtlCol="0" anchor="t" wrap="square" lIns="128016" rIns="109728" tIns="91440" bIns="73152"/>
+          <a:lstStyle/>
+          <a:p>
+            <a:pPr algn="l">
+              <a:lnSpc>
+                <a:spcPct val="110000"/>
+              </a:lnSpc>
+              <a:spcBef>
+                <a:spcPts val="0"/>
+              </a:spcBef>
+              <a:spcAft>
+                <a:spcPts val="0"/>
+              </a:spcAft>
+            </a:pPr>
+            <a:r>
+              <a:rPr sz="1200" b="1">
+                <a:solidFill>
+                  <a:srgbClr val="FFFFFF"/>
+                </a:solidFill>
+                <a:latin typeface="Calibri"/>
+                <a:ea typeface="Calibri"/>
+                <a:cs typeface="Calibri"/>
+              </a:rPr>
+              <a:t>Storytelling</a:t>
+            </a:r>
           </a:p>
         </p:txBody>
       </p:sp>
@@ -9264,8 +9595,8 @@
         </p:nvSpPr>
         <p:spPr>
           <a:xfrm>
-            <a:off x="713232" y="1691640"/>
-            <a:ext cx="3401568" cy="4160520"/>
+            <a:off x="3566160" y="1664208"/>
+            <a:ext cx="2194560" cy="621792"/>
           </a:xfrm>
           <a:prstGeom prst="roundRect">
             <a:avLst>
@@ -9296,207 +9627,44 @@
           </a:fontRef>
         </p:style>
         <p:txBody>
-          <a:bodyPr rtlCol="0" anchor="t" wrap="square" lIns="128016" rIns="128016" tIns="109728" bIns="91440"/>
-          <a:lstStyle/>
-          <a:p>
-            <a:pPr algn="l">
-              <a:lnSpc>
-                <a:spcPct val="112000"/>
-              </a:lnSpc>
-              <a:spcBef>
-                <a:spcPts val="0"/>
-              </a:spcBef>
-              <a:spcAft>
-                <a:spcPts val="800"/>
-              </a:spcAft>
-            </a:pPr>
-            <a:r>
-              <a:rPr sz="1400" b="1">
-                <a:solidFill>
-                  <a:srgbClr val="FFFFFF"/>
-                </a:solidFill>
-                <a:latin typeface="Calibri"/>
-                <a:ea typeface="Calibri"/>
-                <a:cs typeface="Calibri"/>
-              </a:rPr>
-              <a:t>Stack</a:t>
-            </a:r>
-          </a:p>
-          <a:p>
-            <a:pPr algn="l">
-              <a:lnSpc>
-                <a:spcPct val="112000"/>
-              </a:lnSpc>
-              <a:spcBef>
-                <a:spcPts val="0"/>
-              </a:spcBef>
-              <a:spcAft>
-                <a:spcPts val="500"/>
-              </a:spcAft>
-            </a:pPr>
-            <a:r>
-              <a:rPr sz="1200" b="0">
-                <a:solidFill>
-                  <a:srgbClr val="A1A1AA"/>
-                </a:solidFill>
-                <a:latin typeface="Calibri"/>
-                <a:ea typeface="Calibri"/>
-                <a:cs typeface="Calibri"/>
-              </a:rPr>
-              <a:t>•  React / TypeScript web studio</a:t>
-            </a:r>
-          </a:p>
-          <a:p>
-            <a:pPr algn="l">
-              <a:lnSpc>
-                <a:spcPct val="112000"/>
-              </a:lnSpc>
-              <a:spcBef>
-                <a:spcPts val="0"/>
-              </a:spcBef>
-              <a:spcAft>
-                <a:spcPts val="500"/>
-              </a:spcAft>
-            </a:pPr>
-            <a:r>
-              <a:rPr sz="1200" b="0">
-                <a:solidFill>
-                  <a:srgbClr val="A1A1AA"/>
-                </a:solidFill>
-                <a:latin typeface="Calibri"/>
-                <a:ea typeface="Calibri"/>
-                <a:cs typeface="Calibri"/>
-              </a:rPr>
-              <a:t>•  FastAPI + ARQ workers</a:t>
-            </a:r>
-          </a:p>
-          <a:p>
-            <a:pPr algn="l">
-              <a:lnSpc>
-                <a:spcPct val="112000"/>
-              </a:lnSpc>
-              <a:spcBef>
-                <a:spcPts val="0"/>
-              </a:spcBef>
-              <a:spcAft>
-                <a:spcPts val="500"/>
-              </a:spcAft>
-            </a:pPr>
-            <a:r>
-              <a:rPr sz="1200" b="0">
-                <a:solidFill>
-                  <a:srgbClr val="A1A1AA"/>
-                </a:solidFill>
-                <a:latin typeface="Calibri"/>
-                <a:ea typeface="Calibri"/>
-                <a:cs typeface="Calibri"/>
-              </a:rPr>
-              <a:t>•  LangGraph multi-agent pipeline</a:t>
-            </a:r>
-          </a:p>
-          <a:p>
-            <a:pPr algn="l">
-              <a:lnSpc>
-                <a:spcPct val="112000"/>
-              </a:lnSpc>
-              <a:spcBef>
-                <a:spcPts val="0"/>
-              </a:spcBef>
-              <a:spcAft>
-                <a:spcPts val="500"/>
-              </a:spcAft>
-            </a:pPr>
-            <a:r>
-              <a:rPr sz="1200" b="0">
-                <a:solidFill>
-                  <a:srgbClr val="A1A1AA"/>
-                </a:solidFill>
-                <a:latin typeface="Calibri"/>
-                <a:ea typeface="Calibri"/>
-                <a:cs typeface="Calibri"/>
-              </a:rPr>
-              <a:t>•  LLM · TTS · SFX · visuals</a:t>
-            </a:r>
-          </a:p>
-          <a:p>
-            <a:pPr algn="l">
-              <a:lnSpc>
-                <a:spcPct val="112000"/>
-              </a:lnSpc>
-              <a:spcBef>
-                <a:spcPts val="0"/>
-              </a:spcBef>
-              <a:spcAft>
-                <a:spcPts val="0"/>
-              </a:spcAft>
-            </a:pPr>
-            <a:r>
-              <a:rPr sz="1200" b="0">
-                <a:solidFill>
-                  <a:srgbClr val="A1A1AA"/>
-                </a:solidFill>
-                <a:latin typeface="Calibri"/>
-                <a:ea typeface="Calibri"/>
-                <a:cs typeface="Calibri"/>
-              </a:rPr>
-              <a:t>•  Postgres · Redis · object storage</a:t>
-            </a:r>
-          </a:p>
-        </p:txBody>
-      </p:sp>
-      <p:sp>
-        <p:nvSpPr>
-          <p:cNvPr id="8" name="Rectangle 7"/>
+          <a:bodyPr rtlCol="0" anchor="t" wrap="square" lIns="128016" rIns="109728" tIns="91440" bIns="73152"/>
+          <a:lstStyle/>
+          <a:p>
+            <a:pPr algn="l">
+              <a:lnSpc>
+                <a:spcPct val="110000"/>
+              </a:lnSpc>
+              <a:spcBef>
+                <a:spcPts val="0"/>
+              </a:spcBef>
+              <a:spcAft>
+                <a:spcPts val="0"/>
+              </a:spcAft>
+            </a:pPr>
+            <a:r>
+              <a:rPr sz="1100" b="1">
+                <a:solidFill>
+                  <a:srgbClr val="E6194D"/>
+                </a:solidFill>
+                <a:latin typeface="Calibri"/>
+                <a:ea typeface="Calibri"/>
+                <a:cs typeface="Calibri"/>
+              </a:rPr>
+              <a:t>Chat director</a:t>
+            </a:r>
+          </a:p>
+        </p:txBody>
+      </p:sp>
+      <p:sp>
+        <p:nvSpPr>
+          <p:cNvPr id="8" name="Rounded Rectangle 7"/>
           <p:cNvSpPr/>
           <p:nvPr/>
         </p:nvSpPr>
         <p:spPr>
           <a:xfrm>
-            <a:off x="4315968" y="1691640"/>
-            <a:ext cx="73152" cy="4160520"/>
-          </a:xfrm>
-          <a:prstGeom prst="rect">
-            <a:avLst/>
-          </a:prstGeom>
-          <a:solidFill>
-            <a:srgbClr val="E6194D"/>
-          </a:solidFill>
-          <a:ln>
-            <a:noFill/>
-          </a:ln>
-        </p:spPr>
-        <p:style>
-          <a:lnRef idx="1">
-            <a:schemeClr val="accent1"/>
-          </a:lnRef>
-          <a:fillRef idx="3">
-            <a:schemeClr val="accent1"/>
-          </a:fillRef>
-          <a:effectRef idx="2">
-            <a:schemeClr val="accent1"/>
-          </a:effectRef>
-          <a:fontRef idx="minor">
-            <a:schemeClr val="lt1"/>
-          </a:fontRef>
-        </p:style>
-        <p:txBody>
-          <a:bodyPr rtlCol="0" anchor="ctr"/>
-          <a:lstStyle/>
-          <a:p>
-            <a:pPr algn="ctr"/>
-          </a:p>
-        </p:txBody>
-      </p:sp>
-      <p:sp>
-        <p:nvSpPr>
-          <p:cNvPr id="9" name="Rounded Rectangle 8"/>
-          <p:cNvSpPr/>
-          <p:nvPr/>
-        </p:nvSpPr>
-        <p:spPr>
-          <a:xfrm>
-            <a:off x="4389120" y="1691640"/>
-            <a:ext cx="3401568" cy="4160520"/>
+            <a:off x="5852160" y="1664208"/>
+            <a:ext cx="5669280" cy="621792"/>
           </a:xfrm>
           <a:prstGeom prst="roundRect">
             <a:avLst>
@@ -9527,46 +9695,22 @@
           </a:fontRef>
         </p:style>
         <p:txBody>
-          <a:bodyPr rtlCol="0" anchor="t" wrap="square" lIns="128016" rIns="128016" tIns="109728" bIns="91440"/>
-          <a:lstStyle/>
-          <a:p>
-            <a:pPr algn="l">
-              <a:lnSpc>
-                <a:spcPct val="112000"/>
-              </a:lnSpc>
-              <a:spcBef>
-                <a:spcPts val="0"/>
-              </a:spcBef>
-              <a:spcAft>
-                <a:spcPts val="800"/>
-              </a:spcAft>
-            </a:pPr>
-            <a:r>
-              <a:rPr sz="1400" b="1">
-                <a:solidFill>
-                  <a:srgbClr val="FFFFFF"/>
-                </a:solidFill>
-                <a:latin typeface="Calibri"/>
-                <a:ea typeface="Calibri"/>
-                <a:cs typeface="Calibri"/>
-              </a:rPr>
-              <a:t>Now (36h)</a:t>
-            </a:r>
-          </a:p>
-          <a:p>
-            <a:pPr algn="l">
-              <a:lnSpc>
-                <a:spcPct val="112000"/>
-              </a:lnSpc>
-              <a:spcBef>
-                <a:spcPts val="0"/>
-              </a:spcBef>
-              <a:spcAft>
-                <a:spcPts val="500"/>
-              </a:spcAft>
-            </a:pPr>
-            <a:r>
-              <a:rPr sz="1200" b="0">
+          <a:bodyPr rtlCol="0" anchor="t" wrap="square" lIns="128016" rIns="109728" tIns="91440" bIns="73152"/>
+          <a:lstStyle/>
+          <a:p>
+            <a:pPr algn="l">
+              <a:lnSpc>
+                <a:spcPct val="110000"/>
+              </a:lnSpc>
+              <a:spcBef>
+                <a:spcPts val="0"/>
+              </a:spcBef>
+              <a:spcAft>
+                <a:spcPts val="0"/>
+              </a:spcAft>
+            </a:pPr>
+            <a:r>
+              <a:rPr sz="1100" b="0">
                 <a:solidFill>
                   <a:srgbClr val="A1A1AA"/>
                 </a:solidFill>
@@ -9574,126 +9718,34 @@
                 <a:ea typeface="Calibri"/>
                 <a:cs typeface="Calibri"/>
               </a:rPr>
-              <a:t>•  E2E agent pipeline + editor</a:t>
-            </a:r>
-          </a:p>
-          <a:p>
-            <a:pPr algn="l">
-              <a:lnSpc>
-                <a:spcPct val="112000"/>
-              </a:lnSpc>
-              <a:spcBef>
-                <a:spcPts val="0"/>
-              </a:spcBef>
-              <a:spcAft>
-                <a:spcPts val="500"/>
-              </a:spcAft>
-            </a:pPr>
-            <a:r>
-              <a:rPr sz="1200" b="0">
-                <a:solidFill>
-                  <a:srgbClr val="A1A1AA"/>
-                </a:solidFill>
-                <a:latin typeface="Calibri"/>
-                <a:ea typeface="Calibri"/>
-                <a:cs typeface="Calibri"/>
-              </a:rPr>
-              <a:t>•  Wow-audio demo path</a:t>
-            </a:r>
-          </a:p>
-          <a:p>
-            <a:pPr algn="l">
-              <a:lnSpc>
-                <a:spcPct val="112000"/>
-              </a:lnSpc>
-              <a:spcBef>
-                <a:spcPts val="0"/>
-              </a:spcBef>
-              <a:spcAft>
-                <a:spcPts val="500"/>
-              </a:spcAft>
-            </a:pPr>
-            <a:r>
-              <a:rPr sz="1200" b="0">
-                <a:solidFill>
-                  <a:srgbClr val="A1A1AA"/>
-                </a:solidFill>
-                <a:latin typeface="Calibri"/>
-                <a:ea typeface="Calibri"/>
-                <a:cs typeface="Calibri"/>
-              </a:rPr>
-              <a:t>•  Structural audit + persona sim</a:t>
-            </a:r>
-          </a:p>
-          <a:p>
-            <a:pPr algn="l">
-              <a:lnSpc>
-                <a:spcPct val="112000"/>
-              </a:lnSpc>
-              <a:spcBef>
-                <a:spcPts val="0"/>
-              </a:spcBef>
-              <a:spcAft>
-                <a:spcPts val="500"/>
-              </a:spcAft>
-            </a:pPr>
-            <a:r>
-              <a:rPr sz="1200" b="0">
-                <a:solidFill>
-                  <a:srgbClr val="A1A1AA"/>
-                </a:solidFill>
-                <a:latin typeface="Calibri"/>
-                <a:ea typeface="Calibri"/>
-                <a:cs typeface="Calibri"/>
-              </a:rPr>
-              <a:t>•  Human approval gates</a:t>
-            </a:r>
-          </a:p>
-          <a:p>
-            <a:pPr algn="l">
-              <a:lnSpc>
-                <a:spcPct val="112000"/>
-              </a:lnSpc>
-              <a:spcBef>
-                <a:spcPts val="0"/>
-              </a:spcBef>
-              <a:spcAft>
-                <a:spcPts val="0"/>
-              </a:spcAft>
-            </a:pPr>
-            <a:r>
-              <a:rPr sz="1200" b="0">
-                <a:solidFill>
-                  <a:srgbClr val="A1A1AA"/>
-                </a:solidFill>
-                <a:latin typeface="Calibri"/>
-                <a:ea typeface="Calibri"/>
-                <a:cs typeface="Calibri"/>
-              </a:rPr>
-              <a:t>•  Hindi + English series support</a:t>
-            </a:r>
-          </a:p>
-        </p:txBody>
-      </p:sp>
-      <p:sp>
-        <p:nvSpPr>
-          <p:cNvPr id="10" name="Rectangle 9"/>
+              <a:t>Plot pitches, series intent, route generate / rewrite</a:t>
+            </a:r>
+          </a:p>
+        </p:txBody>
+      </p:sp>
+      <p:sp>
+        <p:nvSpPr>
+          <p:cNvPr id="9" name="Rounded Rectangle 8"/>
           <p:cNvSpPr/>
           <p:nvPr/>
         </p:nvSpPr>
         <p:spPr>
           <a:xfrm>
-            <a:off x="7991856" y="1691640"/>
-            <a:ext cx="73152" cy="4160520"/>
-          </a:xfrm>
-          <a:prstGeom prst="rect">
-            <a:avLst/>
+            <a:off x="640080" y="2359152"/>
+            <a:ext cx="2834640" cy="621792"/>
+          </a:xfrm>
+          <a:prstGeom prst="roundRect">
+            <a:avLst>
+              <a:gd name="adj" fmla="val 5000"/>
+            </a:avLst>
           </a:prstGeom>
           <a:solidFill>
-            <a:srgbClr val="E6194D"/>
+            <a:srgbClr val="22222C"/>
           </a:solidFill>
-          <a:ln>
-            <a:noFill/>
+          <a:ln w="12700">
+            <a:solidFill>
+              <a:srgbClr val="2E2E38"/>
+            </a:solidFill>
           </a:ln>
         </p:spPr>
         <p:style>
@@ -9711,23 +9763,44 @@
           </a:fontRef>
         </p:style>
         <p:txBody>
-          <a:bodyPr rtlCol="0" anchor="ctr"/>
-          <a:lstStyle/>
-          <a:p>
-            <a:pPr algn="ctr"/>
-          </a:p>
-        </p:txBody>
-      </p:sp>
-      <p:sp>
-        <p:nvSpPr>
-          <p:cNvPr id="11" name="Rounded Rectangle 10"/>
+          <a:bodyPr rtlCol="0" anchor="t" wrap="square" lIns="128016" rIns="109728" tIns="91440" bIns="73152"/>
+          <a:lstStyle/>
+          <a:p>
+            <a:pPr algn="l">
+              <a:lnSpc>
+                <a:spcPct val="110000"/>
+              </a:lnSpc>
+              <a:spcBef>
+                <a:spcPts val="0"/>
+              </a:spcBef>
+              <a:spcAft>
+                <a:spcPts val="0"/>
+              </a:spcAft>
+            </a:pPr>
+            <a:r>
+              <a:rPr sz="1200" b="1">
+                <a:solidFill>
+                  <a:srgbClr val="FFFFFF"/>
+                </a:solidFill>
+                <a:latin typeface="Calibri"/>
+                <a:ea typeface="Calibri"/>
+                <a:cs typeface="Calibri"/>
+              </a:rPr>
+              <a:t>Scripting &amp; Search</a:t>
+            </a:r>
+          </a:p>
+        </p:txBody>
+      </p:sp>
+      <p:sp>
+        <p:nvSpPr>
+          <p:cNvPr id="10" name="Rounded Rectangle 9"/>
           <p:cNvSpPr/>
           <p:nvPr/>
         </p:nvSpPr>
         <p:spPr>
           <a:xfrm>
-            <a:off x="8065008" y="1691640"/>
-            <a:ext cx="3401568" cy="4160520"/>
+            <a:off x="3566160" y="2359152"/>
+            <a:ext cx="2194560" cy="621792"/>
           </a:xfrm>
           <a:prstGeom prst="roundRect">
             <a:avLst>
@@ -9758,22 +9831,158 @@
           </a:fontRef>
         </p:style>
         <p:txBody>
-          <a:bodyPr rtlCol="0" anchor="t" wrap="square" lIns="128016" rIns="128016" tIns="109728" bIns="91440"/>
-          <a:lstStyle/>
-          <a:p>
-            <a:pPr algn="l">
-              <a:lnSpc>
-                <a:spcPct val="112000"/>
-              </a:lnSpc>
-              <a:spcBef>
-                <a:spcPts val="0"/>
-              </a:spcBef>
-              <a:spcAft>
-                <a:spcPts val="800"/>
-              </a:spcAft>
-            </a:pPr>
-            <a:r>
-              <a:rPr sz="1400" b="1">
+          <a:bodyPr rtlCol="0" anchor="t" wrap="square" lIns="128016" rIns="109728" tIns="91440" bIns="73152"/>
+          <a:lstStyle/>
+          <a:p>
+            <a:pPr algn="l">
+              <a:lnSpc>
+                <a:spcPct val="110000"/>
+              </a:lnSpc>
+              <a:spcBef>
+                <a:spcPts val="0"/>
+              </a:spcBef>
+              <a:spcAft>
+                <a:spcPts val="0"/>
+              </a:spcAft>
+            </a:pPr>
+            <a:r>
+              <a:rPr sz="1100" b="1">
+                <a:solidFill>
+                  <a:srgbClr val="E6194D"/>
+                </a:solidFill>
+                <a:latin typeface="Calibri"/>
+                <a:ea typeface="Calibri"/>
+                <a:cs typeface="Calibri"/>
+              </a:rPr>
+              <a:t>RAG + crawl</a:t>
+            </a:r>
+          </a:p>
+        </p:txBody>
+      </p:sp>
+      <p:sp>
+        <p:nvSpPr>
+          <p:cNvPr id="11" name="Rounded Rectangle 10"/>
+          <p:cNvSpPr/>
+          <p:nvPr/>
+        </p:nvSpPr>
+        <p:spPr>
+          <a:xfrm>
+            <a:off x="5852160" y="2359152"/>
+            <a:ext cx="5669280" cy="621792"/>
+          </a:xfrm>
+          <a:prstGeom prst="roundRect">
+            <a:avLst>
+              <a:gd name="adj" fmla="val 5000"/>
+            </a:avLst>
+          </a:prstGeom>
+          <a:solidFill>
+            <a:srgbClr val="18181F"/>
+          </a:solidFill>
+          <a:ln w="12700">
+            <a:solidFill>
+              <a:srgbClr val="2E2E38"/>
+            </a:solidFill>
+          </a:ln>
+        </p:spPr>
+        <p:style>
+          <a:lnRef idx="1">
+            <a:schemeClr val="accent1"/>
+          </a:lnRef>
+          <a:fillRef idx="3">
+            <a:schemeClr val="accent1"/>
+          </a:fillRef>
+          <a:effectRef idx="2">
+            <a:schemeClr val="accent1"/>
+          </a:effectRef>
+          <a:fontRef idx="minor">
+            <a:schemeClr val="lt1"/>
+          </a:fontRef>
+        </p:style>
+        <p:txBody>
+          <a:bodyPr rtlCol="0" anchor="t" wrap="square" lIns="128016" rIns="109728" tIns="91440" bIns="73152"/>
+          <a:lstStyle/>
+          <a:p>
+            <a:pPr algn="l">
+              <a:lnSpc>
+                <a:spcPct val="110000"/>
+              </a:lnSpc>
+              <a:spcBef>
+                <a:spcPts val="0"/>
+              </a:spcBef>
+              <a:spcAft>
+                <a:spcPts val="0"/>
+              </a:spcAft>
+            </a:pPr>
+            <a:r>
+              <a:rPr sz="1100" b="0">
+                <a:solidFill>
+                  <a:srgbClr val="A1A1AA"/>
+                </a:solidFill>
+                <a:latin typeface="Calibri"/>
+                <a:ea typeface="Calibri"/>
+                <a:cs typeface="Calibri"/>
+              </a:rPr>
+              <a:t>Databricks chunks · Tavily research · SOURCE assembly</a:t>
+            </a:r>
+          </a:p>
+        </p:txBody>
+      </p:sp>
+      <p:sp>
+        <p:nvSpPr>
+          <p:cNvPr id="12" name="Rounded Rectangle 11"/>
+          <p:cNvSpPr/>
+          <p:nvPr/>
+        </p:nvSpPr>
+        <p:spPr>
+          <a:xfrm>
+            <a:off x="640080" y="3054096"/>
+            <a:ext cx="2834640" cy="621792"/>
+          </a:xfrm>
+          <a:prstGeom prst="roundRect">
+            <a:avLst>
+              <a:gd name="adj" fmla="val 5000"/>
+            </a:avLst>
+          </a:prstGeom>
+          <a:solidFill>
+            <a:srgbClr val="22222C"/>
+          </a:solidFill>
+          <a:ln w="12700">
+            <a:solidFill>
+              <a:srgbClr val="2E2E38"/>
+            </a:solidFill>
+          </a:ln>
+        </p:spPr>
+        <p:style>
+          <a:lnRef idx="1">
+            <a:schemeClr val="accent1"/>
+          </a:lnRef>
+          <a:fillRef idx="3">
+            <a:schemeClr val="accent1"/>
+          </a:fillRef>
+          <a:effectRef idx="2">
+            <a:schemeClr val="accent1"/>
+          </a:effectRef>
+          <a:fontRef idx="minor">
+            <a:schemeClr val="lt1"/>
+          </a:fontRef>
+        </p:style>
+        <p:txBody>
+          <a:bodyPr rtlCol="0" anchor="t" wrap="square" lIns="128016" rIns="109728" tIns="91440" bIns="73152"/>
+          <a:lstStyle/>
+          <a:p>
+            <a:pPr algn="l">
+              <a:lnSpc>
+                <a:spcPct val="110000"/>
+              </a:lnSpc>
+              <a:spcBef>
+                <a:spcPts val="0"/>
+              </a:spcBef>
+              <a:spcAft>
+                <a:spcPts val="0"/>
+              </a:spcAft>
+            </a:pPr>
+            <a:r>
+              <a:rPr sz="1200" b="1">
                 <a:solidFill>
                   <a:srgbClr val="FFFFFF"/>
                 </a:solidFill>
@@ -9781,23 +9990,135 @@
                 <a:ea typeface="Calibri"/>
                 <a:cs typeface="Calibri"/>
               </a:rPr>
-              <a:t>Next</a:t>
-            </a:r>
-          </a:p>
-          <a:p>
-            <a:pPr algn="l">
-              <a:lnSpc>
-                <a:spcPct val="112000"/>
-              </a:lnSpc>
-              <a:spcBef>
-                <a:spcPts val="0"/>
-              </a:spcBef>
-              <a:spcAft>
-                <a:spcPts val="500"/>
-              </a:spcAft>
-            </a:pPr>
-            <a:r>
-              <a:rPr sz="1200" b="0">
+              <a:t>Narrative + Script Writer</a:t>
+            </a:r>
+          </a:p>
+        </p:txBody>
+      </p:sp>
+      <p:sp>
+        <p:nvSpPr>
+          <p:cNvPr id="13" name="Rounded Rectangle 12"/>
+          <p:cNvSpPr/>
+          <p:nvPr/>
+        </p:nvSpPr>
+        <p:spPr>
+          <a:xfrm>
+            <a:off x="3566160" y="3054096"/>
+            <a:ext cx="2194560" cy="621792"/>
+          </a:xfrm>
+          <a:prstGeom prst="roundRect">
+            <a:avLst>
+              <a:gd name="adj" fmla="val 5000"/>
+            </a:avLst>
+          </a:prstGeom>
+          <a:solidFill>
+            <a:srgbClr val="18181F"/>
+          </a:solidFill>
+          <a:ln w="12700">
+            <a:solidFill>
+              <a:srgbClr val="2E2E38"/>
+            </a:solidFill>
+          </a:ln>
+        </p:spPr>
+        <p:style>
+          <a:lnRef idx="1">
+            <a:schemeClr val="accent1"/>
+          </a:lnRef>
+          <a:fillRef idx="3">
+            <a:schemeClr val="accent1"/>
+          </a:fillRef>
+          <a:effectRef idx="2">
+            <a:schemeClr val="accent1"/>
+          </a:effectRef>
+          <a:fontRef idx="minor">
+            <a:schemeClr val="lt1"/>
+          </a:fontRef>
+        </p:style>
+        <p:txBody>
+          <a:bodyPr rtlCol="0" anchor="t" wrap="square" lIns="128016" rIns="109728" tIns="91440" bIns="73152"/>
+          <a:lstStyle/>
+          <a:p>
+            <a:pPr algn="l">
+              <a:lnSpc>
+                <a:spcPct val="110000"/>
+              </a:lnSpc>
+              <a:spcBef>
+                <a:spcPts val="0"/>
+              </a:spcBef>
+              <a:spcAft>
+                <a:spcPts val="0"/>
+              </a:spcAft>
+            </a:pPr>
+            <a:r>
+              <a:rPr sz="1100" b="1">
+                <a:solidFill>
+                  <a:srgbClr val="E6194D"/>
+                </a:solidFill>
+                <a:latin typeface="Calibri"/>
+                <a:ea typeface="Calibri"/>
+                <a:cs typeface="Calibri"/>
+              </a:rPr>
+              <a:t>Script package</a:t>
+            </a:r>
+          </a:p>
+        </p:txBody>
+      </p:sp>
+      <p:sp>
+        <p:nvSpPr>
+          <p:cNvPr id="14" name="Rounded Rectangle 13"/>
+          <p:cNvSpPr/>
+          <p:nvPr/>
+        </p:nvSpPr>
+        <p:spPr>
+          <a:xfrm>
+            <a:off x="5852160" y="3054096"/>
+            <a:ext cx="5669280" cy="621792"/>
+          </a:xfrm>
+          <a:prstGeom prst="roundRect">
+            <a:avLst>
+              <a:gd name="adj" fmla="val 5000"/>
+            </a:avLst>
+          </a:prstGeom>
+          <a:solidFill>
+            <a:srgbClr val="18181F"/>
+          </a:solidFill>
+          <a:ln w="12700">
+            <a:solidFill>
+              <a:srgbClr val="2E2E38"/>
+            </a:solidFill>
+          </a:ln>
+        </p:spPr>
+        <p:style>
+          <a:lnRef idx="1">
+            <a:schemeClr val="accent1"/>
+          </a:lnRef>
+          <a:fillRef idx="3">
+            <a:schemeClr val="accent1"/>
+          </a:fillRef>
+          <a:effectRef idx="2">
+            <a:schemeClr val="accent1"/>
+          </a:effectRef>
+          <a:fontRef idx="minor">
+            <a:schemeClr val="lt1"/>
+          </a:fontRef>
+        </p:style>
+        <p:txBody>
+          <a:bodyPr rtlCol="0" anchor="t" wrap="square" lIns="128016" rIns="109728" tIns="91440" bIns="73152"/>
+          <a:lstStyle/>
+          <a:p>
+            <a:pPr algn="l">
+              <a:lnSpc>
+                <a:spcPct val="110000"/>
+              </a:lnSpc>
+              <a:spcBef>
+                <a:spcPts val="0"/>
+              </a:spcBef>
+              <a:spcAft>
+                <a:spcPts val="0"/>
+              </a:spcAft>
+            </a:pPr>
+            <a:r>
+              <a:rPr sz="1100" b="0">
                 <a:solidFill>
                   <a:srgbClr val="A1A1AA"/>
                 </a:solidFill>
@@ -9805,23 +10126,203 @@
                 <a:ea typeface="Calibri"/>
                 <a:cs typeface="Calibri"/>
               </a:rPr>
-              <a:t>•  Calibrate sims on preview listens</a:t>
-            </a:r>
-          </a:p>
-          <a:p>
-            <a:pPr algn="l">
-              <a:lnSpc>
-                <a:spcPct val="112000"/>
-              </a:lnSpc>
-              <a:spcBef>
-                <a:spcPts val="0"/>
-              </a:spcBef>
-              <a:spcAft>
-                <a:spcPts val="500"/>
-              </a:spcAft>
-            </a:pPr>
-            <a:r>
-              <a:rPr sz="1200" b="0">
+              <a:t>Narration config + multi-part screenplay + cliffs</a:t>
+            </a:r>
+          </a:p>
+        </p:txBody>
+      </p:sp>
+      <p:sp>
+        <p:nvSpPr>
+          <p:cNvPr id="15" name="Rounded Rectangle 14"/>
+          <p:cNvSpPr/>
+          <p:nvPr/>
+        </p:nvSpPr>
+        <p:spPr>
+          <a:xfrm>
+            <a:off x="640080" y="3749040"/>
+            <a:ext cx="2834640" cy="621792"/>
+          </a:xfrm>
+          <a:prstGeom prst="roundRect">
+            <a:avLst>
+              <a:gd name="adj" fmla="val 5000"/>
+            </a:avLst>
+          </a:prstGeom>
+          <a:solidFill>
+            <a:srgbClr val="22222C"/>
+          </a:solidFill>
+          <a:ln w="12700">
+            <a:solidFill>
+              <a:srgbClr val="2E2E38"/>
+            </a:solidFill>
+          </a:ln>
+        </p:spPr>
+        <p:style>
+          <a:lnRef idx="1">
+            <a:schemeClr val="accent1"/>
+          </a:lnRef>
+          <a:fillRef idx="3">
+            <a:schemeClr val="accent1"/>
+          </a:fillRef>
+          <a:effectRef idx="2">
+            <a:schemeClr val="accent1"/>
+          </a:effectRef>
+          <a:fontRef idx="minor">
+            <a:schemeClr val="lt1"/>
+          </a:fontRef>
+        </p:style>
+        <p:txBody>
+          <a:bodyPr rtlCol="0" anchor="t" wrap="square" lIns="128016" rIns="109728" tIns="91440" bIns="73152"/>
+          <a:lstStyle/>
+          <a:p>
+            <a:pPr algn="l">
+              <a:lnSpc>
+                <a:spcPct val="110000"/>
+              </a:lnSpc>
+              <a:spcBef>
+                <a:spcPts val="0"/>
+              </a:spcBef>
+              <a:spcAft>
+                <a:spcPts val="0"/>
+              </a:spcAft>
+            </a:pPr>
+            <a:r>
+              <a:rPr sz="1200" b="1">
+                <a:solidFill>
+                  <a:srgbClr val="FFFFFF"/>
+                </a:solidFill>
+                <a:latin typeface="Calibri"/>
+                <a:ea typeface="Calibri"/>
+                <a:cs typeface="Calibri"/>
+              </a:rPr>
+              <a:t>Voice</a:t>
+            </a:r>
+          </a:p>
+        </p:txBody>
+      </p:sp>
+      <p:sp>
+        <p:nvSpPr>
+          <p:cNvPr id="16" name="Rounded Rectangle 15"/>
+          <p:cNvSpPr/>
+          <p:nvPr/>
+        </p:nvSpPr>
+        <p:spPr>
+          <a:xfrm>
+            <a:off x="3566160" y="3749040"/>
+            <a:ext cx="2194560" cy="621792"/>
+          </a:xfrm>
+          <a:prstGeom prst="roundRect">
+            <a:avLst>
+              <a:gd name="adj" fmla="val 5000"/>
+            </a:avLst>
+          </a:prstGeom>
+          <a:solidFill>
+            <a:srgbClr val="18181F"/>
+          </a:solidFill>
+          <a:ln w="12700">
+            <a:solidFill>
+              <a:srgbClr val="2E2E38"/>
+            </a:solidFill>
+          </a:ln>
+        </p:spPr>
+        <p:style>
+          <a:lnRef idx="1">
+            <a:schemeClr val="accent1"/>
+          </a:lnRef>
+          <a:fillRef idx="3">
+            <a:schemeClr val="accent1"/>
+          </a:fillRef>
+          <a:effectRef idx="2">
+            <a:schemeClr val="accent1"/>
+          </a:effectRef>
+          <a:fontRef idx="minor">
+            <a:schemeClr val="lt1"/>
+          </a:fontRef>
+        </p:style>
+        <p:txBody>
+          <a:bodyPr rtlCol="0" anchor="t" wrap="square" lIns="128016" rIns="109728" tIns="91440" bIns="73152"/>
+          <a:lstStyle/>
+          <a:p>
+            <a:pPr algn="l">
+              <a:lnSpc>
+                <a:spcPct val="110000"/>
+              </a:lnSpc>
+              <a:spcBef>
+                <a:spcPts val="0"/>
+              </a:spcBef>
+              <a:spcAft>
+                <a:spcPts val="0"/>
+              </a:spcAft>
+            </a:pPr>
+            <a:r>
+              <a:rPr sz="1100" b="1">
+                <a:solidFill>
+                  <a:srgbClr val="E6194D"/>
+                </a:solidFill>
+                <a:latin typeface="Calibri"/>
+                <a:ea typeface="Calibri"/>
+                <a:cs typeface="Calibri"/>
+              </a:rPr>
+              <a:t>Audio stems</a:t>
+            </a:r>
+          </a:p>
+        </p:txBody>
+      </p:sp>
+      <p:sp>
+        <p:nvSpPr>
+          <p:cNvPr id="17" name="Rounded Rectangle 16"/>
+          <p:cNvSpPr/>
+          <p:nvPr/>
+        </p:nvSpPr>
+        <p:spPr>
+          <a:xfrm>
+            <a:off x="5852160" y="3749040"/>
+            <a:ext cx="5669280" cy="621792"/>
+          </a:xfrm>
+          <a:prstGeom prst="roundRect">
+            <a:avLst>
+              <a:gd name="adj" fmla="val 5000"/>
+            </a:avLst>
+          </a:prstGeom>
+          <a:solidFill>
+            <a:srgbClr val="18181F"/>
+          </a:solidFill>
+          <a:ln w="12700">
+            <a:solidFill>
+              <a:srgbClr val="2E2E38"/>
+            </a:solidFill>
+          </a:ln>
+        </p:spPr>
+        <p:style>
+          <a:lnRef idx="1">
+            <a:schemeClr val="accent1"/>
+          </a:lnRef>
+          <a:fillRef idx="3">
+            <a:schemeClr val="accent1"/>
+          </a:fillRef>
+          <a:effectRef idx="2">
+            <a:schemeClr val="accent1"/>
+          </a:effectRef>
+          <a:fontRef idx="minor">
+            <a:schemeClr val="lt1"/>
+          </a:fontRef>
+        </p:style>
+        <p:txBody>
+          <a:bodyPr rtlCol="0" anchor="t" wrap="square" lIns="128016" rIns="109728" tIns="91440" bIns="73152"/>
+          <a:lstStyle/>
+          <a:p>
+            <a:pPr algn="l">
+              <a:lnSpc>
+                <a:spcPct val="110000"/>
+              </a:lnSpc>
+              <a:spcBef>
+                <a:spcPts val="0"/>
+              </a:spcBef>
+              <a:spcAft>
+                <a:spcPts val="0"/>
+              </a:spcAft>
+            </a:pPr>
+            <a:r>
+              <a:rPr sz="1100" b="0">
                 <a:solidFill>
                   <a:srgbClr val="A1A1AA"/>
                 </a:solidFill>
@@ -9829,23 +10330,203 @@
                 <a:ea typeface="Calibri"/>
                 <a:cs typeface="Calibri"/>
               </a:rPr>
-              <a:t>•  Richer dialect packs for Bharat</a:t>
-            </a:r>
-          </a:p>
-          <a:p>
-            <a:pPr algn="l">
-              <a:lnSpc>
-                <a:spcPct val="112000"/>
-              </a:lnSpc>
-              <a:spcBef>
-                <a:spcPts val="0"/>
-              </a:spcBef>
-              <a:spcAft>
-                <a:spcPts val="500"/>
-              </a:spcAft>
-            </a:pPr>
-            <a:r>
-              <a:rPr sz="1200" b="0">
+              <a:t>Cast match (Vector Search) · TTS · SFX mix</a:t>
+            </a:r>
+          </a:p>
+        </p:txBody>
+      </p:sp>
+      <p:sp>
+        <p:nvSpPr>
+          <p:cNvPr id="18" name="Rounded Rectangle 17"/>
+          <p:cNvSpPr/>
+          <p:nvPr/>
+        </p:nvSpPr>
+        <p:spPr>
+          <a:xfrm>
+            <a:off x="640080" y="4443984"/>
+            <a:ext cx="2834640" cy="621792"/>
+          </a:xfrm>
+          <a:prstGeom prst="roundRect">
+            <a:avLst>
+              <a:gd name="adj" fmla="val 5000"/>
+            </a:avLst>
+          </a:prstGeom>
+          <a:solidFill>
+            <a:srgbClr val="22222C"/>
+          </a:solidFill>
+          <a:ln w="12700">
+            <a:solidFill>
+              <a:srgbClr val="2E2E38"/>
+            </a:solidFill>
+          </a:ln>
+        </p:spPr>
+        <p:style>
+          <a:lnRef idx="1">
+            <a:schemeClr val="accent1"/>
+          </a:lnRef>
+          <a:fillRef idx="3">
+            <a:schemeClr val="accent1"/>
+          </a:fillRef>
+          <a:effectRef idx="2">
+            <a:schemeClr val="accent1"/>
+          </a:effectRef>
+          <a:fontRef idx="minor">
+            <a:schemeClr val="lt1"/>
+          </a:fontRef>
+        </p:style>
+        <p:txBody>
+          <a:bodyPr rtlCol="0" anchor="t" wrap="square" lIns="128016" rIns="109728" tIns="91440" bIns="73152"/>
+          <a:lstStyle/>
+          <a:p>
+            <a:pPr algn="l">
+              <a:lnSpc>
+                <a:spcPct val="110000"/>
+              </a:lnSpc>
+              <a:spcBef>
+                <a:spcPts val="0"/>
+              </a:spcBef>
+              <a:spcAft>
+                <a:spcPts val="0"/>
+              </a:spcAft>
+            </a:pPr>
+            <a:r>
+              <a:rPr sz="1200" b="1">
+                <a:solidFill>
+                  <a:srgbClr val="FFFFFF"/>
+                </a:solidFill>
+                <a:latin typeface="Calibri"/>
+                <a:ea typeface="Calibri"/>
+                <a:cs typeface="Calibri"/>
+              </a:rPr>
+              <a:t>Director + Image</a:t>
+            </a:r>
+          </a:p>
+        </p:txBody>
+      </p:sp>
+      <p:sp>
+        <p:nvSpPr>
+          <p:cNvPr id="19" name="Rounded Rectangle 18"/>
+          <p:cNvSpPr/>
+          <p:nvPr/>
+        </p:nvSpPr>
+        <p:spPr>
+          <a:xfrm>
+            <a:off x="3566160" y="4443984"/>
+            <a:ext cx="2194560" cy="621792"/>
+          </a:xfrm>
+          <a:prstGeom prst="roundRect">
+            <a:avLst>
+              <a:gd name="adj" fmla="val 5000"/>
+            </a:avLst>
+          </a:prstGeom>
+          <a:solidFill>
+            <a:srgbClr val="18181F"/>
+          </a:solidFill>
+          <a:ln w="12700">
+            <a:solidFill>
+              <a:srgbClr val="2E2E38"/>
+            </a:solidFill>
+          </a:ln>
+        </p:spPr>
+        <p:style>
+          <a:lnRef idx="1">
+            <a:schemeClr val="accent1"/>
+          </a:lnRef>
+          <a:fillRef idx="3">
+            <a:schemeClr val="accent1"/>
+          </a:fillRef>
+          <a:effectRef idx="2">
+            <a:schemeClr val="accent1"/>
+          </a:effectRef>
+          <a:fontRef idx="minor">
+            <a:schemeClr val="lt1"/>
+          </a:fontRef>
+        </p:style>
+        <p:txBody>
+          <a:bodyPr rtlCol="0" anchor="t" wrap="square" lIns="128016" rIns="109728" tIns="91440" bIns="73152"/>
+          <a:lstStyle/>
+          <a:p>
+            <a:pPr algn="l">
+              <a:lnSpc>
+                <a:spcPct val="110000"/>
+              </a:lnSpc>
+              <a:spcBef>
+                <a:spcPts val="0"/>
+              </a:spcBef>
+              <a:spcAft>
+                <a:spcPts val="0"/>
+              </a:spcAft>
+            </a:pPr>
+            <a:r>
+              <a:rPr sz="1100" b="1">
+                <a:solidFill>
+                  <a:srgbClr val="E6194D"/>
+                </a:solidFill>
+                <a:latin typeface="Calibri"/>
+                <a:ea typeface="Calibri"/>
+                <a:cs typeface="Calibri"/>
+              </a:rPr>
+              <a:t>Visual track</a:t>
+            </a:r>
+          </a:p>
+        </p:txBody>
+      </p:sp>
+      <p:sp>
+        <p:nvSpPr>
+          <p:cNvPr id="20" name="Rounded Rectangle 19"/>
+          <p:cNvSpPr/>
+          <p:nvPr/>
+        </p:nvSpPr>
+        <p:spPr>
+          <a:xfrm>
+            <a:off x="5852160" y="4443984"/>
+            <a:ext cx="5669280" cy="621792"/>
+          </a:xfrm>
+          <a:prstGeom prst="roundRect">
+            <a:avLst>
+              <a:gd name="adj" fmla="val 5000"/>
+            </a:avLst>
+          </a:prstGeom>
+          <a:solidFill>
+            <a:srgbClr val="18181F"/>
+          </a:solidFill>
+          <a:ln w="12700">
+            <a:solidFill>
+              <a:srgbClr val="2E2E38"/>
+            </a:solidFill>
+          </a:ln>
+        </p:spPr>
+        <p:style>
+          <a:lnRef idx="1">
+            <a:schemeClr val="accent1"/>
+          </a:lnRef>
+          <a:fillRef idx="3">
+            <a:schemeClr val="accent1"/>
+          </a:fillRef>
+          <a:effectRef idx="2">
+            <a:schemeClr val="accent1"/>
+          </a:effectRef>
+          <a:fontRef idx="minor">
+            <a:schemeClr val="lt1"/>
+          </a:fontRef>
+        </p:style>
+        <p:txBody>
+          <a:bodyPr rtlCol="0" anchor="t" wrap="square" lIns="128016" rIns="109728" tIns="91440" bIns="73152"/>
+          <a:lstStyle/>
+          <a:p>
+            <a:pPr algn="l">
+              <a:lnSpc>
+                <a:spcPct val="110000"/>
+              </a:lnSpc>
+              <a:spcBef>
+                <a:spcPts val="0"/>
+              </a:spcBef>
+              <a:spcAft>
+                <a:spcPts val="0"/>
+              </a:spcAft>
+            </a:pPr>
+            <a:r>
+              <a:rPr sz="1100" b="0">
                 <a:solidFill>
                   <a:srgbClr val="A1A1AA"/>
                 </a:solidFill>
@@ -9853,23 +10534,203 @@
                 <a:ea typeface="Calibri"/>
                 <a:cs typeface="Calibri"/>
               </a:rPr>
-              <a:t>•  Deeper SFX / mix automation</a:t>
-            </a:r>
-          </a:p>
-          <a:p>
-            <a:pPr algn="l">
-              <a:lnSpc>
-                <a:spcPct val="112000"/>
-              </a:lnSpc>
-              <a:spcBef>
-                <a:spcPts val="0"/>
-              </a:spcBef>
-              <a:spcAft>
-                <a:spcPts val="500"/>
-              </a:spcAft>
-            </a:pPr>
-            <a:r>
-              <a:rPr sz="1200" b="0">
+              <a:t>Shot plan · lookbook · stills · cover art</a:t>
+            </a:r>
+          </a:p>
+        </p:txBody>
+      </p:sp>
+      <p:sp>
+        <p:nvSpPr>
+          <p:cNvPr id="21" name="Rounded Rectangle 20"/>
+          <p:cNvSpPr/>
+          <p:nvPr/>
+        </p:nvSpPr>
+        <p:spPr>
+          <a:xfrm>
+            <a:off x="640080" y="5138928"/>
+            <a:ext cx="2834640" cy="621792"/>
+          </a:xfrm>
+          <a:prstGeom prst="roundRect">
+            <a:avLst>
+              <a:gd name="adj" fmla="val 5000"/>
+            </a:avLst>
+          </a:prstGeom>
+          <a:solidFill>
+            <a:srgbClr val="22222C"/>
+          </a:solidFill>
+          <a:ln w="12700">
+            <a:solidFill>
+              <a:srgbClr val="2E2E38"/>
+            </a:solidFill>
+          </a:ln>
+        </p:spPr>
+        <p:style>
+          <a:lnRef idx="1">
+            <a:schemeClr val="accent1"/>
+          </a:lnRef>
+          <a:fillRef idx="3">
+            <a:schemeClr val="accent1"/>
+          </a:fillRef>
+          <a:effectRef idx="2">
+            <a:schemeClr val="accent1"/>
+          </a:effectRef>
+          <a:fontRef idx="minor">
+            <a:schemeClr val="lt1"/>
+          </a:fontRef>
+        </p:style>
+        <p:txBody>
+          <a:bodyPr rtlCol="0" anchor="t" wrap="square" lIns="128016" rIns="109728" tIns="91440" bIns="73152"/>
+          <a:lstStyle/>
+          <a:p>
+            <a:pPr algn="l">
+              <a:lnSpc>
+                <a:spcPct val="110000"/>
+              </a:lnSpc>
+              <a:spcBef>
+                <a:spcPts val="0"/>
+              </a:spcBef>
+              <a:spcAft>
+                <a:spcPts val="0"/>
+              </a:spcAft>
+            </a:pPr>
+            <a:r>
+              <a:rPr sz="1200" b="1">
+                <a:solidFill>
+                  <a:srgbClr val="FFFFFF"/>
+                </a:solidFill>
+                <a:latin typeface="Calibri"/>
+                <a:ea typeface="Calibri"/>
+                <a:cs typeface="Calibri"/>
+              </a:rPr>
+              <a:t>Human + Audience Sim</a:t>
+            </a:r>
+          </a:p>
+        </p:txBody>
+      </p:sp>
+      <p:sp>
+        <p:nvSpPr>
+          <p:cNvPr id="22" name="Rounded Rectangle 21"/>
+          <p:cNvSpPr/>
+          <p:nvPr/>
+        </p:nvSpPr>
+        <p:spPr>
+          <a:xfrm>
+            <a:off x="3566160" y="5138928"/>
+            <a:ext cx="2194560" cy="621792"/>
+          </a:xfrm>
+          <a:prstGeom prst="roundRect">
+            <a:avLst>
+              <a:gd name="adj" fmla="val 5000"/>
+            </a:avLst>
+          </a:prstGeom>
+          <a:solidFill>
+            <a:srgbClr val="18181F"/>
+          </a:solidFill>
+          <a:ln w="12700">
+            <a:solidFill>
+              <a:srgbClr val="2E2E38"/>
+            </a:solidFill>
+          </a:ln>
+        </p:spPr>
+        <p:style>
+          <a:lnRef idx="1">
+            <a:schemeClr val="accent1"/>
+          </a:lnRef>
+          <a:fillRef idx="3">
+            <a:schemeClr val="accent1"/>
+          </a:fillRef>
+          <a:effectRef idx="2">
+            <a:schemeClr val="accent1"/>
+          </a:effectRef>
+          <a:fontRef idx="minor">
+            <a:schemeClr val="lt1"/>
+          </a:fontRef>
+        </p:style>
+        <p:txBody>
+          <a:bodyPr rtlCol="0" anchor="t" wrap="square" lIns="128016" rIns="109728" tIns="91440" bIns="73152"/>
+          <a:lstStyle/>
+          <a:p>
+            <a:pPr algn="l">
+              <a:lnSpc>
+                <a:spcPct val="110000"/>
+              </a:lnSpc>
+              <a:spcBef>
+                <a:spcPts val="0"/>
+              </a:spcBef>
+              <a:spcAft>
+                <a:spcPts val="0"/>
+              </a:spcAft>
+            </a:pPr>
+            <a:r>
+              <a:rPr sz="1100" b="1">
+                <a:solidFill>
+                  <a:srgbClr val="E6194D"/>
+                </a:solidFill>
+                <a:latin typeface="Calibri"/>
+                <a:ea typeface="Calibri"/>
+                <a:cs typeface="Calibri"/>
+              </a:rPr>
+              <a:t>Quality gate</a:t>
+            </a:r>
+          </a:p>
+        </p:txBody>
+      </p:sp>
+      <p:sp>
+        <p:nvSpPr>
+          <p:cNvPr id="23" name="Rounded Rectangle 22"/>
+          <p:cNvSpPr/>
+          <p:nvPr/>
+        </p:nvSpPr>
+        <p:spPr>
+          <a:xfrm>
+            <a:off x="5852160" y="5138928"/>
+            <a:ext cx="5669280" cy="621792"/>
+          </a:xfrm>
+          <a:prstGeom prst="roundRect">
+            <a:avLst>
+              <a:gd name="adj" fmla="val 5000"/>
+            </a:avLst>
+          </a:prstGeom>
+          <a:solidFill>
+            <a:srgbClr val="18181F"/>
+          </a:solidFill>
+          <a:ln w="12700">
+            <a:solidFill>
+              <a:srgbClr val="2E2E38"/>
+            </a:solidFill>
+          </a:ln>
+        </p:spPr>
+        <p:style>
+          <a:lnRef idx="1">
+            <a:schemeClr val="accent1"/>
+          </a:lnRef>
+          <a:fillRef idx="3">
+            <a:schemeClr val="accent1"/>
+          </a:fillRef>
+          <a:effectRef idx="2">
+            <a:schemeClr val="accent1"/>
+          </a:effectRef>
+          <a:fontRef idx="minor">
+            <a:schemeClr val="lt1"/>
+          </a:fontRef>
+        </p:style>
+        <p:txBody>
+          <a:bodyPr rtlCol="0" anchor="t" wrap="square" lIns="128016" rIns="109728" tIns="91440" bIns="73152"/>
+          <a:lstStyle/>
+          <a:p>
+            <a:pPr algn="l">
+              <a:lnSpc>
+                <a:spcPct val="110000"/>
+              </a:lnSpc>
+              <a:spcBef>
+                <a:spcPts val="0"/>
+              </a:spcBef>
+              <a:spcAft>
+                <a:spcPts val="0"/>
+              </a:spcAft>
+            </a:pPr>
+            <a:r>
+              <a:rPr sz="1100" b="0">
                 <a:solidFill>
                   <a:srgbClr val="A1A1AA"/>
                 </a:solidFill>
@@ -9877,45 +10738,21 @@
                 <a:ea typeface="Calibri"/>
                 <a:cs typeface="Calibri"/>
               </a:rPr>
-              <a:t>•  Multilingual adaptation / dubbing</a:t>
-            </a:r>
-          </a:p>
-          <a:p>
-            <a:pPr algn="l">
-              <a:lnSpc>
-                <a:spcPct val="112000"/>
-              </a:lnSpc>
-              <a:spcBef>
-                <a:spcPts val="0"/>
-              </a:spcBef>
-              <a:spcAft>
-                <a:spcPts val="0"/>
-              </a:spcAft>
-            </a:pPr>
-            <a:r>
-              <a:rPr sz="1200" b="0">
-                <a:solidFill>
-                  <a:srgbClr val="A1A1AA"/>
-                </a:solidFill>
-                <a:latin typeface="Calibri"/>
-                <a:ea typeface="Calibri"/>
-                <a:cs typeface="Calibri"/>
-              </a:rPr>
-              <a:t>•  Distribution handoff APIs</a:t>
-            </a:r>
-          </a:p>
-        </p:txBody>
-      </p:sp>
-      <p:sp>
-        <p:nvSpPr>
-          <p:cNvPr id="12" name="TextBox 11"/>
+              <a:t>Approve stages · listen in editor · apply patches</a:t>
+            </a:r>
+          </a:p>
+        </p:txBody>
+      </p:sp>
+      <p:sp>
+        <p:nvSpPr>
+          <p:cNvPr id="24" name="TextBox 23"/>
           <p:cNvSpPr txBox="1"/>
           <p:nvPr/>
         </p:nvSpPr>
         <p:spPr>
           <a:xfrm>
             <a:off x="640080" y="6473952"/>
-            <a:ext cx="8412480" cy="219456"/>
+            <a:ext cx="8412480" cy="201168"/>
           </a:xfrm>
           <a:prstGeom prst="rect">
             <a:avLst/>
@@ -9928,7 +10765,7 @@
           <a:p>
             <a:pPr algn="l">
               <a:lnSpc>
-                <a:spcPct val="112000"/>
+                <a:spcPct val="110000"/>
               </a:lnSpc>
               <a:spcBef>
                 <a:spcPts val="0"/>
@@ -9953,14 +10790,14 @@
       </p:sp>
       <p:sp>
         <p:nvSpPr>
-          <p:cNvPr id="13" name="TextBox 12"/>
+          <p:cNvPr id="25" name="TextBox 24"/>
           <p:cNvSpPr txBox="1"/>
           <p:nvPr/>
         </p:nvSpPr>
         <p:spPr>
           <a:xfrm>
             <a:off x="10195560" y="6473952"/>
-            <a:ext cx="1371600" cy="219456"/>
+            <a:ext cx="1371600" cy="201168"/>
           </a:xfrm>
           <a:prstGeom prst="rect">
             <a:avLst/>
@@ -9973,7 +10810,7 @@
           <a:p>
             <a:pPr algn="r">
               <a:lnSpc>
-                <a:spcPct val="112000"/>
+                <a:spcPct val="110000"/>
               </a:lnSpc>
               <a:spcBef>
                 <a:spcPts val="0"/>
@@ -10073,8 +10910,8 @@
         </p:nvSpPr>
         <p:spPr>
           <a:xfrm>
-            <a:off x="640080" y="1463040"/>
-            <a:ext cx="10908792" cy="256032"/>
+            <a:off x="640080" y="1234440"/>
+            <a:ext cx="10908792" cy="237744"/>
           </a:xfrm>
           <a:prstGeom prst="rect">
             <a:avLst/>
@@ -10087,7 +10924,7 @@
           <a:p>
             <a:pPr algn="l">
               <a:lnSpc>
-                <a:spcPct val="112000"/>
+                <a:spcPct val="110000"/>
               </a:lnSpc>
               <a:spcBef>
                 <a:spcPts val="0"/>
@@ -10118,7 +10955,7 @@
         </p:nvSpPr>
         <p:spPr>
           <a:xfrm>
-            <a:off x="640080" y="1920240"/>
+            <a:off x="640080" y="1691640"/>
             <a:ext cx="10908792" cy="640080"/>
           </a:xfrm>
           <a:prstGeom prst="rect">
@@ -10132,7 +10969,7 @@
           <a:p>
             <a:pPr algn="l">
               <a:lnSpc>
-                <a:spcPct val="112000"/>
+                <a:spcPct val="110000"/>
               </a:lnSpc>
               <a:spcBef>
                 <a:spcPts val="0"/>
@@ -10163,8 +11000,8 @@
         </p:nvSpPr>
         <p:spPr>
           <a:xfrm>
-            <a:off x="640080" y="2651760"/>
-            <a:ext cx="10058400" cy="411480"/>
+            <a:off x="640080" y="2423160"/>
+            <a:ext cx="10058400" cy="502920"/>
           </a:xfrm>
           <a:prstGeom prst="rect">
             <a:avLst/>
@@ -10177,17 +11014,17 @@
           <a:p>
             <a:pPr algn="l">
               <a:lnSpc>
-                <a:spcPct val="112000"/>
-              </a:lnSpc>
-              <a:spcBef>
-                <a:spcPts val="0"/>
-              </a:spcBef>
-              <a:spcAft>
-                <a:spcPts val="0"/>
-              </a:spcAft>
-            </a:pPr>
-            <a:r>
-              <a:rPr sz="1600" b="0">
+                <a:spcPct val="110000"/>
+              </a:lnSpc>
+              <a:spcBef>
+                <a:spcPts val="0"/>
+              </a:spcBef>
+              <a:spcAft>
+                <a:spcPts val="0"/>
+              </a:spcAft>
+            </a:pPr>
+            <a:r>
+              <a:rPr sz="1500" b="0">
                 <a:solidFill>
                   <a:srgbClr val="A1A1AA"/>
                 </a:solidFill>
@@ -10195,7 +11032,7 @@
                 <a:ea typeface="Calibri"/>
                 <a:cs typeface="Calibri"/>
               </a:rPr>
-              <a:t>Agentic production for serialized audio — discovery to human publish.</a:t>
+              <a:t>Seven agents. One timeline. Human publish. Built for Pocket FM–scale serial production.</a:t>
             </a:r>
           </a:p>
         </p:txBody>
@@ -10208,8 +11045,8 @@
         </p:nvSpPr>
         <p:spPr>
           <a:xfrm>
-            <a:off x="640080" y="3657600"/>
-            <a:ext cx="3474720" cy="1280160"/>
+            <a:off x="640080" y="3383280"/>
+            <a:ext cx="3474720" cy="1234440"/>
           </a:xfrm>
           <a:prstGeom prst="roundRect">
             <a:avLst>
@@ -10240,12 +11077,12 @@
           </a:fontRef>
         </p:style>
         <p:txBody>
-          <a:bodyPr rtlCol="0" anchor="t" wrap="square" lIns="146304" rIns="128016" tIns="109728" bIns="91440"/>
-          <a:lstStyle/>
-          <a:p>
-            <a:pPr algn="l">
-              <a:lnSpc>
-                <a:spcPct val="112000"/>
+          <a:bodyPr rtlCol="0" anchor="t" wrap="square" lIns="128016" rIns="109728" tIns="91440" bIns="73152"/>
+          <a:lstStyle/>
+          <a:p>
+            <a:pPr algn="l">
+              <a:lnSpc>
+                <a:spcPct val="110000"/>
               </a:lnSpc>
               <a:spcBef>
                 <a:spcPts val="0"/>
@@ -10269,7 +11106,7 @@
           <a:p>
             <a:pPr algn="l">
               <a:lnSpc>
-                <a:spcPct val="112000"/>
+                <a:spcPct val="110000"/>
               </a:lnSpc>
               <a:spcBef>
                 <a:spcPts val="0"/>
@@ -10300,8 +11137,8 @@
         </p:nvSpPr>
         <p:spPr>
           <a:xfrm>
-            <a:off x="4315968" y="3657600"/>
-            <a:ext cx="3474720" cy="1280160"/>
+            <a:off x="4297680" y="3383280"/>
+            <a:ext cx="3474720" cy="1234440"/>
           </a:xfrm>
           <a:prstGeom prst="roundRect">
             <a:avLst>
@@ -10332,12 +11169,12 @@
           </a:fontRef>
         </p:style>
         <p:txBody>
-          <a:bodyPr rtlCol="0" anchor="t" wrap="square" lIns="146304" rIns="128016" tIns="109728" bIns="91440"/>
-          <a:lstStyle/>
-          <a:p>
-            <a:pPr algn="l">
-              <a:lnSpc>
-                <a:spcPct val="112000"/>
+          <a:bodyPr rtlCol="0" anchor="t" wrap="square" lIns="128016" rIns="109728" tIns="91440" bIns="73152"/>
+          <a:lstStyle/>
+          <a:p>
+            <a:pPr algn="l">
+              <a:lnSpc>
+                <a:spcPct val="110000"/>
               </a:lnSpc>
               <a:spcBef>
                 <a:spcPts val="0"/>
@@ -10361,7 +11198,7 @@
           <a:p>
             <a:pPr algn="l">
               <a:lnSpc>
-                <a:spcPct val="112000"/>
+                <a:spcPct val="110000"/>
               </a:lnSpc>
               <a:spcBef>
                 <a:spcPts val="0"/>
@@ -10379,7 +11216,7 @@
                 <a:ea typeface="Calibri"/>
                 <a:cs typeface="Calibri"/>
               </a:rPr>
-              <a:t>Live demo: listen → simulate → patch</a:t>
+              <a:t>Live demo: generate → listen → simulate</a:t>
             </a:r>
           </a:p>
         </p:txBody>
@@ -10392,8 +11229,8 @@
         </p:nvSpPr>
         <p:spPr>
           <a:xfrm>
-            <a:off x="7991856" y="3657600"/>
-            <a:ext cx="3474720" cy="1280160"/>
+            <a:off x="7955280" y="3383280"/>
+            <a:ext cx="3474720" cy="1234440"/>
           </a:xfrm>
           <a:prstGeom prst="roundRect">
             <a:avLst>
@@ -10424,12 +11261,12 @@
           </a:fontRef>
         </p:style>
         <p:txBody>
-          <a:bodyPr rtlCol="0" anchor="t" wrap="square" lIns="146304" rIns="128016" tIns="109728" bIns="91440"/>
-          <a:lstStyle/>
-          <a:p>
-            <a:pPr algn="l">
-              <a:lnSpc>
-                <a:spcPct val="112000"/>
+          <a:bodyPr rtlCol="0" anchor="t" wrap="square" lIns="128016" rIns="109728" tIns="91440" bIns="73152"/>
+          <a:lstStyle/>
+          <a:p>
+            <a:pPr algn="l">
+              <a:lnSpc>
+                <a:spcPct val="110000"/>
               </a:lnSpc>
               <a:spcBef>
                 <a:spcPts val="0"/>
@@ -10453,7 +11290,7 @@
           <a:p>
             <a:pPr algn="l">
               <a:lnSpc>
-                <a:spcPct val="112000"/>
+                <a:spcPct val="110000"/>
               </a:lnSpc>
               <a:spcBef>
                 <a:spcPts val="0"/>
@@ -10484,8 +11321,8 @@
         </p:nvSpPr>
         <p:spPr>
           <a:xfrm>
-            <a:off x="640080" y="5577840"/>
-            <a:ext cx="10908792" cy="256032"/>
+            <a:off x="640080" y="5029200"/>
+            <a:ext cx="10908792" cy="640080"/>
           </a:xfrm>
           <a:prstGeom prst="rect">
             <a:avLst/>
@@ -10498,17 +11335,41 @@
           <a:p>
             <a:pPr algn="l">
               <a:lnSpc>
-                <a:spcPct val="112000"/>
-              </a:lnSpc>
-              <a:spcBef>
-                <a:spcPts val="0"/>
-              </a:spcBef>
-              <a:spcAft>
-                <a:spcPts val="0"/>
-              </a:spcAft>
-            </a:pPr>
-            <a:r>
-              <a:rPr sz="1100" b="0">
+                <a:spcPct val="110000"/>
+              </a:lnSpc>
+              <a:spcBef>
+                <a:spcPts val="0"/>
+              </a:spcBef>
+              <a:spcAft>
+                <a:spcPts val="400"/>
+              </a:spcAft>
+            </a:pPr>
+            <a:r>
+              <a:rPr sz="1100" b="1">
+                <a:solidFill>
+                  <a:srgbClr val="FFFFFF"/>
+                </a:solidFill>
+                <a:latin typeface="Calibri"/>
+                <a:ea typeface="Calibri"/>
+                <a:cs typeface="Calibri"/>
+              </a:rPr>
+              <a:t>Stack highlight</a:t>
+            </a:r>
+          </a:p>
+          <a:p>
+            <a:pPr algn="l">
+              <a:lnSpc>
+                <a:spcPct val="110000"/>
+              </a:lnSpc>
+              <a:spcBef>
+                <a:spcPts val="0"/>
+              </a:spcBef>
+              <a:spcAft>
+                <a:spcPts val="0"/>
+              </a:spcAft>
+            </a:pPr>
+            <a:r>
+              <a:rPr sz="1200" b="0">
                 <a:solidFill>
                   <a:srgbClr val="71717A"/>
                 </a:solidFill>
@@ -10516,7 +11377,7 @@
                 <a:ea typeface="Calibri"/>
                 <a:cs typeface="Calibri"/>
               </a:rPr>
-              <a:t>Zero to One  ·  Pocket FM × OpenAI × Lightspeed  ·  IIM Bangalore  ·  July 2026</a:t>
+              <a:t>LangGraph · FastAPI · React · ElevenLabs/Sarvam · Gemini/OpenAI · Tavily · Databricks AI Search &amp; Vector Search · S3 · Docker</a:t>
             </a:r>
           </a:p>
         </p:txBody>
@@ -10530,7 +11391,7 @@
         <p:spPr>
           <a:xfrm>
             <a:off x="640080" y="6473952"/>
-            <a:ext cx="8412480" cy="219456"/>
+            <a:ext cx="8412480" cy="201168"/>
           </a:xfrm>
           <a:prstGeom prst="rect">
             <a:avLst/>
@@ -10543,7 +11404,7 @@
           <a:p>
             <a:pPr algn="l">
               <a:lnSpc>
-                <a:spcPct val="112000"/>
+                <a:spcPct val="110000"/>
               </a:lnSpc>
               <a:spcBef>
                 <a:spcPts val="0"/>
@@ -10575,7 +11436,7 @@
         <p:spPr>
           <a:xfrm>
             <a:off x="10195560" y="6473952"/>
-            <a:ext cx="1371600" cy="219456"/>
+            <a:ext cx="1371600" cy="201168"/>
           </a:xfrm>
           <a:prstGeom prst="rect">
             <a:avLst/>
@@ -10588,7 +11449,7 @@
           <a:p>
             <a:pPr algn="r">
               <a:lnSpc>
-                <a:spcPct val="112000"/>
+                <a:spcPct val="110000"/>
               </a:lnSpc>
               <a:spcBef>
                 <a:spcPts val="0"/>

--- a/docs/pitch/Kahani_ZeroToOne_Pitch.pptx
+++ b/docs/pitch/Kahani_ZeroToOne_Pitch.pptx
@@ -13,6 +13,7 @@
     <p:sldId id="261" r:id="rId12"/>
     <p:sldId id="262" r:id="rId13"/>
     <p:sldId id="263" r:id="rId14"/>
+    <p:sldId id="264" r:id="rId15"/>
   </p:sldIdLst>
   <p:sldSz cx="12191695" cy="6858000" type="screen4x3"/>
   <p:notesSz cx="6858000" cy="9144000"/>
@@ -4562,7 +4563,7 @@
                 <a:ea typeface="Calibri"/>
                 <a:cs typeface="Calibri"/>
               </a:rPr>
-              <a:t>02 / 08</a:t>
+              <a:t>02 / 09</a:t>
             </a:r>
           </a:p>
         </p:txBody>
@@ -5569,7 +5570,7 @@
                 <a:ea typeface="Calibri"/>
                 <a:cs typeface="Calibri"/>
               </a:rPr>
-              <a:t>03 / 08</a:t>
+              <a:t>03 / 09</a:t>
             </a:r>
           </a:p>
         </p:txBody>
@@ -5683,7 +5684,7 @@
                 <a:ea typeface="Calibri"/>
                 <a:cs typeface="Calibri"/>
               </a:rPr>
-              <a:t>03  PROBLEM</a:t>
+              <a:t>03  ARCHITECTURE</a:t>
             </a:r>
           </a:p>
         </p:txBody>
@@ -5728,7 +5729,7 @@
                 <a:ea typeface="Calibri"/>
                 <a:cs typeface="Calibri"/>
               </a:rPr>
-              <a:t>Serial audio wins on part-to-part retention. Production is still fragmented.</a:t>
+              <a:t>GitHub → edge → AWS → agents &amp; media APIs</a:t>
             </a:r>
           </a:p>
         </p:txBody>
@@ -5773,842 +5774,101 @@
                 <a:ea typeface="Calibri"/>
                 <a:cs typeface="Calibri"/>
               </a:rPr>
-              <a:t>Pocket FM–class storytelling needs speed, cultural specificity, and pre-publish signal.</a:t>
-            </a:r>
-          </a:p>
-        </p:txBody>
-      </p:sp>
-      <p:sp>
-        <p:nvSpPr>
-          <p:cNvPr id="6" name="Rectangle 5"/>
-          <p:cNvSpPr/>
-          <p:nvPr/>
-        </p:nvSpPr>
-        <p:spPr>
-          <a:xfrm>
-            <a:off x="640080" y="1664208"/>
-            <a:ext cx="73152" cy="1691640"/>
+              <a:t>Vercel web · Cloudflare DNS · ALB/ECS Fargate · RDS · Redis · S3 · Secrets.</a:t>
+            </a:r>
+          </a:p>
+        </p:txBody>
+      </p:sp>
+      <p:pic>
+        <p:nvPicPr>
+          <p:cNvPr id="6" name="Picture 5" descr="Architecture_Diagram.png"/>
+          <p:cNvPicPr>
+            <a:picLocks noChangeAspect="1"/>
+          </p:cNvPicPr>
+          <p:nvPr/>
+        </p:nvPicPr>
+        <p:blipFill>
+          <a:blip r:embed="rId2"/>
+          <a:stretch>
+            <a:fillRect/>
+          </a:stretch>
+        </p:blipFill>
+        <p:spPr>
+          <a:xfrm>
+            <a:off x="2331905" y="1664208"/>
+            <a:ext cx="7525140" cy="4526280"/>
           </a:xfrm>
           <a:prstGeom prst="rect">
             <a:avLst/>
           </a:prstGeom>
-          <a:solidFill>
-            <a:srgbClr val="E6194D"/>
-          </a:solidFill>
-          <a:ln>
-            <a:noFill/>
-          </a:ln>
-        </p:spPr>
-        <p:style>
-          <a:lnRef idx="1">
-            <a:schemeClr val="accent1"/>
-          </a:lnRef>
-          <a:fillRef idx="3">
-            <a:schemeClr val="accent1"/>
-          </a:fillRef>
-          <a:effectRef idx="2">
-            <a:schemeClr val="accent1"/>
-          </a:effectRef>
-          <a:fontRef idx="minor">
-            <a:schemeClr val="lt1"/>
-          </a:fontRef>
-        </p:style>
-        <p:txBody>
-          <a:bodyPr rtlCol="0" anchor="ctr"/>
-          <a:lstStyle/>
-          <a:p>
-            <a:pPr algn="ctr"/>
-          </a:p>
-        </p:txBody>
-      </p:sp>
-      <p:sp>
-        <p:nvSpPr>
-          <p:cNvPr id="7" name="Rounded Rectangle 6"/>
-          <p:cNvSpPr/>
-          <p:nvPr/>
-        </p:nvSpPr>
-        <p:spPr>
-          <a:xfrm>
-            <a:off x="713232" y="1664208"/>
-            <a:ext cx="3401568" cy="1691640"/>
-          </a:xfrm>
-          <a:prstGeom prst="roundRect">
-            <a:avLst>
-              <a:gd name="adj" fmla="val 5000"/>
-            </a:avLst>
-          </a:prstGeom>
-          <a:solidFill>
-            <a:srgbClr val="18181F"/>
-          </a:solidFill>
-          <a:ln w="12700">
-            <a:solidFill>
-              <a:srgbClr val="2E2E38"/>
-            </a:solidFill>
-          </a:ln>
-        </p:spPr>
-        <p:style>
-          <a:lnRef idx="1">
-            <a:schemeClr val="accent1"/>
-          </a:lnRef>
-          <a:fillRef idx="3">
-            <a:schemeClr val="accent1"/>
-          </a:fillRef>
-          <a:effectRef idx="2">
-            <a:schemeClr val="accent1"/>
-          </a:effectRef>
-          <a:fontRef idx="minor">
-            <a:schemeClr val="lt1"/>
-          </a:fontRef>
-        </p:style>
-        <p:txBody>
-          <a:bodyPr rtlCol="0" anchor="t" wrap="square" lIns="109728" rIns="109728" tIns="91440" bIns="73152"/>
-          <a:lstStyle/>
-          <a:p>
-            <a:pPr algn="l">
-              <a:lnSpc>
-                <a:spcPct val="110000"/>
-              </a:lnSpc>
-              <a:spcBef>
-                <a:spcPts val="0"/>
-              </a:spcBef>
-              <a:spcAft>
-                <a:spcPts val="600"/>
-              </a:spcAft>
-            </a:pPr>
-            <a:r>
-              <a:rPr sz="1300" b="1">
-                <a:solidFill>
-                  <a:srgbClr val="FFFFFF"/>
-                </a:solidFill>
-                <a:latin typeface="Calibri"/>
-                <a:ea typeface="Calibri"/>
-                <a:cs typeface="Calibri"/>
-              </a:rPr>
-              <a:t>Idea → script is slow</a:t>
-            </a:r>
-          </a:p>
-          <a:p>
-            <a:pPr algn="l">
-              <a:lnSpc>
-                <a:spcPct val="110000"/>
-              </a:lnSpc>
-              <a:spcBef>
-                <a:spcPts val="0"/>
-              </a:spcBef>
-              <a:spcAft>
-                <a:spcPts val="0"/>
-              </a:spcAft>
-            </a:pPr>
-            <a:r>
-              <a:rPr sz="1100" b="0">
-                <a:solidFill>
-                  <a:srgbClr val="A1A1AA"/>
-                </a:solidFill>
-                <a:latin typeface="Calibri"/>
-                <a:ea typeface="Calibri"/>
-                <a:cs typeface="Calibri"/>
-              </a:rPr>
-              <a:t>Regional authenticity is the moat. Generic LLM drafts sound thin.</a:t>
-            </a:r>
-          </a:p>
-        </p:txBody>
-      </p:sp>
-      <p:sp>
-        <p:nvSpPr>
-          <p:cNvPr id="8" name="Rectangle 7"/>
-          <p:cNvSpPr/>
-          <p:nvPr/>
-        </p:nvSpPr>
-        <p:spPr>
-          <a:xfrm>
-            <a:off x="4297680" y="1664208"/>
-            <a:ext cx="73152" cy="1691640"/>
+        </p:spPr>
+      </p:pic>
+      <p:sp>
+        <p:nvSpPr>
+          <p:cNvPr id="7" name="TextBox 6"/>
+          <p:cNvSpPr txBox="1"/>
+          <p:nvPr/>
+        </p:nvSpPr>
+        <p:spPr>
+          <a:xfrm>
+            <a:off x="640080" y="6473952"/>
+            <a:ext cx="8412480" cy="201168"/>
           </a:xfrm>
           <a:prstGeom prst="rect">
             <a:avLst/>
           </a:prstGeom>
-          <a:solidFill>
-            <a:srgbClr val="E6194D"/>
-          </a:solidFill>
-          <a:ln>
-            <a:noFill/>
-          </a:ln>
-        </p:spPr>
-        <p:style>
-          <a:lnRef idx="1">
-            <a:schemeClr val="accent1"/>
-          </a:lnRef>
-          <a:fillRef idx="3">
-            <a:schemeClr val="accent1"/>
-          </a:fillRef>
-          <a:effectRef idx="2">
-            <a:schemeClr val="accent1"/>
-          </a:effectRef>
-          <a:fontRef idx="minor">
-            <a:schemeClr val="lt1"/>
-          </a:fontRef>
-        </p:style>
-        <p:txBody>
-          <a:bodyPr rtlCol="0" anchor="ctr"/>
-          <a:lstStyle/>
-          <a:p>
-            <a:pPr algn="ctr"/>
-          </a:p>
-        </p:txBody>
-      </p:sp>
-      <p:sp>
-        <p:nvSpPr>
-          <p:cNvPr id="9" name="Rounded Rectangle 8"/>
-          <p:cNvSpPr/>
-          <p:nvPr/>
-        </p:nvSpPr>
-        <p:spPr>
-          <a:xfrm>
-            <a:off x="4370832" y="1664208"/>
-            <a:ext cx="3401568" cy="1691640"/>
-          </a:xfrm>
-          <a:prstGeom prst="roundRect">
-            <a:avLst>
-              <a:gd name="adj" fmla="val 5000"/>
-            </a:avLst>
-          </a:prstGeom>
-          <a:solidFill>
-            <a:srgbClr val="18181F"/>
-          </a:solidFill>
-          <a:ln w="12700">
-            <a:solidFill>
-              <a:srgbClr val="2E2E38"/>
-            </a:solidFill>
-          </a:ln>
-        </p:spPr>
-        <p:style>
-          <a:lnRef idx="1">
-            <a:schemeClr val="accent1"/>
-          </a:lnRef>
-          <a:fillRef idx="3">
-            <a:schemeClr val="accent1"/>
-          </a:fillRef>
-          <a:effectRef idx="2">
-            <a:schemeClr val="accent1"/>
-          </a:effectRef>
-          <a:fontRef idx="minor">
-            <a:schemeClr val="lt1"/>
-          </a:fontRef>
-        </p:style>
-        <p:txBody>
-          <a:bodyPr rtlCol="0" anchor="t" wrap="square" lIns="109728" rIns="109728" tIns="91440" bIns="73152"/>
-          <a:lstStyle/>
-          <a:p>
-            <a:pPr algn="l">
-              <a:lnSpc>
-                <a:spcPct val="110000"/>
-              </a:lnSpc>
-              <a:spcBef>
-                <a:spcPts val="0"/>
-              </a:spcBef>
-              <a:spcAft>
-                <a:spcPts val="600"/>
-              </a:spcAft>
-            </a:pPr>
-            <a:r>
-              <a:rPr sz="1300" b="1">
-                <a:solidFill>
-                  <a:srgbClr val="FFFFFF"/>
-                </a:solidFill>
-                <a:latin typeface="Calibri"/>
-                <a:ea typeface="Calibri"/>
-                <a:cs typeface="Calibri"/>
-              </a:rPr>
-              <a:t>Episodes don’t chain</a:t>
-            </a:r>
-          </a:p>
-          <a:p>
-            <a:pPr algn="l">
-              <a:lnSpc>
-                <a:spcPct val="110000"/>
-              </a:lnSpc>
-              <a:spcBef>
-                <a:spcPts val="0"/>
-              </a:spcBef>
-              <a:spcAft>
-                <a:spcPts val="0"/>
-              </a:spcAft>
-            </a:pPr>
-            <a:r>
-              <a:rPr sz="1100" b="0">
-                <a:solidFill>
-                  <a:srgbClr val="A1A1AA"/>
-                </a:solidFill>
-                <a:latin typeface="Calibri"/>
-                <a:ea typeface="Calibri"/>
-                <a:cs typeface="Calibri"/>
-              </a:rPr>
-              <a:t>Weak cliffhangers → drop-off after part one.</a:t>
-            </a:r>
-          </a:p>
-        </p:txBody>
-      </p:sp>
-      <p:sp>
-        <p:nvSpPr>
-          <p:cNvPr id="10" name="Rectangle 9"/>
-          <p:cNvSpPr/>
-          <p:nvPr/>
-        </p:nvSpPr>
-        <p:spPr>
-          <a:xfrm>
-            <a:off x="7955280" y="1664208"/>
-            <a:ext cx="73152" cy="1691640"/>
+          <a:noFill/>
+        </p:spPr>
+        <p:txBody>
+          <a:bodyPr wrap="square" anchor="t" lIns="0" rIns="0" tIns="0" bIns="0"/>
+          <a:lstStyle/>
+          <a:p>
+            <a:pPr algn="l">
+              <a:lnSpc>
+                <a:spcPct val="110000"/>
+              </a:lnSpc>
+              <a:spcBef>
+                <a:spcPts val="0"/>
+              </a:spcBef>
+              <a:spcAft>
+                <a:spcPts val="0"/>
+              </a:spcAft>
+            </a:pPr>
+            <a:r>
+              <a:rPr sz="1000" b="0">
+                <a:solidFill>
+                  <a:srgbClr val="71717A"/>
+                </a:solidFill>
+                <a:latin typeface="Calibri"/>
+                <a:ea typeface="Calibri"/>
+                <a:cs typeface="Calibri"/>
+              </a:rPr>
+              <a:t>Kahani  ·  Zero to One × Pocket FM  ·  IIM Bangalore</a:t>
+            </a:r>
+          </a:p>
+        </p:txBody>
+      </p:sp>
+      <p:sp>
+        <p:nvSpPr>
+          <p:cNvPr id="8" name="TextBox 7"/>
+          <p:cNvSpPr txBox="1"/>
+          <p:nvPr/>
+        </p:nvSpPr>
+        <p:spPr>
+          <a:xfrm>
+            <a:off x="10195560" y="6473952"/>
+            <a:ext cx="1371600" cy="201168"/>
           </a:xfrm>
           <a:prstGeom prst="rect">
             <a:avLst/>
           </a:prstGeom>
-          <a:solidFill>
-            <a:srgbClr val="E6194D"/>
-          </a:solidFill>
-          <a:ln>
-            <a:noFill/>
-          </a:ln>
-        </p:spPr>
-        <p:style>
-          <a:lnRef idx="1">
-            <a:schemeClr val="accent1"/>
-          </a:lnRef>
-          <a:fillRef idx="3">
-            <a:schemeClr val="accent1"/>
-          </a:fillRef>
-          <a:effectRef idx="2">
-            <a:schemeClr val="accent1"/>
-          </a:effectRef>
-          <a:fontRef idx="minor">
-            <a:schemeClr val="lt1"/>
-          </a:fontRef>
-        </p:style>
-        <p:txBody>
-          <a:bodyPr rtlCol="0" anchor="ctr"/>
-          <a:lstStyle/>
-          <a:p>
-            <a:pPr algn="ctr"/>
-          </a:p>
-        </p:txBody>
-      </p:sp>
-      <p:sp>
-        <p:nvSpPr>
-          <p:cNvPr id="11" name="Rounded Rectangle 10"/>
-          <p:cNvSpPr/>
-          <p:nvPr/>
-        </p:nvSpPr>
-        <p:spPr>
-          <a:xfrm>
-            <a:off x="8028432" y="1664208"/>
-            <a:ext cx="3401568" cy="1691640"/>
-          </a:xfrm>
-          <a:prstGeom prst="roundRect">
-            <a:avLst>
-              <a:gd name="adj" fmla="val 5000"/>
-            </a:avLst>
-          </a:prstGeom>
-          <a:solidFill>
-            <a:srgbClr val="18181F"/>
-          </a:solidFill>
-          <a:ln w="12700">
-            <a:solidFill>
-              <a:srgbClr val="2E2E38"/>
-            </a:solidFill>
-          </a:ln>
-        </p:spPr>
-        <p:style>
-          <a:lnRef idx="1">
-            <a:schemeClr val="accent1"/>
-          </a:lnRef>
-          <a:fillRef idx="3">
-            <a:schemeClr val="accent1"/>
-          </a:fillRef>
-          <a:effectRef idx="2">
-            <a:schemeClr val="accent1"/>
-          </a:effectRef>
-          <a:fontRef idx="minor">
-            <a:schemeClr val="lt1"/>
-          </a:fontRef>
-        </p:style>
-        <p:txBody>
-          <a:bodyPr rtlCol="0" anchor="t" wrap="square" lIns="109728" rIns="109728" tIns="91440" bIns="73152"/>
-          <a:lstStyle/>
-          <a:p>
-            <a:pPr algn="l">
-              <a:lnSpc>
-                <a:spcPct val="110000"/>
-              </a:lnSpc>
-              <a:spcBef>
-                <a:spcPts val="0"/>
-              </a:spcBef>
-              <a:spcAft>
-                <a:spcPts val="600"/>
-              </a:spcAft>
-            </a:pPr>
-            <a:r>
-              <a:rPr sz="1300" b="1">
-                <a:solidFill>
-                  <a:srgbClr val="FFFFFF"/>
-                </a:solidFill>
-                <a:latin typeface="Calibri"/>
-                <a:ea typeface="Calibri"/>
-                <a:cs typeface="Calibri"/>
-              </a:rPr>
-              <a:t>Audio assembly is manual</a:t>
-            </a:r>
-          </a:p>
-          <a:p>
-            <a:pPr algn="l">
-              <a:lnSpc>
-                <a:spcPct val="110000"/>
-              </a:lnSpc>
-              <a:spcBef>
-                <a:spcPts val="0"/>
-              </a:spcBef>
-              <a:spcAft>
-                <a:spcPts val="0"/>
-              </a:spcAft>
-            </a:pPr>
-            <a:r>
-              <a:rPr sz="1100" b="0">
-                <a:solidFill>
-                  <a:srgbClr val="A1A1AA"/>
-                </a:solidFill>
-                <a:latin typeface="Calibri"/>
-                <a:ea typeface="Calibri"/>
-                <a:cs typeface="Calibri"/>
-              </a:rPr>
-              <a:t>Voice, SFX, and visuals are synced by hand across tools.</a:t>
-            </a:r>
-          </a:p>
-        </p:txBody>
-      </p:sp>
-      <p:sp>
-        <p:nvSpPr>
-          <p:cNvPr id="12" name="Rectangle 11"/>
-          <p:cNvSpPr/>
-          <p:nvPr/>
-        </p:nvSpPr>
-        <p:spPr>
-          <a:xfrm>
-            <a:off x="640080" y="3538728"/>
-            <a:ext cx="73152" cy="1691640"/>
-          </a:xfrm>
-          <a:prstGeom prst="rect">
-            <a:avLst/>
-          </a:prstGeom>
-          <a:solidFill>
-            <a:srgbClr val="E6194D"/>
-          </a:solidFill>
-          <a:ln>
-            <a:noFill/>
-          </a:ln>
-        </p:spPr>
-        <p:style>
-          <a:lnRef idx="1">
-            <a:schemeClr val="accent1"/>
-          </a:lnRef>
-          <a:fillRef idx="3">
-            <a:schemeClr val="accent1"/>
-          </a:fillRef>
-          <a:effectRef idx="2">
-            <a:schemeClr val="accent1"/>
-          </a:effectRef>
-          <a:fontRef idx="minor">
-            <a:schemeClr val="lt1"/>
-          </a:fontRef>
-        </p:style>
-        <p:txBody>
-          <a:bodyPr rtlCol="0" anchor="ctr"/>
-          <a:lstStyle/>
-          <a:p>
-            <a:pPr algn="ctr"/>
-          </a:p>
-        </p:txBody>
-      </p:sp>
-      <p:sp>
-        <p:nvSpPr>
-          <p:cNvPr id="13" name="Rounded Rectangle 12"/>
-          <p:cNvSpPr/>
-          <p:nvPr/>
-        </p:nvSpPr>
-        <p:spPr>
-          <a:xfrm>
-            <a:off x="713232" y="3538728"/>
-            <a:ext cx="3401568" cy="1691640"/>
-          </a:xfrm>
-          <a:prstGeom prst="roundRect">
-            <a:avLst>
-              <a:gd name="adj" fmla="val 5000"/>
-            </a:avLst>
-          </a:prstGeom>
-          <a:solidFill>
-            <a:srgbClr val="18181F"/>
-          </a:solidFill>
-          <a:ln w="12700">
-            <a:solidFill>
-              <a:srgbClr val="2E2E38"/>
-            </a:solidFill>
-          </a:ln>
-        </p:spPr>
-        <p:style>
-          <a:lnRef idx="1">
-            <a:schemeClr val="accent1"/>
-          </a:lnRef>
-          <a:fillRef idx="3">
-            <a:schemeClr val="accent1"/>
-          </a:fillRef>
-          <a:effectRef idx="2">
-            <a:schemeClr val="accent1"/>
-          </a:effectRef>
-          <a:fontRef idx="minor">
-            <a:schemeClr val="lt1"/>
-          </a:fontRef>
-        </p:style>
-        <p:txBody>
-          <a:bodyPr rtlCol="0" anchor="t" wrap="square" lIns="109728" rIns="109728" tIns="91440" bIns="73152"/>
-          <a:lstStyle/>
-          <a:p>
-            <a:pPr algn="l">
-              <a:lnSpc>
-                <a:spcPct val="110000"/>
-              </a:lnSpc>
-              <a:spcBef>
-                <a:spcPts val="0"/>
-              </a:spcBef>
-              <a:spcAft>
-                <a:spcPts val="600"/>
-              </a:spcAft>
-            </a:pPr>
-            <a:r>
-              <a:rPr sz="1300" b="1">
-                <a:solidFill>
-                  <a:srgbClr val="FFFFFF"/>
-                </a:solidFill>
-                <a:latin typeface="Calibri"/>
-                <a:ea typeface="Calibri"/>
-                <a:cs typeface="Calibri"/>
-              </a:rPr>
-              <a:t>No pre-publish signal</a:t>
-            </a:r>
-          </a:p>
-          <a:p>
-            <a:pPr algn="l">
-              <a:lnSpc>
-                <a:spcPct val="110000"/>
-              </a:lnSpc>
-              <a:spcBef>
-                <a:spcPts val="0"/>
-              </a:spcBef>
-              <a:spcAft>
-                <a:spcPts val="0"/>
-              </a:spcAft>
-            </a:pPr>
-            <a:r>
-              <a:rPr sz="1100" b="0">
-                <a:solidFill>
-                  <a:srgbClr val="A1A1AA"/>
-                </a:solidFill>
-                <a:latin typeface="Calibri"/>
-                <a:ea typeface="Calibri"/>
-                <a:cs typeface="Calibri"/>
-              </a:rPr>
-              <a:t>Teams guess which cohorts will continue listening.</a:t>
-            </a:r>
-          </a:p>
-        </p:txBody>
-      </p:sp>
-      <p:sp>
-        <p:nvSpPr>
-          <p:cNvPr id="14" name="Rectangle 13"/>
-          <p:cNvSpPr/>
-          <p:nvPr/>
-        </p:nvSpPr>
-        <p:spPr>
-          <a:xfrm>
-            <a:off x="4297680" y="3538728"/>
-            <a:ext cx="73152" cy="1691640"/>
-          </a:xfrm>
-          <a:prstGeom prst="rect">
-            <a:avLst/>
-          </a:prstGeom>
-          <a:solidFill>
-            <a:srgbClr val="E6194D"/>
-          </a:solidFill>
-          <a:ln>
-            <a:noFill/>
-          </a:ln>
-        </p:spPr>
-        <p:style>
-          <a:lnRef idx="1">
-            <a:schemeClr val="accent1"/>
-          </a:lnRef>
-          <a:fillRef idx="3">
-            <a:schemeClr val="accent1"/>
-          </a:fillRef>
-          <a:effectRef idx="2">
-            <a:schemeClr val="accent1"/>
-          </a:effectRef>
-          <a:fontRef idx="minor">
-            <a:schemeClr val="lt1"/>
-          </a:fontRef>
-        </p:style>
-        <p:txBody>
-          <a:bodyPr rtlCol="0" anchor="ctr"/>
-          <a:lstStyle/>
-          <a:p>
-            <a:pPr algn="ctr"/>
-          </a:p>
-        </p:txBody>
-      </p:sp>
-      <p:sp>
-        <p:nvSpPr>
-          <p:cNvPr id="15" name="Rounded Rectangle 14"/>
-          <p:cNvSpPr/>
-          <p:nvPr/>
-        </p:nvSpPr>
-        <p:spPr>
-          <a:xfrm>
-            <a:off x="4370832" y="3538728"/>
-            <a:ext cx="3401568" cy="1691640"/>
-          </a:xfrm>
-          <a:prstGeom prst="roundRect">
-            <a:avLst>
-              <a:gd name="adj" fmla="val 5000"/>
-            </a:avLst>
-          </a:prstGeom>
-          <a:solidFill>
-            <a:srgbClr val="18181F"/>
-          </a:solidFill>
-          <a:ln w="12700">
-            <a:solidFill>
-              <a:srgbClr val="2E2E38"/>
-            </a:solidFill>
-          </a:ln>
-        </p:spPr>
-        <p:style>
-          <a:lnRef idx="1">
-            <a:schemeClr val="accent1"/>
-          </a:lnRef>
-          <a:fillRef idx="3">
-            <a:schemeClr val="accent1"/>
-          </a:fillRef>
-          <a:effectRef idx="2">
-            <a:schemeClr val="accent1"/>
-          </a:effectRef>
-          <a:fontRef idx="minor">
-            <a:schemeClr val="lt1"/>
-          </a:fontRef>
-        </p:style>
-        <p:txBody>
-          <a:bodyPr rtlCol="0" anchor="t" wrap="square" lIns="109728" rIns="109728" tIns="91440" bIns="73152"/>
-          <a:lstStyle/>
-          <a:p>
-            <a:pPr algn="l">
-              <a:lnSpc>
-                <a:spcPct val="110000"/>
-              </a:lnSpc>
-              <a:spcBef>
-                <a:spcPts val="0"/>
-              </a:spcBef>
-              <a:spcAft>
-                <a:spcPts val="600"/>
-              </a:spcAft>
-            </a:pPr>
-            <a:r>
-              <a:rPr sz="1300" b="1">
-                <a:solidFill>
-                  <a:srgbClr val="FFFFFF"/>
-                </a:solidFill>
-                <a:latin typeface="Calibri"/>
-                <a:ea typeface="Calibri"/>
-                <a:cs typeface="Calibri"/>
-              </a:rPr>
-              <a:t>No closed loop</a:t>
-            </a:r>
-          </a:p>
-          <a:p>
-            <a:pPr algn="l">
-              <a:lnSpc>
-                <a:spcPct val="110000"/>
-              </a:lnSpc>
-              <a:spcBef>
-                <a:spcPts val="0"/>
-              </a:spcBef>
-              <a:spcAft>
-                <a:spcPts val="0"/>
-              </a:spcAft>
-            </a:pPr>
-            <a:r>
-              <a:rPr sz="1100" b="0">
-                <a:solidFill>
-                  <a:srgbClr val="A1A1AA"/>
-                </a:solidFill>
-                <a:latin typeface="Calibri"/>
-                <a:ea typeface="Calibri"/>
-                <a:cs typeface="Calibri"/>
-              </a:rPr>
-              <a:t>Wins on one story don’t systematically improve the next.</a:t>
-            </a:r>
-          </a:p>
-        </p:txBody>
-      </p:sp>
-      <p:sp>
-        <p:nvSpPr>
-          <p:cNvPr id="16" name="Rectangle 15"/>
-          <p:cNvSpPr/>
-          <p:nvPr/>
-        </p:nvSpPr>
-        <p:spPr>
-          <a:xfrm>
-            <a:off x="7955280" y="3538728"/>
-            <a:ext cx="73152" cy="1691640"/>
-          </a:xfrm>
-          <a:prstGeom prst="rect">
-            <a:avLst/>
-          </a:prstGeom>
-          <a:solidFill>
-            <a:srgbClr val="E6194D"/>
-          </a:solidFill>
-          <a:ln>
-            <a:noFill/>
-          </a:ln>
-        </p:spPr>
-        <p:style>
-          <a:lnRef idx="1">
-            <a:schemeClr val="accent1"/>
-          </a:lnRef>
-          <a:fillRef idx="3">
-            <a:schemeClr val="accent1"/>
-          </a:fillRef>
-          <a:effectRef idx="2">
-            <a:schemeClr val="accent1"/>
-          </a:effectRef>
-          <a:fontRef idx="minor">
-            <a:schemeClr val="lt1"/>
-          </a:fontRef>
-        </p:style>
-        <p:txBody>
-          <a:bodyPr rtlCol="0" anchor="ctr"/>
-          <a:lstStyle/>
-          <a:p>
-            <a:pPr algn="ctr"/>
-          </a:p>
-        </p:txBody>
-      </p:sp>
-      <p:sp>
-        <p:nvSpPr>
-          <p:cNvPr id="17" name="Rounded Rectangle 16"/>
-          <p:cNvSpPr/>
-          <p:nvPr/>
-        </p:nvSpPr>
-        <p:spPr>
-          <a:xfrm>
-            <a:off x="8028432" y="3538728"/>
-            <a:ext cx="3401568" cy="1691640"/>
-          </a:xfrm>
-          <a:prstGeom prst="roundRect">
-            <a:avLst>
-              <a:gd name="adj" fmla="val 5000"/>
-            </a:avLst>
-          </a:prstGeom>
-          <a:solidFill>
-            <a:srgbClr val="18181F"/>
-          </a:solidFill>
-          <a:ln w="12700">
-            <a:solidFill>
-              <a:srgbClr val="2E2E38"/>
-            </a:solidFill>
-          </a:ln>
-        </p:spPr>
-        <p:style>
-          <a:lnRef idx="1">
-            <a:schemeClr val="accent1"/>
-          </a:lnRef>
-          <a:fillRef idx="3">
-            <a:schemeClr val="accent1"/>
-          </a:fillRef>
-          <a:effectRef idx="2">
-            <a:schemeClr val="accent1"/>
-          </a:effectRef>
-          <a:fontRef idx="minor">
-            <a:schemeClr val="lt1"/>
-          </a:fontRef>
-        </p:style>
-        <p:txBody>
-          <a:bodyPr rtlCol="0" anchor="t" wrap="square" lIns="109728" rIns="109728" tIns="91440" bIns="73152"/>
-          <a:lstStyle/>
-          <a:p>
-            <a:pPr algn="l">
-              <a:lnSpc>
-                <a:spcPct val="110000"/>
-              </a:lnSpc>
-              <a:spcBef>
-                <a:spcPts val="0"/>
-              </a:spcBef>
-              <a:spcAft>
-                <a:spcPts val="600"/>
-              </a:spcAft>
-            </a:pPr>
-            <a:r>
-              <a:rPr sz="1300" b="1">
-                <a:solidFill>
-                  <a:srgbClr val="FFFFFF"/>
-                </a:solidFill>
-                <a:latin typeface="Calibri"/>
-                <a:ea typeface="Calibri"/>
-                <a:cs typeface="Calibri"/>
-              </a:rPr>
-              <a:t>Tool sprawl</a:t>
-            </a:r>
-          </a:p>
-          <a:p>
-            <a:pPr algn="l">
-              <a:lnSpc>
-                <a:spcPct val="110000"/>
-              </a:lnSpc>
-              <a:spcBef>
-                <a:spcPts val="0"/>
-              </a:spcBef>
-              <a:spcAft>
-                <a:spcPts val="0"/>
-              </a:spcAft>
-            </a:pPr>
-            <a:r>
-              <a:rPr sz="1100" b="0">
-                <a:solidFill>
-                  <a:srgbClr val="A1A1AA"/>
-                </a:solidFill>
-                <a:latin typeface="Calibri"/>
-                <a:ea typeface="Calibri"/>
-                <a:cs typeface="Calibri"/>
-              </a:rPr>
-              <a:t>Briefing, writing, casting, mix, and QA live in five apps.</a:t>
-            </a:r>
-          </a:p>
-        </p:txBody>
-      </p:sp>
-      <p:sp>
-        <p:nvSpPr>
-          <p:cNvPr id="18" name="TextBox 17"/>
-          <p:cNvSpPr txBox="1"/>
-          <p:nvPr/>
-        </p:nvSpPr>
-        <p:spPr>
-          <a:xfrm>
-            <a:off x="640080" y="6473952"/>
-            <a:ext cx="8412480" cy="201168"/>
-          </a:xfrm>
-          <a:prstGeom prst="rect">
-            <a:avLst/>
-          </a:prstGeom>
           <a:noFill/>
         </p:spPr>
         <p:txBody>
           <a:bodyPr wrap="square" anchor="t" lIns="0" rIns="0" tIns="0" bIns="0"/>
           <a:lstStyle/>
           <a:p>
-            <a:pPr algn="l">
+            <a:pPr algn="r">
               <a:lnSpc>
                 <a:spcPct val="110000"/>
               </a:lnSpc>
@@ -6628,52 +5888,7 @@
                 <a:ea typeface="Calibri"/>
                 <a:cs typeface="Calibri"/>
               </a:rPr>
-              <a:t>Kahani  ·  Zero to One × Pocket FM  ·  IIM Bangalore</a:t>
-            </a:r>
-          </a:p>
-        </p:txBody>
-      </p:sp>
-      <p:sp>
-        <p:nvSpPr>
-          <p:cNvPr id="19" name="TextBox 18"/>
-          <p:cNvSpPr txBox="1"/>
-          <p:nvPr/>
-        </p:nvSpPr>
-        <p:spPr>
-          <a:xfrm>
-            <a:off x="10195560" y="6473952"/>
-            <a:ext cx="1371600" cy="201168"/>
-          </a:xfrm>
-          <a:prstGeom prst="rect">
-            <a:avLst/>
-          </a:prstGeom>
-          <a:noFill/>
-        </p:spPr>
-        <p:txBody>
-          <a:bodyPr wrap="square" anchor="t" lIns="0" rIns="0" tIns="0" bIns="0"/>
-          <a:lstStyle/>
-          <a:p>
-            <a:pPr algn="r">
-              <a:lnSpc>
-                <a:spcPct val="110000"/>
-              </a:lnSpc>
-              <a:spcBef>
-                <a:spcPts val="0"/>
-              </a:spcBef>
-              <a:spcAft>
-                <a:spcPts val="0"/>
-              </a:spcAft>
-            </a:pPr>
-            <a:r>
-              <a:rPr sz="1000" b="0">
-                <a:solidFill>
-                  <a:srgbClr val="71717A"/>
-                </a:solidFill>
-                <a:latin typeface="Calibri"/>
-                <a:ea typeface="Calibri"/>
-                <a:cs typeface="Calibri"/>
-              </a:rPr>
-              <a:t>04 / 08</a:t>
+              <a:t>04 / 09</a:t>
             </a:r>
           </a:p>
         </p:txBody>
@@ -6787,7 +6002,7 @@
                 <a:ea typeface="Calibri"/>
                 <a:cs typeface="Calibri"/>
               </a:rPr>
-              <a:t>04  HOW IT WORKS</a:t>
+              <a:t>04  PROBLEM</a:t>
             </a:r>
           </a:p>
         </p:txBody>
@@ -6832,7 +6047,7 @@
                 <a:ea typeface="Calibri"/>
                 <a:cs typeface="Calibri"/>
               </a:rPr>
-              <a:t>One orchestrated pipeline — agents specialize, humans gate quality cliffs</a:t>
+              <a:t>Serial audio wins on part-to-part retention. Production is still fragmented.</a:t>
             </a:r>
           </a:p>
         </p:txBody>
@@ -6877,21 +6092,64 @@
                 <a:ea typeface="Calibri"/>
                 <a:cs typeface="Calibri"/>
               </a:rPr>
-              <a:t>Auto-run generation. Never auto-publish.</a:t>
-            </a:r>
-          </a:p>
-        </p:txBody>
-      </p:sp>
-      <p:sp>
-        <p:nvSpPr>
-          <p:cNvPr id="6" name="Rounded Rectangle 5"/>
+              <a:t>Pocket FM–class storytelling needs speed, cultural specificity, and pre-publish signal.</a:t>
+            </a:r>
+          </a:p>
+        </p:txBody>
+      </p:sp>
+      <p:sp>
+        <p:nvSpPr>
+          <p:cNvPr id="6" name="Rectangle 5"/>
           <p:cNvSpPr/>
           <p:nvPr/>
         </p:nvSpPr>
         <p:spPr>
           <a:xfrm>
             <a:off x="640080" y="1664208"/>
-            <a:ext cx="1234440" cy="1051560"/>
+            <a:ext cx="73152" cy="1691640"/>
+          </a:xfrm>
+          <a:prstGeom prst="rect">
+            <a:avLst/>
+          </a:prstGeom>
+          <a:solidFill>
+            <a:srgbClr val="E6194D"/>
+          </a:solidFill>
+          <a:ln>
+            <a:noFill/>
+          </a:ln>
+        </p:spPr>
+        <p:style>
+          <a:lnRef idx="1">
+            <a:schemeClr val="accent1"/>
+          </a:lnRef>
+          <a:fillRef idx="3">
+            <a:schemeClr val="accent1"/>
+          </a:fillRef>
+          <a:effectRef idx="2">
+            <a:schemeClr val="accent1"/>
+          </a:effectRef>
+          <a:fontRef idx="minor">
+            <a:schemeClr val="lt1"/>
+          </a:fontRef>
+        </p:style>
+        <p:txBody>
+          <a:bodyPr rtlCol="0" anchor="ctr"/>
+          <a:lstStyle/>
+          <a:p>
+            <a:pPr algn="ctr"/>
+          </a:p>
+        </p:txBody>
+      </p:sp>
+      <p:sp>
+        <p:nvSpPr>
+          <p:cNvPr id="7" name="Rounded Rectangle 6"/>
+          <p:cNvSpPr/>
+          <p:nvPr/>
+        </p:nvSpPr>
+        <p:spPr>
+          <a:xfrm>
+            <a:off x="713232" y="1664208"/>
+            <a:ext cx="3401568" cy="1691640"/>
           </a:xfrm>
           <a:prstGeom prst="roundRect">
             <a:avLst>
@@ -6922,46 +6180,22 @@
           </a:fontRef>
         </p:style>
         <p:txBody>
-          <a:bodyPr rtlCol="0" anchor="ctr" wrap="square" lIns="128016" rIns="109728" tIns="91440" bIns="73152"/>
-          <a:lstStyle/>
-          <a:p>
-            <a:pPr algn="ctr">
-              <a:lnSpc>
-                <a:spcPct val="110000"/>
-              </a:lnSpc>
-              <a:spcBef>
-                <a:spcPts val="0"/>
-              </a:spcBef>
-              <a:spcAft>
-                <a:spcPts val="200"/>
-              </a:spcAft>
-            </a:pPr>
-            <a:r>
-              <a:rPr sz="1200" b="1">
-                <a:solidFill>
-                  <a:srgbClr val="E6194D"/>
-                </a:solidFill>
-                <a:latin typeface="Calibri"/>
-                <a:ea typeface="Calibri"/>
-                <a:cs typeface="Calibri"/>
-              </a:rPr>
-              <a:t>1</a:t>
-            </a:r>
-          </a:p>
-          <a:p>
-            <a:pPr algn="ctr">
-              <a:lnSpc>
-                <a:spcPct val="110000"/>
-              </a:lnSpc>
-              <a:spcBef>
-                <a:spcPts val="0"/>
-              </a:spcBef>
-              <a:spcAft>
-                <a:spcPts val="0"/>
-              </a:spcAft>
-            </a:pPr>
-            <a:r>
-              <a:rPr sz="1100" b="1">
+          <a:bodyPr rtlCol="0" anchor="t" wrap="square" lIns="109728" rIns="109728" tIns="91440" bIns="73152"/>
+          <a:lstStyle/>
+          <a:p>
+            <a:pPr algn="l">
+              <a:lnSpc>
+                <a:spcPct val="110000"/>
+              </a:lnSpc>
+              <a:spcBef>
+                <a:spcPts val="0"/>
+              </a:spcBef>
+              <a:spcAft>
+                <a:spcPts val="600"/>
+              </a:spcAft>
+            </a:pPr>
+            <a:r>
+              <a:rPr sz="1300" b="1">
                 <a:solidFill>
                   <a:srgbClr val="FFFFFF"/>
                 </a:solidFill>
@@ -6969,21 +6203,88 @@
                 <a:ea typeface="Calibri"/>
                 <a:cs typeface="Calibri"/>
               </a:rPr>
-              <a:t>Discover</a:t>
-            </a:r>
-          </a:p>
-        </p:txBody>
-      </p:sp>
-      <p:sp>
-        <p:nvSpPr>
-          <p:cNvPr id="7" name="Rounded Rectangle 6"/>
+              <a:t>Idea → script is slow</a:t>
+            </a:r>
+          </a:p>
+          <a:p>
+            <a:pPr algn="l">
+              <a:lnSpc>
+                <a:spcPct val="110000"/>
+              </a:lnSpc>
+              <a:spcBef>
+                <a:spcPts val="0"/>
+              </a:spcBef>
+              <a:spcAft>
+                <a:spcPts val="0"/>
+              </a:spcAft>
+            </a:pPr>
+            <a:r>
+              <a:rPr sz="1100" b="0">
+                <a:solidFill>
+                  <a:srgbClr val="A1A1AA"/>
+                </a:solidFill>
+                <a:latin typeface="Calibri"/>
+                <a:ea typeface="Calibri"/>
+                <a:cs typeface="Calibri"/>
+              </a:rPr>
+              <a:t>Regional authenticity is the moat. Generic LLM drafts sound thin.</a:t>
+            </a:r>
+          </a:p>
+        </p:txBody>
+      </p:sp>
+      <p:sp>
+        <p:nvSpPr>
+          <p:cNvPr id="8" name="Rectangle 7"/>
           <p:cNvSpPr/>
           <p:nvPr/>
         </p:nvSpPr>
         <p:spPr>
           <a:xfrm>
-            <a:off x="1984248" y="1664208"/>
-            <a:ext cx="1234440" cy="1051560"/>
+            <a:off x="4297680" y="1664208"/>
+            <a:ext cx="73152" cy="1691640"/>
+          </a:xfrm>
+          <a:prstGeom prst="rect">
+            <a:avLst/>
+          </a:prstGeom>
+          <a:solidFill>
+            <a:srgbClr val="E6194D"/>
+          </a:solidFill>
+          <a:ln>
+            <a:noFill/>
+          </a:ln>
+        </p:spPr>
+        <p:style>
+          <a:lnRef idx="1">
+            <a:schemeClr val="accent1"/>
+          </a:lnRef>
+          <a:fillRef idx="3">
+            <a:schemeClr val="accent1"/>
+          </a:fillRef>
+          <a:effectRef idx="2">
+            <a:schemeClr val="accent1"/>
+          </a:effectRef>
+          <a:fontRef idx="minor">
+            <a:schemeClr val="lt1"/>
+          </a:fontRef>
+        </p:style>
+        <p:txBody>
+          <a:bodyPr rtlCol="0" anchor="ctr"/>
+          <a:lstStyle/>
+          <a:p>
+            <a:pPr algn="ctr"/>
+          </a:p>
+        </p:txBody>
+      </p:sp>
+      <p:sp>
+        <p:nvSpPr>
+          <p:cNvPr id="9" name="Rounded Rectangle 8"/>
+          <p:cNvSpPr/>
+          <p:nvPr/>
+        </p:nvSpPr>
+        <p:spPr>
+          <a:xfrm>
+            <a:off x="4370832" y="1664208"/>
+            <a:ext cx="3401568" cy="1691640"/>
           </a:xfrm>
           <a:prstGeom prst="roundRect">
             <a:avLst>
@@ -7014,46 +6315,22 @@
           </a:fontRef>
         </p:style>
         <p:txBody>
-          <a:bodyPr rtlCol="0" anchor="ctr" wrap="square" lIns="128016" rIns="109728" tIns="91440" bIns="73152"/>
-          <a:lstStyle/>
-          <a:p>
-            <a:pPr algn="ctr">
-              <a:lnSpc>
-                <a:spcPct val="110000"/>
-              </a:lnSpc>
-              <a:spcBef>
-                <a:spcPts val="0"/>
-              </a:spcBef>
-              <a:spcAft>
-                <a:spcPts val="200"/>
-              </a:spcAft>
-            </a:pPr>
-            <a:r>
-              <a:rPr sz="1200" b="1">
-                <a:solidFill>
-                  <a:srgbClr val="E6194D"/>
-                </a:solidFill>
-                <a:latin typeface="Calibri"/>
-                <a:ea typeface="Calibri"/>
-                <a:cs typeface="Calibri"/>
-              </a:rPr>
-              <a:t>2</a:t>
-            </a:r>
-          </a:p>
-          <a:p>
-            <a:pPr algn="ctr">
-              <a:lnSpc>
-                <a:spcPct val="110000"/>
-              </a:lnSpc>
-              <a:spcBef>
-                <a:spcPts val="0"/>
-              </a:spcBef>
-              <a:spcAft>
-                <a:spcPts val="0"/>
-              </a:spcAft>
-            </a:pPr>
-            <a:r>
-              <a:rPr sz="1100" b="1">
+          <a:bodyPr rtlCol="0" anchor="t" wrap="square" lIns="109728" rIns="109728" tIns="91440" bIns="73152"/>
+          <a:lstStyle/>
+          <a:p>
+            <a:pPr algn="l">
+              <a:lnSpc>
+                <a:spcPct val="110000"/>
+              </a:lnSpc>
+              <a:spcBef>
+                <a:spcPts val="0"/>
+              </a:spcBef>
+              <a:spcAft>
+                <a:spcPts val="600"/>
+              </a:spcAft>
+            </a:pPr>
+            <a:r>
+              <a:rPr sz="1300" b="1">
                 <a:solidFill>
                   <a:srgbClr val="FFFFFF"/>
                 </a:solidFill>
@@ -7061,21 +6338,88 @@
                 <a:ea typeface="Calibri"/>
                 <a:cs typeface="Calibri"/>
               </a:rPr>
-              <a:t>Research</a:t>
-            </a:r>
-          </a:p>
-        </p:txBody>
-      </p:sp>
-      <p:sp>
-        <p:nvSpPr>
-          <p:cNvPr id="8" name="Rounded Rectangle 7"/>
+              <a:t>Episodes don’t chain</a:t>
+            </a:r>
+          </a:p>
+          <a:p>
+            <a:pPr algn="l">
+              <a:lnSpc>
+                <a:spcPct val="110000"/>
+              </a:lnSpc>
+              <a:spcBef>
+                <a:spcPts val="0"/>
+              </a:spcBef>
+              <a:spcAft>
+                <a:spcPts val="0"/>
+              </a:spcAft>
+            </a:pPr>
+            <a:r>
+              <a:rPr sz="1100" b="0">
+                <a:solidFill>
+                  <a:srgbClr val="A1A1AA"/>
+                </a:solidFill>
+                <a:latin typeface="Calibri"/>
+                <a:ea typeface="Calibri"/>
+                <a:cs typeface="Calibri"/>
+              </a:rPr>
+              <a:t>Weak cliffhangers → drop-off after part one.</a:t>
+            </a:r>
+          </a:p>
+        </p:txBody>
+      </p:sp>
+      <p:sp>
+        <p:nvSpPr>
+          <p:cNvPr id="10" name="Rectangle 9"/>
           <p:cNvSpPr/>
           <p:nvPr/>
         </p:nvSpPr>
         <p:spPr>
           <a:xfrm>
-            <a:off x="3328416" y="1664208"/>
-            <a:ext cx="1234440" cy="1051560"/>
+            <a:off x="7955280" y="1664208"/>
+            <a:ext cx="73152" cy="1691640"/>
+          </a:xfrm>
+          <a:prstGeom prst="rect">
+            <a:avLst/>
+          </a:prstGeom>
+          <a:solidFill>
+            <a:srgbClr val="E6194D"/>
+          </a:solidFill>
+          <a:ln>
+            <a:noFill/>
+          </a:ln>
+        </p:spPr>
+        <p:style>
+          <a:lnRef idx="1">
+            <a:schemeClr val="accent1"/>
+          </a:lnRef>
+          <a:fillRef idx="3">
+            <a:schemeClr val="accent1"/>
+          </a:fillRef>
+          <a:effectRef idx="2">
+            <a:schemeClr val="accent1"/>
+          </a:effectRef>
+          <a:fontRef idx="minor">
+            <a:schemeClr val="lt1"/>
+          </a:fontRef>
+        </p:style>
+        <p:txBody>
+          <a:bodyPr rtlCol="0" anchor="ctr"/>
+          <a:lstStyle/>
+          <a:p>
+            <a:pPr algn="ctr"/>
+          </a:p>
+        </p:txBody>
+      </p:sp>
+      <p:sp>
+        <p:nvSpPr>
+          <p:cNvPr id="11" name="Rounded Rectangle 10"/>
+          <p:cNvSpPr/>
+          <p:nvPr/>
+        </p:nvSpPr>
+        <p:spPr>
+          <a:xfrm>
+            <a:off x="8028432" y="1664208"/>
+            <a:ext cx="3401568" cy="1691640"/>
           </a:xfrm>
           <a:prstGeom prst="roundRect">
             <a:avLst>
@@ -7106,46 +6450,22 @@
           </a:fontRef>
         </p:style>
         <p:txBody>
-          <a:bodyPr rtlCol="0" anchor="ctr" wrap="square" lIns="128016" rIns="109728" tIns="91440" bIns="73152"/>
-          <a:lstStyle/>
-          <a:p>
-            <a:pPr algn="ctr">
-              <a:lnSpc>
-                <a:spcPct val="110000"/>
-              </a:lnSpc>
-              <a:spcBef>
-                <a:spcPts val="0"/>
-              </a:spcBef>
-              <a:spcAft>
-                <a:spcPts val="200"/>
-              </a:spcAft>
-            </a:pPr>
-            <a:r>
-              <a:rPr sz="1200" b="1">
-                <a:solidFill>
-                  <a:srgbClr val="E6194D"/>
-                </a:solidFill>
-                <a:latin typeface="Calibri"/>
-                <a:ea typeface="Calibri"/>
-                <a:cs typeface="Calibri"/>
-              </a:rPr>
-              <a:t>3</a:t>
-            </a:r>
-          </a:p>
-          <a:p>
-            <a:pPr algn="ctr">
-              <a:lnSpc>
-                <a:spcPct val="110000"/>
-              </a:lnSpc>
-              <a:spcBef>
-                <a:spcPts val="0"/>
-              </a:spcBef>
-              <a:spcAft>
-                <a:spcPts val="0"/>
-              </a:spcAft>
-            </a:pPr>
-            <a:r>
-              <a:rPr sz="1100" b="1">
+          <a:bodyPr rtlCol="0" anchor="t" wrap="square" lIns="109728" rIns="109728" tIns="91440" bIns="73152"/>
+          <a:lstStyle/>
+          <a:p>
+            <a:pPr algn="l">
+              <a:lnSpc>
+                <a:spcPct val="110000"/>
+              </a:lnSpc>
+              <a:spcBef>
+                <a:spcPts val="0"/>
+              </a:spcBef>
+              <a:spcAft>
+                <a:spcPts val="600"/>
+              </a:spcAft>
+            </a:pPr>
+            <a:r>
+              <a:rPr sz="1300" b="1">
                 <a:solidFill>
                   <a:srgbClr val="FFFFFF"/>
                 </a:solidFill>
@@ -7153,21 +6473,88 @@
                 <a:ea typeface="Calibri"/>
                 <a:cs typeface="Calibri"/>
               </a:rPr>
-              <a:t>Script</a:t>
-            </a:r>
-          </a:p>
-        </p:txBody>
-      </p:sp>
-      <p:sp>
-        <p:nvSpPr>
-          <p:cNvPr id="9" name="Rounded Rectangle 8"/>
+              <a:t>Audio assembly is manual</a:t>
+            </a:r>
+          </a:p>
+          <a:p>
+            <a:pPr algn="l">
+              <a:lnSpc>
+                <a:spcPct val="110000"/>
+              </a:lnSpc>
+              <a:spcBef>
+                <a:spcPts val="0"/>
+              </a:spcBef>
+              <a:spcAft>
+                <a:spcPts val="0"/>
+              </a:spcAft>
+            </a:pPr>
+            <a:r>
+              <a:rPr sz="1100" b="0">
+                <a:solidFill>
+                  <a:srgbClr val="A1A1AA"/>
+                </a:solidFill>
+                <a:latin typeface="Calibri"/>
+                <a:ea typeface="Calibri"/>
+                <a:cs typeface="Calibri"/>
+              </a:rPr>
+              <a:t>Voice, SFX, and visuals are synced by hand across tools.</a:t>
+            </a:r>
+          </a:p>
+        </p:txBody>
+      </p:sp>
+      <p:sp>
+        <p:nvSpPr>
+          <p:cNvPr id="12" name="Rectangle 11"/>
           <p:cNvSpPr/>
           <p:nvPr/>
         </p:nvSpPr>
         <p:spPr>
           <a:xfrm>
-            <a:off x="4672584" y="1664208"/>
-            <a:ext cx="1234440" cy="1051560"/>
+            <a:off x="640080" y="3538728"/>
+            <a:ext cx="73152" cy="1691640"/>
+          </a:xfrm>
+          <a:prstGeom prst="rect">
+            <a:avLst/>
+          </a:prstGeom>
+          <a:solidFill>
+            <a:srgbClr val="E6194D"/>
+          </a:solidFill>
+          <a:ln>
+            <a:noFill/>
+          </a:ln>
+        </p:spPr>
+        <p:style>
+          <a:lnRef idx="1">
+            <a:schemeClr val="accent1"/>
+          </a:lnRef>
+          <a:fillRef idx="3">
+            <a:schemeClr val="accent1"/>
+          </a:fillRef>
+          <a:effectRef idx="2">
+            <a:schemeClr val="accent1"/>
+          </a:effectRef>
+          <a:fontRef idx="minor">
+            <a:schemeClr val="lt1"/>
+          </a:fontRef>
+        </p:style>
+        <p:txBody>
+          <a:bodyPr rtlCol="0" anchor="ctr"/>
+          <a:lstStyle/>
+          <a:p>
+            <a:pPr algn="ctr"/>
+          </a:p>
+        </p:txBody>
+      </p:sp>
+      <p:sp>
+        <p:nvSpPr>
+          <p:cNvPr id="13" name="Rounded Rectangle 12"/>
+          <p:cNvSpPr/>
+          <p:nvPr/>
+        </p:nvSpPr>
+        <p:spPr>
+          <a:xfrm>
+            <a:off x="713232" y="3538728"/>
+            <a:ext cx="3401568" cy="1691640"/>
           </a:xfrm>
           <a:prstGeom prst="roundRect">
             <a:avLst>
@@ -7198,46 +6585,22 @@
           </a:fontRef>
         </p:style>
         <p:txBody>
-          <a:bodyPr rtlCol="0" anchor="ctr" wrap="square" lIns="128016" rIns="109728" tIns="91440" bIns="73152"/>
-          <a:lstStyle/>
-          <a:p>
-            <a:pPr algn="ctr">
-              <a:lnSpc>
-                <a:spcPct val="110000"/>
-              </a:lnSpc>
-              <a:spcBef>
-                <a:spcPts val="0"/>
-              </a:spcBef>
-              <a:spcAft>
-                <a:spcPts val="200"/>
-              </a:spcAft>
-            </a:pPr>
-            <a:r>
-              <a:rPr sz="1200" b="1">
-                <a:solidFill>
-                  <a:srgbClr val="E6194D"/>
-                </a:solidFill>
-                <a:latin typeface="Calibri"/>
-                <a:ea typeface="Calibri"/>
-                <a:cs typeface="Calibri"/>
-              </a:rPr>
-              <a:t>4</a:t>
-            </a:r>
-          </a:p>
-          <a:p>
-            <a:pPr algn="ctr">
-              <a:lnSpc>
-                <a:spcPct val="110000"/>
-              </a:lnSpc>
-              <a:spcBef>
-                <a:spcPts val="0"/>
-              </a:spcBef>
-              <a:spcAft>
-                <a:spcPts val="0"/>
-              </a:spcAft>
-            </a:pPr>
-            <a:r>
-              <a:rPr sz="1100" b="1">
+          <a:bodyPr rtlCol="0" anchor="t" wrap="square" lIns="109728" rIns="109728" tIns="91440" bIns="73152"/>
+          <a:lstStyle/>
+          <a:p>
+            <a:pPr algn="l">
+              <a:lnSpc>
+                <a:spcPct val="110000"/>
+              </a:lnSpc>
+              <a:spcBef>
+                <a:spcPts val="0"/>
+              </a:spcBef>
+              <a:spcAft>
+                <a:spcPts val="600"/>
+              </a:spcAft>
+            </a:pPr>
+            <a:r>
+              <a:rPr sz="1300" b="1">
                 <a:solidFill>
                   <a:srgbClr val="FFFFFF"/>
                 </a:solidFill>
@@ -7245,21 +6608,88 @@
                 <a:ea typeface="Calibri"/>
                 <a:cs typeface="Calibri"/>
               </a:rPr>
-              <a:t>Narrate</a:t>
-            </a:r>
-          </a:p>
-        </p:txBody>
-      </p:sp>
-      <p:sp>
-        <p:nvSpPr>
-          <p:cNvPr id="10" name="Rounded Rectangle 9"/>
+              <a:t>No pre-publish signal</a:t>
+            </a:r>
+          </a:p>
+          <a:p>
+            <a:pPr algn="l">
+              <a:lnSpc>
+                <a:spcPct val="110000"/>
+              </a:lnSpc>
+              <a:spcBef>
+                <a:spcPts val="0"/>
+              </a:spcBef>
+              <a:spcAft>
+                <a:spcPts val="0"/>
+              </a:spcAft>
+            </a:pPr>
+            <a:r>
+              <a:rPr sz="1100" b="0">
+                <a:solidFill>
+                  <a:srgbClr val="A1A1AA"/>
+                </a:solidFill>
+                <a:latin typeface="Calibri"/>
+                <a:ea typeface="Calibri"/>
+                <a:cs typeface="Calibri"/>
+              </a:rPr>
+              <a:t>Teams guess which cohorts will continue listening.</a:t>
+            </a:r>
+          </a:p>
+        </p:txBody>
+      </p:sp>
+      <p:sp>
+        <p:nvSpPr>
+          <p:cNvPr id="14" name="Rectangle 13"/>
           <p:cNvSpPr/>
           <p:nvPr/>
         </p:nvSpPr>
         <p:spPr>
           <a:xfrm>
-            <a:off x="6016752" y="1664208"/>
-            <a:ext cx="1234440" cy="1051560"/>
+            <a:off x="4297680" y="3538728"/>
+            <a:ext cx="73152" cy="1691640"/>
+          </a:xfrm>
+          <a:prstGeom prst="rect">
+            <a:avLst/>
+          </a:prstGeom>
+          <a:solidFill>
+            <a:srgbClr val="E6194D"/>
+          </a:solidFill>
+          <a:ln>
+            <a:noFill/>
+          </a:ln>
+        </p:spPr>
+        <p:style>
+          <a:lnRef idx="1">
+            <a:schemeClr val="accent1"/>
+          </a:lnRef>
+          <a:fillRef idx="3">
+            <a:schemeClr val="accent1"/>
+          </a:fillRef>
+          <a:effectRef idx="2">
+            <a:schemeClr val="accent1"/>
+          </a:effectRef>
+          <a:fontRef idx="minor">
+            <a:schemeClr val="lt1"/>
+          </a:fontRef>
+        </p:style>
+        <p:txBody>
+          <a:bodyPr rtlCol="0" anchor="ctr"/>
+          <a:lstStyle/>
+          <a:p>
+            <a:pPr algn="ctr"/>
+          </a:p>
+        </p:txBody>
+      </p:sp>
+      <p:sp>
+        <p:nvSpPr>
+          <p:cNvPr id="15" name="Rounded Rectangle 14"/>
+          <p:cNvSpPr/>
+          <p:nvPr/>
+        </p:nvSpPr>
+        <p:spPr>
+          <a:xfrm>
+            <a:off x="4370832" y="3538728"/>
+            <a:ext cx="3401568" cy="1691640"/>
           </a:xfrm>
           <a:prstGeom prst="roundRect">
             <a:avLst>
@@ -7290,46 +6720,22 @@
           </a:fontRef>
         </p:style>
         <p:txBody>
-          <a:bodyPr rtlCol="0" anchor="ctr" wrap="square" lIns="128016" rIns="109728" tIns="91440" bIns="73152"/>
-          <a:lstStyle/>
-          <a:p>
-            <a:pPr algn="ctr">
-              <a:lnSpc>
-                <a:spcPct val="110000"/>
-              </a:lnSpc>
-              <a:spcBef>
-                <a:spcPts val="0"/>
-              </a:spcBef>
-              <a:spcAft>
-                <a:spcPts val="200"/>
-              </a:spcAft>
-            </a:pPr>
-            <a:r>
-              <a:rPr sz="1200" b="1">
-                <a:solidFill>
-                  <a:srgbClr val="E6194D"/>
-                </a:solidFill>
-                <a:latin typeface="Calibri"/>
-                <a:ea typeface="Calibri"/>
-                <a:cs typeface="Calibri"/>
-              </a:rPr>
-              <a:t>5</a:t>
-            </a:r>
-          </a:p>
-          <a:p>
-            <a:pPr algn="ctr">
-              <a:lnSpc>
-                <a:spcPct val="110000"/>
-              </a:lnSpc>
-              <a:spcBef>
-                <a:spcPts val="0"/>
-              </a:spcBef>
-              <a:spcAft>
-                <a:spcPts val="0"/>
-              </a:spcAft>
-            </a:pPr>
-            <a:r>
-              <a:rPr sz="1100" b="1">
+          <a:bodyPr rtlCol="0" anchor="t" wrap="square" lIns="109728" rIns="109728" tIns="91440" bIns="73152"/>
+          <a:lstStyle/>
+          <a:p>
+            <a:pPr algn="l">
+              <a:lnSpc>
+                <a:spcPct val="110000"/>
+              </a:lnSpc>
+              <a:spcBef>
+                <a:spcPts val="0"/>
+              </a:spcBef>
+              <a:spcAft>
+                <a:spcPts val="600"/>
+              </a:spcAft>
+            </a:pPr>
+            <a:r>
+              <a:rPr sz="1300" b="1">
                 <a:solidFill>
                   <a:srgbClr val="FFFFFF"/>
                 </a:solidFill>
@@ -7337,21 +6743,88 @@
                 <a:ea typeface="Calibri"/>
                 <a:cs typeface="Calibri"/>
               </a:rPr>
-              <a:t>Voice</a:t>
-            </a:r>
-          </a:p>
-        </p:txBody>
-      </p:sp>
-      <p:sp>
-        <p:nvSpPr>
-          <p:cNvPr id="11" name="Rounded Rectangle 10"/>
+              <a:t>No closed loop</a:t>
+            </a:r>
+          </a:p>
+          <a:p>
+            <a:pPr algn="l">
+              <a:lnSpc>
+                <a:spcPct val="110000"/>
+              </a:lnSpc>
+              <a:spcBef>
+                <a:spcPts val="0"/>
+              </a:spcBef>
+              <a:spcAft>
+                <a:spcPts val="0"/>
+              </a:spcAft>
+            </a:pPr>
+            <a:r>
+              <a:rPr sz="1100" b="0">
+                <a:solidFill>
+                  <a:srgbClr val="A1A1AA"/>
+                </a:solidFill>
+                <a:latin typeface="Calibri"/>
+                <a:ea typeface="Calibri"/>
+                <a:cs typeface="Calibri"/>
+              </a:rPr>
+              <a:t>Wins on one story don’t systematically improve the next.</a:t>
+            </a:r>
+          </a:p>
+        </p:txBody>
+      </p:sp>
+      <p:sp>
+        <p:nvSpPr>
+          <p:cNvPr id="16" name="Rectangle 15"/>
           <p:cNvSpPr/>
           <p:nvPr/>
         </p:nvSpPr>
         <p:spPr>
           <a:xfrm>
-            <a:off x="7360920" y="1664208"/>
-            <a:ext cx="1234440" cy="1051560"/>
+            <a:off x="7955280" y="3538728"/>
+            <a:ext cx="73152" cy="1691640"/>
+          </a:xfrm>
+          <a:prstGeom prst="rect">
+            <a:avLst/>
+          </a:prstGeom>
+          <a:solidFill>
+            <a:srgbClr val="E6194D"/>
+          </a:solidFill>
+          <a:ln>
+            <a:noFill/>
+          </a:ln>
+        </p:spPr>
+        <p:style>
+          <a:lnRef idx="1">
+            <a:schemeClr val="accent1"/>
+          </a:lnRef>
+          <a:fillRef idx="3">
+            <a:schemeClr val="accent1"/>
+          </a:fillRef>
+          <a:effectRef idx="2">
+            <a:schemeClr val="accent1"/>
+          </a:effectRef>
+          <a:fontRef idx="minor">
+            <a:schemeClr val="lt1"/>
+          </a:fontRef>
+        </p:style>
+        <p:txBody>
+          <a:bodyPr rtlCol="0" anchor="ctr"/>
+          <a:lstStyle/>
+          <a:p>
+            <a:pPr algn="ctr"/>
+          </a:p>
+        </p:txBody>
+      </p:sp>
+      <p:sp>
+        <p:nvSpPr>
+          <p:cNvPr id="17" name="Rounded Rectangle 16"/>
+          <p:cNvSpPr/>
+          <p:nvPr/>
+        </p:nvSpPr>
+        <p:spPr>
+          <a:xfrm>
+            <a:off x="8028432" y="3538728"/>
+            <a:ext cx="3401568" cy="1691640"/>
           </a:xfrm>
           <a:prstGeom prst="roundRect">
             <a:avLst>
@@ -7382,46 +6855,22 @@
           </a:fontRef>
         </p:style>
         <p:txBody>
-          <a:bodyPr rtlCol="0" anchor="ctr" wrap="square" lIns="128016" rIns="109728" tIns="91440" bIns="73152"/>
-          <a:lstStyle/>
-          <a:p>
-            <a:pPr algn="ctr">
-              <a:lnSpc>
-                <a:spcPct val="110000"/>
-              </a:lnSpc>
-              <a:spcBef>
-                <a:spcPts val="0"/>
-              </a:spcBef>
-              <a:spcAft>
-                <a:spcPts val="200"/>
-              </a:spcAft>
-            </a:pPr>
-            <a:r>
-              <a:rPr sz="1200" b="1">
-                <a:solidFill>
-                  <a:srgbClr val="E6194D"/>
-                </a:solidFill>
-                <a:latin typeface="Calibri"/>
-                <a:ea typeface="Calibri"/>
-                <a:cs typeface="Calibri"/>
-              </a:rPr>
-              <a:t>6</a:t>
-            </a:r>
-          </a:p>
-          <a:p>
-            <a:pPr algn="ctr">
-              <a:lnSpc>
-                <a:spcPct val="110000"/>
-              </a:lnSpc>
-              <a:spcBef>
-                <a:spcPts val="0"/>
-              </a:spcBef>
-              <a:spcAft>
-                <a:spcPts val="0"/>
-              </a:spcAft>
-            </a:pPr>
-            <a:r>
-              <a:rPr sz="1100" b="1">
+          <a:bodyPr rtlCol="0" anchor="t" wrap="square" lIns="109728" rIns="109728" tIns="91440" bIns="73152"/>
+          <a:lstStyle/>
+          <a:p>
+            <a:pPr algn="l">
+              <a:lnSpc>
+                <a:spcPct val="110000"/>
+              </a:lnSpc>
+              <a:spcBef>
+                <a:spcPts val="0"/>
+              </a:spcBef>
+              <a:spcAft>
+                <a:spcPts val="600"/>
+              </a:spcAft>
+            </a:pPr>
+            <a:r>
+              <a:rPr sz="1300" b="1">
                 <a:solidFill>
                   <a:srgbClr val="FFFFFF"/>
                 </a:solidFill>
@@ -7429,559 +6878,31 @@
                 <a:ea typeface="Calibri"/>
                 <a:cs typeface="Calibri"/>
               </a:rPr>
-              <a:t>Visuals</a:t>
-            </a:r>
-          </a:p>
-        </p:txBody>
-      </p:sp>
-      <p:sp>
-        <p:nvSpPr>
-          <p:cNvPr id="12" name="Rounded Rectangle 11"/>
-          <p:cNvSpPr/>
-          <p:nvPr/>
-        </p:nvSpPr>
-        <p:spPr>
-          <a:xfrm>
-            <a:off x="8705088" y="1664208"/>
-            <a:ext cx="1234440" cy="1051560"/>
-          </a:xfrm>
-          <a:prstGeom prst="roundRect">
-            <a:avLst>
-              <a:gd name="adj" fmla="val 5000"/>
-            </a:avLst>
-          </a:prstGeom>
-          <a:solidFill>
-            <a:srgbClr val="18181F"/>
-          </a:solidFill>
-          <a:ln w="12700">
-            <a:solidFill>
-              <a:srgbClr val="2E2E38"/>
-            </a:solidFill>
-          </a:ln>
-        </p:spPr>
-        <p:style>
-          <a:lnRef idx="1">
-            <a:schemeClr val="accent1"/>
-          </a:lnRef>
-          <a:fillRef idx="3">
-            <a:schemeClr val="accent1"/>
-          </a:fillRef>
-          <a:effectRef idx="2">
-            <a:schemeClr val="accent1"/>
-          </a:effectRef>
-          <a:fontRef idx="minor">
-            <a:schemeClr val="lt1"/>
-          </a:fontRef>
-        </p:style>
-        <p:txBody>
-          <a:bodyPr rtlCol="0" anchor="ctr" wrap="square" lIns="128016" rIns="109728" tIns="91440" bIns="73152"/>
-          <a:lstStyle/>
-          <a:p>
-            <a:pPr algn="ctr">
-              <a:lnSpc>
-                <a:spcPct val="110000"/>
-              </a:lnSpc>
-              <a:spcBef>
-                <a:spcPts val="0"/>
-              </a:spcBef>
-              <a:spcAft>
-                <a:spcPts val="200"/>
-              </a:spcAft>
-            </a:pPr>
-            <a:r>
-              <a:rPr sz="1200" b="1">
-                <a:solidFill>
-                  <a:srgbClr val="E6194D"/>
-                </a:solidFill>
-                <a:latin typeface="Calibri"/>
-                <a:ea typeface="Calibri"/>
-                <a:cs typeface="Calibri"/>
-              </a:rPr>
-              <a:t>7</a:t>
-            </a:r>
-          </a:p>
-          <a:p>
-            <a:pPr algn="ctr">
-              <a:lnSpc>
-                <a:spcPct val="110000"/>
-              </a:lnSpc>
-              <a:spcBef>
-                <a:spcPts val="0"/>
-              </a:spcBef>
-              <a:spcAft>
-                <a:spcPts val="0"/>
-              </a:spcAft>
-            </a:pPr>
-            <a:r>
-              <a:rPr sz="1100" b="1">
-                <a:solidFill>
-                  <a:srgbClr val="FFFFFF"/>
-                </a:solidFill>
-                <a:latin typeface="Calibri"/>
-                <a:ea typeface="Calibri"/>
-                <a:cs typeface="Calibri"/>
-              </a:rPr>
-              <a:t>Edit</a:t>
-            </a:r>
-          </a:p>
-        </p:txBody>
-      </p:sp>
-      <p:sp>
-        <p:nvSpPr>
-          <p:cNvPr id="13" name="Rounded Rectangle 12"/>
-          <p:cNvSpPr/>
-          <p:nvPr/>
-        </p:nvSpPr>
-        <p:spPr>
-          <a:xfrm>
-            <a:off x="10049256" y="1664208"/>
-            <a:ext cx="1234440" cy="1051560"/>
-          </a:xfrm>
-          <a:prstGeom prst="roundRect">
-            <a:avLst>
-              <a:gd name="adj" fmla="val 5000"/>
-            </a:avLst>
-          </a:prstGeom>
-          <a:solidFill>
-            <a:srgbClr val="18181F"/>
-          </a:solidFill>
-          <a:ln w="12700">
-            <a:solidFill>
-              <a:srgbClr val="2E2E38"/>
-            </a:solidFill>
-          </a:ln>
-        </p:spPr>
-        <p:style>
-          <a:lnRef idx="1">
-            <a:schemeClr val="accent1"/>
-          </a:lnRef>
-          <a:fillRef idx="3">
-            <a:schemeClr val="accent1"/>
-          </a:fillRef>
-          <a:effectRef idx="2">
-            <a:schemeClr val="accent1"/>
-          </a:effectRef>
-          <a:fontRef idx="minor">
-            <a:schemeClr val="lt1"/>
-          </a:fontRef>
-        </p:style>
-        <p:txBody>
-          <a:bodyPr rtlCol="0" anchor="ctr" wrap="square" lIns="128016" rIns="109728" tIns="91440" bIns="73152"/>
-          <a:lstStyle/>
-          <a:p>
-            <a:pPr algn="ctr">
-              <a:lnSpc>
-                <a:spcPct val="110000"/>
-              </a:lnSpc>
-              <a:spcBef>
-                <a:spcPts val="0"/>
-              </a:spcBef>
-              <a:spcAft>
-                <a:spcPts val="200"/>
-              </a:spcAft>
-            </a:pPr>
-            <a:r>
-              <a:rPr sz="1200" b="1">
-                <a:solidFill>
-                  <a:srgbClr val="E6194D"/>
-                </a:solidFill>
-                <a:latin typeface="Calibri"/>
-                <a:ea typeface="Calibri"/>
-                <a:cs typeface="Calibri"/>
-              </a:rPr>
-              <a:t>8</a:t>
-            </a:r>
-          </a:p>
-          <a:p>
-            <a:pPr algn="ctr">
-              <a:lnSpc>
-                <a:spcPct val="110000"/>
-              </a:lnSpc>
-              <a:spcBef>
-                <a:spcPts val="0"/>
-              </a:spcBef>
-              <a:spcAft>
-                <a:spcPts val="0"/>
-              </a:spcAft>
-            </a:pPr>
-            <a:r>
-              <a:rPr sz="1100" b="1">
-                <a:solidFill>
-                  <a:srgbClr val="FFFFFF"/>
-                </a:solidFill>
-                <a:latin typeface="Calibri"/>
-                <a:ea typeface="Calibri"/>
-                <a:cs typeface="Calibri"/>
-              </a:rPr>
-              <a:t>Simulate</a:t>
-            </a:r>
-          </a:p>
-        </p:txBody>
-      </p:sp>
-      <p:sp>
-        <p:nvSpPr>
-          <p:cNvPr id="14" name="Rounded Rectangle 13"/>
-          <p:cNvSpPr/>
-          <p:nvPr/>
-        </p:nvSpPr>
-        <p:spPr>
-          <a:xfrm>
-            <a:off x="640080" y="2944368"/>
-            <a:ext cx="2560320" cy="2697480"/>
-          </a:xfrm>
-          <a:prstGeom prst="roundRect">
-            <a:avLst>
-              <a:gd name="adj" fmla="val 5000"/>
-            </a:avLst>
-          </a:prstGeom>
-          <a:solidFill>
-            <a:srgbClr val="18181F"/>
-          </a:solidFill>
-          <a:ln w="12700">
-            <a:solidFill>
-              <a:srgbClr val="2E2E38"/>
-            </a:solidFill>
-          </a:ln>
-        </p:spPr>
-        <p:style>
-          <a:lnRef idx="1">
-            <a:schemeClr val="accent1"/>
-          </a:lnRef>
-          <a:fillRef idx="3">
-            <a:schemeClr val="accent1"/>
-          </a:fillRef>
-          <a:effectRef idx="2">
-            <a:schemeClr val="accent1"/>
-          </a:effectRef>
-          <a:fontRef idx="minor">
-            <a:schemeClr val="lt1"/>
-          </a:fontRef>
-        </p:style>
-        <p:txBody>
-          <a:bodyPr rtlCol="0" anchor="t" wrap="square" lIns="128016" rIns="109728" tIns="91440" bIns="73152"/>
-          <a:lstStyle/>
-          <a:p>
-            <a:pPr algn="l">
-              <a:lnSpc>
-                <a:spcPct val="110000"/>
-              </a:lnSpc>
-              <a:spcBef>
-                <a:spcPts val="0"/>
-              </a:spcBef>
-              <a:spcAft>
-                <a:spcPts val="800"/>
-              </a:spcAft>
-            </a:pPr>
-            <a:r>
-              <a:rPr sz="1100" b="1">
-                <a:solidFill>
-                  <a:srgbClr val="E6194D"/>
-                </a:solidFill>
-                <a:latin typeface="Calibri"/>
-                <a:ea typeface="Calibri"/>
-                <a:cs typeface="Calibri"/>
-              </a:rPr>
-              <a:t>GROUND</a:t>
-            </a:r>
-          </a:p>
-          <a:p>
-            <a:pPr algn="l">
-              <a:lnSpc>
-                <a:spcPct val="110000"/>
-              </a:lnSpc>
-              <a:spcBef>
-                <a:spcPts val="0"/>
-              </a:spcBef>
-              <a:spcAft>
-                <a:spcPts val="0"/>
-              </a:spcAft>
-            </a:pPr>
-            <a:r>
-              <a:rPr sz="1200" b="0">
-                <a:solidFill>
-                  <a:srgbClr val="FFFFFF"/>
-                </a:solidFill>
-                <a:latin typeface="Calibri"/>
-                <a:ea typeface="Calibri"/>
-                <a:cs typeface="Calibri"/>
-              </a:rPr>
-              <a:t>Attachments → Databricks AI Search. Cast &amp; templates → Vector Search. Optional Tavily crawl for fresh hooks.</a:t>
-            </a:r>
-          </a:p>
-        </p:txBody>
-      </p:sp>
-      <p:sp>
-        <p:nvSpPr>
-          <p:cNvPr id="15" name="Rounded Rectangle 14"/>
-          <p:cNvSpPr/>
-          <p:nvPr/>
-        </p:nvSpPr>
-        <p:spPr>
-          <a:xfrm>
-            <a:off x="3383280" y="2944368"/>
-            <a:ext cx="2560320" cy="2697480"/>
-          </a:xfrm>
-          <a:prstGeom prst="roundRect">
-            <a:avLst>
-              <a:gd name="adj" fmla="val 5000"/>
-            </a:avLst>
-          </a:prstGeom>
-          <a:solidFill>
-            <a:srgbClr val="18181F"/>
-          </a:solidFill>
-          <a:ln w="12700">
-            <a:solidFill>
-              <a:srgbClr val="2E2E38"/>
-            </a:solidFill>
-          </a:ln>
-        </p:spPr>
-        <p:style>
-          <a:lnRef idx="1">
-            <a:schemeClr val="accent1"/>
-          </a:lnRef>
-          <a:fillRef idx="3">
-            <a:schemeClr val="accent1"/>
-          </a:fillRef>
-          <a:effectRef idx="2">
-            <a:schemeClr val="accent1"/>
-          </a:effectRef>
-          <a:fontRef idx="minor">
-            <a:schemeClr val="lt1"/>
-          </a:fontRef>
-        </p:style>
-        <p:txBody>
-          <a:bodyPr rtlCol="0" anchor="t" wrap="square" lIns="128016" rIns="109728" tIns="91440" bIns="73152"/>
-          <a:lstStyle/>
-          <a:p>
-            <a:pPr algn="l">
-              <a:lnSpc>
-                <a:spcPct val="110000"/>
-              </a:lnSpc>
-              <a:spcBef>
-                <a:spcPts val="0"/>
-              </a:spcBef>
-              <a:spcAft>
-                <a:spcPts val="800"/>
-              </a:spcAft>
-            </a:pPr>
-            <a:r>
-              <a:rPr sz="1100" b="1">
-                <a:solidFill>
-                  <a:srgbClr val="E6194D"/>
-                </a:solidFill>
-                <a:latin typeface="Calibri"/>
-                <a:ea typeface="Calibri"/>
-                <a:cs typeface="Calibri"/>
-              </a:rPr>
-              <a:t>WRITE</a:t>
-            </a:r>
-          </a:p>
-          <a:p>
-            <a:pPr algn="l">
-              <a:lnSpc>
-                <a:spcPct val="110000"/>
-              </a:lnSpc>
-              <a:spcBef>
-                <a:spcPts val="0"/>
-              </a:spcBef>
-              <a:spcAft>
-                <a:spcPts val="0"/>
-              </a:spcAft>
-            </a:pPr>
-            <a:r>
-              <a:rPr sz="1200" b="0">
-                <a:solidFill>
-                  <a:srgbClr val="FFFFFF"/>
-                </a:solidFill>
-                <a:latin typeface="Calibri"/>
-                <a:ea typeface="Calibri"/>
-                <a:cs typeface="Calibri"/>
-              </a:rPr>
-              <a:t>Storytelling + Script Writer produce a structured multi-part package with cliffhangers and narration plan.</a:t>
-            </a:r>
-          </a:p>
-        </p:txBody>
-      </p:sp>
-      <p:sp>
-        <p:nvSpPr>
-          <p:cNvPr id="16" name="Rounded Rectangle 15"/>
-          <p:cNvSpPr/>
-          <p:nvPr/>
-        </p:nvSpPr>
-        <p:spPr>
-          <a:xfrm>
-            <a:off x="6126480" y="2944368"/>
-            <a:ext cx="2560320" cy="2697480"/>
-          </a:xfrm>
-          <a:prstGeom prst="roundRect">
-            <a:avLst>
-              <a:gd name="adj" fmla="val 5000"/>
-            </a:avLst>
-          </a:prstGeom>
-          <a:solidFill>
-            <a:srgbClr val="18181F"/>
-          </a:solidFill>
-          <a:ln w="12700">
-            <a:solidFill>
-              <a:srgbClr val="2E2E38"/>
-            </a:solidFill>
-          </a:ln>
-        </p:spPr>
-        <p:style>
-          <a:lnRef idx="1">
-            <a:schemeClr val="accent1"/>
-          </a:lnRef>
-          <a:fillRef idx="3">
-            <a:schemeClr val="accent1"/>
-          </a:fillRef>
-          <a:effectRef idx="2">
-            <a:schemeClr val="accent1"/>
-          </a:effectRef>
-          <a:fontRef idx="minor">
-            <a:schemeClr val="lt1"/>
-          </a:fontRef>
-        </p:style>
-        <p:txBody>
-          <a:bodyPr rtlCol="0" anchor="t" wrap="square" lIns="128016" rIns="109728" tIns="91440" bIns="73152"/>
-          <a:lstStyle/>
-          <a:p>
-            <a:pPr algn="l">
-              <a:lnSpc>
-                <a:spcPct val="110000"/>
-              </a:lnSpc>
-              <a:spcBef>
-                <a:spcPts val="0"/>
-              </a:spcBef>
-              <a:spcAft>
-                <a:spcPts val="800"/>
-              </a:spcAft>
-            </a:pPr>
-            <a:r>
-              <a:rPr sz="1100" b="1">
-                <a:solidFill>
-                  <a:srgbClr val="E6194D"/>
-                </a:solidFill>
-                <a:latin typeface="Calibri"/>
-                <a:ea typeface="Calibri"/>
-                <a:cs typeface="Calibri"/>
-              </a:rPr>
-              <a:t>PRODUCE</a:t>
-            </a:r>
-          </a:p>
-          <a:p>
-            <a:pPr algn="l">
-              <a:lnSpc>
-                <a:spcPct val="110000"/>
-              </a:lnSpc>
-              <a:spcBef>
-                <a:spcPts val="0"/>
-              </a:spcBef>
-              <a:spcAft>
-                <a:spcPts val="0"/>
-              </a:spcAft>
-            </a:pPr>
-            <a:r>
-              <a:rPr sz="1200" b="0">
-                <a:solidFill>
-                  <a:srgbClr val="FFFFFF"/>
-                </a:solidFill>
-                <a:latin typeface="Calibri"/>
-                <a:ea typeface="Calibri"/>
-                <a:cs typeface="Calibri"/>
-              </a:rPr>
-              <a:t>Voice agent renders TTS + SFX. Director + Image agents build companion visuals and cover art.</a:t>
-            </a:r>
-          </a:p>
-        </p:txBody>
-      </p:sp>
-      <p:sp>
-        <p:nvSpPr>
-          <p:cNvPr id="17" name="Rounded Rectangle 16"/>
-          <p:cNvSpPr/>
-          <p:nvPr/>
-        </p:nvSpPr>
-        <p:spPr>
-          <a:xfrm>
-            <a:off x="8869680" y="2944368"/>
-            <a:ext cx="2560320" cy="2697480"/>
-          </a:xfrm>
-          <a:prstGeom prst="roundRect">
-            <a:avLst>
-              <a:gd name="adj" fmla="val 5000"/>
-            </a:avLst>
-          </a:prstGeom>
-          <a:solidFill>
-            <a:srgbClr val="18181F"/>
-          </a:solidFill>
-          <a:ln w="12700">
-            <a:solidFill>
-              <a:srgbClr val="2E2E38"/>
-            </a:solidFill>
-          </a:ln>
-        </p:spPr>
-        <p:style>
-          <a:lnRef idx="1">
-            <a:schemeClr val="accent1"/>
-          </a:lnRef>
-          <a:fillRef idx="3">
-            <a:schemeClr val="accent1"/>
-          </a:fillRef>
-          <a:effectRef idx="2">
-            <a:schemeClr val="accent1"/>
-          </a:effectRef>
-          <a:fontRef idx="minor">
-            <a:schemeClr val="lt1"/>
-          </a:fontRef>
-        </p:style>
-        <p:txBody>
-          <a:bodyPr rtlCol="0" anchor="t" wrap="square" lIns="128016" rIns="109728" tIns="91440" bIns="73152"/>
-          <a:lstStyle/>
-          <a:p>
-            <a:pPr algn="l">
-              <a:lnSpc>
-                <a:spcPct val="110000"/>
-              </a:lnSpc>
-              <a:spcBef>
-                <a:spcPts val="0"/>
-              </a:spcBef>
-              <a:spcAft>
-                <a:spcPts val="800"/>
-              </a:spcAft>
-            </a:pPr>
-            <a:r>
-              <a:rPr sz="1100" b="1">
-                <a:solidFill>
-                  <a:srgbClr val="E6194D"/>
-                </a:solidFill>
-                <a:latin typeface="Calibri"/>
-                <a:ea typeface="Calibri"/>
-                <a:cs typeface="Calibri"/>
-              </a:rPr>
-              <a:t>ASSURE</a:t>
-            </a:r>
-          </a:p>
-          <a:p>
-            <a:pPr algn="l">
-              <a:lnSpc>
-                <a:spcPct val="110000"/>
-              </a:lnSpc>
-              <a:spcBef>
-                <a:spcPts val="0"/>
-              </a:spcBef>
-              <a:spcAft>
-                <a:spcPts val="0"/>
-              </a:spcAft>
-            </a:pPr>
-            <a:r>
-              <a:rPr sz="1200" b="0">
-                <a:solidFill>
-                  <a:srgbClr val="FFFFFF"/>
-                </a:solidFill>
-                <a:latin typeface="Calibri"/>
-                <a:ea typeface="Calibri"/>
-                <a:cs typeface="Calibri"/>
-              </a:rPr>
-              <a:t>Timeline editor for listen/edit. Audience Sim proposes patches. Human approves each gate.</a:t>
+              <a:t>Tool sprawl</a:t>
+            </a:r>
+          </a:p>
+          <a:p>
+            <a:pPr algn="l">
+              <a:lnSpc>
+                <a:spcPct val="110000"/>
+              </a:lnSpc>
+              <a:spcBef>
+                <a:spcPts val="0"/>
+              </a:spcBef>
+              <a:spcAft>
+                <a:spcPts val="0"/>
+              </a:spcAft>
+            </a:pPr>
+            <a:r>
+              <a:rPr sz="1100" b="0">
+                <a:solidFill>
+                  <a:srgbClr val="A1A1AA"/>
+                </a:solidFill>
+                <a:latin typeface="Calibri"/>
+                <a:ea typeface="Calibri"/>
+                <a:cs typeface="Calibri"/>
+              </a:rPr>
+              <a:t>Briefing, writing, casting, mix, and QA live in five apps.</a:t>
             </a:r>
           </a:p>
         </p:txBody>
@@ -8071,7 +6992,7 @@
                 <a:ea typeface="Calibri"/>
                 <a:cs typeface="Calibri"/>
               </a:rPr>
-              <a:t>05 / 08</a:t>
+              <a:t>05 / 09</a:t>
             </a:r>
           </a:p>
         </p:txBody>
@@ -8185,7 +7106,7 @@
                 <a:ea typeface="Calibri"/>
                 <a:cs typeface="Calibri"/>
               </a:rPr>
-              <a:t>05  AGENTS</a:t>
+              <a:t>05  HOW IT WORKS</a:t>
             </a:r>
           </a:p>
         </p:txBody>
@@ -8230,7 +7151,7 @@
                 <a:ea typeface="Calibri"/>
                 <a:cs typeface="Calibri"/>
               </a:rPr>
-              <a:t>Seven specialized agents — one production studio</a:t>
+              <a:t>One orchestrated pipeline — agents specialize, humans gate quality cliffs</a:t>
             </a:r>
           </a:p>
         </p:txBody>
@@ -8275,64 +7196,21 @@
                 <a:ea typeface="Calibri"/>
                 <a:cs typeface="Calibri"/>
               </a:rPr>
-              <a:t>Each owns a stage; the orchestrator sequences them with human approvals.</a:t>
-            </a:r>
-          </a:p>
-        </p:txBody>
-      </p:sp>
-      <p:sp>
-        <p:nvSpPr>
-          <p:cNvPr id="6" name="Rectangle 5"/>
+              <a:t>Auto-run generation. Never auto-publish.</a:t>
+            </a:r>
+          </a:p>
+        </p:txBody>
+      </p:sp>
+      <p:sp>
+        <p:nvSpPr>
+          <p:cNvPr id="6" name="Rounded Rectangle 5"/>
           <p:cNvSpPr/>
           <p:nvPr/>
         </p:nvSpPr>
         <p:spPr>
           <a:xfrm>
             <a:off x="640080" y="1664208"/>
-            <a:ext cx="73152" cy="1783080"/>
-          </a:xfrm>
-          <a:prstGeom prst="rect">
-            <a:avLst/>
-          </a:prstGeom>
-          <a:solidFill>
-            <a:srgbClr val="E6194D"/>
-          </a:solidFill>
-          <a:ln>
-            <a:noFill/>
-          </a:ln>
-        </p:spPr>
-        <p:style>
-          <a:lnRef idx="1">
-            <a:schemeClr val="accent1"/>
-          </a:lnRef>
-          <a:fillRef idx="3">
-            <a:schemeClr val="accent1"/>
-          </a:fillRef>
-          <a:effectRef idx="2">
-            <a:schemeClr val="accent1"/>
-          </a:effectRef>
-          <a:fontRef idx="minor">
-            <a:schemeClr val="lt1"/>
-          </a:fontRef>
-        </p:style>
-        <p:txBody>
-          <a:bodyPr rtlCol="0" anchor="ctr"/>
-          <a:lstStyle/>
-          <a:p>
-            <a:pPr algn="ctr"/>
-          </a:p>
-        </p:txBody>
-      </p:sp>
-      <p:sp>
-        <p:nvSpPr>
-          <p:cNvPr id="7" name="Rounded Rectangle 6"/>
-          <p:cNvSpPr/>
-          <p:nvPr/>
-        </p:nvSpPr>
-        <p:spPr>
-          <a:xfrm>
-            <a:off x="713232" y="1664208"/>
-            <a:ext cx="2487168" cy="1783080"/>
+            <a:ext cx="1234440" cy="1051560"/>
           </a:xfrm>
           <a:prstGeom prst="roundRect">
             <a:avLst>
@@ -8363,111 +7241,68 @@
           </a:fontRef>
         </p:style>
         <p:txBody>
-          <a:bodyPr rtlCol="0" anchor="t" wrap="square" lIns="109728" rIns="109728" tIns="91440" bIns="73152"/>
-          <a:lstStyle/>
-          <a:p>
-            <a:pPr algn="l">
-              <a:lnSpc>
-                <a:spcPct val="110000"/>
-              </a:lnSpc>
-              <a:spcBef>
-                <a:spcPts val="0"/>
-              </a:spcBef>
-              <a:spcAft>
-                <a:spcPts val="600"/>
+          <a:bodyPr rtlCol="0" anchor="ctr" wrap="square" lIns="128016" rIns="109728" tIns="91440" bIns="73152"/>
+          <a:lstStyle/>
+          <a:p>
+            <a:pPr algn="ctr">
+              <a:lnSpc>
+                <a:spcPct val="110000"/>
+              </a:lnSpc>
+              <a:spcBef>
+                <a:spcPts val="0"/>
+              </a:spcBef>
+              <a:spcAft>
+                <a:spcPts val="200"/>
               </a:spcAft>
             </a:pPr>
             <a:r>
               <a:rPr sz="1200" b="1">
                 <a:solidFill>
+                  <a:srgbClr val="E6194D"/>
+                </a:solidFill>
+                <a:latin typeface="Calibri"/>
+                <a:ea typeface="Calibri"/>
+                <a:cs typeface="Calibri"/>
+              </a:rPr>
+              <a:t>1</a:t>
+            </a:r>
+          </a:p>
+          <a:p>
+            <a:pPr algn="ctr">
+              <a:lnSpc>
+                <a:spcPct val="110000"/>
+              </a:lnSpc>
+              <a:spcBef>
+                <a:spcPts val="0"/>
+              </a:spcBef>
+              <a:spcAft>
+                <a:spcPts val="0"/>
+              </a:spcAft>
+            </a:pPr>
+            <a:r>
+              <a:rPr sz="1100" b="1">
+                <a:solidFill>
                   <a:srgbClr val="FFFFFF"/>
                 </a:solidFill>
                 <a:latin typeface="Calibri"/>
                 <a:ea typeface="Calibri"/>
                 <a:cs typeface="Calibri"/>
               </a:rPr>
-              <a:t>Storytelling Agent</a:t>
-            </a:r>
-          </a:p>
-          <a:p>
-            <a:pPr algn="l">
-              <a:lnSpc>
-                <a:spcPct val="110000"/>
-              </a:lnSpc>
-              <a:spcBef>
-                <a:spcPts val="0"/>
-              </a:spcBef>
-              <a:spcAft>
-                <a:spcPts val="0"/>
-              </a:spcAft>
-            </a:pPr>
-            <a:r>
-              <a:rPr sz="1100" b="0">
-                <a:solidFill>
-                  <a:srgbClr val="A1A1AA"/>
-                </a:solidFill>
-                <a:latin typeface="Calibri"/>
-                <a:ea typeface="Calibri"/>
-                <a:cs typeface="Calibri"/>
-              </a:rPr>
-              <a:t>Shapes the series brief, plot pitches, and creative direction inside chat.</a:t>
-            </a:r>
-          </a:p>
-        </p:txBody>
-      </p:sp>
-      <p:sp>
-        <p:nvSpPr>
-          <p:cNvPr id="8" name="Rectangle 7"/>
+              <a:t>Discover</a:t>
+            </a:r>
+          </a:p>
+        </p:txBody>
+      </p:sp>
+      <p:sp>
+        <p:nvSpPr>
+          <p:cNvPr id="7" name="Rounded Rectangle 6"/>
           <p:cNvSpPr/>
           <p:nvPr/>
         </p:nvSpPr>
         <p:spPr>
           <a:xfrm>
-            <a:off x="3383280" y="1664208"/>
-            <a:ext cx="73152" cy="1783080"/>
-          </a:xfrm>
-          <a:prstGeom prst="rect">
-            <a:avLst/>
-          </a:prstGeom>
-          <a:solidFill>
-            <a:srgbClr val="E6194D"/>
-          </a:solidFill>
-          <a:ln>
-            <a:noFill/>
-          </a:ln>
-        </p:spPr>
-        <p:style>
-          <a:lnRef idx="1">
-            <a:schemeClr val="accent1"/>
-          </a:lnRef>
-          <a:fillRef idx="3">
-            <a:schemeClr val="accent1"/>
-          </a:fillRef>
-          <a:effectRef idx="2">
-            <a:schemeClr val="accent1"/>
-          </a:effectRef>
-          <a:fontRef idx="minor">
-            <a:schemeClr val="lt1"/>
-          </a:fontRef>
-        </p:style>
-        <p:txBody>
-          <a:bodyPr rtlCol="0" anchor="ctr"/>
-          <a:lstStyle/>
-          <a:p>
-            <a:pPr algn="ctr"/>
-          </a:p>
-        </p:txBody>
-      </p:sp>
-      <p:sp>
-        <p:nvSpPr>
-          <p:cNvPr id="9" name="Rounded Rectangle 8"/>
-          <p:cNvSpPr/>
-          <p:nvPr/>
-        </p:nvSpPr>
-        <p:spPr>
-          <a:xfrm>
-            <a:off x="3456432" y="1664208"/>
-            <a:ext cx="2487168" cy="1783080"/>
+            <a:off x="1984248" y="1664208"/>
+            <a:ext cx="1234440" cy="1051560"/>
           </a:xfrm>
           <a:prstGeom prst="roundRect">
             <a:avLst>
@@ -8498,111 +7333,68 @@
           </a:fontRef>
         </p:style>
         <p:txBody>
-          <a:bodyPr rtlCol="0" anchor="t" wrap="square" lIns="109728" rIns="109728" tIns="91440" bIns="73152"/>
-          <a:lstStyle/>
-          <a:p>
-            <a:pPr algn="l">
-              <a:lnSpc>
-                <a:spcPct val="110000"/>
-              </a:lnSpc>
-              <a:spcBef>
-                <a:spcPts val="0"/>
-              </a:spcBef>
-              <a:spcAft>
-                <a:spcPts val="600"/>
+          <a:bodyPr rtlCol="0" anchor="ctr" wrap="square" lIns="128016" rIns="109728" tIns="91440" bIns="73152"/>
+          <a:lstStyle/>
+          <a:p>
+            <a:pPr algn="ctr">
+              <a:lnSpc>
+                <a:spcPct val="110000"/>
+              </a:lnSpc>
+              <a:spcBef>
+                <a:spcPts val="0"/>
+              </a:spcBef>
+              <a:spcAft>
+                <a:spcPts val="200"/>
               </a:spcAft>
             </a:pPr>
             <a:r>
               <a:rPr sz="1200" b="1">
                 <a:solidFill>
+                  <a:srgbClr val="E6194D"/>
+                </a:solidFill>
+                <a:latin typeface="Calibri"/>
+                <a:ea typeface="Calibri"/>
+                <a:cs typeface="Calibri"/>
+              </a:rPr>
+              <a:t>2</a:t>
+            </a:r>
+          </a:p>
+          <a:p>
+            <a:pPr algn="ctr">
+              <a:lnSpc>
+                <a:spcPct val="110000"/>
+              </a:lnSpc>
+              <a:spcBef>
+                <a:spcPts val="0"/>
+              </a:spcBef>
+              <a:spcAft>
+                <a:spcPts val="0"/>
+              </a:spcAft>
+            </a:pPr>
+            <a:r>
+              <a:rPr sz="1100" b="1">
+                <a:solidFill>
                   <a:srgbClr val="FFFFFF"/>
                 </a:solidFill>
                 <a:latin typeface="Calibri"/>
                 <a:ea typeface="Calibri"/>
                 <a:cs typeface="Calibri"/>
               </a:rPr>
-              <a:t>Scripting &amp; Search Agent</a:t>
-            </a:r>
-          </a:p>
-          <a:p>
-            <a:pPr algn="l">
-              <a:lnSpc>
-                <a:spcPct val="110000"/>
-              </a:lnSpc>
-              <a:spcBef>
-                <a:spcPts val="0"/>
-              </a:spcBef>
-              <a:spcAft>
-                <a:spcPts val="0"/>
-              </a:spcAft>
-            </a:pPr>
-            <a:r>
-              <a:rPr sz="1100" b="0">
-                <a:solidFill>
-                  <a:srgbClr val="A1A1AA"/>
-                </a:solidFill>
-                <a:latin typeface="Calibri"/>
-                <a:ea typeface="Calibri"/>
-                <a:cs typeface="Calibri"/>
-              </a:rPr>
-              <a:t>Retrieves project context (Databricks) and researches hooks (Tavily + extraction).</a:t>
-            </a:r>
-          </a:p>
-        </p:txBody>
-      </p:sp>
-      <p:sp>
-        <p:nvSpPr>
-          <p:cNvPr id="10" name="Rectangle 9"/>
+              <a:t>Research</a:t>
+            </a:r>
+          </a:p>
+        </p:txBody>
+      </p:sp>
+      <p:sp>
+        <p:nvSpPr>
+          <p:cNvPr id="8" name="Rounded Rectangle 7"/>
           <p:cNvSpPr/>
           <p:nvPr/>
         </p:nvSpPr>
         <p:spPr>
           <a:xfrm>
-            <a:off x="6126480" y="1664208"/>
-            <a:ext cx="73152" cy="1783080"/>
-          </a:xfrm>
-          <a:prstGeom prst="rect">
-            <a:avLst/>
-          </a:prstGeom>
-          <a:solidFill>
-            <a:srgbClr val="E6194D"/>
-          </a:solidFill>
-          <a:ln>
-            <a:noFill/>
-          </a:ln>
-        </p:spPr>
-        <p:style>
-          <a:lnRef idx="1">
-            <a:schemeClr val="accent1"/>
-          </a:lnRef>
-          <a:fillRef idx="3">
-            <a:schemeClr val="accent1"/>
-          </a:fillRef>
-          <a:effectRef idx="2">
-            <a:schemeClr val="accent1"/>
-          </a:effectRef>
-          <a:fontRef idx="minor">
-            <a:schemeClr val="lt1"/>
-          </a:fontRef>
-        </p:style>
-        <p:txBody>
-          <a:bodyPr rtlCol="0" anchor="ctr"/>
-          <a:lstStyle/>
-          <a:p>
-            <a:pPr algn="ctr"/>
-          </a:p>
-        </p:txBody>
-      </p:sp>
-      <p:sp>
-        <p:nvSpPr>
-          <p:cNvPr id="11" name="Rounded Rectangle 10"/>
-          <p:cNvSpPr/>
-          <p:nvPr/>
-        </p:nvSpPr>
-        <p:spPr>
-          <a:xfrm>
-            <a:off x="6199632" y="1664208"/>
-            <a:ext cx="2487168" cy="1783080"/>
+            <a:off x="3328416" y="1664208"/>
+            <a:ext cx="1234440" cy="1051560"/>
           </a:xfrm>
           <a:prstGeom prst="roundRect">
             <a:avLst>
@@ -8633,111 +7425,68 @@
           </a:fontRef>
         </p:style>
         <p:txBody>
-          <a:bodyPr rtlCol="0" anchor="t" wrap="square" lIns="109728" rIns="109728" tIns="91440" bIns="73152"/>
-          <a:lstStyle/>
-          <a:p>
-            <a:pPr algn="l">
-              <a:lnSpc>
-                <a:spcPct val="110000"/>
-              </a:lnSpc>
-              <a:spcBef>
-                <a:spcPts val="0"/>
-              </a:spcBef>
-              <a:spcAft>
-                <a:spcPts val="600"/>
+          <a:bodyPr rtlCol="0" anchor="ctr" wrap="square" lIns="128016" rIns="109728" tIns="91440" bIns="73152"/>
+          <a:lstStyle/>
+          <a:p>
+            <a:pPr algn="ctr">
+              <a:lnSpc>
+                <a:spcPct val="110000"/>
+              </a:lnSpc>
+              <a:spcBef>
+                <a:spcPts val="0"/>
+              </a:spcBef>
+              <a:spcAft>
+                <a:spcPts val="200"/>
               </a:spcAft>
             </a:pPr>
             <a:r>
               <a:rPr sz="1200" b="1">
                 <a:solidFill>
+                  <a:srgbClr val="E6194D"/>
+                </a:solidFill>
+                <a:latin typeface="Calibri"/>
+                <a:ea typeface="Calibri"/>
+                <a:cs typeface="Calibri"/>
+              </a:rPr>
+              <a:t>3</a:t>
+            </a:r>
+          </a:p>
+          <a:p>
+            <a:pPr algn="ctr">
+              <a:lnSpc>
+                <a:spcPct val="110000"/>
+              </a:lnSpc>
+              <a:spcBef>
+                <a:spcPts val="0"/>
+              </a:spcBef>
+              <a:spcAft>
+                <a:spcPts val="0"/>
+              </a:spcAft>
+            </a:pPr>
+            <a:r>
+              <a:rPr sz="1100" b="1">
+                <a:solidFill>
                   <a:srgbClr val="FFFFFF"/>
                 </a:solidFill>
                 <a:latin typeface="Calibri"/>
                 <a:ea typeface="Calibri"/>
                 <a:cs typeface="Calibri"/>
               </a:rPr>
-              <a:t>Narrative Agent</a:t>
-            </a:r>
-          </a:p>
-          <a:p>
-            <a:pPr algn="l">
-              <a:lnSpc>
-                <a:spcPct val="110000"/>
-              </a:lnSpc>
-              <a:spcBef>
-                <a:spcPts val="0"/>
-              </a:spcBef>
-              <a:spcAft>
-                <a:spcPts val="0"/>
-              </a:spcAft>
-            </a:pPr>
-            <a:r>
-              <a:rPr sz="1100" b="0">
-                <a:solidFill>
-                  <a:srgbClr val="A1A1AA"/>
-                </a:solidFill>
-                <a:latin typeface="Calibri"/>
-                <a:ea typeface="Calibri"/>
-                <a:cs typeface="Calibri"/>
-              </a:rPr>
-              <a:t>Locks narration mode — narration-led, dialogue inserts, multi-narrator, framed.</a:t>
-            </a:r>
-          </a:p>
-        </p:txBody>
-      </p:sp>
-      <p:sp>
-        <p:nvSpPr>
-          <p:cNvPr id="12" name="Rectangle 11"/>
+              <a:t>Script</a:t>
+            </a:r>
+          </a:p>
+        </p:txBody>
+      </p:sp>
+      <p:sp>
+        <p:nvSpPr>
+          <p:cNvPr id="9" name="Rounded Rectangle 8"/>
           <p:cNvSpPr/>
           <p:nvPr/>
         </p:nvSpPr>
         <p:spPr>
           <a:xfrm>
-            <a:off x="8869680" y="1664208"/>
-            <a:ext cx="73152" cy="1783080"/>
-          </a:xfrm>
-          <a:prstGeom prst="rect">
-            <a:avLst/>
-          </a:prstGeom>
-          <a:solidFill>
-            <a:srgbClr val="E6194D"/>
-          </a:solidFill>
-          <a:ln>
-            <a:noFill/>
-          </a:ln>
-        </p:spPr>
-        <p:style>
-          <a:lnRef idx="1">
-            <a:schemeClr val="accent1"/>
-          </a:lnRef>
-          <a:fillRef idx="3">
-            <a:schemeClr val="accent1"/>
-          </a:fillRef>
-          <a:effectRef idx="2">
-            <a:schemeClr val="accent1"/>
-          </a:effectRef>
-          <a:fontRef idx="minor">
-            <a:schemeClr val="lt1"/>
-          </a:fontRef>
-        </p:style>
-        <p:txBody>
-          <a:bodyPr rtlCol="0" anchor="ctr"/>
-          <a:lstStyle/>
-          <a:p>
-            <a:pPr algn="ctr"/>
-          </a:p>
-        </p:txBody>
-      </p:sp>
-      <p:sp>
-        <p:nvSpPr>
-          <p:cNvPr id="13" name="Rounded Rectangle 12"/>
-          <p:cNvSpPr/>
-          <p:nvPr/>
-        </p:nvSpPr>
-        <p:spPr>
-          <a:xfrm>
-            <a:off x="8942832" y="1664208"/>
-            <a:ext cx="2487168" cy="1783080"/>
+            <a:off x="4672584" y="1664208"/>
+            <a:ext cx="1234440" cy="1051560"/>
           </a:xfrm>
           <a:prstGeom prst="roundRect">
             <a:avLst>
@@ -8768,111 +7517,68 @@
           </a:fontRef>
         </p:style>
         <p:txBody>
-          <a:bodyPr rtlCol="0" anchor="t" wrap="square" lIns="109728" rIns="109728" tIns="91440" bIns="73152"/>
-          <a:lstStyle/>
-          <a:p>
-            <a:pPr algn="l">
-              <a:lnSpc>
-                <a:spcPct val="110000"/>
-              </a:lnSpc>
-              <a:spcBef>
-                <a:spcPts val="0"/>
-              </a:spcBef>
-              <a:spcAft>
-                <a:spcPts val="600"/>
+          <a:bodyPr rtlCol="0" anchor="ctr" wrap="square" lIns="128016" rIns="109728" tIns="91440" bIns="73152"/>
+          <a:lstStyle/>
+          <a:p>
+            <a:pPr algn="ctr">
+              <a:lnSpc>
+                <a:spcPct val="110000"/>
+              </a:lnSpc>
+              <a:spcBef>
+                <a:spcPts val="0"/>
+              </a:spcBef>
+              <a:spcAft>
+                <a:spcPts val="200"/>
               </a:spcAft>
             </a:pPr>
             <a:r>
               <a:rPr sz="1200" b="1">
                 <a:solidFill>
+                  <a:srgbClr val="E6194D"/>
+                </a:solidFill>
+                <a:latin typeface="Calibri"/>
+                <a:ea typeface="Calibri"/>
+                <a:cs typeface="Calibri"/>
+              </a:rPr>
+              <a:t>4</a:t>
+            </a:r>
+          </a:p>
+          <a:p>
+            <a:pPr algn="ctr">
+              <a:lnSpc>
+                <a:spcPct val="110000"/>
+              </a:lnSpc>
+              <a:spcBef>
+                <a:spcPts val="0"/>
+              </a:spcBef>
+              <a:spcAft>
+                <a:spcPts val="0"/>
+              </a:spcAft>
+            </a:pPr>
+            <a:r>
+              <a:rPr sz="1100" b="1">
+                <a:solidFill>
                   <a:srgbClr val="FFFFFF"/>
                 </a:solidFill>
                 <a:latin typeface="Calibri"/>
                 <a:ea typeface="Calibri"/>
                 <a:cs typeface="Calibri"/>
               </a:rPr>
-              <a:t>Script Writer Agent</a:t>
-            </a:r>
-          </a:p>
-          <a:p>
-            <a:pPr algn="l">
-              <a:lnSpc>
-                <a:spcPct val="110000"/>
-              </a:lnSpc>
-              <a:spcBef>
-                <a:spcPts val="0"/>
-              </a:spcBef>
-              <a:spcAft>
-                <a:spcPts val="0"/>
-              </a:spcAft>
-            </a:pPr>
-            <a:r>
-              <a:rPr sz="1100" b="0">
-                <a:solidFill>
-                  <a:srgbClr val="A1A1AA"/>
-                </a:solidFill>
-                <a:latin typeface="Calibri"/>
-                <a:ea typeface="Calibri"/>
-                <a:cs typeface="Calibri"/>
-              </a:rPr>
-              <a:t>Writes the structured multi-part script package and screenplay.</a:t>
-            </a:r>
-          </a:p>
-        </p:txBody>
-      </p:sp>
-      <p:sp>
-        <p:nvSpPr>
-          <p:cNvPr id="14" name="Rectangle 13"/>
+              <a:t>Narrate</a:t>
+            </a:r>
+          </a:p>
+        </p:txBody>
+      </p:sp>
+      <p:sp>
+        <p:nvSpPr>
+          <p:cNvPr id="10" name="Rounded Rectangle 9"/>
           <p:cNvSpPr/>
           <p:nvPr/>
         </p:nvSpPr>
         <p:spPr>
           <a:xfrm>
-            <a:off x="777240" y="3630168"/>
-            <a:ext cx="73152" cy="1783080"/>
-          </a:xfrm>
-          <a:prstGeom prst="rect">
-            <a:avLst/>
-          </a:prstGeom>
-          <a:solidFill>
-            <a:srgbClr val="E6194D"/>
-          </a:solidFill>
-          <a:ln>
-            <a:noFill/>
-          </a:ln>
-        </p:spPr>
-        <p:style>
-          <a:lnRef idx="1">
-            <a:schemeClr val="accent1"/>
-          </a:lnRef>
-          <a:fillRef idx="3">
-            <a:schemeClr val="accent1"/>
-          </a:fillRef>
-          <a:effectRef idx="2">
-            <a:schemeClr val="accent1"/>
-          </a:effectRef>
-          <a:fontRef idx="minor">
-            <a:schemeClr val="lt1"/>
-          </a:fontRef>
-        </p:style>
-        <p:txBody>
-          <a:bodyPr rtlCol="0" anchor="ctr"/>
-          <a:lstStyle/>
-          <a:p>
-            <a:pPr algn="ctr"/>
-          </a:p>
-        </p:txBody>
-      </p:sp>
-      <p:sp>
-        <p:nvSpPr>
-          <p:cNvPr id="15" name="Rounded Rectangle 14"/>
-          <p:cNvSpPr/>
-          <p:nvPr/>
-        </p:nvSpPr>
-        <p:spPr>
-          <a:xfrm>
-            <a:off x="850392" y="3630168"/>
-            <a:ext cx="3401568" cy="1783080"/>
+            <a:off x="6016752" y="1664208"/>
+            <a:ext cx="1234440" cy="1051560"/>
           </a:xfrm>
           <a:prstGeom prst="roundRect">
             <a:avLst>
@@ -8903,111 +7609,68 @@
           </a:fontRef>
         </p:style>
         <p:txBody>
-          <a:bodyPr rtlCol="0" anchor="t" wrap="square" lIns="109728" rIns="109728" tIns="91440" bIns="73152"/>
-          <a:lstStyle/>
-          <a:p>
-            <a:pPr algn="l">
-              <a:lnSpc>
-                <a:spcPct val="110000"/>
-              </a:lnSpc>
-              <a:spcBef>
-                <a:spcPts val="0"/>
-              </a:spcBef>
-              <a:spcAft>
-                <a:spcPts val="600"/>
+          <a:bodyPr rtlCol="0" anchor="ctr" wrap="square" lIns="128016" rIns="109728" tIns="91440" bIns="73152"/>
+          <a:lstStyle/>
+          <a:p>
+            <a:pPr algn="ctr">
+              <a:lnSpc>
+                <a:spcPct val="110000"/>
+              </a:lnSpc>
+              <a:spcBef>
+                <a:spcPts val="0"/>
+              </a:spcBef>
+              <a:spcAft>
+                <a:spcPts val="200"/>
               </a:spcAft>
             </a:pPr>
             <a:r>
               <a:rPr sz="1200" b="1">
                 <a:solidFill>
+                  <a:srgbClr val="E6194D"/>
+                </a:solidFill>
+                <a:latin typeface="Calibri"/>
+                <a:ea typeface="Calibri"/>
+                <a:cs typeface="Calibri"/>
+              </a:rPr>
+              <a:t>5</a:t>
+            </a:r>
+          </a:p>
+          <a:p>
+            <a:pPr algn="ctr">
+              <a:lnSpc>
+                <a:spcPct val="110000"/>
+              </a:lnSpc>
+              <a:spcBef>
+                <a:spcPts val="0"/>
+              </a:spcBef>
+              <a:spcAft>
+                <a:spcPts val="0"/>
+              </a:spcAft>
+            </a:pPr>
+            <a:r>
+              <a:rPr sz="1100" b="1">
+                <a:solidFill>
                   <a:srgbClr val="FFFFFF"/>
                 </a:solidFill>
                 <a:latin typeface="Calibri"/>
                 <a:ea typeface="Calibri"/>
                 <a:cs typeface="Calibri"/>
               </a:rPr>
-              <a:t>Director Agent</a:t>
-            </a:r>
-          </a:p>
-          <a:p>
-            <a:pPr algn="l">
-              <a:lnSpc>
-                <a:spcPct val="110000"/>
-              </a:lnSpc>
-              <a:spcBef>
-                <a:spcPts val="0"/>
-              </a:spcBef>
-              <a:spcAft>
-                <a:spcPts val="0"/>
-              </a:spcAft>
-            </a:pPr>
-            <a:r>
-              <a:rPr sz="1100" b="0">
-                <a:solidFill>
-                  <a:srgbClr val="A1A1AA"/>
-                </a:solidFill>
-                <a:latin typeface="Calibri"/>
-                <a:ea typeface="Calibri"/>
-                <a:cs typeface="Calibri"/>
-              </a:rPr>
-              <a:t>Plans visual shots / lookbook — performance-aware scene direction.</a:t>
-            </a:r>
-          </a:p>
-        </p:txBody>
-      </p:sp>
-      <p:sp>
-        <p:nvSpPr>
-          <p:cNvPr id="16" name="Rectangle 15"/>
+              <a:t>Voice</a:t>
+            </a:r>
+          </a:p>
+        </p:txBody>
+      </p:sp>
+      <p:sp>
+        <p:nvSpPr>
+          <p:cNvPr id="11" name="Rounded Rectangle 10"/>
           <p:cNvSpPr/>
           <p:nvPr/>
         </p:nvSpPr>
         <p:spPr>
           <a:xfrm>
-            <a:off x="4434840" y="3630168"/>
-            <a:ext cx="73152" cy="1783080"/>
-          </a:xfrm>
-          <a:prstGeom prst="rect">
-            <a:avLst/>
-          </a:prstGeom>
-          <a:solidFill>
-            <a:srgbClr val="E6194D"/>
-          </a:solidFill>
-          <a:ln>
-            <a:noFill/>
-          </a:ln>
-        </p:spPr>
-        <p:style>
-          <a:lnRef idx="1">
-            <a:schemeClr val="accent1"/>
-          </a:lnRef>
-          <a:fillRef idx="3">
-            <a:schemeClr val="accent1"/>
-          </a:fillRef>
-          <a:effectRef idx="2">
-            <a:schemeClr val="accent1"/>
-          </a:effectRef>
-          <a:fontRef idx="minor">
-            <a:schemeClr val="lt1"/>
-          </a:fontRef>
-        </p:style>
-        <p:txBody>
-          <a:bodyPr rtlCol="0" anchor="ctr"/>
-          <a:lstStyle/>
-          <a:p>
-            <a:pPr algn="ctr"/>
-          </a:p>
-        </p:txBody>
-      </p:sp>
-      <p:sp>
-        <p:nvSpPr>
-          <p:cNvPr id="17" name="Rounded Rectangle 16"/>
-          <p:cNvSpPr/>
-          <p:nvPr/>
-        </p:nvSpPr>
-        <p:spPr>
-          <a:xfrm>
-            <a:off x="4507992" y="3630168"/>
-            <a:ext cx="3401568" cy="1783080"/>
+            <a:off x="7360920" y="1664208"/>
+            <a:ext cx="1234440" cy="1051560"/>
           </a:xfrm>
           <a:prstGeom prst="roundRect">
             <a:avLst>
@@ -9038,111 +7701,68 @@
           </a:fontRef>
         </p:style>
         <p:txBody>
-          <a:bodyPr rtlCol="0" anchor="t" wrap="square" lIns="109728" rIns="109728" tIns="91440" bIns="73152"/>
-          <a:lstStyle/>
-          <a:p>
-            <a:pPr algn="l">
-              <a:lnSpc>
-                <a:spcPct val="110000"/>
-              </a:lnSpc>
-              <a:spcBef>
-                <a:spcPts val="0"/>
-              </a:spcBef>
-              <a:spcAft>
-                <a:spcPts val="600"/>
+          <a:bodyPr rtlCol="0" anchor="ctr" wrap="square" lIns="128016" rIns="109728" tIns="91440" bIns="73152"/>
+          <a:lstStyle/>
+          <a:p>
+            <a:pPr algn="ctr">
+              <a:lnSpc>
+                <a:spcPct val="110000"/>
+              </a:lnSpc>
+              <a:spcBef>
+                <a:spcPts val="0"/>
+              </a:spcBef>
+              <a:spcAft>
+                <a:spcPts val="200"/>
               </a:spcAft>
             </a:pPr>
             <a:r>
               <a:rPr sz="1200" b="1">
                 <a:solidFill>
+                  <a:srgbClr val="E6194D"/>
+                </a:solidFill>
+                <a:latin typeface="Calibri"/>
+                <a:ea typeface="Calibri"/>
+                <a:cs typeface="Calibri"/>
+              </a:rPr>
+              <a:t>6</a:t>
+            </a:r>
+          </a:p>
+          <a:p>
+            <a:pPr algn="ctr">
+              <a:lnSpc>
+                <a:spcPct val="110000"/>
+              </a:lnSpc>
+              <a:spcBef>
+                <a:spcPts val="0"/>
+              </a:spcBef>
+              <a:spcAft>
+                <a:spcPts val="0"/>
+              </a:spcAft>
+            </a:pPr>
+            <a:r>
+              <a:rPr sz="1100" b="1">
+                <a:solidFill>
                   <a:srgbClr val="FFFFFF"/>
                 </a:solidFill>
                 <a:latin typeface="Calibri"/>
                 <a:ea typeface="Calibri"/>
                 <a:cs typeface="Calibri"/>
               </a:rPr>
-              <a:t>Voice Agent</a:t>
-            </a:r>
-          </a:p>
-          <a:p>
-            <a:pPr algn="l">
-              <a:lnSpc>
-                <a:spcPct val="110000"/>
-              </a:lnSpc>
-              <a:spcBef>
-                <a:spcPts val="0"/>
-              </a:spcBef>
-              <a:spcAft>
-                <a:spcPts val="0"/>
-              </a:spcAft>
-            </a:pPr>
-            <a:r>
-              <a:rPr sz="1100" b="0">
-                <a:solidFill>
-                  <a:srgbClr val="A1A1AA"/>
-                </a:solidFill>
-                <a:latin typeface="Calibri"/>
-                <a:ea typeface="Calibri"/>
-                <a:cs typeface="Calibri"/>
-              </a:rPr>
-              <a:t>Casts library voices and renders TTS + SFX beds (ElevenLabs / Sarvam).</a:t>
-            </a:r>
-          </a:p>
-        </p:txBody>
-      </p:sp>
-      <p:sp>
-        <p:nvSpPr>
-          <p:cNvPr id="18" name="Rectangle 17"/>
+              <a:t>Visuals</a:t>
+            </a:r>
+          </a:p>
+        </p:txBody>
+      </p:sp>
+      <p:sp>
+        <p:nvSpPr>
+          <p:cNvPr id="12" name="Rounded Rectangle 11"/>
           <p:cNvSpPr/>
           <p:nvPr/>
         </p:nvSpPr>
         <p:spPr>
           <a:xfrm>
-            <a:off x="8092440" y="3630168"/>
-            <a:ext cx="73152" cy="1783080"/>
-          </a:xfrm>
-          <a:prstGeom prst="rect">
-            <a:avLst/>
-          </a:prstGeom>
-          <a:solidFill>
-            <a:srgbClr val="E6194D"/>
-          </a:solidFill>
-          <a:ln>
-            <a:noFill/>
-          </a:ln>
-        </p:spPr>
-        <p:style>
-          <a:lnRef idx="1">
-            <a:schemeClr val="accent1"/>
-          </a:lnRef>
-          <a:fillRef idx="3">
-            <a:schemeClr val="accent1"/>
-          </a:fillRef>
-          <a:effectRef idx="2">
-            <a:schemeClr val="accent1"/>
-          </a:effectRef>
-          <a:fontRef idx="minor">
-            <a:schemeClr val="lt1"/>
-          </a:fontRef>
-        </p:style>
-        <p:txBody>
-          <a:bodyPr rtlCol="0" anchor="ctr"/>
-          <a:lstStyle/>
-          <a:p>
-            <a:pPr algn="ctr"/>
-          </a:p>
-        </p:txBody>
-      </p:sp>
-      <p:sp>
-        <p:nvSpPr>
-          <p:cNvPr id="19" name="Rounded Rectangle 18"/>
-          <p:cNvSpPr/>
-          <p:nvPr/>
-        </p:nvSpPr>
-        <p:spPr>
-          <a:xfrm>
-            <a:off x="8165592" y="3630168"/>
-            <a:ext cx="3401568" cy="1783080"/>
+            <a:off x="8705088" y="1664208"/>
+            <a:ext cx="1234440" cy="1051560"/>
           </a:xfrm>
           <a:prstGeom prst="roundRect">
             <a:avLst>
@@ -9173,61 +7793,521 @@
           </a:fontRef>
         </p:style>
         <p:txBody>
-          <a:bodyPr rtlCol="0" anchor="t" wrap="square" lIns="109728" rIns="109728" tIns="91440" bIns="73152"/>
-          <a:lstStyle/>
-          <a:p>
-            <a:pPr algn="l">
-              <a:lnSpc>
-                <a:spcPct val="110000"/>
-              </a:lnSpc>
-              <a:spcBef>
-                <a:spcPts val="0"/>
-              </a:spcBef>
-              <a:spcAft>
-                <a:spcPts val="600"/>
+          <a:bodyPr rtlCol="0" anchor="ctr" wrap="square" lIns="128016" rIns="109728" tIns="91440" bIns="73152"/>
+          <a:lstStyle/>
+          <a:p>
+            <a:pPr algn="ctr">
+              <a:lnSpc>
+                <a:spcPct val="110000"/>
+              </a:lnSpc>
+              <a:spcBef>
+                <a:spcPts val="0"/>
+              </a:spcBef>
+              <a:spcAft>
+                <a:spcPts val="200"/>
               </a:spcAft>
             </a:pPr>
             <a:r>
               <a:rPr sz="1200" b="1">
                 <a:solidFill>
+                  <a:srgbClr val="E6194D"/>
+                </a:solidFill>
+                <a:latin typeface="Calibri"/>
+                <a:ea typeface="Calibri"/>
+                <a:cs typeface="Calibri"/>
+              </a:rPr>
+              <a:t>7</a:t>
+            </a:r>
+          </a:p>
+          <a:p>
+            <a:pPr algn="ctr">
+              <a:lnSpc>
+                <a:spcPct val="110000"/>
+              </a:lnSpc>
+              <a:spcBef>
+                <a:spcPts val="0"/>
+              </a:spcBef>
+              <a:spcAft>
+                <a:spcPts val="0"/>
+              </a:spcAft>
+            </a:pPr>
+            <a:r>
+              <a:rPr sz="1100" b="1">
+                <a:solidFill>
                   <a:srgbClr val="FFFFFF"/>
                 </a:solidFill>
                 <a:latin typeface="Calibri"/>
                 <a:ea typeface="Calibri"/>
                 <a:cs typeface="Calibri"/>
               </a:rPr>
-              <a:t>Image Agent</a:t>
-            </a:r>
-          </a:p>
-          <a:p>
-            <a:pPr algn="l">
-              <a:lnSpc>
-                <a:spcPct val="110000"/>
-              </a:lnSpc>
-              <a:spcBef>
-                <a:spcPts val="0"/>
-              </a:spcBef>
-              <a:spcAft>
-                <a:spcPts val="0"/>
-              </a:spcAft>
-            </a:pPr>
-            <a:r>
-              <a:rPr sz="1100" b="0">
-                <a:solidFill>
-                  <a:srgbClr val="A1A1AA"/>
-                </a:solidFill>
-                <a:latin typeface="Calibri"/>
-                <a:ea typeface="Calibri"/>
-                <a:cs typeface="Calibri"/>
-              </a:rPr>
-              <a:t>Generates companion stills, cover art, and visual track assets.</a:t>
-            </a:r>
-          </a:p>
-        </p:txBody>
-      </p:sp>
-      <p:sp>
-        <p:nvSpPr>
-          <p:cNvPr id="20" name="TextBox 19"/>
+              <a:t>Edit</a:t>
+            </a:r>
+          </a:p>
+        </p:txBody>
+      </p:sp>
+      <p:sp>
+        <p:nvSpPr>
+          <p:cNvPr id="13" name="Rounded Rectangle 12"/>
+          <p:cNvSpPr/>
+          <p:nvPr/>
+        </p:nvSpPr>
+        <p:spPr>
+          <a:xfrm>
+            <a:off x="10049256" y="1664208"/>
+            <a:ext cx="1234440" cy="1051560"/>
+          </a:xfrm>
+          <a:prstGeom prst="roundRect">
+            <a:avLst>
+              <a:gd name="adj" fmla="val 5000"/>
+            </a:avLst>
+          </a:prstGeom>
+          <a:solidFill>
+            <a:srgbClr val="18181F"/>
+          </a:solidFill>
+          <a:ln w="12700">
+            <a:solidFill>
+              <a:srgbClr val="2E2E38"/>
+            </a:solidFill>
+          </a:ln>
+        </p:spPr>
+        <p:style>
+          <a:lnRef idx="1">
+            <a:schemeClr val="accent1"/>
+          </a:lnRef>
+          <a:fillRef idx="3">
+            <a:schemeClr val="accent1"/>
+          </a:fillRef>
+          <a:effectRef idx="2">
+            <a:schemeClr val="accent1"/>
+          </a:effectRef>
+          <a:fontRef idx="minor">
+            <a:schemeClr val="lt1"/>
+          </a:fontRef>
+        </p:style>
+        <p:txBody>
+          <a:bodyPr rtlCol="0" anchor="ctr" wrap="square" lIns="128016" rIns="109728" tIns="91440" bIns="73152"/>
+          <a:lstStyle/>
+          <a:p>
+            <a:pPr algn="ctr">
+              <a:lnSpc>
+                <a:spcPct val="110000"/>
+              </a:lnSpc>
+              <a:spcBef>
+                <a:spcPts val="0"/>
+              </a:spcBef>
+              <a:spcAft>
+                <a:spcPts val="200"/>
+              </a:spcAft>
+            </a:pPr>
+            <a:r>
+              <a:rPr sz="1200" b="1">
+                <a:solidFill>
+                  <a:srgbClr val="E6194D"/>
+                </a:solidFill>
+                <a:latin typeface="Calibri"/>
+                <a:ea typeface="Calibri"/>
+                <a:cs typeface="Calibri"/>
+              </a:rPr>
+              <a:t>8</a:t>
+            </a:r>
+          </a:p>
+          <a:p>
+            <a:pPr algn="ctr">
+              <a:lnSpc>
+                <a:spcPct val="110000"/>
+              </a:lnSpc>
+              <a:spcBef>
+                <a:spcPts val="0"/>
+              </a:spcBef>
+              <a:spcAft>
+                <a:spcPts val="0"/>
+              </a:spcAft>
+            </a:pPr>
+            <a:r>
+              <a:rPr sz="1100" b="1">
+                <a:solidFill>
+                  <a:srgbClr val="FFFFFF"/>
+                </a:solidFill>
+                <a:latin typeface="Calibri"/>
+                <a:ea typeface="Calibri"/>
+                <a:cs typeface="Calibri"/>
+              </a:rPr>
+              <a:t>Simulate</a:t>
+            </a:r>
+          </a:p>
+        </p:txBody>
+      </p:sp>
+      <p:sp>
+        <p:nvSpPr>
+          <p:cNvPr id="14" name="Rounded Rectangle 13"/>
+          <p:cNvSpPr/>
+          <p:nvPr/>
+        </p:nvSpPr>
+        <p:spPr>
+          <a:xfrm>
+            <a:off x="640080" y="2944368"/>
+            <a:ext cx="2560320" cy="2697480"/>
+          </a:xfrm>
+          <a:prstGeom prst="roundRect">
+            <a:avLst>
+              <a:gd name="adj" fmla="val 5000"/>
+            </a:avLst>
+          </a:prstGeom>
+          <a:solidFill>
+            <a:srgbClr val="18181F"/>
+          </a:solidFill>
+          <a:ln w="12700">
+            <a:solidFill>
+              <a:srgbClr val="2E2E38"/>
+            </a:solidFill>
+          </a:ln>
+        </p:spPr>
+        <p:style>
+          <a:lnRef idx="1">
+            <a:schemeClr val="accent1"/>
+          </a:lnRef>
+          <a:fillRef idx="3">
+            <a:schemeClr val="accent1"/>
+          </a:fillRef>
+          <a:effectRef idx="2">
+            <a:schemeClr val="accent1"/>
+          </a:effectRef>
+          <a:fontRef idx="minor">
+            <a:schemeClr val="lt1"/>
+          </a:fontRef>
+        </p:style>
+        <p:txBody>
+          <a:bodyPr rtlCol="0" anchor="t" wrap="square" lIns="128016" rIns="109728" tIns="91440" bIns="73152"/>
+          <a:lstStyle/>
+          <a:p>
+            <a:pPr algn="l">
+              <a:lnSpc>
+                <a:spcPct val="110000"/>
+              </a:lnSpc>
+              <a:spcBef>
+                <a:spcPts val="0"/>
+              </a:spcBef>
+              <a:spcAft>
+                <a:spcPts val="800"/>
+              </a:spcAft>
+            </a:pPr>
+            <a:r>
+              <a:rPr sz="1100" b="1">
+                <a:solidFill>
+                  <a:srgbClr val="E6194D"/>
+                </a:solidFill>
+                <a:latin typeface="Calibri"/>
+                <a:ea typeface="Calibri"/>
+                <a:cs typeface="Calibri"/>
+              </a:rPr>
+              <a:t>GROUND</a:t>
+            </a:r>
+          </a:p>
+          <a:p>
+            <a:pPr algn="l">
+              <a:lnSpc>
+                <a:spcPct val="110000"/>
+              </a:lnSpc>
+              <a:spcBef>
+                <a:spcPts val="0"/>
+              </a:spcBef>
+              <a:spcAft>
+                <a:spcPts val="0"/>
+              </a:spcAft>
+            </a:pPr>
+            <a:r>
+              <a:rPr sz="1200" b="0">
+                <a:solidFill>
+                  <a:srgbClr val="FFFFFF"/>
+                </a:solidFill>
+                <a:latin typeface="Calibri"/>
+                <a:ea typeface="Calibri"/>
+                <a:cs typeface="Calibri"/>
+              </a:rPr>
+              <a:t>Attachments → Databricks AI Search. Cast &amp; templates → Vector Search. Optional Tavily crawl for fresh hooks.</a:t>
+            </a:r>
+          </a:p>
+        </p:txBody>
+      </p:sp>
+      <p:sp>
+        <p:nvSpPr>
+          <p:cNvPr id="15" name="Rounded Rectangle 14"/>
+          <p:cNvSpPr/>
+          <p:nvPr/>
+        </p:nvSpPr>
+        <p:spPr>
+          <a:xfrm>
+            <a:off x="3383280" y="2944368"/>
+            <a:ext cx="2560320" cy="2697480"/>
+          </a:xfrm>
+          <a:prstGeom prst="roundRect">
+            <a:avLst>
+              <a:gd name="adj" fmla="val 5000"/>
+            </a:avLst>
+          </a:prstGeom>
+          <a:solidFill>
+            <a:srgbClr val="18181F"/>
+          </a:solidFill>
+          <a:ln w="12700">
+            <a:solidFill>
+              <a:srgbClr val="2E2E38"/>
+            </a:solidFill>
+          </a:ln>
+        </p:spPr>
+        <p:style>
+          <a:lnRef idx="1">
+            <a:schemeClr val="accent1"/>
+          </a:lnRef>
+          <a:fillRef idx="3">
+            <a:schemeClr val="accent1"/>
+          </a:fillRef>
+          <a:effectRef idx="2">
+            <a:schemeClr val="accent1"/>
+          </a:effectRef>
+          <a:fontRef idx="minor">
+            <a:schemeClr val="lt1"/>
+          </a:fontRef>
+        </p:style>
+        <p:txBody>
+          <a:bodyPr rtlCol="0" anchor="t" wrap="square" lIns="128016" rIns="109728" tIns="91440" bIns="73152"/>
+          <a:lstStyle/>
+          <a:p>
+            <a:pPr algn="l">
+              <a:lnSpc>
+                <a:spcPct val="110000"/>
+              </a:lnSpc>
+              <a:spcBef>
+                <a:spcPts val="0"/>
+              </a:spcBef>
+              <a:spcAft>
+                <a:spcPts val="800"/>
+              </a:spcAft>
+            </a:pPr>
+            <a:r>
+              <a:rPr sz="1100" b="1">
+                <a:solidFill>
+                  <a:srgbClr val="E6194D"/>
+                </a:solidFill>
+                <a:latin typeface="Calibri"/>
+                <a:ea typeface="Calibri"/>
+                <a:cs typeface="Calibri"/>
+              </a:rPr>
+              <a:t>WRITE</a:t>
+            </a:r>
+          </a:p>
+          <a:p>
+            <a:pPr algn="l">
+              <a:lnSpc>
+                <a:spcPct val="110000"/>
+              </a:lnSpc>
+              <a:spcBef>
+                <a:spcPts val="0"/>
+              </a:spcBef>
+              <a:spcAft>
+                <a:spcPts val="0"/>
+              </a:spcAft>
+            </a:pPr>
+            <a:r>
+              <a:rPr sz="1200" b="0">
+                <a:solidFill>
+                  <a:srgbClr val="FFFFFF"/>
+                </a:solidFill>
+                <a:latin typeface="Calibri"/>
+                <a:ea typeface="Calibri"/>
+                <a:cs typeface="Calibri"/>
+              </a:rPr>
+              <a:t>Storytelling + Script Writer produce a structured multi-part package with cliffhangers and narration plan.</a:t>
+            </a:r>
+          </a:p>
+        </p:txBody>
+      </p:sp>
+      <p:sp>
+        <p:nvSpPr>
+          <p:cNvPr id="16" name="Rounded Rectangle 15"/>
+          <p:cNvSpPr/>
+          <p:nvPr/>
+        </p:nvSpPr>
+        <p:spPr>
+          <a:xfrm>
+            <a:off x="6126480" y="2944368"/>
+            <a:ext cx="2560320" cy="2697480"/>
+          </a:xfrm>
+          <a:prstGeom prst="roundRect">
+            <a:avLst>
+              <a:gd name="adj" fmla="val 5000"/>
+            </a:avLst>
+          </a:prstGeom>
+          <a:solidFill>
+            <a:srgbClr val="18181F"/>
+          </a:solidFill>
+          <a:ln w="12700">
+            <a:solidFill>
+              <a:srgbClr val="2E2E38"/>
+            </a:solidFill>
+          </a:ln>
+        </p:spPr>
+        <p:style>
+          <a:lnRef idx="1">
+            <a:schemeClr val="accent1"/>
+          </a:lnRef>
+          <a:fillRef idx="3">
+            <a:schemeClr val="accent1"/>
+          </a:fillRef>
+          <a:effectRef idx="2">
+            <a:schemeClr val="accent1"/>
+          </a:effectRef>
+          <a:fontRef idx="minor">
+            <a:schemeClr val="lt1"/>
+          </a:fontRef>
+        </p:style>
+        <p:txBody>
+          <a:bodyPr rtlCol="0" anchor="t" wrap="square" lIns="128016" rIns="109728" tIns="91440" bIns="73152"/>
+          <a:lstStyle/>
+          <a:p>
+            <a:pPr algn="l">
+              <a:lnSpc>
+                <a:spcPct val="110000"/>
+              </a:lnSpc>
+              <a:spcBef>
+                <a:spcPts val="0"/>
+              </a:spcBef>
+              <a:spcAft>
+                <a:spcPts val="800"/>
+              </a:spcAft>
+            </a:pPr>
+            <a:r>
+              <a:rPr sz="1100" b="1">
+                <a:solidFill>
+                  <a:srgbClr val="E6194D"/>
+                </a:solidFill>
+                <a:latin typeface="Calibri"/>
+                <a:ea typeface="Calibri"/>
+                <a:cs typeface="Calibri"/>
+              </a:rPr>
+              <a:t>PRODUCE</a:t>
+            </a:r>
+          </a:p>
+          <a:p>
+            <a:pPr algn="l">
+              <a:lnSpc>
+                <a:spcPct val="110000"/>
+              </a:lnSpc>
+              <a:spcBef>
+                <a:spcPts val="0"/>
+              </a:spcBef>
+              <a:spcAft>
+                <a:spcPts val="0"/>
+              </a:spcAft>
+            </a:pPr>
+            <a:r>
+              <a:rPr sz="1200" b="0">
+                <a:solidFill>
+                  <a:srgbClr val="FFFFFF"/>
+                </a:solidFill>
+                <a:latin typeface="Calibri"/>
+                <a:ea typeface="Calibri"/>
+                <a:cs typeface="Calibri"/>
+              </a:rPr>
+              <a:t>Voice agent renders TTS + SFX. Director + Image agents build companion visuals and cover art.</a:t>
+            </a:r>
+          </a:p>
+        </p:txBody>
+      </p:sp>
+      <p:sp>
+        <p:nvSpPr>
+          <p:cNvPr id="17" name="Rounded Rectangle 16"/>
+          <p:cNvSpPr/>
+          <p:nvPr/>
+        </p:nvSpPr>
+        <p:spPr>
+          <a:xfrm>
+            <a:off x="8869680" y="2944368"/>
+            <a:ext cx="2560320" cy="2697480"/>
+          </a:xfrm>
+          <a:prstGeom prst="roundRect">
+            <a:avLst>
+              <a:gd name="adj" fmla="val 5000"/>
+            </a:avLst>
+          </a:prstGeom>
+          <a:solidFill>
+            <a:srgbClr val="18181F"/>
+          </a:solidFill>
+          <a:ln w="12700">
+            <a:solidFill>
+              <a:srgbClr val="2E2E38"/>
+            </a:solidFill>
+          </a:ln>
+        </p:spPr>
+        <p:style>
+          <a:lnRef idx="1">
+            <a:schemeClr val="accent1"/>
+          </a:lnRef>
+          <a:fillRef idx="3">
+            <a:schemeClr val="accent1"/>
+          </a:fillRef>
+          <a:effectRef idx="2">
+            <a:schemeClr val="accent1"/>
+          </a:effectRef>
+          <a:fontRef idx="minor">
+            <a:schemeClr val="lt1"/>
+          </a:fontRef>
+        </p:style>
+        <p:txBody>
+          <a:bodyPr rtlCol="0" anchor="t" wrap="square" lIns="128016" rIns="109728" tIns="91440" bIns="73152"/>
+          <a:lstStyle/>
+          <a:p>
+            <a:pPr algn="l">
+              <a:lnSpc>
+                <a:spcPct val="110000"/>
+              </a:lnSpc>
+              <a:spcBef>
+                <a:spcPts val="0"/>
+              </a:spcBef>
+              <a:spcAft>
+                <a:spcPts val="800"/>
+              </a:spcAft>
+            </a:pPr>
+            <a:r>
+              <a:rPr sz="1100" b="1">
+                <a:solidFill>
+                  <a:srgbClr val="E6194D"/>
+                </a:solidFill>
+                <a:latin typeface="Calibri"/>
+                <a:ea typeface="Calibri"/>
+                <a:cs typeface="Calibri"/>
+              </a:rPr>
+              <a:t>ASSURE</a:t>
+            </a:r>
+          </a:p>
+          <a:p>
+            <a:pPr algn="l">
+              <a:lnSpc>
+                <a:spcPct val="110000"/>
+              </a:lnSpc>
+              <a:spcBef>
+                <a:spcPts val="0"/>
+              </a:spcBef>
+              <a:spcAft>
+                <a:spcPts val="0"/>
+              </a:spcAft>
+            </a:pPr>
+            <a:r>
+              <a:rPr sz="1200" b="0">
+                <a:solidFill>
+                  <a:srgbClr val="FFFFFF"/>
+                </a:solidFill>
+                <a:latin typeface="Calibri"/>
+                <a:ea typeface="Calibri"/>
+                <a:cs typeface="Calibri"/>
+              </a:rPr>
+              <a:t>Timeline editor for listen/edit. Audience Sim proposes patches. Human approves each gate.</a:t>
+            </a:r>
+          </a:p>
+        </p:txBody>
+      </p:sp>
+      <p:sp>
+        <p:nvSpPr>
+          <p:cNvPr id="18" name="TextBox 17"/>
           <p:cNvSpPr txBox="1"/>
           <p:nvPr/>
         </p:nvSpPr>
@@ -9272,7 +8352,7 @@
       </p:sp>
       <p:sp>
         <p:nvSpPr>
-          <p:cNvPr id="21" name="TextBox 20"/>
+          <p:cNvPr id="19" name="TextBox 18"/>
           <p:cNvSpPr txBox="1"/>
           <p:nvPr/>
         </p:nvSpPr>
@@ -9310,7 +8390,7 @@
                 <a:ea typeface="Calibri"/>
                 <a:cs typeface="Calibri"/>
               </a:rPr>
-              <a:t>06 / 08</a:t>
+              <a:t>06 / 09</a:t>
             </a:r>
           </a:p>
         </p:txBody>
@@ -9424,7 +8504,7 @@
                 <a:ea typeface="Calibri"/>
                 <a:cs typeface="Calibri"/>
               </a:rPr>
-              <a:t>06  AGENT HANDOFF</a:t>
+              <a:t>06  AGENTS</a:t>
             </a:r>
           </a:p>
         </p:txBody>
@@ -9469,7 +8549,7 @@
                 <a:ea typeface="Calibri"/>
                 <a:cs typeface="Calibri"/>
               </a:rPr>
-              <a:t>Who does what in sequence</a:t>
+              <a:t>Seven specialized agents — one production studio</a:t>
             </a:r>
           </a:p>
         </p:txBody>
@@ -9514,34 +8594,30 @@
                 <a:ea typeface="Calibri"/>
                 <a:cs typeface="Calibri"/>
               </a:rPr>
-              <a:t>Search grounds truth → writers lock story → voice &amp; image produce → humans decide.</a:t>
-            </a:r>
-          </a:p>
-        </p:txBody>
-      </p:sp>
-      <p:sp>
-        <p:nvSpPr>
-          <p:cNvPr id="6" name="Rounded Rectangle 5"/>
+              <a:t>Each owns a stage; the orchestrator sequences them with human approvals.</a:t>
+            </a:r>
+          </a:p>
+        </p:txBody>
+      </p:sp>
+      <p:sp>
+        <p:nvSpPr>
+          <p:cNvPr id="6" name="Rectangle 5"/>
           <p:cNvSpPr/>
           <p:nvPr/>
         </p:nvSpPr>
         <p:spPr>
           <a:xfrm>
             <a:off x="640080" y="1664208"/>
-            <a:ext cx="2834640" cy="621792"/>
-          </a:xfrm>
-          <a:prstGeom prst="roundRect">
-            <a:avLst>
-              <a:gd name="adj" fmla="val 5000"/>
-            </a:avLst>
+            <a:ext cx="73152" cy="1783080"/>
+          </a:xfrm>
+          <a:prstGeom prst="rect">
+            <a:avLst/>
           </a:prstGeom>
           <a:solidFill>
-            <a:srgbClr val="22222C"/>
+            <a:srgbClr val="E6194D"/>
           </a:solidFill>
-          <a:ln w="12700">
-            <a:solidFill>
-              <a:srgbClr val="2E2E38"/>
-            </a:solidFill>
+          <a:ln>
+            <a:noFill/>
           </a:ln>
         </p:spPr>
         <p:style>
@@ -9559,31 +8635,10 @@
           </a:fontRef>
         </p:style>
         <p:txBody>
-          <a:bodyPr rtlCol="0" anchor="t" wrap="square" lIns="128016" rIns="109728" tIns="91440" bIns="73152"/>
-          <a:lstStyle/>
-          <a:p>
-            <a:pPr algn="l">
-              <a:lnSpc>
-                <a:spcPct val="110000"/>
-              </a:lnSpc>
-              <a:spcBef>
-                <a:spcPts val="0"/>
-              </a:spcBef>
-              <a:spcAft>
-                <a:spcPts val="0"/>
-              </a:spcAft>
-            </a:pPr>
-            <a:r>
-              <a:rPr sz="1200" b="1">
-                <a:solidFill>
-                  <a:srgbClr val="FFFFFF"/>
-                </a:solidFill>
-                <a:latin typeface="Calibri"/>
-                <a:ea typeface="Calibri"/>
-                <a:cs typeface="Calibri"/>
-              </a:rPr>
-              <a:t>Storytelling</a:t>
-            </a:r>
+          <a:bodyPr rtlCol="0" anchor="ctr"/>
+          <a:lstStyle/>
+          <a:p>
+            <a:pPr algn="ctr"/>
           </a:p>
         </p:txBody>
       </p:sp>
@@ -9595,8 +8650,8 @@
         </p:nvSpPr>
         <p:spPr>
           <a:xfrm>
-            <a:off x="3566160" y="1664208"/>
-            <a:ext cx="2194560" cy="621792"/>
+            <a:off x="713232" y="1664208"/>
+            <a:ext cx="2487168" cy="1783080"/>
           </a:xfrm>
           <a:prstGeom prst="roundRect">
             <a:avLst>
@@ -9627,44 +8682,111 @@
           </a:fontRef>
         </p:style>
         <p:txBody>
-          <a:bodyPr rtlCol="0" anchor="t" wrap="square" lIns="128016" rIns="109728" tIns="91440" bIns="73152"/>
-          <a:lstStyle/>
-          <a:p>
-            <a:pPr algn="l">
-              <a:lnSpc>
-                <a:spcPct val="110000"/>
-              </a:lnSpc>
-              <a:spcBef>
-                <a:spcPts val="0"/>
-              </a:spcBef>
-              <a:spcAft>
-                <a:spcPts val="0"/>
-              </a:spcAft>
-            </a:pPr>
-            <a:r>
-              <a:rPr sz="1100" b="1">
-                <a:solidFill>
-                  <a:srgbClr val="E6194D"/>
-                </a:solidFill>
-                <a:latin typeface="Calibri"/>
-                <a:ea typeface="Calibri"/>
-                <a:cs typeface="Calibri"/>
-              </a:rPr>
-              <a:t>Chat director</a:t>
-            </a:r>
-          </a:p>
-        </p:txBody>
-      </p:sp>
-      <p:sp>
-        <p:nvSpPr>
-          <p:cNvPr id="8" name="Rounded Rectangle 7"/>
+          <a:bodyPr rtlCol="0" anchor="t" wrap="square" lIns="109728" rIns="109728" tIns="91440" bIns="73152"/>
+          <a:lstStyle/>
+          <a:p>
+            <a:pPr algn="l">
+              <a:lnSpc>
+                <a:spcPct val="110000"/>
+              </a:lnSpc>
+              <a:spcBef>
+                <a:spcPts val="0"/>
+              </a:spcBef>
+              <a:spcAft>
+                <a:spcPts val="600"/>
+              </a:spcAft>
+            </a:pPr>
+            <a:r>
+              <a:rPr sz="1200" b="1">
+                <a:solidFill>
+                  <a:srgbClr val="FFFFFF"/>
+                </a:solidFill>
+                <a:latin typeface="Calibri"/>
+                <a:ea typeface="Calibri"/>
+                <a:cs typeface="Calibri"/>
+              </a:rPr>
+              <a:t>Storytelling Agent</a:t>
+            </a:r>
+          </a:p>
+          <a:p>
+            <a:pPr algn="l">
+              <a:lnSpc>
+                <a:spcPct val="110000"/>
+              </a:lnSpc>
+              <a:spcBef>
+                <a:spcPts val="0"/>
+              </a:spcBef>
+              <a:spcAft>
+                <a:spcPts val="0"/>
+              </a:spcAft>
+            </a:pPr>
+            <a:r>
+              <a:rPr sz="1100" b="0">
+                <a:solidFill>
+                  <a:srgbClr val="A1A1AA"/>
+                </a:solidFill>
+                <a:latin typeface="Calibri"/>
+                <a:ea typeface="Calibri"/>
+                <a:cs typeface="Calibri"/>
+              </a:rPr>
+              <a:t>Shapes the series brief, plot pitches, and creative direction inside chat.</a:t>
+            </a:r>
+          </a:p>
+        </p:txBody>
+      </p:sp>
+      <p:sp>
+        <p:nvSpPr>
+          <p:cNvPr id="8" name="Rectangle 7"/>
           <p:cNvSpPr/>
           <p:nvPr/>
         </p:nvSpPr>
         <p:spPr>
           <a:xfrm>
-            <a:off x="5852160" y="1664208"/>
-            <a:ext cx="5669280" cy="621792"/>
+            <a:off x="3383280" y="1664208"/>
+            <a:ext cx="73152" cy="1783080"/>
+          </a:xfrm>
+          <a:prstGeom prst="rect">
+            <a:avLst/>
+          </a:prstGeom>
+          <a:solidFill>
+            <a:srgbClr val="E6194D"/>
+          </a:solidFill>
+          <a:ln>
+            <a:noFill/>
+          </a:ln>
+        </p:spPr>
+        <p:style>
+          <a:lnRef idx="1">
+            <a:schemeClr val="accent1"/>
+          </a:lnRef>
+          <a:fillRef idx="3">
+            <a:schemeClr val="accent1"/>
+          </a:fillRef>
+          <a:effectRef idx="2">
+            <a:schemeClr val="accent1"/>
+          </a:effectRef>
+          <a:fontRef idx="minor">
+            <a:schemeClr val="lt1"/>
+          </a:fontRef>
+        </p:style>
+        <p:txBody>
+          <a:bodyPr rtlCol="0" anchor="ctr"/>
+          <a:lstStyle/>
+          <a:p>
+            <a:pPr algn="ctr"/>
+          </a:p>
+        </p:txBody>
+      </p:sp>
+      <p:sp>
+        <p:nvSpPr>
+          <p:cNvPr id="9" name="Rounded Rectangle 8"/>
+          <p:cNvSpPr/>
+          <p:nvPr/>
+        </p:nvSpPr>
+        <p:spPr>
+          <a:xfrm>
+            <a:off x="3456432" y="1664208"/>
+            <a:ext cx="2487168" cy="1783080"/>
           </a:xfrm>
           <a:prstGeom prst="roundRect">
             <a:avLst>
@@ -9695,8 +8817,32 @@
           </a:fontRef>
         </p:style>
         <p:txBody>
-          <a:bodyPr rtlCol="0" anchor="t" wrap="square" lIns="128016" rIns="109728" tIns="91440" bIns="73152"/>
-          <a:lstStyle/>
+          <a:bodyPr rtlCol="0" anchor="t" wrap="square" lIns="109728" rIns="109728" tIns="91440" bIns="73152"/>
+          <a:lstStyle/>
+          <a:p>
+            <a:pPr algn="l">
+              <a:lnSpc>
+                <a:spcPct val="110000"/>
+              </a:lnSpc>
+              <a:spcBef>
+                <a:spcPts val="0"/>
+              </a:spcBef>
+              <a:spcAft>
+                <a:spcPts val="600"/>
+              </a:spcAft>
+            </a:pPr>
+            <a:r>
+              <a:rPr sz="1200" b="1">
+                <a:solidFill>
+                  <a:srgbClr val="FFFFFF"/>
+                </a:solidFill>
+                <a:latin typeface="Calibri"/>
+                <a:ea typeface="Calibri"/>
+                <a:cs typeface="Calibri"/>
+              </a:rPr>
+              <a:t>Scripting &amp; Search Agent</a:t>
+            </a:r>
+          </a:p>
           <a:p>
             <a:pPr algn="l">
               <a:lnSpc>
@@ -9718,34 +8864,30 @@
                 <a:ea typeface="Calibri"/>
                 <a:cs typeface="Calibri"/>
               </a:rPr>
-              <a:t>Plot pitches, series intent, route generate / rewrite</a:t>
-            </a:r>
-          </a:p>
-        </p:txBody>
-      </p:sp>
-      <p:sp>
-        <p:nvSpPr>
-          <p:cNvPr id="9" name="Rounded Rectangle 8"/>
+              <a:t>Retrieves project context (Databricks) and researches hooks (Tavily + extraction).</a:t>
+            </a:r>
+          </a:p>
+        </p:txBody>
+      </p:sp>
+      <p:sp>
+        <p:nvSpPr>
+          <p:cNvPr id="10" name="Rectangle 9"/>
           <p:cNvSpPr/>
           <p:nvPr/>
         </p:nvSpPr>
         <p:spPr>
           <a:xfrm>
-            <a:off x="640080" y="2359152"/>
-            <a:ext cx="2834640" cy="621792"/>
-          </a:xfrm>
-          <a:prstGeom prst="roundRect">
-            <a:avLst>
-              <a:gd name="adj" fmla="val 5000"/>
-            </a:avLst>
+            <a:off x="6126480" y="1664208"/>
+            <a:ext cx="73152" cy="1783080"/>
+          </a:xfrm>
+          <a:prstGeom prst="rect">
+            <a:avLst/>
           </a:prstGeom>
           <a:solidFill>
-            <a:srgbClr val="22222C"/>
+            <a:srgbClr val="E6194D"/>
           </a:solidFill>
-          <a:ln w="12700">
-            <a:solidFill>
-              <a:srgbClr val="2E2E38"/>
-            </a:solidFill>
+          <a:ln>
+            <a:noFill/>
           </a:ln>
         </p:spPr>
         <p:style>
@@ -9763,44 +8905,23 @@
           </a:fontRef>
         </p:style>
         <p:txBody>
-          <a:bodyPr rtlCol="0" anchor="t" wrap="square" lIns="128016" rIns="109728" tIns="91440" bIns="73152"/>
-          <a:lstStyle/>
-          <a:p>
-            <a:pPr algn="l">
-              <a:lnSpc>
-                <a:spcPct val="110000"/>
-              </a:lnSpc>
-              <a:spcBef>
-                <a:spcPts val="0"/>
-              </a:spcBef>
-              <a:spcAft>
-                <a:spcPts val="0"/>
-              </a:spcAft>
-            </a:pPr>
-            <a:r>
-              <a:rPr sz="1200" b="1">
-                <a:solidFill>
-                  <a:srgbClr val="FFFFFF"/>
-                </a:solidFill>
-                <a:latin typeface="Calibri"/>
-                <a:ea typeface="Calibri"/>
-                <a:cs typeface="Calibri"/>
-              </a:rPr>
-              <a:t>Scripting &amp; Search</a:t>
-            </a:r>
-          </a:p>
-        </p:txBody>
-      </p:sp>
-      <p:sp>
-        <p:nvSpPr>
-          <p:cNvPr id="10" name="Rounded Rectangle 9"/>
+          <a:bodyPr rtlCol="0" anchor="ctr"/>
+          <a:lstStyle/>
+          <a:p>
+            <a:pPr algn="ctr"/>
+          </a:p>
+        </p:txBody>
+      </p:sp>
+      <p:sp>
+        <p:nvSpPr>
+          <p:cNvPr id="11" name="Rounded Rectangle 10"/>
           <p:cNvSpPr/>
           <p:nvPr/>
         </p:nvSpPr>
         <p:spPr>
           <a:xfrm>
-            <a:off x="3566160" y="2359152"/>
-            <a:ext cx="2194560" cy="621792"/>
+            <a:off x="6199632" y="1664208"/>
+            <a:ext cx="2487168" cy="1783080"/>
           </a:xfrm>
           <a:prstGeom prst="roundRect">
             <a:avLst>
@@ -9831,44 +8952,111 @@
           </a:fontRef>
         </p:style>
         <p:txBody>
-          <a:bodyPr rtlCol="0" anchor="t" wrap="square" lIns="128016" rIns="109728" tIns="91440" bIns="73152"/>
-          <a:lstStyle/>
-          <a:p>
-            <a:pPr algn="l">
-              <a:lnSpc>
-                <a:spcPct val="110000"/>
-              </a:lnSpc>
-              <a:spcBef>
-                <a:spcPts val="0"/>
-              </a:spcBef>
-              <a:spcAft>
-                <a:spcPts val="0"/>
-              </a:spcAft>
-            </a:pPr>
-            <a:r>
-              <a:rPr sz="1100" b="1">
-                <a:solidFill>
-                  <a:srgbClr val="E6194D"/>
-                </a:solidFill>
-                <a:latin typeface="Calibri"/>
-                <a:ea typeface="Calibri"/>
-                <a:cs typeface="Calibri"/>
-              </a:rPr>
-              <a:t>RAG + crawl</a:t>
-            </a:r>
-          </a:p>
-        </p:txBody>
-      </p:sp>
-      <p:sp>
-        <p:nvSpPr>
-          <p:cNvPr id="11" name="Rounded Rectangle 10"/>
+          <a:bodyPr rtlCol="0" anchor="t" wrap="square" lIns="109728" rIns="109728" tIns="91440" bIns="73152"/>
+          <a:lstStyle/>
+          <a:p>
+            <a:pPr algn="l">
+              <a:lnSpc>
+                <a:spcPct val="110000"/>
+              </a:lnSpc>
+              <a:spcBef>
+                <a:spcPts val="0"/>
+              </a:spcBef>
+              <a:spcAft>
+                <a:spcPts val="600"/>
+              </a:spcAft>
+            </a:pPr>
+            <a:r>
+              <a:rPr sz="1200" b="1">
+                <a:solidFill>
+                  <a:srgbClr val="FFFFFF"/>
+                </a:solidFill>
+                <a:latin typeface="Calibri"/>
+                <a:ea typeface="Calibri"/>
+                <a:cs typeface="Calibri"/>
+              </a:rPr>
+              <a:t>Narrative Agent</a:t>
+            </a:r>
+          </a:p>
+          <a:p>
+            <a:pPr algn="l">
+              <a:lnSpc>
+                <a:spcPct val="110000"/>
+              </a:lnSpc>
+              <a:spcBef>
+                <a:spcPts val="0"/>
+              </a:spcBef>
+              <a:spcAft>
+                <a:spcPts val="0"/>
+              </a:spcAft>
+            </a:pPr>
+            <a:r>
+              <a:rPr sz="1100" b="0">
+                <a:solidFill>
+                  <a:srgbClr val="A1A1AA"/>
+                </a:solidFill>
+                <a:latin typeface="Calibri"/>
+                <a:ea typeface="Calibri"/>
+                <a:cs typeface="Calibri"/>
+              </a:rPr>
+              <a:t>Locks narration mode — narration-led, dialogue inserts, multi-narrator, framed.</a:t>
+            </a:r>
+          </a:p>
+        </p:txBody>
+      </p:sp>
+      <p:sp>
+        <p:nvSpPr>
+          <p:cNvPr id="12" name="Rectangle 11"/>
           <p:cNvSpPr/>
           <p:nvPr/>
         </p:nvSpPr>
         <p:spPr>
           <a:xfrm>
-            <a:off x="5852160" y="2359152"/>
-            <a:ext cx="5669280" cy="621792"/>
+            <a:off x="8869680" y="1664208"/>
+            <a:ext cx="73152" cy="1783080"/>
+          </a:xfrm>
+          <a:prstGeom prst="rect">
+            <a:avLst/>
+          </a:prstGeom>
+          <a:solidFill>
+            <a:srgbClr val="E6194D"/>
+          </a:solidFill>
+          <a:ln>
+            <a:noFill/>
+          </a:ln>
+        </p:spPr>
+        <p:style>
+          <a:lnRef idx="1">
+            <a:schemeClr val="accent1"/>
+          </a:lnRef>
+          <a:fillRef idx="3">
+            <a:schemeClr val="accent1"/>
+          </a:fillRef>
+          <a:effectRef idx="2">
+            <a:schemeClr val="accent1"/>
+          </a:effectRef>
+          <a:fontRef idx="minor">
+            <a:schemeClr val="lt1"/>
+          </a:fontRef>
+        </p:style>
+        <p:txBody>
+          <a:bodyPr rtlCol="0" anchor="ctr"/>
+          <a:lstStyle/>
+          <a:p>
+            <a:pPr algn="ctr"/>
+          </a:p>
+        </p:txBody>
+      </p:sp>
+      <p:sp>
+        <p:nvSpPr>
+          <p:cNvPr id="13" name="Rounded Rectangle 12"/>
+          <p:cNvSpPr/>
+          <p:nvPr/>
+        </p:nvSpPr>
+        <p:spPr>
+          <a:xfrm>
+            <a:off x="8942832" y="1664208"/>
+            <a:ext cx="2487168" cy="1783080"/>
           </a:xfrm>
           <a:prstGeom prst="roundRect">
             <a:avLst>
@@ -9899,8 +9087,32 @@
           </a:fontRef>
         </p:style>
         <p:txBody>
-          <a:bodyPr rtlCol="0" anchor="t" wrap="square" lIns="128016" rIns="109728" tIns="91440" bIns="73152"/>
-          <a:lstStyle/>
+          <a:bodyPr rtlCol="0" anchor="t" wrap="square" lIns="109728" rIns="109728" tIns="91440" bIns="73152"/>
+          <a:lstStyle/>
+          <a:p>
+            <a:pPr algn="l">
+              <a:lnSpc>
+                <a:spcPct val="110000"/>
+              </a:lnSpc>
+              <a:spcBef>
+                <a:spcPts val="0"/>
+              </a:spcBef>
+              <a:spcAft>
+                <a:spcPts val="600"/>
+              </a:spcAft>
+            </a:pPr>
+            <a:r>
+              <a:rPr sz="1200" b="1">
+                <a:solidFill>
+                  <a:srgbClr val="FFFFFF"/>
+                </a:solidFill>
+                <a:latin typeface="Calibri"/>
+                <a:ea typeface="Calibri"/>
+                <a:cs typeface="Calibri"/>
+              </a:rPr>
+              <a:t>Script Writer Agent</a:t>
+            </a:r>
+          </a:p>
           <a:p>
             <a:pPr algn="l">
               <a:lnSpc>
@@ -9922,34 +9134,30 @@
                 <a:ea typeface="Calibri"/>
                 <a:cs typeface="Calibri"/>
               </a:rPr>
-              <a:t>Databricks chunks · Tavily research · SOURCE assembly</a:t>
-            </a:r>
-          </a:p>
-        </p:txBody>
-      </p:sp>
-      <p:sp>
-        <p:nvSpPr>
-          <p:cNvPr id="12" name="Rounded Rectangle 11"/>
+              <a:t>Writes the structured multi-part script package and screenplay.</a:t>
+            </a:r>
+          </a:p>
+        </p:txBody>
+      </p:sp>
+      <p:sp>
+        <p:nvSpPr>
+          <p:cNvPr id="14" name="Rectangle 13"/>
           <p:cNvSpPr/>
           <p:nvPr/>
         </p:nvSpPr>
         <p:spPr>
           <a:xfrm>
-            <a:off x="640080" y="3054096"/>
-            <a:ext cx="2834640" cy="621792"/>
-          </a:xfrm>
-          <a:prstGeom prst="roundRect">
-            <a:avLst>
-              <a:gd name="adj" fmla="val 5000"/>
-            </a:avLst>
+            <a:off x="777240" y="3630168"/>
+            <a:ext cx="73152" cy="1783080"/>
+          </a:xfrm>
+          <a:prstGeom prst="rect">
+            <a:avLst/>
           </a:prstGeom>
           <a:solidFill>
-            <a:srgbClr val="22222C"/>
+            <a:srgbClr val="E6194D"/>
           </a:solidFill>
-          <a:ln w="12700">
-            <a:solidFill>
-              <a:srgbClr val="2E2E38"/>
-            </a:solidFill>
+          <a:ln>
+            <a:noFill/>
           </a:ln>
         </p:spPr>
         <p:style>
@@ -9967,44 +9175,23 @@
           </a:fontRef>
         </p:style>
         <p:txBody>
-          <a:bodyPr rtlCol="0" anchor="t" wrap="square" lIns="128016" rIns="109728" tIns="91440" bIns="73152"/>
-          <a:lstStyle/>
-          <a:p>
-            <a:pPr algn="l">
-              <a:lnSpc>
-                <a:spcPct val="110000"/>
-              </a:lnSpc>
-              <a:spcBef>
-                <a:spcPts val="0"/>
-              </a:spcBef>
-              <a:spcAft>
-                <a:spcPts val="0"/>
-              </a:spcAft>
-            </a:pPr>
-            <a:r>
-              <a:rPr sz="1200" b="1">
-                <a:solidFill>
-                  <a:srgbClr val="FFFFFF"/>
-                </a:solidFill>
-                <a:latin typeface="Calibri"/>
-                <a:ea typeface="Calibri"/>
-                <a:cs typeface="Calibri"/>
-              </a:rPr>
-              <a:t>Narrative + Script Writer</a:t>
-            </a:r>
-          </a:p>
-        </p:txBody>
-      </p:sp>
-      <p:sp>
-        <p:nvSpPr>
-          <p:cNvPr id="13" name="Rounded Rectangle 12"/>
+          <a:bodyPr rtlCol="0" anchor="ctr"/>
+          <a:lstStyle/>
+          <a:p>
+            <a:pPr algn="ctr"/>
+          </a:p>
+        </p:txBody>
+      </p:sp>
+      <p:sp>
+        <p:nvSpPr>
+          <p:cNvPr id="15" name="Rounded Rectangle 14"/>
           <p:cNvSpPr/>
           <p:nvPr/>
         </p:nvSpPr>
         <p:spPr>
           <a:xfrm>
-            <a:off x="3566160" y="3054096"/>
-            <a:ext cx="2194560" cy="621792"/>
+            <a:off x="850392" y="3630168"/>
+            <a:ext cx="3401568" cy="1783080"/>
           </a:xfrm>
           <a:prstGeom prst="roundRect">
             <a:avLst>
@@ -10035,44 +9222,111 @@
           </a:fontRef>
         </p:style>
         <p:txBody>
-          <a:bodyPr rtlCol="0" anchor="t" wrap="square" lIns="128016" rIns="109728" tIns="91440" bIns="73152"/>
-          <a:lstStyle/>
-          <a:p>
-            <a:pPr algn="l">
-              <a:lnSpc>
-                <a:spcPct val="110000"/>
-              </a:lnSpc>
-              <a:spcBef>
-                <a:spcPts val="0"/>
-              </a:spcBef>
-              <a:spcAft>
-                <a:spcPts val="0"/>
-              </a:spcAft>
-            </a:pPr>
-            <a:r>
-              <a:rPr sz="1100" b="1">
-                <a:solidFill>
-                  <a:srgbClr val="E6194D"/>
-                </a:solidFill>
-                <a:latin typeface="Calibri"/>
-                <a:ea typeface="Calibri"/>
-                <a:cs typeface="Calibri"/>
-              </a:rPr>
-              <a:t>Script package</a:t>
-            </a:r>
-          </a:p>
-        </p:txBody>
-      </p:sp>
-      <p:sp>
-        <p:nvSpPr>
-          <p:cNvPr id="14" name="Rounded Rectangle 13"/>
+          <a:bodyPr rtlCol="0" anchor="t" wrap="square" lIns="109728" rIns="109728" tIns="91440" bIns="73152"/>
+          <a:lstStyle/>
+          <a:p>
+            <a:pPr algn="l">
+              <a:lnSpc>
+                <a:spcPct val="110000"/>
+              </a:lnSpc>
+              <a:spcBef>
+                <a:spcPts val="0"/>
+              </a:spcBef>
+              <a:spcAft>
+                <a:spcPts val="600"/>
+              </a:spcAft>
+            </a:pPr>
+            <a:r>
+              <a:rPr sz="1200" b="1">
+                <a:solidFill>
+                  <a:srgbClr val="FFFFFF"/>
+                </a:solidFill>
+                <a:latin typeface="Calibri"/>
+                <a:ea typeface="Calibri"/>
+                <a:cs typeface="Calibri"/>
+              </a:rPr>
+              <a:t>Director Agent</a:t>
+            </a:r>
+          </a:p>
+          <a:p>
+            <a:pPr algn="l">
+              <a:lnSpc>
+                <a:spcPct val="110000"/>
+              </a:lnSpc>
+              <a:spcBef>
+                <a:spcPts val="0"/>
+              </a:spcBef>
+              <a:spcAft>
+                <a:spcPts val="0"/>
+              </a:spcAft>
+            </a:pPr>
+            <a:r>
+              <a:rPr sz="1100" b="0">
+                <a:solidFill>
+                  <a:srgbClr val="A1A1AA"/>
+                </a:solidFill>
+                <a:latin typeface="Calibri"/>
+                <a:ea typeface="Calibri"/>
+                <a:cs typeface="Calibri"/>
+              </a:rPr>
+              <a:t>Plans visual shots / lookbook — performance-aware scene direction.</a:t>
+            </a:r>
+          </a:p>
+        </p:txBody>
+      </p:sp>
+      <p:sp>
+        <p:nvSpPr>
+          <p:cNvPr id="16" name="Rectangle 15"/>
           <p:cNvSpPr/>
           <p:nvPr/>
         </p:nvSpPr>
         <p:spPr>
           <a:xfrm>
-            <a:off x="5852160" y="3054096"/>
-            <a:ext cx="5669280" cy="621792"/>
+            <a:off x="4434840" y="3630168"/>
+            <a:ext cx="73152" cy="1783080"/>
+          </a:xfrm>
+          <a:prstGeom prst="rect">
+            <a:avLst/>
+          </a:prstGeom>
+          <a:solidFill>
+            <a:srgbClr val="E6194D"/>
+          </a:solidFill>
+          <a:ln>
+            <a:noFill/>
+          </a:ln>
+        </p:spPr>
+        <p:style>
+          <a:lnRef idx="1">
+            <a:schemeClr val="accent1"/>
+          </a:lnRef>
+          <a:fillRef idx="3">
+            <a:schemeClr val="accent1"/>
+          </a:fillRef>
+          <a:effectRef idx="2">
+            <a:schemeClr val="accent1"/>
+          </a:effectRef>
+          <a:fontRef idx="minor">
+            <a:schemeClr val="lt1"/>
+          </a:fontRef>
+        </p:style>
+        <p:txBody>
+          <a:bodyPr rtlCol="0" anchor="ctr"/>
+          <a:lstStyle/>
+          <a:p>
+            <a:pPr algn="ctr"/>
+          </a:p>
+        </p:txBody>
+      </p:sp>
+      <p:sp>
+        <p:nvSpPr>
+          <p:cNvPr id="17" name="Rounded Rectangle 16"/>
+          <p:cNvSpPr/>
+          <p:nvPr/>
+        </p:nvSpPr>
+        <p:spPr>
+          <a:xfrm>
+            <a:off x="4507992" y="3630168"/>
+            <a:ext cx="3401568" cy="1783080"/>
           </a:xfrm>
           <a:prstGeom prst="roundRect">
             <a:avLst>
@@ -10103,8 +9357,32 @@
           </a:fontRef>
         </p:style>
         <p:txBody>
-          <a:bodyPr rtlCol="0" anchor="t" wrap="square" lIns="128016" rIns="109728" tIns="91440" bIns="73152"/>
-          <a:lstStyle/>
+          <a:bodyPr rtlCol="0" anchor="t" wrap="square" lIns="109728" rIns="109728" tIns="91440" bIns="73152"/>
+          <a:lstStyle/>
+          <a:p>
+            <a:pPr algn="l">
+              <a:lnSpc>
+                <a:spcPct val="110000"/>
+              </a:lnSpc>
+              <a:spcBef>
+                <a:spcPts val="0"/>
+              </a:spcBef>
+              <a:spcAft>
+                <a:spcPts val="600"/>
+              </a:spcAft>
+            </a:pPr>
+            <a:r>
+              <a:rPr sz="1200" b="1">
+                <a:solidFill>
+                  <a:srgbClr val="FFFFFF"/>
+                </a:solidFill>
+                <a:latin typeface="Calibri"/>
+                <a:ea typeface="Calibri"/>
+                <a:cs typeface="Calibri"/>
+              </a:rPr>
+              <a:t>Voice Agent</a:t>
+            </a:r>
+          </a:p>
           <a:p>
             <a:pPr algn="l">
               <a:lnSpc>
@@ -10126,34 +9404,30 @@
                 <a:ea typeface="Calibri"/>
                 <a:cs typeface="Calibri"/>
               </a:rPr>
-              <a:t>Narration config + multi-part screenplay + cliffs</a:t>
-            </a:r>
-          </a:p>
-        </p:txBody>
-      </p:sp>
-      <p:sp>
-        <p:nvSpPr>
-          <p:cNvPr id="15" name="Rounded Rectangle 14"/>
+              <a:t>Casts library voices and renders TTS + SFX beds (ElevenLabs / Sarvam).</a:t>
+            </a:r>
+          </a:p>
+        </p:txBody>
+      </p:sp>
+      <p:sp>
+        <p:nvSpPr>
+          <p:cNvPr id="18" name="Rectangle 17"/>
           <p:cNvSpPr/>
           <p:nvPr/>
         </p:nvSpPr>
         <p:spPr>
           <a:xfrm>
-            <a:off x="640080" y="3749040"/>
-            <a:ext cx="2834640" cy="621792"/>
-          </a:xfrm>
-          <a:prstGeom prst="roundRect">
-            <a:avLst>
-              <a:gd name="adj" fmla="val 5000"/>
-            </a:avLst>
+            <a:off x="8092440" y="3630168"/>
+            <a:ext cx="73152" cy="1783080"/>
+          </a:xfrm>
+          <a:prstGeom prst="rect">
+            <a:avLst/>
           </a:prstGeom>
           <a:solidFill>
-            <a:srgbClr val="22222C"/>
+            <a:srgbClr val="E6194D"/>
           </a:solidFill>
-          <a:ln w="12700">
-            <a:solidFill>
-              <a:srgbClr val="2E2E38"/>
-            </a:solidFill>
+          <a:ln>
+            <a:noFill/>
           </a:ln>
         </p:spPr>
         <p:style>
@@ -10171,44 +9445,23 @@
           </a:fontRef>
         </p:style>
         <p:txBody>
-          <a:bodyPr rtlCol="0" anchor="t" wrap="square" lIns="128016" rIns="109728" tIns="91440" bIns="73152"/>
-          <a:lstStyle/>
-          <a:p>
-            <a:pPr algn="l">
-              <a:lnSpc>
-                <a:spcPct val="110000"/>
-              </a:lnSpc>
-              <a:spcBef>
-                <a:spcPts val="0"/>
-              </a:spcBef>
-              <a:spcAft>
-                <a:spcPts val="0"/>
-              </a:spcAft>
-            </a:pPr>
-            <a:r>
-              <a:rPr sz="1200" b="1">
-                <a:solidFill>
-                  <a:srgbClr val="FFFFFF"/>
-                </a:solidFill>
-                <a:latin typeface="Calibri"/>
-                <a:ea typeface="Calibri"/>
-                <a:cs typeface="Calibri"/>
-              </a:rPr>
-              <a:t>Voice</a:t>
-            </a:r>
-          </a:p>
-        </p:txBody>
-      </p:sp>
-      <p:sp>
-        <p:nvSpPr>
-          <p:cNvPr id="16" name="Rounded Rectangle 15"/>
+          <a:bodyPr rtlCol="0" anchor="ctr"/>
+          <a:lstStyle/>
+          <a:p>
+            <a:pPr algn="ctr"/>
+          </a:p>
+        </p:txBody>
+      </p:sp>
+      <p:sp>
+        <p:nvSpPr>
+          <p:cNvPr id="19" name="Rounded Rectangle 18"/>
           <p:cNvSpPr/>
           <p:nvPr/>
         </p:nvSpPr>
         <p:spPr>
           <a:xfrm>
-            <a:off x="3566160" y="3749040"/>
-            <a:ext cx="2194560" cy="621792"/>
+            <a:off x="8165592" y="3630168"/>
+            <a:ext cx="3401568" cy="1783080"/>
           </a:xfrm>
           <a:prstGeom prst="roundRect">
             <a:avLst>
@@ -10239,76 +9492,32 @@
           </a:fontRef>
         </p:style>
         <p:txBody>
-          <a:bodyPr rtlCol="0" anchor="t" wrap="square" lIns="128016" rIns="109728" tIns="91440" bIns="73152"/>
-          <a:lstStyle/>
-          <a:p>
-            <a:pPr algn="l">
-              <a:lnSpc>
-                <a:spcPct val="110000"/>
-              </a:lnSpc>
-              <a:spcBef>
-                <a:spcPts val="0"/>
-              </a:spcBef>
-              <a:spcAft>
-                <a:spcPts val="0"/>
-              </a:spcAft>
-            </a:pPr>
-            <a:r>
-              <a:rPr sz="1100" b="1">
-                <a:solidFill>
-                  <a:srgbClr val="E6194D"/>
-                </a:solidFill>
-                <a:latin typeface="Calibri"/>
-                <a:ea typeface="Calibri"/>
-                <a:cs typeface="Calibri"/>
-              </a:rPr>
-              <a:t>Audio stems</a:t>
-            </a:r>
-          </a:p>
-        </p:txBody>
-      </p:sp>
-      <p:sp>
-        <p:nvSpPr>
-          <p:cNvPr id="17" name="Rounded Rectangle 16"/>
-          <p:cNvSpPr/>
-          <p:nvPr/>
-        </p:nvSpPr>
-        <p:spPr>
-          <a:xfrm>
-            <a:off x="5852160" y="3749040"/>
-            <a:ext cx="5669280" cy="621792"/>
-          </a:xfrm>
-          <a:prstGeom prst="roundRect">
-            <a:avLst>
-              <a:gd name="adj" fmla="val 5000"/>
-            </a:avLst>
-          </a:prstGeom>
-          <a:solidFill>
-            <a:srgbClr val="18181F"/>
-          </a:solidFill>
-          <a:ln w="12700">
-            <a:solidFill>
-              <a:srgbClr val="2E2E38"/>
-            </a:solidFill>
-          </a:ln>
-        </p:spPr>
-        <p:style>
-          <a:lnRef idx="1">
-            <a:schemeClr val="accent1"/>
-          </a:lnRef>
-          <a:fillRef idx="3">
-            <a:schemeClr val="accent1"/>
-          </a:fillRef>
-          <a:effectRef idx="2">
-            <a:schemeClr val="accent1"/>
-          </a:effectRef>
-          <a:fontRef idx="minor">
-            <a:schemeClr val="lt1"/>
-          </a:fontRef>
-        </p:style>
-        <p:txBody>
-          <a:bodyPr rtlCol="0" anchor="t" wrap="square" lIns="128016" rIns="109728" tIns="91440" bIns="73152"/>
-          <a:lstStyle/>
+          <a:bodyPr rtlCol="0" anchor="t" wrap="square" lIns="109728" rIns="109728" tIns="91440" bIns="73152"/>
+          <a:lstStyle/>
+          <a:p>
+            <a:pPr algn="l">
+              <a:lnSpc>
+                <a:spcPct val="110000"/>
+              </a:lnSpc>
+              <a:spcBef>
+                <a:spcPts val="0"/>
+              </a:spcBef>
+              <a:spcAft>
+                <a:spcPts val="600"/>
+              </a:spcAft>
+            </a:pPr>
+            <a:r>
+              <a:rPr sz="1200" b="1">
+                <a:solidFill>
+                  <a:srgbClr val="FFFFFF"/>
+                </a:solidFill>
+                <a:latin typeface="Calibri"/>
+                <a:ea typeface="Calibri"/>
+                <a:cs typeface="Calibri"/>
+              </a:rPr>
+              <a:t>Image Agent</a:t>
+            </a:r>
+          </a:p>
           <a:p>
             <a:pPr algn="l">
               <a:lnSpc>
@@ -10330,422 +9539,14 @@
                 <a:ea typeface="Calibri"/>
                 <a:cs typeface="Calibri"/>
               </a:rPr>
-              <a:t>Cast match (Vector Search) · TTS · SFX mix</a:t>
-            </a:r>
-          </a:p>
-        </p:txBody>
-      </p:sp>
-      <p:sp>
-        <p:nvSpPr>
-          <p:cNvPr id="18" name="Rounded Rectangle 17"/>
-          <p:cNvSpPr/>
-          <p:nvPr/>
-        </p:nvSpPr>
-        <p:spPr>
-          <a:xfrm>
-            <a:off x="640080" y="4443984"/>
-            <a:ext cx="2834640" cy="621792"/>
-          </a:xfrm>
-          <a:prstGeom prst="roundRect">
-            <a:avLst>
-              <a:gd name="adj" fmla="val 5000"/>
-            </a:avLst>
-          </a:prstGeom>
-          <a:solidFill>
-            <a:srgbClr val="22222C"/>
-          </a:solidFill>
-          <a:ln w="12700">
-            <a:solidFill>
-              <a:srgbClr val="2E2E38"/>
-            </a:solidFill>
-          </a:ln>
-        </p:spPr>
-        <p:style>
-          <a:lnRef idx="1">
-            <a:schemeClr val="accent1"/>
-          </a:lnRef>
-          <a:fillRef idx="3">
-            <a:schemeClr val="accent1"/>
-          </a:fillRef>
-          <a:effectRef idx="2">
-            <a:schemeClr val="accent1"/>
-          </a:effectRef>
-          <a:fontRef idx="minor">
-            <a:schemeClr val="lt1"/>
-          </a:fontRef>
-        </p:style>
-        <p:txBody>
-          <a:bodyPr rtlCol="0" anchor="t" wrap="square" lIns="128016" rIns="109728" tIns="91440" bIns="73152"/>
-          <a:lstStyle/>
-          <a:p>
-            <a:pPr algn="l">
-              <a:lnSpc>
-                <a:spcPct val="110000"/>
-              </a:lnSpc>
-              <a:spcBef>
-                <a:spcPts val="0"/>
-              </a:spcBef>
-              <a:spcAft>
-                <a:spcPts val="0"/>
-              </a:spcAft>
-            </a:pPr>
-            <a:r>
-              <a:rPr sz="1200" b="1">
-                <a:solidFill>
-                  <a:srgbClr val="FFFFFF"/>
-                </a:solidFill>
-                <a:latin typeface="Calibri"/>
-                <a:ea typeface="Calibri"/>
-                <a:cs typeface="Calibri"/>
-              </a:rPr>
-              <a:t>Director + Image</a:t>
-            </a:r>
-          </a:p>
-        </p:txBody>
-      </p:sp>
-      <p:sp>
-        <p:nvSpPr>
-          <p:cNvPr id="19" name="Rounded Rectangle 18"/>
-          <p:cNvSpPr/>
-          <p:nvPr/>
-        </p:nvSpPr>
-        <p:spPr>
-          <a:xfrm>
-            <a:off x="3566160" y="4443984"/>
-            <a:ext cx="2194560" cy="621792"/>
-          </a:xfrm>
-          <a:prstGeom prst="roundRect">
-            <a:avLst>
-              <a:gd name="adj" fmla="val 5000"/>
-            </a:avLst>
-          </a:prstGeom>
-          <a:solidFill>
-            <a:srgbClr val="18181F"/>
-          </a:solidFill>
-          <a:ln w="12700">
-            <a:solidFill>
-              <a:srgbClr val="2E2E38"/>
-            </a:solidFill>
-          </a:ln>
-        </p:spPr>
-        <p:style>
-          <a:lnRef idx="1">
-            <a:schemeClr val="accent1"/>
-          </a:lnRef>
-          <a:fillRef idx="3">
-            <a:schemeClr val="accent1"/>
-          </a:fillRef>
-          <a:effectRef idx="2">
-            <a:schemeClr val="accent1"/>
-          </a:effectRef>
-          <a:fontRef idx="minor">
-            <a:schemeClr val="lt1"/>
-          </a:fontRef>
-        </p:style>
-        <p:txBody>
-          <a:bodyPr rtlCol="0" anchor="t" wrap="square" lIns="128016" rIns="109728" tIns="91440" bIns="73152"/>
-          <a:lstStyle/>
-          <a:p>
-            <a:pPr algn="l">
-              <a:lnSpc>
-                <a:spcPct val="110000"/>
-              </a:lnSpc>
-              <a:spcBef>
-                <a:spcPts val="0"/>
-              </a:spcBef>
-              <a:spcAft>
-                <a:spcPts val="0"/>
-              </a:spcAft>
-            </a:pPr>
-            <a:r>
-              <a:rPr sz="1100" b="1">
-                <a:solidFill>
-                  <a:srgbClr val="E6194D"/>
-                </a:solidFill>
-                <a:latin typeface="Calibri"/>
-                <a:ea typeface="Calibri"/>
-                <a:cs typeface="Calibri"/>
-              </a:rPr>
-              <a:t>Visual track</a:t>
-            </a:r>
-          </a:p>
-        </p:txBody>
-      </p:sp>
-      <p:sp>
-        <p:nvSpPr>
-          <p:cNvPr id="20" name="Rounded Rectangle 19"/>
-          <p:cNvSpPr/>
-          <p:nvPr/>
-        </p:nvSpPr>
-        <p:spPr>
-          <a:xfrm>
-            <a:off x="5852160" y="4443984"/>
-            <a:ext cx="5669280" cy="621792"/>
-          </a:xfrm>
-          <a:prstGeom prst="roundRect">
-            <a:avLst>
-              <a:gd name="adj" fmla="val 5000"/>
-            </a:avLst>
-          </a:prstGeom>
-          <a:solidFill>
-            <a:srgbClr val="18181F"/>
-          </a:solidFill>
-          <a:ln w="12700">
-            <a:solidFill>
-              <a:srgbClr val="2E2E38"/>
-            </a:solidFill>
-          </a:ln>
-        </p:spPr>
-        <p:style>
-          <a:lnRef idx="1">
-            <a:schemeClr val="accent1"/>
-          </a:lnRef>
-          <a:fillRef idx="3">
-            <a:schemeClr val="accent1"/>
-          </a:fillRef>
-          <a:effectRef idx="2">
-            <a:schemeClr val="accent1"/>
-          </a:effectRef>
-          <a:fontRef idx="minor">
-            <a:schemeClr val="lt1"/>
-          </a:fontRef>
-        </p:style>
-        <p:txBody>
-          <a:bodyPr rtlCol="0" anchor="t" wrap="square" lIns="128016" rIns="109728" tIns="91440" bIns="73152"/>
-          <a:lstStyle/>
-          <a:p>
-            <a:pPr algn="l">
-              <a:lnSpc>
-                <a:spcPct val="110000"/>
-              </a:lnSpc>
-              <a:spcBef>
-                <a:spcPts val="0"/>
-              </a:spcBef>
-              <a:spcAft>
-                <a:spcPts val="0"/>
-              </a:spcAft>
-            </a:pPr>
-            <a:r>
-              <a:rPr sz="1100" b="0">
-                <a:solidFill>
-                  <a:srgbClr val="A1A1AA"/>
-                </a:solidFill>
-                <a:latin typeface="Calibri"/>
-                <a:ea typeface="Calibri"/>
-                <a:cs typeface="Calibri"/>
-              </a:rPr>
-              <a:t>Shot plan · lookbook · stills · cover art</a:t>
-            </a:r>
-          </a:p>
-        </p:txBody>
-      </p:sp>
-      <p:sp>
-        <p:nvSpPr>
-          <p:cNvPr id="21" name="Rounded Rectangle 20"/>
-          <p:cNvSpPr/>
-          <p:nvPr/>
-        </p:nvSpPr>
-        <p:spPr>
-          <a:xfrm>
-            <a:off x="640080" y="5138928"/>
-            <a:ext cx="2834640" cy="621792"/>
-          </a:xfrm>
-          <a:prstGeom prst="roundRect">
-            <a:avLst>
-              <a:gd name="adj" fmla="val 5000"/>
-            </a:avLst>
-          </a:prstGeom>
-          <a:solidFill>
-            <a:srgbClr val="22222C"/>
-          </a:solidFill>
-          <a:ln w="12700">
-            <a:solidFill>
-              <a:srgbClr val="2E2E38"/>
-            </a:solidFill>
-          </a:ln>
-        </p:spPr>
-        <p:style>
-          <a:lnRef idx="1">
-            <a:schemeClr val="accent1"/>
-          </a:lnRef>
-          <a:fillRef idx="3">
-            <a:schemeClr val="accent1"/>
-          </a:fillRef>
-          <a:effectRef idx="2">
-            <a:schemeClr val="accent1"/>
-          </a:effectRef>
-          <a:fontRef idx="minor">
-            <a:schemeClr val="lt1"/>
-          </a:fontRef>
-        </p:style>
-        <p:txBody>
-          <a:bodyPr rtlCol="0" anchor="t" wrap="square" lIns="128016" rIns="109728" tIns="91440" bIns="73152"/>
-          <a:lstStyle/>
-          <a:p>
-            <a:pPr algn="l">
-              <a:lnSpc>
-                <a:spcPct val="110000"/>
-              </a:lnSpc>
-              <a:spcBef>
-                <a:spcPts val="0"/>
-              </a:spcBef>
-              <a:spcAft>
-                <a:spcPts val="0"/>
-              </a:spcAft>
-            </a:pPr>
-            <a:r>
-              <a:rPr sz="1200" b="1">
-                <a:solidFill>
-                  <a:srgbClr val="FFFFFF"/>
-                </a:solidFill>
-                <a:latin typeface="Calibri"/>
-                <a:ea typeface="Calibri"/>
-                <a:cs typeface="Calibri"/>
-              </a:rPr>
-              <a:t>Human + Audience Sim</a:t>
-            </a:r>
-          </a:p>
-        </p:txBody>
-      </p:sp>
-      <p:sp>
-        <p:nvSpPr>
-          <p:cNvPr id="22" name="Rounded Rectangle 21"/>
-          <p:cNvSpPr/>
-          <p:nvPr/>
-        </p:nvSpPr>
-        <p:spPr>
-          <a:xfrm>
-            <a:off x="3566160" y="5138928"/>
-            <a:ext cx="2194560" cy="621792"/>
-          </a:xfrm>
-          <a:prstGeom prst="roundRect">
-            <a:avLst>
-              <a:gd name="adj" fmla="val 5000"/>
-            </a:avLst>
-          </a:prstGeom>
-          <a:solidFill>
-            <a:srgbClr val="18181F"/>
-          </a:solidFill>
-          <a:ln w="12700">
-            <a:solidFill>
-              <a:srgbClr val="2E2E38"/>
-            </a:solidFill>
-          </a:ln>
-        </p:spPr>
-        <p:style>
-          <a:lnRef idx="1">
-            <a:schemeClr val="accent1"/>
-          </a:lnRef>
-          <a:fillRef idx="3">
-            <a:schemeClr val="accent1"/>
-          </a:fillRef>
-          <a:effectRef idx="2">
-            <a:schemeClr val="accent1"/>
-          </a:effectRef>
-          <a:fontRef idx="minor">
-            <a:schemeClr val="lt1"/>
-          </a:fontRef>
-        </p:style>
-        <p:txBody>
-          <a:bodyPr rtlCol="0" anchor="t" wrap="square" lIns="128016" rIns="109728" tIns="91440" bIns="73152"/>
-          <a:lstStyle/>
-          <a:p>
-            <a:pPr algn="l">
-              <a:lnSpc>
-                <a:spcPct val="110000"/>
-              </a:lnSpc>
-              <a:spcBef>
-                <a:spcPts val="0"/>
-              </a:spcBef>
-              <a:spcAft>
-                <a:spcPts val="0"/>
-              </a:spcAft>
-            </a:pPr>
-            <a:r>
-              <a:rPr sz="1100" b="1">
-                <a:solidFill>
-                  <a:srgbClr val="E6194D"/>
-                </a:solidFill>
-                <a:latin typeface="Calibri"/>
-                <a:ea typeface="Calibri"/>
-                <a:cs typeface="Calibri"/>
-              </a:rPr>
-              <a:t>Quality gate</a:t>
-            </a:r>
-          </a:p>
-        </p:txBody>
-      </p:sp>
-      <p:sp>
-        <p:nvSpPr>
-          <p:cNvPr id="23" name="Rounded Rectangle 22"/>
-          <p:cNvSpPr/>
-          <p:nvPr/>
-        </p:nvSpPr>
-        <p:spPr>
-          <a:xfrm>
-            <a:off x="5852160" y="5138928"/>
-            <a:ext cx="5669280" cy="621792"/>
-          </a:xfrm>
-          <a:prstGeom prst="roundRect">
-            <a:avLst>
-              <a:gd name="adj" fmla="val 5000"/>
-            </a:avLst>
-          </a:prstGeom>
-          <a:solidFill>
-            <a:srgbClr val="18181F"/>
-          </a:solidFill>
-          <a:ln w="12700">
-            <a:solidFill>
-              <a:srgbClr val="2E2E38"/>
-            </a:solidFill>
-          </a:ln>
-        </p:spPr>
-        <p:style>
-          <a:lnRef idx="1">
-            <a:schemeClr val="accent1"/>
-          </a:lnRef>
-          <a:fillRef idx="3">
-            <a:schemeClr val="accent1"/>
-          </a:fillRef>
-          <a:effectRef idx="2">
-            <a:schemeClr val="accent1"/>
-          </a:effectRef>
-          <a:fontRef idx="minor">
-            <a:schemeClr val="lt1"/>
-          </a:fontRef>
-        </p:style>
-        <p:txBody>
-          <a:bodyPr rtlCol="0" anchor="t" wrap="square" lIns="128016" rIns="109728" tIns="91440" bIns="73152"/>
-          <a:lstStyle/>
-          <a:p>
-            <a:pPr algn="l">
-              <a:lnSpc>
-                <a:spcPct val="110000"/>
-              </a:lnSpc>
-              <a:spcBef>
-                <a:spcPts val="0"/>
-              </a:spcBef>
-              <a:spcAft>
-                <a:spcPts val="0"/>
-              </a:spcAft>
-            </a:pPr>
-            <a:r>
-              <a:rPr sz="1100" b="0">
-                <a:solidFill>
-                  <a:srgbClr val="A1A1AA"/>
-                </a:solidFill>
-                <a:latin typeface="Calibri"/>
-                <a:ea typeface="Calibri"/>
-                <a:cs typeface="Calibri"/>
-              </a:rPr>
-              <a:t>Approve stages · listen in editor · apply patches</a:t>
-            </a:r>
-          </a:p>
-        </p:txBody>
-      </p:sp>
-      <p:sp>
-        <p:nvSpPr>
-          <p:cNvPr id="24" name="TextBox 23"/>
+              <a:t>Generates companion stills, cover art, and visual track assets.</a:t>
+            </a:r>
+          </a:p>
+        </p:txBody>
+      </p:sp>
+      <p:sp>
+        <p:nvSpPr>
+          <p:cNvPr id="20" name="TextBox 19"/>
           <p:cNvSpPr txBox="1"/>
           <p:nvPr/>
         </p:nvSpPr>
@@ -10790,7 +9591,7 @@
       </p:sp>
       <p:sp>
         <p:nvSpPr>
-          <p:cNvPr id="25" name="TextBox 24"/>
+          <p:cNvPr id="21" name="TextBox 20"/>
           <p:cNvSpPr txBox="1"/>
           <p:nvPr/>
         </p:nvSpPr>
@@ -10828,7 +9629,7 @@
                 <a:ea typeface="Calibri"/>
                 <a:cs typeface="Calibri"/>
               </a:rPr>
-              <a:t>07 / 08</a:t>
+              <a:t>07 / 09</a:t>
             </a:r>
           </a:p>
         </p:txBody>
@@ -10867,8 +9668,8 @@
         </p:nvSpPr>
         <p:spPr>
           <a:xfrm>
-            <a:off x="0" y="0"/>
-            <a:ext cx="109728" cy="6858000"/>
+            <a:off x="640080" y="329184"/>
+            <a:ext cx="329184" cy="54864"/>
           </a:xfrm>
           <a:prstGeom prst="rect">
             <a:avLst/>
@@ -10910,8 +9711,8 @@
         </p:nvSpPr>
         <p:spPr>
           <a:xfrm>
-            <a:off x="640080" y="1234440"/>
-            <a:ext cx="10908792" cy="237744"/>
+            <a:off x="640080" y="457200"/>
+            <a:ext cx="10908792" cy="201168"/>
           </a:xfrm>
           <a:prstGeom prst="rect">
             <a:avLst/>
@@ -10934,7 +9735,7 @@
               </a:spcAft>
             </a:pPr>
             <a:r>
-              <a:rPr sz="1200" b="1">
+              <a:rPr sz="1100" b="1">
                 <a:solidFill>
                   <a:srgbClr val="E6194D"/>
                 </a:solidFill>
@@ -10942,7 +9743,7 @@
                 <a:ea typeface="Calibri"/>
                 <a:cs typeface="Calibri"/>
               </a:rPr>
-              <a:t>THANK YOU</a:t>
+              <a:t>07  AGENT HANDOFF</a:t>
             </a:r>
           </a:p>
         </p:txBody>
@@ -10955,8 +9756,8 @@
         </p:nvSpPr>
         <p:spPr>
           <a:xfrm>
-            <a:off x="640080" y="1691640"/>
-            <a:ext cx="10908792" cy="640080"/>
+            <a:off x="640080" y="694944"/>
+            <a:ext cx="10908792" cy="347472"/>
           </a:xfrm>
           <a:prstGeom prst="rect">
             <a:avLst/>
@@ -10979,7 +9780,7 @@
               </a:spcAft>
             </a:pPr>
             <a:r>
-              <a:rPr sz="4600" b="1">
+              <a:rPr sz="2200" b="1">
                 <a:solidFill>
                   <a:srgbClr val="FFFFFF"/>
                 </a:solidFill>
@@ -10987,7 +9788,7 @@
                 <a:ea typeface="Calibri"/>
                 <a:cs typeface="Calibri"/>
               </a:rPr>
-              <a:t>Kahani</a:t>
+              <a:t>Who does what in sequence</a:t>
             </a:r>
           </a:p>
         </p:txBody>
@@ -11000,8 +9801,8 @@
         </p:nvSpPr>
         <p:spPr>
           <a:xfrm>
-            <a:off x="640080" y="2423160"/>
-            <a:ext cx="10058400" cy="502920"/>
+            <a:off x="640080" y="1097280"/>
+            <a:ext cx="10908792" cy="365760"/>
           </a:xfrm>
           <a:prstGeom prst="rect">
             <a:avLst/>
@@ -11024,7 +9825,7 @@
               </a:spcAft>
             </a:pPr>
             <a:r>
-              <a:rPr sz="1500" b="0">
+              <a:rPr sz="1200" b="0">
                 <a:solidFill>
                   <a:srgbClr val="A1A1AA"/>
                 </a:solidFill>
@@ -11032,7 +9833,7 @@
                 <a:ea typeface="Calibri"/>
                 <a:cs typeface="Calibri"/>
               </a:rPr>
-              <a:t>Seven agents. One timeline. Human publish. Built for Pocket FM–scale serial production.</a:t>
+              <a:t>Search grounds truth → writers lock story → voice &amp; image produce → humans decide.</a:t>
             </a:r>
           </a:p>
         </p:txBody>
@@ -11045,8 +9846,76 @@
         </p:nvSpPr>
         <p:spPr>
           <a:xfrm>
-            <a:off x="640080" y="3383280"/>
-            <a:ext cx="3474720" cy="1234440"/>
+            <a:off x="640080" y="1664208"/>
+            <a:ext cx="2834640" cy="621792"/>
+          </a:xfrm>
+          <a:prstGeom prst="roundRect">
+            <a:avLst>
+              <a:gd name="adj" fmla="val 5000"/>
+            </a:avLst>
+          </a:prstGeom>
+          <a:solidFill>
+            <a:srgbClr val="22222C"/>
+          </a:solidFill>
+          <a:ln w="12700">
+            <a:solidFill>
+              <a:srgbClr val="2E2E38"/>
+            </a:solidFill>
+          </a:ln>
+        </p:spPr>
+        <p:style>
+          <a:lnRef idx="1">
+            <a:schemeClr val="accent1"/>
+          </a:lnRef>
+          <a:fillRef idx="3">
+            <a:schemeClr val="accent1"/>
+          </a:fillRef>
+          <a:effectRef idx="2">
+            <a:schemeClr val="accent1"/>
+          </a:effectRef>
+          <a:fontRef idx="minor">
+            <a:schemeClr val="lt1"/>
+          </a:fontRef>
+        </p:style>
+        <p:txBody>
+          <a:bodyPr rtlCol="0" anchor="t" wrap="square" lIns="128016" rIns="109728" tIns="91440" bIns="73152"/>
+          <a:lstStyle/>
+          <a:p>
+            <a:pPr algn="l">
+              <a:lnSpc>
+                <a:spcPct val="110000"/>
+              </a:lnSpc>
+              <a:spcBef>
+                <a:spcPts val="0"/>
+              </a:spcBef>
+              <a:spcAft>
+                <a:spcPts val="0"/>
+              </a:spcAft>
+            </a:pPr>
+            <a:r>
+              <a:rPr sz="1200" b="1">
+                <a:solidFill>
+                  <a:srgbClr val="FFFFFF"/>
+                </a:solidFill>
+                <a:latin typeface="Calibri"/>
+                <a:ea typeface="Calibri"/>
+                <a:cs typeface="Calibri"/>
+              </a:rPr>
+              <a:t>Storytelling</a:t>
+            </a:r>
+          </a:p>
+        </p:txBody>
+      </p:sp>
+      <p:sp>
+        <p:nvSpPr>
+          <p:cNvPr id="7" name="Rounded Rectangle 6"/>
+          <p:cNvSpPr/>
+          <p:nvPr/>
+        </p:nvSpPr>
+        <p:spPr>
+          <a:xfrm>
+            <a:off x="3566160" y="1664208"/>
+            <a:ext cx="2194560" cy="621792"/>
           </a:xfrm>
           <a:prstGeom prst="roundRect">
             <a:avLst>
@@ -11088,7 +9957,7 @@
                 <a:spcPts val="0"/>
               </a:spcBef>
               <a:spcAft>
-                <a:spcPts val="600"/>
+                <a:spcPts val="0"/>
               </a:spcAft>
             </a:pPr>
             <a:r>
@@ -11100,45 +9969,21 @@
                 <a:ea typeface="Calibri"/>
                 <a:cs typeface="Calibri"/>
               </a:rPr>
-              <a:t>ASK</a:t>
-            </a:r>
-          </a:p>
-          <a:p>
-            <a:pPr algn="l">
-              <a:lnSpc>
-                <a:spcPct val="110000"/>
-              </a:lnSpc>
-              <a:spcBef>
-                <a:spcPts val="0"/>
-              </a:spcBef>
-              <a:spcAft>
-                <a:spcPts val="0"/>
-              </a:spcAft>
-            </a:pPr>
-            <a:r>
-              <a:rPr sz="1300" b="1">
-                <a:solidFill>
-                  <a:srgbClr val="FFFFFF"/>
-                </a:solidFill>
-                <a:latin typeface="Calibri"/>
-                <a:ea typeface="Calibri"/>
-                <a:cs typeface="Calibri"/>
-              </a:rPr>
-              <a:t>Pilot with a Pocket FM–style content pod</a:t>
-            </a:r>
-          </a:p>
-        </p:txBody>
-      </p:sp>
-      <p:sp>
-        <p:nvSpPr>
-          <p:cNvPr id="7" name="Rounded Rectangle 6"/>
+              <a:t>Chat director</a:t>
+            </a:r>
+          </a:p>
+        </p:txBody>
+      </p:sp>
+      <p:sp>
+        <p:nvSpPr>
+          <p:cNvPr id="8" name="Rounded Rectangle 7"/>
           <p:cNvSpPr/>
           <p:nvPr/>
         </p:nvSpPr>
         <p:spPr>
           <a:xfrm>
-            <a:off x="4297680" y="3383280"/>
-            <a:ext cx="3474720" cy="1234440"/>
+            <a:off x="5852160" y="1664208"/>
+            <a:ext cx="5669280" cy="621792"/>
           </a:xfrm>
           <a:prstGeom prst="roundRect">
             <a:avLst>
@@ -11180,35 +10025,79 @@
                 <a:spcPts val="0"/>
               </a:spcBef>
               <a:spcAft>
-                <a:spcPts val="600"/>
-              </a:spcAft>
-            </a:pPr>
-            <a:r>
-              <a:rPr sz="1100" b="1">
-                <a:solidFill>
-                  <a:srgbClr val="E6194D"/>
-                </a:solidFill>
-                <a:latin typeface="Calibri"/>
-                <a:ea typeface="Calibri"/>
-                <a:cs typeface="Calibri"/>
-              </a:rPr>
-              <a:t>PROOF</a:t>
-            </a:r>
-          </a:p>
-          <a:p>
-            <a:pPr algn="l">
-              <a:lnSpc>
-                <a:spcPct val="110000"/>
-              </a:lnSpc>
-              <a:spcBef>
-                <a:spcPts val="0"/>
-              </a:spcBef>
-              <a:spcAft>
-                <a:spcPts val="0"/>
-              </a:spcAft>
-            </a:pPr>
-            <a:r>
-              <a:rPr sz="1300" b="1">
+                <a:spcPts val="0"/>
+              </a:spcAft>
+            </a:pPr>
+            <a:r>
+              <a:rPr sz="1100" b="0">
+                <a:solidFill>
+                  <a:srgbClr val="A1A1AA"/>
+                </a:solidFill>
+                <a:latin typeface="Calibri"/>
+                <a:ea typeface="Calibri"/>
+                <a:cs typeface="Calibri"/>
+              </a:rPr>
+              <a:t>Plot pitches, series intent, route generate / rewrite</a:t>
+            </a:r>
+          </a:p>
+        </p:txBody>
+      </p:sp>
+      <p:sp>
+        <p:nvSpPr>
+          <p:cNvPr id="9" name="Rounded Rectangle 8"/>
+          <p:cNvSpPr/>
+          <p:nvPr/>
+        </p:nvSpPr>
+        <p:spPr>
+          <a:xfrm>
+            <a:off x="640080" y="2359152"/>
+            <a:ext cx="2834640" cy="621792"/>
+          </a:xfrm>
+          <a:prstGeom prst="roundRect">
+            <a:avLst>
+              <a:gd name="adj" fmla="val 5000"/>
+            </a:avLst>
+          </a:prstGeom>
+          <a:solidFill>
+            <a:srgbClr val="22222C"/>
+          </a:solidFill>
+          <a:ln w="12700">
+            <a:solidFill>
+              <a:srgbClr val="2E2E38"/>
+            </a:solidFill>
+          </a:ln>
+        </p:spPr>
+        <p:style>
+          <a:lnRef idx="1">
+            <a:schemeClr val="accent1"/>
+          </a:lnRef>
+          <a:fillRef idx="3">
+            <a:schemeClr val="accent1"/>
+          </a:fillRef>
+          <a:effectRef idx="2">
+            <a:schemeClr val="accent1"/>
+          </a:effectRef>
+          <a:fontRef idx="minor">
+            <a:schemeClr val="lt1"/>
+          </a:fontRef>
+        </p:style>
+        <p:txBody>
+          <a:bodyPr rtlCol="0" anchor="t" wrap="square" lIns="128016" rIns="109728" tIns="91440" bIns="73152"/>
+          <a:lstStyle/>
+          <a:p>
+            <a:pPr algn="l">
+              <a:lnSpc>
+                <a:spcPct val="110000"/>
+              </a:lnSpc>
+              <a:spcBef>
+                <a:spcPts val="0"/>
+              </a:spcBef>
+              <a:spcAft>
+                <a:spcPts val="0"/>
+              </a:spcAft>
+            </a:pPr>
+            <a:r>
+              <a:rPr sz="1200" b="1">
                 <a:solidFill>
                   <a:srgbClr val="FFFFFF"/>
                 </a:solidFill>
@@ -11216,21 +10105,21 @@
                 <a:ea typeface="Calibri"/>
                 <a:cs typeface="Calibri"/>
               </a:rPr>
-              <a:t>Live demo: generate → listen → simulate</a:t>
-            </a:r>
-          </a:p>
-        </p:txBody>
-      </p:sp>
-      <p:sp>
-        <p:nvSpPr>
-          <p:cNvPr id="8" name="Rounded Rectangle 7"/>
+              <a:t>Scripting &amp; Search</a:t>
+            </a:r>
+          </a:p>
+        </p:txBody>
+      </p:sp>
+      <p:sp>
+        <p:nvSpPr>
+          <p:cNvPr id="10" name="Rounded Rectangle 9"/>
           <p:cNvSpPr/>
           <p:nvPr/>
         </p:nvSpPr>
         <p:spPr>
           <a:xfrm>
-            <a:off x="7955280" y="3383280"/>
-            <a:ext cx="3474720" cy="1234440"/>
+            <a:off x="3566160" y="2359152"/>
+            <a:ext cx="2194560" cy="621792"/>
           </a:xfrm>
           <a:prstGeom prst="roundRect">
             <a:avLst>
@@ -11272,6 +10161,1436 @@
                 <a:spcPts val="0"/>
               </a:spcBef>
               <a:spcAft>
+                <a:spcPts val="0"/>
+              </a:spcAft>
+            </a:pPr>
+            <a:r>
+              <a:rPr sz="1100" b="1">
+                <a:solidFill>
+                  <a:srgbClr val="E6194D"/>
+                </a:solidFill>
+                <a:latin typeface="Calibri"/>
+                <a:ea typeface="Calibri"/>
+                <a:cs typeface="Calibri"/>
+              </a:rPr>
+              <a:t>RAG + crawl</a:t>
+            </a:r>
+          </a:p>
+        </p:txBody>
+      </p:sp>
+      <p:sp>
+        <p:nvSpPr>
+          <p:cNvPr id="11" name="Rounded Rectangle 10"/>
+          <p:cNvSpPr/>
+          <p:nvPr/>
+        </p:nvSpPr>
+        <p:spPr>
+          <a:xfrm>
+            <a:off x="5852160" y="2359152"/>
+            <a:ext cx="5669280" cy="621792"/>
+          </a:xfrm>
+          <a:prstGeom prst="roundRect">
+            <a:avLst>
+              <a:gd name="adj" fmla="val 5000"/>
+            </a:avLst>
+          </a:prstGeom>
+          <a:solidFill>
+            <a:srgbClr val="18181F"/>
+          </a:solidFill>
+          <a:ln w="12700">
+            <a:solidFill>
+              <a:srgbClr val="2E2E38"/>
+            </a:solidFill>
+          </a:ln>
+        </p:spPr>
+        <p:style>
+          <a:lnRef idx="1">
+            <a:schemeClr val="accent1"/>
+          </a:lnRef>
+          <a:fillRef idx="3">
+            <a:schemeClr val="accent1"/>
+          </a:fillRef>
+          <a:effectRef idx="2">
+            <a:schemeClr val="accent1"/>
+          </a:effectRef>
+          <a:fontRef idx="minor">
+            <a:schemeClr val="lt1"/>
+          </a:fontRef>
+        </p:style>
+        <p:txBody>
+          <a:bodyPr rtlCol="0" anchor="t" wrap="square" lIns="128016" rIns="109728" tIns="91440" bIns="73152"/>
+          <a:lstStyle/>
+          <a:p>
+            <a:pPr algn="l">
+              <a:lnSpc>
+                <a:spcPct val="110000"/>
+              </a:lnSpc>
+              <a:spcBef>
+                <a:spcPts val="0"/>
+              </a:spcBef>
+              <a:spcAft>
+                <a:spcPts val="0"/>
+              </a:spcAft>
+            </a:pPr>
+            <a:r>
+              <a:rPr sz="1100" b="0">
+                <a:solidFill>
+                  <a:srgbClr val="A1A1AA"/>
+                </a:solidFill>
+                <a:latin typeface="Calibri"/>
+                <a:ea typeface="Calibri"/>
+                <a:cs typeface="Calibri"/>
+              </a:rPr>
+              <a:t>Databricks chunks · Tavily research · SOURCE assembly</a:t>
+            </a:r>
+          </a:p>
+        </p:txBody>
+      </p:sp>
+      <p:sp>
+        <p:nvSpPr>
+          <p:cNvPr id="12" name="Rounded Rectangle 11"/>
+          <p:cNvSpPr/>
+          <p:nvPr/>
+        </p:nvSpPr>
+        <p:spPr>
+          <a:xfrm>
+            <a:off x="640080" y="3054096"/>
+            <a:ext cx="2834640" cy="621792"/>
+          </a:xfrm>
+          <a:prstGeom prst="roundRect">
+            <a:avLst>
+              <a:gd name="adj" fmla="val 5000"/>
+            </a:avLst>
+          </a:prstGeom>
+          <a:solidFill>
+            <a:srgbClr val="22222C"/>
+          </a:solidFill>
+          <a:ln w="12700">
+            <a:solidFill>
+              <a:srgbClr val="2E2E38"/>
+            </a:solidFill>
+          </a:ln>
+        </p:spPr>
+        <p:style>
+          <a:lnRef idx="1">
+            <a:schemeClr val="accent1"/>
+          </a:lnRef>
+          <a:fillRef idx="3">
+            <a:schemeClr val="accent1"/>
+          </a:fillRef>
+          <a:effectRef idx="2">
+            <a:schemeClr val="accent1"/>
+          </a:effectRef>
+          <a:fontRef idx="minor">
+            <a:schemeClr val="lt1"/>
+          </a:fontRef>
+        </p:style>
+        <p:txBody>
+          <a:bodyPr rtlCol="0" anchor="t" wrap="square" lIns="128016" rIns="109728" tIns="91440" bIns="73152"/>
+          <a:lstStyle/>
+          <a:p>
+            <a:pPr algn="l">
+              <a:lnSpc>
+                <a:spcPct val="110000"/>
+              </a:lnSpc>
+              <a:spcBef>
+                <a:spcPts val="0"/>
+              </a:spcBef>
+              <a:spcAft>
+                <a:spcPts val="0"/>
+              </a:spcAft>
+            </a:pPr>
+            <a:r>
+              <a:rPr sz="1200" b="1">
+                <a:solidFill>
+                  <a:srgbClr val="FFFFFF"/>
+                </a:solidFill>
+                <a:latin typeface="Calibri"/>
+                <a:ea typeface="Calibri"/>
+                <a:cs typeface="Calibri"/>
+              </a:rPr>
+              <a:t>Narrative + Script Writer</a:t>
+            </a:r>
+          </a:p>
+        </p:txBody>
+      </p:sp>
+      <p:sp>
+        <p:nvSpPr>
+          <p:cNvPr id="13" name="Rounded Rectangle 12"/>
+          <p:cNvSpPr/>
+          <p:nvPr/>
+        </p:nvSpPr>
+        <p:spPr>
+          <a:xfrm>
+            <a:off x="3566160" y="3054096"/>
+            <a:ext cx="2194560" cy="621792"/>
+          </a:xfrm>
+          <a:prstGeom prst="roundRect">
+            <a:avLst>
+              <a:gd name="adj" fmla="val 5000"/>
+            </a:avLst>
+          </a:prstGeom>
+          <a:solidFill>
+            <a:srgbClr val="18181F"/>
+          </a:solidFill>
+          <a:ln w="12700">
+            <a:solidFill>
+              <a:srgbClr val="2E2E38"/>
+            </a:solidFill>
+          </a:ln>
+        </p:spPr>
+        <p:style>
+          <a:lnRef idx="1">
+            <a:schemeClr val="accent1"/>
+          </a:lnRef>
+          <a:fillRef idx="3">
+            <a:schemeClr val="accent1"/>
+          </a:fillRef>
+          <a:effectRef idx="2">
+            <a:schemeClr val="accent1"/>
+          </a:effectRef>
+          <a:fontRef idx="minor">
+            <a:schemeClr val="lt1"/>
+          </a:fontRef>
+        </p:style>
+        <p:txBody>
+          <a:bodyPr rtlCol="0" anchor="t" wrap="square" lIns="128016" rIns="109728" tIns="91440" bIns="73152"/>
+          <a:lstStyle/>
+          <a:p>
+            <a:pPr algn="l">
+              <a:lnSpc>
+                <a:spcPct val="110000"/>
+              </a:lnSpc>
+              <a:spcBef>
+                <a:spcPts val="0"/>
+              </a:spcBef>
+              <a:spcAft>
+                <a:spcPts val="0"/>
+              </a:spcAft>
+            </a:pPr>
+            <a:r>
+              <a:rPr sz="1100" b="1">
+                <a:solidFill>
+                  <a:srgbClr val="E6194D"/>
+                </a:solidFill>
+                <a:latin typeface="Calibri"/>
+                <a:ea typeface="Calibri"/>
+                <a:cs typeface="Calibri"/>
+              </a:rPr>
+              <a:t>Script package</a:t>
+            </a:r>
+          </a:p>
+        </p:txBody>
+      </p:sp>
+      <p:sp>
+        <p:nvSpPr>
+          <p:cNvPr id="14" name="Rounded Rectangle 13"/>
+          <p:cNvSpPr/>
+          <p:nvPr/>
+        </p:nvSpPr>
+        <p:spPr>
+          <a:xfrm>
+            <a:off x="5852160" y="3054096"/>
+            <a:ext cx="5669280" cy="621792"/>
+          </a:xfrm>
+          <a:prstGeom prst="roundRect">
+            <a:avLst>
+              <a:gd name="adj" fmla="val 5000"/>
+            </a:avLst>
+          </a:prstGeom>
+          <a:solidFill>
+            <a:srgbClr val="18181F"/>
+          </a:solidFill>
+          <a:ln w="12700">
+            <a:solidFill>
+              <a:srgbClr val="2E2E38"/>
+            </a:solidFill>
+          </a:ln>
+        </p:spPr>
+        <p:style>
+          <a:lnRef idx="1">
+            <a:schemeClr val="accent1"/>
+          </a:lnRef>
+          <a:fillRef idx="3">
+            <a:schemeClr val="accent1"/>
+          </a:fillRef>
+          <a:effectRef idx="2">
+            <a:schemeClr val="accent1"/>
+          </a:effectRef>
+          <a:fontRef idx="minor">
+            <a:schemeClr val="lt1"/>
+          </a:fontRef>
+        </p:style>
+        <p:txBody>
+          <a:bodyPr rtlCol="0" anchor="t" wrap="square" lIns="128016" rIns="109728" tIns="91440" bIns="73152"/>
+          <a:lstStyle/>
+          <a:p>
+            <a:pPr algn="l">
+              <a:lnSpc>
+                <a:spcPct val="110000"/>
+              </a:lnSpc>
+              <a:spcBef>
+                <a:spcPts val="0"/>
+              </a:spcBef>
+              <a:spcAft>
+                <a:spcPts val="0"/>
+              </a:spcAft>
+            </a:pPr>
+            <a:r>
+              <a:rPr sz="1100" b="0">
+                <a:solidFill>
+                  <a:srgbClr val="A1A1AA"/>
+                </a:solidFill>
+                <a:latin typeface="Calibri"/>
+                <a:ea typeface="Calibri"/>
+                <a:cs typeface="Calibri"/>
+              </a:rPr>
+              <a:t>Narration config + multi-part screenplay + cliffs</a:t>
+            </a:r>
+          </a:p>
+        </p:txBody>
+      </p:sp>
+      <p:sp>
+        <p:nvSpPr>
+          <p:cNvPr id="15" name="Rounded Rectangle 14"/>
+          <p:cNvSpPr/>
+          <p:nvPr/>
+        </p:nvSpPr>
+        <p:spPr>
+          <a:xfrm>
+            <a:off x="640080" y="3749040"/>
+            <a:ext cx="2834640" cy="621792"/>
+          </a:xfrm>
+          <a:prstGeom prst="roundRect">
+            <a:avLst>
+              <a:gd name="adj" fmla="val 5000"/>
+            </a:avLst>
+          </a:prstGeom>
+          <a:solidFill>
+            <a:srgbClr val="22222C"/>
+          </a:solidFill>
+          <a:ln w="12700">
+            <a:solidFill>
+              <a:srgbClr val="2E2E38"/>
+            </a:solidFill>
+          </a:ln>
+        </p:spPr>
+        <p:style>
+          <a:lnRef idx="1">
+            <a:schemeClr val="accent1"/>
+          </a:lnRef>
+          <a:fillRef idx="3">
+            <a:schemeClr val="accent1"/>
+          </a:fillRef>
+          <a:effectRef idx="2">
+            <a:schemeClr val="accent1"/>
+          </a:effectRef>
+          <a:fontRef idx="minor">
+            <a:schemeClr val="lt1"/>
+          </a:fontRef>
+        </p:style>
+        <p:txBody>
+          <a:bodyPr rtlCol="0" anchor="t" wrap="square" lIns="128016" rIns="109728" tIns="91440" bIns="73152"/>
+          <a:lstStyle/>
+          <a:p>
+            <a:pPr algn="l">
+              <a:lnSpc>
+                <a:spcPct val="110000"/>
+              </a:lnSpc>
+              <a:spcBef>
+                <a:spcPts val="0"/>
+              </a:spcBef>
+              <a:spcAft>
+                <a:spcPts val="0"/>
+              </a:spcAft>
+            </a:pPr>
+            <a:r>
+              <a:rPr sz="1200" b="1">
+                <a:solidFill>
+                  <a:srgbClr val="FFFFFF"/>
+                </a:solidFill>
+                <a:latin typeface="Calibri"/>
+                <a:ea typeface="Calibri"/>
+                <a:cs typeface="Calibri"/>
+              </a:rPr>
+              <a:t>Voice</a:t>
+            </a:r>
+          </a:p>
+        </p:txBody>
+      </p:sp>
+      <p:sp>
+        <p:nvSpPr>
+          <p:cNvPr id="16" name="Rounded Rectangle 15"/>
+          <p:cNvSpPr/>
+          <p:nvPr/>
+        </p:nvSpPr>
+        <p:spPr>
+          <a:xfrm>
+            <a:off x="3566160" y="3749040"/>
+            <a:ext cx="2194560" cy="621792"/>
+          </a:xfrm>
+          <a:prstGeom prst="roundRect">
+            <a:avLst>
+              <a:gd name="adj" fmla="val 5000"/>
+            </a:avLst>
+          </a:prstGeom>
+          <a:solidFill>
+            <a:srgbClr val="18181F"/>
+          </a:solidFill>
+          <a:ln w="12700">
+            <a:solidFill>
+              <a:srgbClr val="2E2E38"/>
+            </a:solidFill>
+          </a:ln>
+        </p:spPr>
+        <p:style>
+          <a:lnRef idx="1">
+            <a:schemeClr val="accent1"/>
+          </a:lnRef>
+          <a:fillRef idx="3">
+            <a:schemeClr val="accent1"/>
+          </a:fillRef>
+          <a:effectRef idx="2">
+            <a:schemeClr val="accent1"/>
+          </a:effectRef>
+          <a:fontRef idx="minor">
+            <a:schemeClr val="lt1"/>
+          </a:fontRef>
+        </p:style>
+        <p:txBody>
+          <a:bodyPr rtlCol="0" anchor="t" wrap="square" lIns="128016" rIns="109728" tIns="91440" bIns="73152"/>
+          <a:lstStyle/>
+          <a:p>
+            <a:pPr algn="l">
+              <a:lnSpc>
+                <a:spcPct val="110000"/>
+              </a:lnSpc>
+              <a:spcBef>
+                <a:spcPts val="0"/>
+              </a:spcBef>
+              <a:spcAft>
+                <a:spcPts val="0"/>
+              </a:spcAft>
+            </a:pPr>
+            <a:r>
+              <a:rPr sz="1100" b="1">
+                <a:solidFill>
+                  <a:srgbClr val="E6194D"/>
+                </a:solidFill>
+                <a:latin typeface="Calibri"/>
+                <a:ea typeface="Calibri"/>
+                <a:cs typeface="Calibri"/>
+              </a:rPr>
+              <a:t>Audio stems</a:t>
+            </a:r>
+          </a:p>
+        </p:txBody>
+      </p:sp>
+      <p:sp>
+        <p:nvSpPr>
+          <p:cNvPr id="17" name="Rounded Rectangle 16"/>
+          <p:cNvSpPr/>
+          <p:nvPr/>
+        </p:nvSpPr>
+        <p:spPr>
+          <a:xfrm>
+            <a:off x="5852160" y="3749040"/>
+            <a:ext cx="5669280" cy="621792"/>
+          </a:xfrm>
+          <a:prstGeom prst="roundRect">
+            <a:avLst>
+              <a:gd name="adj" fmla="val 5000"/>
+            </a:avLst>
+          </a:prstGeom>
+          <a:solidFill>
+            <a:srgbClr val="18181F"/>
+          </a:solidFill>
+          <a:ln w="12700">
+            <a:solidFill>
+              <a:srgbClr val="2E2E38"/>
+            </a:solidFill>
+          </a:ln>
+        </p:spPr>
+        <p:style>
+          <a:lnRef idx="1">
+            <a:schemeClr val="accent1"/>
+          </a:lnRef>
+          <a:fillRef idx="3">
+            <a:schemeClr val="accent1"/>
+          </a:fillRef>
+          <a:effectRef idx="2">
+            <a:schemeClr val="accent1"/>
+          </a:effectRef>
+          <a:fontRef idx="minor">
+            <a:schemeClr val="lt1"/>
+          </a:fontRef>
+        </p:style>
+        <p:txBody>
+          <a:bodyPr rtlCol="0" anchor="t" wrap="square" lIns="128016" rIns="109728" tIns="91440" bIns="73152"/>
+          <a:lstStyle/>
+          <a:p>
+            <a:pPr algn="l">
+              <a:lnSpc>
+                <a:spcPct val="110000"/>
+              </a:lnSpc>
+              <a:spcBef>
+                <a:spcPts val="0"/>
+              </a:spcBef>
+              <a:spcAft>
+                <a:spcPts val="0"/>
+              </a:spcAft>
+            </a:pPr>
+            <a:r>
+              <a:rPr sz="1100" b="0">
+                <a:solidFill>
+                  <a:srgbClr val="A1A1AA"/>
+                </a:solidFill>
+                <a:latin typeface="Calibri"/>
+                <a:ea typeface="Calibri"/>
+                <a:cs typeface="Calibri"/>
+              </a:rPr>
+              <a:t>Cast match (Vector Search) · TTS · SFX mix</a:t>
+            </a:r>
+          </a:p>
+        </p:txBody>
+      </p:sp>
+      <p:sp>
+        <p:nvSpPr>
+          <p:cNvPr id="18" name="Rounded Rectangle 17"/>
+          <p:cNvSpPr/>
+          <p:nvPr/>
+        </p:nvSpPr>
+        <p:spPr>
+          <a:xfrm>
+            <a:off x="640080" y="4443984"/>
+            <a:ext cx="2834640" cy="621792"/>
+          </a:xfrm>
+          <a:prstGeom prst="roundRect">
+            <a:avLst>
+              <a:gd name="adj" fmla="val 5000"/>
+            </a:avLst>
+          </a:prstGeom>
+          <a:solidFill>
+            <a:srgbClr val="22222C"/>
+          </a:solidFill>
+          <a:ln w="12700">
+            <a:solidFill>
+              <a:srgbClr val="2E2E38"/>
+            </a:solidFill>
+          </a:ln>
+        </p:spPr>
+        <p:style>
+          <a:lnRef idx="1">
+            <a:schemeClr val="accent1"/>
+          </a:lnRef>
+          <a:fillRef idx="3">
+            <a:schemeClr val="accent1"/>
+          </a:fillRef>
+          <a:effectRef idx="2">
+            <a:schemeClr val="accent1"/>
+          </a:effectRef>
+          <a:fontRef idx="minor">
+            <a:schemeClr val="lt1"/>
+          </a:fontRef>
+        </p:style>
+        <p:txBody>
+          <a:bodyPr rtlCol="0" anchor="t" wrap="square" lIns="128016" rIns="109728" tIns="91440" bIns="73152"/>
+          <a:lstStyle/>
+          <a:p>
+            <a:pPr algn="l">
+              <a:lnSpc>
+                <a:spcPct val="110000"/>
+              </a:lnSpc>
+              <a:spcBef>
+                <a:spcPts val="0"/>
+              </a:spcBef>
+              <a:spcAft>
+                <a:spcPts val="0"/>
+              </a:spcAft>
+            </a:pPr>
+            <a:r>
+              <a:rPr sz="1200" b="1">
+                <a:solidFill>
+                  <a:srgbClr val="FFFFFF"/>
+                </a:solidFill>
+                <a:latin typeface="Calibri"/>
+                <a:ea typeface="Calibri"/>
+                <a:cs typeface="Calibri"/>
+              </a:rPr>
+              <a:t>Director + Image</a:t>
+            </a:r>
+          </a:p>
+        </p:txBody>
+      </p:sp>
+      <p:sp>
+        <p:nvSpPr>
+          <p:cNvPr id="19" name="Rounded Rectangle 18"/>
+          <p:cNvSpPr/>
+          <p:nvPr/>
+        </p:nvSpPr>
+        <p:spPr>
+          <a:xfrm>
+            <a:off x="3566160" y="4443984"/>
+            <a:ext cx="2194560" cy="621792"/>
+          </a:xfrm>
+          <a:prstGeom prst="roundRect">
+            <a:avLst>
+              <a:gd name="adj" fmla="val 5000"/>
+            </a:avLst>
+          </a:prstGeom>
+          <a:solidFill>
+            <a:srgbClr val="18181F"/>
+          </a:solidFill>
+          <a:ln w="12700">
+            <a:solidFill>
+              <a:srgbClr val="2E2E38"/>
+            </a:solidFill>
+          </a:ln>
+        </p:spPr>
+        <p:style>
+          <a:lnRef idx="1">
+            <a:schemeClr val="accent1"/>
+          </a:lnRef>
+          <a:fillRef idx="3">
+            <a:schemeClr val="accent1"/>
+          </a:fillRef>
+          <a:effectRef idx="2">
+            <a:schemeClr val="accent1"/>
+          </a:effectRef>
+          <a:fontRef idx="minor">
+            <a:schemeClr val="lt1"/>
+          </a:fontRef>
+        </p:style>
+        <p:txBody>
+          <a:bodyPr rtlCol="0" anchor="t" wrap="square" lIns="128016" rIns="109728" tIns="91440" bIns="73152"/>
+          <a:lstStyle/>
+          <a:p>
+            <a:pPr algn="l">
+              <a:lnSpc>
+                <a:spcPct val="110000"/>
+              </a:lnSpc>
+              <a:spcBef>
+                <a:spcPts val="0"/>
+              </a:spcBef>
+              <a:spcAft>
+                <a:spcPts val="0"/>
+              </a:spcAft>
+            </a:pPr>
+            <a:r>
+              <a:rPr sz="1100" b="1">
+                <a:solidFill>
+                  <a:srgbClr val="E6194D"/>
+                </a:solidFill>
+                <a:latin typeface="Calibri"/>
+                <a:ea typeface="Calibri"/>
+                <a:cs typeface="Calibri"/>
+              </a:rPr>
+              <a:t>Visual track</a:t>
+            </a:r>
+          </a:p>
+        </p:txBody>
+      </p:sp>
+      <p:sp>
+        <p:nvSpPr>
+          <p:cNvPr id="20" name="Rounded Rectangle 19"/>
+          <p:cNvSpPr/>
+          <p:nvPr/>
+        </p:nvSpPr>
+        <p:spPr>
+          <a:xfrm>
+            <a:off x="5852160" y="4443984"/>
+            <a:ext cx="5669280" cy="621792"/>
+          </a:xfrm>
+          <a:prstGeom prst="roundRect">
+            <a:avLst>
+              <a:gd name="adj" fmla="val 5000"/>
+            </a:avLst>
+          </a:prstGeom>
+          <a:solidFill>
+            <a:srgbClr val="18181F"/>
+          </a:solidFill>
+          <a:ln w="12700">
+            <a:solidFill>
+              <a:srgbClr val="2E2E38"/>
+            </a:solidFill>
+          </a:ln>
+        </p:spPr>
+        <p:style>
+          <a:lnRef idx="1">
+            <a:schemeClr val="accent1"/>
+          </a:lnRef>
+          <a:fillRef idx="3">
+            <a:schemeClr val="accent1"/>
+          </a:fillRef>
+          <a:effectRef idx="2">
+            <a:schemeClr val="accent1"/>
+          </a:effectRef>
+          <a:fontRef idx="minor">
+            <a:schemeClr val="lt1"/>
+          </a:fontRef>
+        </p:style>
+        <p:txBody>
+          <a:bodyPr rtlCol="0" anchor="t" wrap="square" lIns="128016" rIns="109728" tIns="91440" bIns="73152"/>
+          <a:lstStyle/>
+          <a:p>
+            <a:pPr algn="l">
+              <a:lnSpc>
+                <a:spcPct val="110000"/>
+              </a:lnSpc>
+              <a:spcBef>
+                <a:spcPts val="0"/>
+              </a:spcBef>
+              <a:spcAft>
+                <a:spcPts val="0"/>
+              </a:spcAft>
+            </a:pPr>
+            <a:r>
+              <a:rPr sz="1100" b="0">
+                <a:solidFill>
+                  <a:srgbClr val="A1A1AA"/>
+                </a:solidFill>
+                <a:latin typeface="Calibri"/>
+                <a:ea typeface="Calibri"/>
+                <a:cs typeface="Calibri"/>
+              </a:rPr>
+              <a:t>Shot plan · lookbook · stills · cover art</a:t>
+            </a:r>
+          </a:p>
+        </p:txBody>
+      </p:sp>
+      <p:sp>
+        <p:nvSpPr>
+          <p:cNvPr id="21" name="Rounded Rectangle 20"/>
+          <p:cNvSpPr/>
+          <p:nvPr/>
+        </p:nvSpPr>
+        <p:spPr>
+          <a:xfrm>
+            <a:off x="640080" y="5138928"/>
+            <a:ext cx="2834640" cy="621792"/>
+          </a:xfrm>
+          <a:prstGeom prst="roundRect">
+            <a:avLst>
+              <a:gd name="adj" fmla="val 5000"/>
+            </a:avLst>
+          </a:prstGeom>
+          <a:solidFill>
+            <a:srgbClr val="22222C"/>
+          </a:solidFill>
+          <a:ln w="12700">
+            <a:solidFill>
+              <a:srgbClr val="2E2E38"/>
+            </a:solidFill>
+          </a:ln>
+        </p:spPr>
+        <p:style>
+          <a:lnRef idx="1">
+            <a:schemeClr val="accent1"/>
+          </a:lnRef>
+          <a:fillRef idx="3">
+            <a:schemeClr val="accent1"/>
+          </a:fillRef>
+          <a:effectRef idx="2">
+            <a:schemeClr val="accent1"/>
+          </a:effectRef>
+          <a:fontRef idx="minor">
+            <a:schemeClr val="lt1"/>
+          </a:fontRef>
+        </p:style>
+        <p:txBody>
+          <a:bodyPr rtlCol="0" anchor="t" wrap="square" lIns="128016" rIns="109728" tIns="91440" bIns="73152"/>
+          <a:lstStyle/>
+          <a:p>
+            <a:pPr algn="l">
+              <a:lnSpc>
+                <a:spcPct val="110000"/>
+              </a:lnSpc>
+              <a:spcBef>
+                <a:spcPts val="0"/>
+              </a:spcBef>
+              <a:spcAft>
+                <a:spcPts val="0"/>
+              </a:spcAft>
+            </a:pPr>
+            <a:r>
+              <a:rPr sz="1200" b="1">
+                <a:solidFill>
+                  <a:srgbClr val="FFFFFF"/>
+                </a:solidFill>
+                <a:latin typeface="Calibri"/>
+                <a:ea typeface="Calibri"/>
+                <a:cs typeface="Calibri"/>
+              </a:rPr>
+              <a:t>Human + Audience Sim</a:t>
+            </a:r>
+          </a:p>
+        </p:txBody>
+      </p:sp>
+      <p:sp>
+        <p:nvSpPr>
+          <p:cNvPr id="22" name="Rounded Rectangle 21"/>
+          <p:cNvSpPr/>
+          <p:nvPr/>
+        </p:nvSpPr>
+        <p:spPr>
+          <a:xfrm>
+            <a:off x="3566160" y="5138928"/>
+            <a:ext cx="2194560" cy="621792"/>
+          </a:xfrm>
+          <a:prstGeom prst="roundRect">
+            <a:avLst>
+              <a:gd name="adj" fmla="val 5000"/>
+            </a:avLst>
+          </a:prstGeom>
+          <a:solidFill>
+            <a:srgbClr val="18181F"/>
+          </a:solidFill>
+          <a:ln w="12700">
+            <a:solidFill>
+              <a:srgbClr val="2E2E38"/>
+            </a:solidFill>
+          </a:ln>
+        </p:spPr>
+        <p:style>
+          <a:lnRef idx="1">
+            <a:schemeClr val="accent1"/>
+          </a:lnRef>
+          <a:fillRef idx="3">
+            <a:schemeClr val="accent1"/>
+          </a:fillRef>
+          <a:effectRef idx="2">
+            <a:schemeClr val="accent1"/>
+          </a:effectRef>
+          <a:fontRef idx="minor">
+            <a:schemeClr val="lt1"/>
+          </a:fontRef>
+        </p:style>
+        <p:txBody>
+          <a:bodyPr rtlCol="0" anchor="t" wrap="square" lIns="128016" rIns="109728" tIns="91440" bIns="73152"/>
+          <a:lstStyle/>
+          <a:p>
+            <a:pPr algn="l">
+              <a:lnSpc>
+                <a:spcPct val="110000"/>
+              </a:lnSpc>
+              <a:spcBef>
+                <a:spcPts val="0"/>
+              </a:spcBef>
+              <a:spcAft>
+                <a:spcPts val="0"/>
+              </a:spcAft>
+            </a:pPr>
+            <a:r>
+              <a:rPr sz="1100" b="1">
+                <a:solidFill>
+                  <a:srgbClr val="E6194D"/>
+                </a:solidFill>
+                <a:latin typeface="Calibri"/>
+                <a:ea typeface="Calibri"/>
+                <a:cs typeface="Calibri"/>
+              </a:rPr>
+              <a:t>Quality gate</a:t>
+            </a:r>
+          </a:p>
+        </p:txBody>
+      </p:sp>
+      <p:sp>
+        <p:nvSpPr>
+          <p:cNvPr id="23" name="Rounded Rectangle 22"/>
+          <p:cNvSpPr/>
+          <p:nvPr/>
+        </p:nvSpPr>
+        <p:spPr>
+          <a:xfrm>
+            <a:off x="5852160" y="5138928"/>
+            <a:ext cx="5669280" cy="621792"/>
+          </a:xfrm>
+          <a:prstGeom prst="roundRect">
+            <a:avLst>
+              <a:gd name="adj" fmla="val 5000"/>
+            </a:avLst>
+          </a:prstGeom>
+          <a:solidFill>
+            <a:srgbClr val="18181F"/>
+          </a:solidFill>
+          <a:ln w="12700">
+            <a:solidFill>
+              <a:srgbClr val="2E2E38"/>
+            </a:solidFill>
+          </a:ln>
+        </p:spPr>
+        <p:style>
+          <a:lnRef idx="1">
+            <a:schemeClr val="accent1"/>
+          </a:lnRef>
+          <a:fillRef idx="3">
+            <a:schemeClr val="accent1"/>
+          </a:fillRef>
+          <a:effectRef idx="2">
+            <a:schemeClr val="accent1"/>
+          </a:effectRef>
+          <a:fontRef idx="minor">
+            <a:schemeClr val="lt1"/>
+          </a:fontRef>
+        </p:style>
+        <p:txBody>
+          <a:bodyPr rtlCol="0" anchor="t" wrap="square" lIns="128016" rIns="109728" tIns="91440" bIns="73152"/>
+          <a:lstStyle/>
+          <a:p>
+            <a:pPr algn="l">
+              <a:lnSpc>
+                <a:spcPct val="110000"/>
+              </a:lnSpc>
+              <a:spcBef>
+                <a:spcPts val="0"/>
+              </a:spcBef>
+              <a:spcAft>
+                <a:spcPts val="0"/>
+              </a:spcAft>
+            </a:pPr>
+            <a:r>
+              <a:rPr sz="1100" b="0">
+                <a:solidFill>
+                  <a:srgbClr val="A1A1AA"/>
+                </a:solidFill>
+                <a:latin typeface="Calibri"/>
+                <a:ea typeface="Calibri"/>
+                <a:cs typeface="Calibri"/>
+              </a:rPr>
+              <a:t>Approve stages · listen in editor · apply patches</a:t>
+            </a:r>
+          </a:p>
+        </p:txBody>
+      </p:sp>
+      <p:sp>
+        <p:nvSpPr>
+          <p:cNvPr id="24" name="TextBox 23"/>
+          <p:cNvSpPr txBox="1"/>
+          <p:nvPr/>
+        </p:nvSpPr>
+        <p:spPr>
+          <a:xfrm>
+            <a:off x="640080" y="6473952"/>
+            <a:ext cx="8412480" cy="201168"/>
+          </a:xfrm>
+          <a:prstGeom prst="rect">
+            <a:avLst/>
+          </a:prstGeom>
+          <a:noFill/>
+        </p:spPr>
+        <p:txBody>
+          <a:bodyPr wrap="square" anchor="t" lIns="0" rIns="0" tIns="0" bIns="0"/>
+          <a:lstStyle/>
+          <a:p>
+            <a:pPr algn="l">
+              <a:lnSpc>
+                <a:spcPct val="110000"/>
+              </a:lnSpc>
+              <a:spcBef>
+                <a:spcPts val="0"/>
+              </a:spcBef>
+              <a:spcAft>
+                <a:spcPts val="0"/>
+              </a:spcAft>
+            </a:pPr>
+            <a:r>
+              <a:rPr sz="1000" b="0">
+                <a:solidFill>
+                  <a:srgbClr val="71717A"/>
+                </a:solidFill>
+                <a:latin typeface="Calibri"/>
+                <a:ea typeface="Calibri"/>
+                <a:cs typeface="Calibri"/>
+              </a:rPr>
+              <a:t>Kahani  ·  Zero to One × Pocket FM  ·  IIM Bangalore</a:t>
+            </a:r>
+          </a:p>
+        </p:txBody>
+      </p:sp>
+      <p:sp>
+        <p:nvSpPr>
+          <p:cNvPr id="25" name="TextBox 24"/>
+          <p:cNvSpPr txBox="1"/>
+          <p:nvPr/>
+        </p:nvSpPr>
+        <p:spPr>
+          <a:xfrm>
+            <a:off x="10195560" y="6473952"/>
+            <a:ext cx="1371600" cy="201168"/>
+          </a:xfrm>
+          <a:prstGeom prst="rect">
+            <a:avLst/>
+          </a:prstGeom>
+          <a:noFill/>
+        </p:spPr>
+        <p:txBody>
+          <a:bodyPr wrap="square" anchor="t" lIns="0" rIns="0" tIns="0" bIns="0"/>
+          <a:lstStyle/>
+          <a:p>
+            <a:pPr algn="r">
+              <a:lnSpc>
+                <a:spcPct val="110000"/>
+              </a:lnSpc>
+              <a:spcBef>
+                <a:spcPts val="0"/>
+              </a:spcBef>
+              <a:spcAft>
+                <a:spcPts val="0"/>
+              </a:spcAft>
+            </a:pPr>
+            <a:r>
+              <a:rPr sz="1000" b="0">
+                <a:solidFill>
+                  <a:srgbClr val="71717A"/>
+                </a:solidFill>
+                <a:latin typeface="Calibri"/>
+                <a:ea typeface="Calibri"/>
+                <a:cs typeface="Calibri"/>
+              </a:rPr>
+              <a:t>08 / 09</a:t>
+            </a:r>
+          </a:p>
+        </p:txBody>
+      </p:sp>
+    </p:spTree>
+  </p:cSld>
+  <p:clrMapOvr>
+    <a:masterClrMapping/>
+  </p:clrMapOvr>
+</p:sld>
+</file>
+
+<file path=ppt/slides/slide9.xml><?xml version="1.0" encoding="utf-8"?>
+<p:sld xmlns:a="http://schemas.openxmlformats.org/drawingml/2006/main" xmlns:p="http://schemas.openxmlformats.org/presentationml/2006/main" xmlns:r="http://schemas.openxmlformats.org/officeDocument/2006/relationships">
+  <p:cSld>
+    <p:bg>
+      <p:bgPr>
+        <a:solidFill>
+          <a:srgbClr val="0F0F12"/>
+        </a:solidFill>
+        <a:effectLst/>
+      </p:bgPr>
+    </p:bg>
+    <p:spTree>
+      <p:nvGrpSpPr>
+        <p:cNvPr id="1" name=""/>
+        <p:cNvGrpSpPr/>
+        <p:nvPr/>
+      </p:nvGrpSpPr>
+      <p:grpSpPr/>
+      <p:sp>
+        <p:nvSpPr>
+          <p:cNvPr id="2" name="Rectangle 1"/>
+          <p:cNvSpPr/>
+          <p:nvPr/>
+        </p:nvSpPr>
+        <p:spPr>
+          <a:xfrm>
+            <a:off x="0" y="0"/>
+            <a:ext cx="109728" cy="6858000"/>
+          </a:xfrm>
+          <a:prstGeom prst="rect">
+            <a:avLst/>
+          </a:prstGeom>
+          <a:solidFill>
+            <a:srgbClr val="E6194D"/>
+          </a:solidFill>
+          <a:ln>
+            <a:noFill/>
+          </a:ln>
+        </p:spPr>
+        <p:style>
+          <a:lnRef idx="1">
+            <a:schemeClr val="accent1"/>
+          </a:lnRef>
+          <a:fillRef idx="3">
+            <a:schemeClr val="accent1"/>
+          </a:fillRef>
+          <a:effectRef idx="2">
+            <a:schemeClr val="accent1"/>
+          </a:effectRef>
+          <a:fontRef idx="minor">
+            <a:schemeClr val="lt1"/>
+          </a:fontRef>
+        </p:style>
+        <p:txBody>
+          <a:bodyPr rtlCol="0" anchor="ctr"/>
+          <a:lstStyle/>
+          <a:p>
+            <a:pPr algn="ctr"/>
+          </a:p>
+        </p:txBody>
+      </p:sp>
+      <p:sp>
+        <p:nvSpPr>
+          <p:cNvPr id="3" name="TextBox 2"/>
+          <p:cNvSpPr txBox="1"/>
+          <p:nvPr/>
+        </p:nvSpPr>
+        <p:spPr>
+          <a:xfrm>
+            <a:off x="640080" y="1234440"/>
+            <a:ext cx="10908792" cy="237744"/>
+          </a:xfrm>
+          <a:prstGeom prst="rect">
+            <a:avLst/>
+          </a:prstGeom>
+          <a:noFill/>
+        </p:spPr>
+        <p:txBody>
+          <a:bodyPr wrap="square" anchor="t" lIns="0" rIns="0" tIns="0" bIns="0"/>
+          <a:lstStyle/>
+          <a:p>
+            <a:pPr algn="l">
+              <a:lnSpc>
+                <a:spcPct val="110000"/>
+              </a:lnSpc>
+              <a:spcBef>
+                <a:spcPts val="0"/>
+              </a:spcBef>
+              <a:spcAft>
+                <a:spcPts val="0"/>
+              </a:spcAft>
+            </a:pPr>
+            <a:r>
+              <a:rPr sz="1200" b="1">
+                <a:solidFill>
+                  <a:srgbClr val="E6194D"/>
+                </a:solidFill>
+                <a:latin typeface="Calibri"/>
+                <a:ea typeface="Calibri"/>
+                <a:cs typeface="Calibri"/>
+              </a:rPr>
+              <a:t>THANK YOU</a:t>
+            </a:r>
+          </a:p>
+        </p:txBody>
+      </p:sp>
+      <p:sp>
+        <p:nvSpPr>
+          <p:cNvPr id="4" name="TextBox 3"/>
+          <p:cNvSpPr txBox="1"/>
+          <p:nvPr/>
+        </p:nvSpPr>
+        <p:spPr>
+          <a:xfrm>
+            <a:off x="640080" y="1691640"/>
+            <a:ext cx="10908792" cy="640080"/>
+          </a:xfrm>
+          <a:prstGeom prst="rect">
+            <a:avLst/>
+          </a:prstGeom>
+          <a:noFill/>
+        </p:spPr>
+        <p:txBody>
+          <a:bodyPr wrap="square" anchor="t" lIns="0" rIns="0" tIns="0" bIns="0"/>
+          <a:lstStyle/>
+          <a:p>
+            <a:pPr algn="l">
+              <a:lnSpc>
+                <a:spcPct val="110000"/>
+              </a:lnSpc>
+              <a:spcBef>
+                <a:spcPts val="0"/>
+              </a:spcBef>
+              <a:spcAft>
+                <a:spcPts val="0"/>
+              </a:spcAft>
+            </a:pPr>
+            <a:r>
+              <a:rPr sz="4600" b="1">
+                <a:solidFill>
+                  <a:srgbClr val="FFFFFF"/>
+                </a:solidFill>
+                <a:latin typeface="Calibri"/>
+                <a:ea typeface="Calibri"/>
+                <a:cs typeface="Calibri"/>
+              </a:rPr>
+              <a:t>Kahani</a:t>
+            </a:r>
+          </a:p>
+        </p:txBody>
+      </p:sp>
+      <p:sp>
+        <p:nvSpPr>
+          <p:cNvPr id="5" name="TextBox 4"/>
+          <p:cNvSpPr txBox="1"/>
+          <p:nvPr/>
+        </p:nvSpPr>
+        <p:spPr>
+          <a:xfrm>
+            <a:off x="640080" y="2423160"/>
+            <a:ext cx="10058400" cy="502920"/>
+          </a:xfrm>
+          <a:prstGeom prst="rect">
+            <a:avLst/>
+          </a:prstGeom>
+          <a:noFill/>
+        </p:spPr>
+        <p:txBody>
+          <a:bodyPr wrap="square" anchor="t" lIns="0" rIns="0" tIns="0" bIns="0"/>
+          <a:lstStyle/>
+          <a:p>
+            <a:pPr algn="l">
+              <a:lnSpc>
+                <a:spcPct val="110000"/>
+              </a:lnSpc>
+              <a:spcBef>
+                <a:spcPts val="0"/>
+              </a:spcBef>
+              <a:spcAft>
+                <a:spcPts val="0"/>
+              </a:spcAft>
+            </a:pPr>
+            <a:r>
+              <a:rPr sz="1500" b="0">
+                <a:solidFill>
+                  <a:srgbClr val="A1A1AA"/>
+                </a:solidFill>
+                <a:latin typeface="Calibri"/>
+                <a:ea typeface="Calibri"/>
+                <a:cs typeface="Calibri"/>
+              </a:rPr>
+              <a:t>Seven agents. One timeline. Human publish. Built for Pocket FM–scale serial production.</a:t>
+            </a:r>
+          </a:p>
+        </p:txBody>
+      </p:sp>
+      <p:sp>
+        <p:nvSpPr>
+          <p:cNvPr id="6" name="Rounded Rectangle 5"/>
+          <p:cNvSpPr/>
+          <p:nvPr/>
+        </p:nvSpPr>
+        <p:spPr>
+          <a:xfrm>
+            <a:off x="640080" y="3383280"/>
+            <a:ext cx="3474720" cy="1234440"/>
+          </a:xfrm>
+          <a:prstGeom prst="roundRect">
+            <a:avLst>
+              <a:gd name="adj" fmla="val 5000"/>
+            </a:avLst>
+          </a:prstGeom>
+          <a:solidFill>
+            <a:srgbClr val="18181F"/>
+          </a:solidFill>
+          <a:ln w="12700">
+            <a:solidFill>
+              <a:srgbClr val="2E2E38"/>
+            </a:solidFill>
+          </a:ln>
+        </p:spPr>
+        <p:style>
+          <a:lnRef idx="1">
+            <a:schemeClr val="accent1"/>
+          </a:lnRef>
+          <a:fillRef idx="3">
+            <a:schemeClr val="accent1"/>
+          </a:fillRef>
+          <a:effectRef idx="2">
+            <a:schemeClr val="accent1"/>
+          </a:effectRef>
+          <a:fontRef idx="minor">
+            <a:schemeClr val="lt1"/>
+          </a:fontRef>
+        </p:style>
+        <p:txBody>
+          <a:bodyPr rtlCol="0" anchor="t" wrap="square" lIns="128016" rIns="109728" tIns="91440" bIns="73152"/>
+          <a:lstStyle/>
+          <a:p>
+            <a:pPr algn="l">
+              <a:lnSpc>
+                <a:spcPct val="110000"/>
+              </a:lnSpc>
+              <a:spcBef>
+                <a:spcPts val="0"/>
+              </a:spcBef>
+              <a:spcAft>
+                <a:spcPts val="600"/>
+              </a:spcAft>
+            </a:pPr>
+            <a:r>
+              <a:rPr sz="1100" b="1">
+                <a:solidFill>
+                  <a:srgbClr val="E6194D"/>
+                </a:solidFill>
+                <a:latin typeface="Calibri"/>
+                <a:ea typeface="Calibri"/>
+                <a:cs typeface="Calibri"/>
+              </a:rPr>
+              <a:t>ASK</a:t>
+            </a:r>
+          </a:p>
+          <a:p>
+            <a:pPr algn="l">
+              <a:lnSpc>
+                <a:spcPct val="110000"/>
+              </a:lnSpc>
+              <a:spcBef>
+                <a:spcPts val="0"/>
+              </a:spcBef>
+              <a:spcAft>
+                <a:spcPts val="0"/>
+              </a:spcAft>
+            </a:pPr>
+            <a:r>
+              <a:rPr sz="1300" b="1">
+                <a:solidFill>
+                  <a:srgbClr val="FFFFFF"/>
+                </a:solidFill>
+                <a:latin typeface="Calibri"/>
+                <a:ea typeface="Calibri"/>
+                <a:cs typeface="Calibri"/>
+              </a:rPr>
+              <a:t>Pilot with a Pocket FM–style content pod</a:t>
+            </a:r>
+          </a:p>
+        </p:txBody>
+      </p:sp>
+      <p:sp>
+        <p:nvSpPr>
+          <p:cNvPr id="7" name="Rounded Rectangle 6"/>
+          <p:cNvSpPr/>
+          <p:nvPr/>
+        </p:nvSpPr>
+        <p:spPr>
+          <a:xfrm>
+            <a:off x="4297680" y="3383280"/>
+            <a:ext cx="3474720" cy="1234440"/>
+          </a:xfrm>
+          <a:prstGeom prst="roundRect">
+            <a:avLst>
+              <a:gd name="adj" fmla="val 5000"/>
+            </a:avLst>
+          </a:prstGeom>
+          <a:solidFill>
+            <a:srgbClr val="18181F"/>
+          </a:solidFill>
+          <a:ln w="12700">
+            <a:solidFill>
+              <a:srgbClr val="2E2E38"/>
+            </a:solidFill>
+          </a:ln>
+        </p:spPr>
+        <p:style>
+          <a:lnRef idx="1">
+            <a:schemeClr val="accent1"/>
+          </a:lnRef>
+          <a:fillRef idx="3">
+            <a:schemeClr val="accent1"/>
+          </a:fillRef>
+          <a:effectRef idx="2">
+            <a:schemeClr val="accent1"/>
+          </a:effectRef>
+          <a:fontRef idx="minor">
+            <a:schemeClr val="lt1"/>
+          </a:fontRef>
+        </p:style>
+        <p:txBody>
+          <a:bodyPr rtlCol="0" anchor="t" wrap="square" lIns="128016" rIns="109728" tIns="91440" bIns="73152"/>
+          <a:lstStyle/>
+          <a:p>
+            <a:pPr algn="l">
+              <a:lnSpc>
+                <a:spcPct val="110000"/>
+              </a:lnSpc>
+              <a:spcBef>
+                <a:spcPts val="0"/>
+              </a:spcBef>
+              <a:spcAft>
+                <a:spcPts val="600"/>
+              </a:spcAft>
+            </a:pPr>
+            <a:r>
+              <a:rPr sz="1100" b="1">
+                <a:solidFill>
+                  <a:srgbClr val="E6194D"/>
+                </a:solidFill>
+                <a:latin typeface="Calibri"/>
+                <a:ea typeface="Calibri"/>
+                <a:cs typeface="Calibri"/>
+              </a:rPr>
+              <a:t>PROOF</a:t>
+            </a:r>
+          </a:p>
+          <a:p>
+            <a:pPr algn="l">
+              <a:lnSpc>
+                <a:spcPct val="110000"/>
+              </a:lnSpc>
+              <a:spcBef>
+                <a:spcPts val="0"/>
+              </a:spcBef>
+              <a:spcAft>
+                <a:spcPts val="0"/>
+              </a:spcAft>
+            </a:pPr>
+            <a:r>
+              <a:rPr sz="1300" b="1">
+                <a:solidFill>
+                  <a:srgbClr val="FFFFFF"/>
+                </a:solidFill>
+                <a:latin typeface="Calibri"/>
+                <a:ea typeface="Calibri"/>
+                <a:cs typeface="Calibri"/>
+              </a:rPr>
+              <a:t>Live demo: generate → listen → simulate</a:t>
+            </a:r>
+          </a:p>
+        </p:txBody>
+      </p:sp>
+      <p:sp>
+        <p:nvSpPr>
+          <p:cNvPr id="8" name="Rounded Rectangle 7"/>
+          <p:cNvSpPr/>
+          <p:nvPr/>
+        </p:nvSpPr>
+        <p:spPr>
+          <a:xfrm>
+            <a:off x="7955280" y="3383280"/>
+            <a:ext cx="3474720" cy="1234440"/>
+          </a:xfrm>
+          <a:prstGeom prst="roundRect">
+            <a:avLst>
+              <a:gd name="adj" fmla="val 5000"/>
+            </a:avLst>
+          </a:prstGeom>
+          <a:solidFill>
+            <a:srgbClr val="18181F"/>
+          </a:solidFill>
+          <a:ln w="12700">
+            <a:solidFill>
+              <a:srgbClr val="2E2E38"/>
+            </a:solidFill>
+          </a:ln>
+        </p:spPr>
+        <p:style>
+          <a:lnRef idx="1">
+            <a:schemeClr val="accent1"/>
+          </a:lnRef>
+          <a:fillRef idx="3">
+            <a:schemeClr val="accent1"/>
+          </a:fillRef>
+          <a:effectRef idx="2">
+            <a:schemeClr val="accent1"/>
+          </a:effectRef>
+          <a:fontRef idx="minor">
+            <a:schemeClr val="lt1"/>
+          </a:fontRef>
+        </p:style>
+        <p:txBody>
+          <a:bodyPr rtlCol="0" anchor="t" wrap="square" lIns="128016" rIns="109728" tIns="91440" bIns="73152"/>
+          <a:lstStyle/>
+          <a:p>
+            <a:pPr algn="l">
+              <a:lnSpc>
+                <a:spcPct val="110000"/>
+              </a:lnSpc>
+              <a:spcBef>
+                <a:spcPts val="0"/>
+              </a:spcBef>
+              <a:spcAft>
                 <a:spcPts val="600"/>
               </a:spcAft>
             </a:pPr>
@@ -11467,7 +11786,7 @@
                 <a:ea typeface="Calibri"/>
                 <a:cs typeface="Calibri"/>
               </a:rPr>
-              <a:t>08 / 08</a:t>
+              <a:t>09 / 09</a:t>
             </a:r>
           </a:p>
         </p:txBody>
